--- a/poster/SigmaTau_poster_draft.pptx
+++ b/poster/SigmaTau_poster_draft.pptx
@@ -1027,7 +1027,7 @@
                 <a:ea typeface="Calibri" pitchFamily="34" charset="-122"/>
                 <a:cs typeface="Calibri" pitchFamily="34" charset="-120"/>
               </a:rPr>
-              <a:t>     The University of Alabama   ·   github.com/ianlap/SigmaTau.jl   ·   v0.5.0, MIT license</a:t>
+              <a:t>     The University of Alabama   ·   github.com/ianlap/SigmaTau.jl   ·   MIT license</a:t>
             </a:r>
             <a:endParaRPr lang="en-US" sz="3000" dirty="0"/>
           </a:p>
@@ -1153,7 +1153,7 @@
                 <a:ea typeface="Calibri" pitchFamily="34" charset="-122"/>
                 <a:cs typeface="Calibri" pitchFamily="34" charset="-120"/>
               </a:rPr>
-              <a:t>A usable stability point therefore needs four quantities computed together: the deviation, the noise type at that τ, the equivalent degrees of freedom (EDF), and the χ² interval they imply.</a:t>
+              <a:t>A usable stability point therefore needs four quantities computed together: the deviation, the noise type at that τ, the equivalent degrees of freedom (EDF) and the χ² interval.</a:t>
             </a:r>
             <a:endParaRPr lang="en-US" sz="2400" dirty="0"/>
           </a:p>
@@ -1168,7 +1168,7 @@
         <p:spPr>
           <a:xfrm>
             <a:off x="914400" y="9097010"/>
-            <a:ext cx="11094720" cy="13530771"/>
+            <a:ext cx="11094720" cy="13606971"/>
           </a:xfrm>
           <a:prstGeom prst="rect">
             <a:avLst/>
@@ -1232,7 +1232,7 @@
         <p:spPr>
           <a:xfrm>
             <a:off x="1234440" y="10591292"/>
-            <a:ext cx="10454640" cy="4653280"/>
+            <a:ext cx="10454640" cy="5003800"/>
           </a:xfrm>
           <a:prstGeom prst="rect">
             <a:avLst/>
@@ -1274,7 +1274,7 @@
                 <a:ea typeface="Calibri" pitchFamily="34" charset="-122"/>
                 <a:cs typeface="Calibri" pitchFamily="34" charset="-120"/>
               </a:rPr>
-              <a:t>Allan, modified Allan and time deviations; Hadamard, modified Hadamard and Hadamard time; five totals; Thêo1/ThêoBR/ThêoH; MTIE, TIE rms, PDEV; time-resolved and real-time variants.</a:t>
+              <a:t>Allan, modified Allan, time; Hadamard, modified Hadamard, Hadamard time; five totals; Thêo1/ThêoBR/ThêoH; MTIE, TIE rms, PDEV; time-resolved and real-time variants.</a:t>
             </a:r>
             <a:endParaRPr lang="en-US" sz="2400" dirty="0"/>
           </a:p>
@@ -1344,7 +1344,7 @@
                 <a:ea typeface="Calibri" pitchFamily="34" charset="-122"/>
                 <a:cs typeface="Calibri" pitchFamily="34" charset="-120"/>
               </a:rPr>
-              <a:t>Greenhall–Riley 2003 for the difference families; the published total-variance tables (SP1065; Howe et al.) for TOTDEV, MTOTDEV and HTOTDEV; Monte Carlo for MHTOTDEV (column 2).</a:t>
+              <a:t>Greenhall–Riley 2003 for the difference families; the published total-variance tables (SP1065; Howe et al.) for TOTDEV, MTOTDEV and HTOTDEV, with documented fallbacks outside their ranges; Monte Carlo for MHTOTDEV (column 2).</a:t>
             </a:r>
             <a:endParaRPr lang="en-US" sz="2400" dirty="0"/>
           </a:p>
@@ -1436,8 +1436,8 @@
         </p:blipFill>
         <p:spPr>
           <a:xfrm>
-            <a:off x="2459603" y="15354300"/>
-            <a:ext cx="8004313" cy="5943600"/>
+            <a:off x="2644318" y="15704820"/>
+            <a:ext cx="7634883" cy="5669280"/>
           </a:xfrm>
           <a:prstGeom prst="rect">
             <a:avLst/>
@@ -1452,7 +1452,7 @@
         </p:nvSpPr>
         <p:spPr>
           <a:xfrm>
-            <a:off x="1234440" y="21407628"/>
+            <a:off x="1234440" y="21483828"/>
             <a:ext cx="10454640" cy="900112"/>
           </a:xfrm>
           <a:prstGeom prst="rect">
@@ -1477,7 +1477,7 @@
                 <a:ea typeface="Calibri" pitchFamily="34" charset="-122"/>
                 <a:cs typeface="Calibri" pitchFamily="34" charset="-120"/>
               </a:rPr>
-              <a:t>Fig. 1. Deviation suite on the shipped 8192-point validation record (τ₀ = 1 s) with 68.3 % χ² intervals. MDEV rolls white PM off as τ^−3/2; the totals reach τ = T/4 with tighter long-τ intervals.</a:t>
+              <a:t>Fig. 1. Deviation suite on the shipped 8192-point validation record (τ₀ = 1 s) with 68.3 % χ² intervals. MDEV rolls white PM off as τ^−3/2 and separates it from flicker PM; the totals reach τ = T/4 with tighter long-τ intervals.</a:t>
             </a:r>
             <a:endParaRPr lang="en-US" sz="1950" dirty="0"/>
           </a:p>
@@ -1491,7 +1491,7 @@
         </p:nvSpPr>
         <p:spPr>
           <a:xfrm>
-            <a:off x="914400" y="23039261"/>
+            <a:off x="914400" y="23115461"/>
             <a:ext cx="11094720" cy="3634105"/>
           </a:xfrm>
           <a:prstGeom prst="rect">
@@ -1516,7 +1516,7 @@
         </p:nvSpPr>
         <p:spPr>
           <a:xfrm>
-            <a:off x="1234440" y="23359301"/>
+            <a:off x="1234440" y="23435501"/>
             <a:ext cx="10454640" cy="527685"/>
           </a:xfrm>
           <a:prstGeom prst="rect">
@@ -1555,7 +1555,7 @@
         </p:nvSpPr>
         <p:spPr>
           <a:xfrm>
-            <a:off x="1234440" y="24051578"/>
+            <a:off x="1234440" y="24127778"/>
             <a:ext cx="10454640" cy="2283460"/>
           </a:xfrm>
           <a:prstGeom prst="rect">
@@ -1598,7 +1598,7 @@
                 <a:ea typeface="Calibri" pitchFamily="34" charset="-122"/>
                 <a:cs typeface="Calibri" pitchFamily="34" charset="-120"/>
               </a:rPr>
-              <a:t>ADEV, MDEV, HDEV and MHDEV accumulate in O(1) per sample per τ (Dobrogowski–Kasznia 2007, extended to third differences) from a ring buffer of at most 4·m_max + 1 samples; the running estimate equals the batch kernel on the samples seen so far.</a:t>
+              <a:t>ADEV, MDEV, HDEV and MHDEV accumulate in O(1) per sample per τ (Dobrogowski–Kasznia 2007, extended to third differences) from a ring buffer of at most 4·m_max + 1 samples; the running deviation equals the batch kernel on the samples seen so far.</a:t>
             </a:r>
             <a:endParaRPr lang="en-US" sz="2400" dirty="0"/>
           </a:p>
@@ -1633,7 +1633,7 @@
                 <a:ea typeface="Calibri" pitchFamily="34" charset="-122"/>
                 <a:cs typeface="Calibri" pitchFamily="34" charset="-120"/>
               </a:rPr>
-              <a:t>dynamic σ(t, τ) maps for non-stationary records; N-cornered hat for N ≥ 3 clocks.</a:t>
+              <a:t>dynamic σ(t, τ) maps for non-stationary records; N-cornered hat for N ≥ 3 clocks with independent noises.</a:t>
             </a:r>
             <a:endParaRPr lang="en-US" sz="2400" dirty="0"/>
           </a:p>
@@ -1648,7 +1648,7 @@
         <p:spPr>
           <a:xfrm>
             <a:off x="12740640" y="4206240"/>
-            <a:ext cx="11094720" cy="9370886"/>
+            <a:ext cx="11094720" cy="9096566"/>
           </a:xfrm>
           <a:prstGeom prst="rect">
             <a:avLst/>
@@ -1761,8 +1761,8 @@
         </p:blipFill>
         <p:spPr>
           <a:xfrm>
-            <a:off x="15547099" y="7654290"/>
-            <a:ext cx="5481802" cy="4023360"/>
+            <a:off x="15733979" y="7654290"/>
+            <a:ext cx="5108042" cy="3749040"/>
           </a:xfrm>
           <a:prstGeom prst="rect">
             <a:avLst/>
@@ -1777,7 +1777,7 @@
         </p:nvSpPr>
         <p:spPr>
           <a:xfrm>
-            <a:off x="13060680" y="11787378"/>
+            <a:off x="13060680" y="11513058"/>
             <a:ext cx="10454640" cy="1469708"/>
           </a:xfrm>
           <a:prstGeom prst="rect">
@@ -1802,7 +1802,7 @@
                 <a:ea typeface="Calibri" pitchFamily="34" charset="-122"/>
                 <a:cs typeface="Calibri" pitchFamily="34" charset="-120"/>
               </a:rPr>
-              <a:t>Fig. 2. Construction (Greenhall scheme, as for MTOTDEV and HTOTDEV): each of the N − 4m + 1 windows of length L = 4m has its half-mean slope removed and is extended by two time-reversed copies; the modified third difference is averaged over m positions, squared, normalised by 6m²τ², and averaged over all windows. The public call first removes the record's least-squares frequency drift.</a:t>
+              <a:t>Fig. 2. Construction (Greenhall scheme, as for MTOTDEV and HTOTDEV): each of the N − 4m + 1 windows of length L = 4m has its half-mean slope removed and is extended by two time-reversed copies; the third difference at lag m is averaged over m positions, squared, normalised by 6m²τ² and averaged over all windows. The public call first removes the record's least-squares frequency drift.</a:t>
             </a:r>
             <a:endParaRPr lang="en-US" sz="1950" dirty="0"/>
           </a:p>
@@ -1816,8 +1816,8 @@
         </p:nvSpPr>
         <p:spPr>
           <a:xfrm>
-            <a:off x="12740640" y="13988605"/>
-            <a:ext cx="11094720" cy="12673076"/>
+            <a:off x="12740640" y="13714285"/>
+            <a:ext cx="11094720" cy="13236956"/>
           </a:xfrm>
           <a:prstGeom prst="rect">
             <a:avLst/>
@@ -1841,7 +1841,7 @@
         </p:nvSpPr>
         <p:spPr>
           <a:xfrm>
-            <a:off x="13060680" y="14308645"/>
+            <a:off x="13060680" y="14034325"/>
             <a:ext cx="10454640" cy="1009650"/>
           </a:xfrm>
           <a:prstGeom prst="rect">
@@ -1880,8 +1880,8 @@
         </p:nvSpPr>
         <p:spPr>
           <a:xfrm>
-            <a:off x="13060680" y="15482887"/>
-            <a:ext cx="10454640" cy="3423920"/>
+            <a:off x="13060680" y="15208567"/>
+            <a:ext cx="10454640" cy="4124960"/>
           </a:xfrm>
           <a:prstGeom prst="rect">
             <a:avLst/>
@@ -1923,7 +1923,7 @@
                 <a:ea typeface="Calibri" pitchFamily="34" charset="-122"/>
                 <a:cs typeface="Calibri" pitchFamily="34" charset="-120"/>
               </a:rPr>
-              <a:t>α ∈ {+2, +1, 0, −1, −2}; N ∈ {1024, …, 32768}; octave m grid; R = 3000 realizations per cell; one independent random stream per (seed, α, N, r).</a:t>
+              <a:t>α ∈ {+2, +1, 0, −1, −2}; N ∈ {1024, …, 32768}; octave m grid; R = 3000 realizations per cell; one independent random stream per (seed, α, N, r). The statistic calibrated is the shipped pipeline, including its default drift removal.</a:t>
             </a:r>
             <a:endParaRPr lang="en-US" sz="2400" dirty="0"/>
           </a:p>
@@ -1993,7 +1993,7 @@
                 <a:ea typeface="Calibri" pitchFamily="34" charset="-122"/>
                 <a:cs typeface="Calibri" pitchFamily="34" charset="-120"/>
               </a:rPr>
-              <a:t>over τ/τ₀ ≥ 16, the validity window of the total-variance literature. EDF ν = b T/τ − c (Mod-Totvar; the TotHvar form fits no better than ΔR² = 8 × 10⁻⁴) and bias B = b₀ + b₁ τ/T, both by weighted least squares.</a:t>
+              <a:t>over τ/τ₀ ≥ 16, the validity window of the total-variance literature. EDF ν = b T/τ − c (Mod-Totvar; the TotHvar form is better by at most ΔR² = 8 × 10⁻⁴, at α = ±2) and bias B = b₀ + b₁ τ/T, both by weighted least squares.</a:t>
             </a:r>
             <a:endParaRPr lang="en-US" sz="2400" dirty="0"/>
           </a:p>
@@ -2015,8 +2015,8 @@
         </p:blipFill>
         <p:spPr>
           <a:xfrm>
-            <a:off x="13498188" y="19016535"/>
-            <a:ext cx="4215143" cy="3657600"/>
+            <a:off x="13577222" y="19443255"/>
+            <a:ext cx="4057075" cy="3520440"/>
           </a:xfrm>
           <a:prstGeom prst="rect">
             <a:avLst/>
@@ -2039,8 +2039,8 @@
         </p:blipFill>
         <p:spPr>
           <a:xfrm>
-            <a:off x="18864876" y="19016535"/>
-            <a:ext cx="4210729" cy="3657600"/>
+            <a:off x="18943827" y="19443255"/>
+            <a:ext cx="4052826" cy="3520440"/>
           </a:xfrm>
           <a:prstGeom prst="rect">
             <a:avLst/>
@@ -2055,7 +2055,7 @@
         </p:nvSpPr>
         <p:spPr>
           <a:xfrm>
-            <a:off x="13060680" y="22783864"/>
+            <a:off x="13060680" y="23073423"/>
             <a:ext cx="10454640" cy="1184910"/>
           </a:xfrm>
           <a:prstGeom prst="rect">
@@ -2101,7 +2101,7 @@
           </p:nvPr>
         </p:nvGraphicFramePr>
         <p:xfrm>
-          <a:off x="13060680" y="24060213"/>
+          <a:off x="13060680" y="24349773"/>
           <a:ext cx="10454640" cy="914400"/>
         </p:xfrm>
         <a:graphic>
@@ -4998,7 +4998,7 @@
         <p:spPr>
           <a:xfrm>
             <a:off x="24566880" y="4206240"/>
-            <a:ext cx="11094720" cy="9883331"/>
+            <a:ext cx="11094720" cy="10477690"/>
           </a:xfrm>
           <a:prstGeom prst="rect">
             <a:avLst/>
@@ -5062,7 +5062,7 @@
         <p:spPr>
           <a:xfrm>
             <a:off x="24886920" y="5700522"/>
-            <a:ext cx="10454640" cy="2194560"/>
+            <a:ext cx="10454640" cy="3246120"/>
           </a:xfrm>
           <a:prstGeom prst="rect">
             <a:avLst/>
@@ -5089,7 +5089,7 @@
                 <a:ea typeface="Calibri" pitchFamily="34" charset="-122"/>
                 <a:cs typeface="Calibri" pitchFamily="34" charset="-120"/>
               </a:rPr>
-              <a:t>On the shipped record, ADEV, MDEV, TDEV and HDEV match Stable32 to ≤ 0.005 % (its five-significant-figure output) and allantools to ≤ 1 × 10⁻¹³; the raw total kernels match allantools to ≤ 4.4 × 10⁻¹⁵. Confidence bounds agree with Stable32 to ≤ 0.05 % at 11 of 12 τ. The one recurring residual is a convention: at τ = 256 s Stable32 assigns α = +2 where the detrended identifier assigns α = 0; one keyword reproduces Stable32 at every τ.</a:t>
+              <a:t>On the shipped 8192-point record, ADEV, MDEV, TDEV and HDEV match Stable32 to ≤ 0.005 % (its five-significant-figure output) and allantools to ≤ 1 × 10⁻¹³; the raw total kernels match allantools to ≤ 4.4 × 10⁻¹⁵. Confidence bounds agree with Stable32 to ≤ 0.05 % at 11 of 12 τ. The one recurring residual is a convention: at τ = 256 s Stable32 assigns α = +2 where the detrended identifier assigns α = 0; one keyword reproduces Stable32 at every τ. Estimators neither reference implements (MHDEV, HTDEV, MHTOTDEV, ThêoH, nch, dynamic, streaming) are checked against inlined textbook kernels and algebraic identities.</a:t>
             </a:r>
             <a:endParaRPr lang="en-US" sz="2400" dirty="0"/>
           </a:p>
@@ -5111,8 +5111,8 @@
         </p:blipFill>
         <p:spPr>
           <a:xfrm>
-            <a:off x="25891351" y="8004810"/>
-            <a:ext cx="8445777" cy="4754880"/>
+            <a:off x="26297398" y="9056370"/>
+            <a:ext cx="7633683" cy="4297680"/>
           </a:xfrm>
           <a:prstGeom prst="rect">
             <a:avLst/>
@@ -5127,7 +5127,7 @@
         </p:nvSpPr>
         <p:spPr>
           <a:xfrm>
-            <a:off x="24886920" y="12869418"/>
+            <a:off x="24886920" y="13463778"/>
             <a:ext cx="10454640" cy="900112"/>
           </a:xfrm>
           <a:prstGeom prst="rect">
@@ -5166,8 +5166,8 @@
         </p:nvSpPr>
         <p:spPr>
           <a:xfrm>
-            <a:off x="24566880" y="14501051"/>
-            <a:ext cx="11094720" cy="8984171"/>
+            <a:off x="24566880" y="15095410"/>
+            <a:ext cx="11094720" cy="8618411"/>
           </a:xfrm>
           <a:prstGeom prst="rect">
             <a:avLst/>
@@ -5191,7 +5191,7 @@
         </p:nvSpPr>
         <p:spPr>
           <a:xfrm>
-            <a:off x="24886920" y="14821090"/>
+            <a:off x="24886920" y="15415450"/>
             <a:ext cx="10454640" cy="1009650"/>
           </a:xfrm>
           <a:prstGeom prst="rect">
@@ -5230,7 +5230,7 @@
         </p:nvSpPr>
         <p:spPr>
           <a:xfrm>
-            <a:off x="24886920" y="15995333"/>
+            <a:off x="24886920" y="16589692"/>
             <a:ext cx="10454640" cy="1844040"/>
           </a:xfrm>
           <a:prstGeom prst="rect">
@@ -5280,8 +5280,8 @@
         </p:blipFill>
         <p:spPr>
           <a:xfrm>
-            <a:off x="26361342" y="17949101"/>
-            <a:ext cx="7505795" cy="4206240"/>
+            <a:off x="26687681" y="18543461"/>
+            <a:ext cx="6853118" cy="3840480"/>
           </a:xfrm>
           <a:prstGeom prst="rect">
             <a:avLst/>
@@ -5296,7 +5296,7 @@
         </p:nvSpPr>
         <p:spPr>
           <a:xfrm>
-            <a:off x="24886920" y="22265069"/>
+            <a:off x="24886920" y="22493669"/>
             <a:ext cx="10454640" cy="900112"/>
           </a:xfrm>
           <a:prstGeom prst="rect">
@@ -5321,7 +5321,7 @@
                 <a:ea typeface="Calibri" pitchFamily="34" charset="-122"/>
                 <a:cs typeface="Calibri" pitchFamily="34" charset="-120"/>
               </a:rPr>
-              <a:t>Fig. 5. Speed-up per kernel on an N = 25 000 white-PM record (bench/, mean of 30 realizations, 12 cores; diamonds: independent 4-core re-run). Ratios are the portable result; absolute times depend on the machine.</a:t>
+              <a:t>Fig. 5. Kernel-only speed-up (no intervals, raw totals) on an N = 25 000 white-PM record (bench/, mean of 30 realizations, 12 cores; diamonds: independent 4-core re-run). Ratios are the portable result; absolute times depend on the machine.</a:t>
             </a:r>
             <a:endParaRPr lang="en-US" sz="1950" dirty="0"/>
           </a:p>
@@ -5335,7 +5335,7 @@
         </p:nvSpPr>
         <p:spPr>
           <a:xfrm>
-            <a:off x="24566880" y="23896701"/>
+            <a:off x="24566880" y="24125301"/>
             <a:ext cx="11094720" cy="2933065"/>
           </a:xfrm>
           <a:prstGeom prst="rect">
@@ -5360,7 +5360,7 @@
         </p:nvSpPr>
         <p:spPr>
           <a:xfrm>
-            <a:off x="24886920" y="24216741"/>
+            <a:off x="24886920" y="24445341"/>
             <a:ext cx="10454640" cy="527685"/>
           </a:xfrm>
           <a:prstGeom prst="rect">
@@ -5399,7 +5399,7 @@
         </p:nvSpPr>
         <p:spPr>
           <a:xfrm>
-            <a:off x="24886920" y="24909018"/>
+            <a:off x="24886920" y="25137618"/>
             <a:ext cx="10454640" cy="1582420"/>
           </a:xfrm>
           <a:prstGeom prst="rect">
@@ -5477,7 +5477,7 @@
                 <a:ea typeface="Calibri" pitchFamily="34" charset="-122"/>
                 <a:cs typeface="Calibri" pitchFamily="34" charset="-120"/>
               </a:rPr>
-              <a:t>extend the Monte Carlo method to the Thêo family and to gapped records.</a:t>
+              <a:t>extend the Monte Carlo method to the Thêo family and gapped records.</a:t>
             </a:r>
             <a:endParaRPr lang="en-US" sz="2400" dirty="0"/>
           </a:p>
@@ -5491,7 +5491,7 @@
         </p:nvSpPr>
         <p:spPr>
           <a:xfrm>
-            <a:off x="914400" y="26791920"/>
+            <a:off x="914400" y="27066240"/>
             <a:ext cx="34747200" cy="0"/>
           </a:xfrm>
           <a:prstGeom prst="line">
@@ -5514,8 +5514,8 @@
         </p:nvSpPr>
         <p:spPr>
           <a:xfrm>
-            <a:off x="914400" y="26929080"/>
-            <a:ext cx="12508992" cy="1600200"/>
+            <a:off x="914400" y="27203400"/>
+            <a:ext cx="12508992" cy="1325880"/>
           </a:xfrm>
           <a:prstGeom prst="rect">
             <a:avLst/>
@@ -5633,8 +5633,8 @@
         </p:nvSpPr>
         <p:spPr>
           <a:xfrm>
-            <a:off x="13697712" y="26929080"/>
-            <a:ext cx="12508992" cy="1600200"/>
+            <a:off x="13697712" y="27203400"/>
+            <a:ext cx="12508992" cy="1325880"/>
           </a:xfrm>
           <a:prstGeom prst="rect">
             <a:avLst/>
@@ -5732,8 +5732,8 @@
         </p:nvSpPr>
         <p:spPr>
           <a:xfrm>
-            <a:off x="26481024" y="26929080"/>
-            <a:ext cx="9180576" cy="1600200"/>
+            <a:off x="26481024" y="27203400"/>
+            <a:ext cx="9180576" cy="1325880"/>
           </a:xfrm>
           <a:prstGeom prst="rect">
             <a:avLst/>

--- a/poster/SigmaTau_poster_draft.pptx
+++ b/poster/SigmaTau_poster_draft.pptx
@@ -1133,7 +1133,63 @@
                 <a:ea typeface="Calibri" pitchFamily="34" charset="-122"/>
                 <a:cs typeface="Calibri" pitchFamily="34" charset="-120"/>
               </a:rPr>
-              <a:t>Clock noise is power-law, S_y(f) ∝ f^α with α ∈ {+2, +1, 0, −1, −2} (white PM to random-walk FM). From N phase samples at spacing τ₀, the number of independent samples at averaging time τ = mτ₀ is not N/m: it depends on the noise type, on τ/T and on the estimator.</a:t>
+              <a:t>Clock noise is power-law, S</a:t>
+            </a:r>
+            <a:pPr indent="0" marL="0">
+              <a:buNone/>
+            </a:pPr>
+            <a:r>
+              <a:rPr lang="en-US" sz="2400" baseline="-40000" dirty="0">
+                <a:solidFill>
+                  <a:srgbClr val="0B0B0B"/>
+                </a:solidFill>
+                <a:latin typeface="Calibri" pitchFamily="34" charset="0"/>
+                <a:ea typeface="Calibri" pitchFamily="34" charset="-122"/>
+                <a:cs typeface="Calibri" pitchFamily="34" charset="-120"/>
+              </a:rPr>
+              <a:t>y</a:t>
+            </a:r>
+            <a:pPr indent="0" marL="0">
+              <a:buNone/>
+            </a:pPr>
+            <a:r>
+              <a:rPr lang="en-US" sz="2400" dirty="0">
+                <a:solidFill>
+                  <a:srgbClr val="0B0B0B"/>
+                </a:solidFill>
+                <a:latin typeface="Calibri" pitchFamily="34" charset="0"/>
+                <a:ea typeface="Calibri" pitchFamily="34" charset="-122"/>
+                <a:cs typeface="Calibri" pitchFamily="34" charset="-120"/>
+              </a:rPr>
+              <a:t>(f) ∝ f</a:t>
+            </a:r>
+            <a:pPr indent="0" marL="0">
+              <a:buNone/>
+            </a:pPr>
+            <a:r>
+              <a:rPr lang="en-US" sz="2400" baseline="30000" dirty="0">
+                <a:solidFill>
+                  <a:srgbClr val="0B0B0B"/>
+                </a:solidFill>
+                <a:latin typeface="Calibri" pitchFamily="34" charset="0"/>
+                <a:ea typeface="Calibri" pitchFamily="34" charset="-122"/>
+                <a:cs typeface="Calibri" pitchFamily="34" charset="-120"/>
+              </a:rPr>
+              <a:t>α</a:t>
+            </a:r>
+            <a:pPr indent="0" marL="0">
+              <a:buNone/>
+            </a:pPr>
+            <a:r>
+              <a:rPr lang="en-US" sz="2400" dirty="0">
+                <a:solidFill>
+                  <a:srgbClr val="0B0B0B"/>
+                </a:solidFill>
+                <a:latin typeface="Calibri" pitchFamily="34" charset="0"/>
+                <a:ea typeface="Calibri" pitchFamily="34" charset="-122"/>
+                <a:cs typeface="Calibri" pitchFamily="34" charset="-120"/>
+              </a:rPr>
+              <a:t> with α ∈ {+2, +1, 0, −1, −2} (white PM to random-walk FM). From N phase samples at spacing τ₀, the number of independent samples at averaging time τ = mτ₀ is not N/m: it depends on the noise type, on τ/T and on the estimator.</a:t>
             </a:r>
             <a:endParaRPr lang="en-US" sz="2400" dirty="0"/>
           </a:p>
@@ -1477,7 +1533,35 @@
                 <a:ea typeface="Calibri" pitchFamily="34" charset="-122"/>
                 <a:cs typeface="Calibri" pitchFamily="34" charset="-120"/>
               </a:rPr>
-              <a:t>Fig. 1. Deviation suite on the shipped 8192-point validation record (τ₀ = 1 s) with 68.3 % χ² intervals. MDEV rolls white PM off as τ^−3/2 and separates it from flicker PM; the totals reach τ = T/4 with tighter long-τ intervals.</a:t>
+              <a:t>Fig. 1. Deviation suite on the shipped 8192-point validation record (τ₀ = 1 s) with 68.3 % χ² intervals. MDEV rolls white PM off as τ</a:t>
+            </a:r>
+            <a:pPr indent="0" marL="0">
+              <a:buNone/>
+            </a:pPr>
+            <a:r>
+              <a:rPr lang="en-US" sz="1950" baseline="30000" dirty="0">
+                <a:solidFill>
+                  <a:srgbClr val="52514E"/>
+                </a:solidFill>
+                <a:latin typeface="Calibri" pitchFamily="34" charset="0"/>
+                <a:ea typeface="Calibri" pitchFamily="34" charset="-122"/>
+                <a:cs typeface="Calibri" pitchFamily="34" charset="-120"/>
+              </a:rPr>
+              <a:t>−3/2</a:t>
+            </a:r>
+            <a:pPr indent="0" marL="0">
+              <a:buNone/>
+            </a:pPr>
+            <a:r>
+              <a:rPr lang="en-US" sz="1950" dirty="0">
+                <a:solidFill>
+                  <a:srgbClr val="52514E"/>
+                </a:solidFill>
+                <a:latin typeface="Calibri" pitchFamily="34" charset="0"/>
+                <a:ea typeface="Calibri" pitchFamily="34" charset="-122"/>
+                <a:cs typeface="Calibri" pitchFamily="34" charset="-120"/>
+              </a:rPr>
+              <a:t> and separates it from flicker PM; the totals reach τ = T/4 with tighter long-τ intervals.</a:t>
             </a:r>
             <a:endParaRPr lang="en-US" sz="1950" dirty="0"/>
           </a:p>
@@ -1598,7 +1682,35 @@
                 <a:ea typeface="Calibri" pitchFamily="34" charset="-122"/>
                 <a:cs typeface="Calibri" pitchFamily="34" charset="-120"/>
               </a:rPr>
-              <a:t>ADEV, MDEV, HDEV and MHDEV accumulate in O(1) per sample per τ (Dobrogowski–Kasznia 2007, extended to third differences) from a ring buffer of at most 4·m_max + 1 samples; the running deviation equals the batch kernel on the samples seen so far.</a:t>
+              <a:t>ADEV, MDEV, HDEV and MHDEV accumulate in O(1) per sample per τ (Dobrogowski–Kasznia 2007, extended to third differences) from a ring buffer of at most 4·m</a:t>
+            </a:r>
+            <a:pPr indent="0" marL="0">
+              <a:buNone/>
+            </a:pPr>
+            <a:r>
+              <a:rPr lang="en-US" sz="2400" baseline="-40000" dirty="0">
+                <a:solidFill>
+                  <a:srgbClr val="0B0B0B"/>
+                </a:solidFill>
+                <a:latin typeface="Calibri" pitchFamily="34" charset="0"/>
+                <a:ea typeface="Calibri" pitchFamily="34" charset="-122"/>
+                <a:cs typeface="Calibri" pitchFamily="34" charset="-120"/>
+              </a:rPr>
+              <a:t>max</a:t>
+            </a:r>
+            <a:pPr indent="0" marL="0">
+              <a:buNone/>
+            </a:pPr>
+            <a:r>
+              <a:rPr lang="en-US" sz="2400" dirty="0">
+                <a:solidFill>
+                  <a:srgbClr val="0B0B0B"/>
+                </a:solidFill>
+                <a:latin typeface="Calibri" pitchFamily="34" charset="0"/>
+                <a:ea typeface="Calibri" pitchFamily="34" charset="-122"/>
+                <a:cs typeface="Calibri" pitchFamily="34" charset="-120"/>
+              </a:rPr>
+              <a:t> + 1 samples; the running deviation equals the batch kernel on the samples seen so far.</a:t>
             </a:r>
             <a:endParaRPr lang="en-US" sz="2400" dirty="0"/>
           </a:p>
@@ -1958,7 +2070,35 @@
                 <a:ea typeface="Calibri" pitchFamily="34" charset="-122"/>
                 <a:cs typeface="Calibri" pitchFamily="34" charset="-120"/>
               </a:rPr>
-              <a:t>MHDEV on the same realization (its EDF follows from the Greenhall–Riley spectral sum). Bias B = E[MHTOTVAR] / E[MHVAR]; EDF = 2 V̄² / s_V², bootstrap standard error ≈ √(2/R) = 2.6 %.</a:t>
+              <a:t>MHDEV on the same realization (its EDF follows from the Greenhall–Riley spectral sum). Bias B = E[MHTOTVAR] / E[MHVAR]; EDF = 2 mean(V)</a:t>
+            </a:r>
+            <a:pPr indent="0" marL="0">
+              <a:buNone/>
+            </a:pPr>
+            <a:r>
+              <a:rPr lang="en-US" sz="2400" baseline="30000" dirty="0">
+                <a:solidFill>
+                  <a:srgbClr val="0B0B0B"/>
+                </a:solidFill>
+                <a:latin typeface="Calibri" pitchFamily="34" charset="0"/>
+                <a:ea typeface="Calibri" pitchFamily="34" charset="-122"/>
+                <a:cs typeface="Calibri" pitchFamily="34" charset="-120"/>
+              </a:rPr>
+              <a:t>2</a:t>
+            </a:r>
+            <a:pPr indent="0" marL="0">
+              <a:buNone/>
+            </a:pPr>
+            <a:r>
+              <a:rPr lang="en-US" sz="2400" dirty="0">
+                <a:solidFill>
+                  <a:srgbClr val="0B0B0B"/>
+                </a:solidFill>
+                <a:latin typeface="Calibri" pitchFamily="34" charset="0"/>
+                <a:ea typeface="Calibri" pitchFamily="34" charset="-122"/>
+                <a:cs typeface="Calibri" pitchFamily="34" charset="-120"/>
+              </a:rPr>
+              <a:t> / var(V), bootstrap standard error ≈ √(2/R) = 2.6 %.</a:t>
             </a:r>
             <a:endParaRPr lang="en-US" sz="2400" dirty="0"/>
           </a:p>

--- a/poster/SigmaTau_poster_draft.pptx
+++ b/poster/SigmaTau_poster_draft.pptx
@@ -909,7 +909,7 @@
         <p:spPr>
           <a:xfrm>
             <a:off x="914400" y="320040"/>
-            <a:ext cx="34747200" cy="1920240"/>
+            <a:ext cx="34747200" cy="1234440"/>
           </a:xfrm>
           <a:prstGeom prst="rect">
             <a:avLst/>
@@ -935,7 +935,7 @@
                 <a:ea typeface="Calibri" pitchFamily="34" charset="-122"/>
                 <a:cs typeface="Calibri" pitchFamily="34" charset="-120"/>
               </a:rPr>
-              <a:t>Frequency stability with quantified uncertainty: per-τ noise identification, χ² intervals, and a calibrated modified-Hadamard total deviation</a:t>
+              <a:t>SigmaTau.jl: unified, validated and fast time-and-frequency stability analysis in Julia</a:t>
             </a:r>
             <a:endParaRPr lang="en-US" sz="6000" dirty="0"/>
           </a:p>
@@ -949,8 +949,8 @@
         </p:nvSpPr>
         <p:spPr>
           <a:xfrm>
-            <a:off x="914400" y="2286000"/>
-            <a:ext cx="34747200" cy="502920"/>
+            <a:off x="914400" y="1645920"/>
+            <a:ext cx="34747200" cy="1097280"/>
           </a:xfrm>
           <a:prstGeom prst="rect">
             <a:avLst/>
@@ -966,7 +966,7 @@
               <a:buNone/>
             </a:pPr>
             <a:r>
-              <a:rPr lang="en-US" sz="3000" i="1" dirty="0">
+              <a:rPr lang="en-US" sz="2800" dirty="0">
                 <a:solidFill>
                   <a:srgbClr val="FFFFFF"/>
                 </a:solidFill>
@@ -974,9 +974,9 @@
                 <a:ea typeface="Calibri" pitchFamily="34" charset="-122"/>
                 <a:cs typeface="Calibri" pitchFamily="34" charset="-120"/>
               </a:rPr>
-              <a:t>SigmaTau.jl, an open and validated time-and-frequency stability library in Julia</a:t>
+              <a:t>Every estimator family with per-τ noise identification, EDF and χ² intervals in one call · matches Stable32 and allantools · modified-total kernels 1,600 to 4,200× faster · a new Monte-Carlo-calibrated MHTOTDEV</a:t>
             </a:r>
-            <a:endParaRPr lang="en-US" sz="3000" dirty="0"/>
+            <a:endParaRPr lang="en-US" sz="2800" dirty="0"/>
           </a:p>
         </p:txBody>
       </p:sp>
@@ -1027,7 +1027,7 @@
                 <a:ea typeface="Calibri" pitchFamily="34" charset="-122"/>
                 <a:cs typeface="Calibri" pitchFamily="34" charset="-120"/>
               </a:rPr>
-              <a:t>     The University of Alabama   ·   github.com/ianlap/SigmaTau.jl   ·   MIT license</a:t>
+              <a:t>     The University of Alabama   ·   github.com/ianlap/SigmaTau.jl   ·   MIT license   ·   Julia ≥ 1.11</a:t>
             </a:r>
             <a:endParaRPr lang="en-US" sz="3000" dirty="0"/>
           </a:p>
@@ -1042,7 +1042,7 @@
         <p:spPr>
           <a:xfrm>
             <a:off x="914400" y="4206240"/>
-            <a:ext cx="11094720" cy="4479290"/>
+            <a:ext cx="11094720" cy="13876020"/>
           </a:xfrm>
           <a:prstGeom prst="rect">
             <a:avLst/>
@@ -1091,7 +1091,7 @@
                 <a:ea typeface="Calibri" pitchFamily="34" charset="-122"/>
                 <a:cs typeface="Calibri" pitchFamily="34" charset="-120"/>
               </a:rPr>
-              <a:t>A clock record is finite, so every σ(τ) point is an estimate with an interval</a:t>
+              <a:t>One API, every estimator, a χ² interval with every point</a:t>
             </a:r>
             <a:endParaRPr lang="en-US" sz="3300" dirty="0"/>
           </a:p>
@@ -1099,14 +1099,14 @@
       </p:sp>
       <p:sp>
         <p:nvSpPr>
-          <p:cNvPr id="8" name="Body"/>
+          <p:cNvPr id="8" name="Bullets"/>
           <p:cNvSpPr txBox="1"/>
           <p:nvPr/>
         </p:nvSpPr>
         <p:spPr>
           <a:xfrm>
             <a:off x="1234440" y="5700522"/>
-            <a:ext cx="10454640" cy="2646680"/>
+            <a:ext cx="10454640" cy="5615940"/>
           </a:xfrm>
           <a:prstGeom prst="rect">
             <a:avLst/>
@@ -1118,10 +1118,25 @@
           <a:bodyPr wrap="square" lIns="0" tIns="0" rIns="0" bIns="0" rtlCol="0" anchor="t"/>
           <a:lstStyle/>
           <a:p>
+            <a:pPr marL="279400" indent="-279400">
+              <a:spcAft>
+                <a:spcPts val="700"/>
+              </a:spcAft>
+              <a:buSzPct val="100000"/>
+              <a:buChar char="•"/>
+            </a:pPr>
+            <a:r>
+              <a:rPr lang="en-US" sz="2400" b="1" dirty="0">
+                <a:solidFill>
+                  <a:srgbClr val="0B0B0B"/>
+                </a:solidFill>
+                <a:latin typeface="Calibri" pitchFamily="34" charset="0"/>
+                <a:ea typeface="Calibri" pitchFamily="34" charset="-122"/>
+                <a:cs typeface="Calibri" pitchFamily="34" charset="-120"/>
+              </a:rPr>
+              <a:t>Allan: </a:t>
+            </a:r>
             <a:pPr indent="0" marL="0">
-              <a:spcAft>
-                <a:spcPts val="800"/>
-              </a:spcAft>
               <a:buNone/>
             </a:pPr>
             <a:r>
@@ -1133,7 +1148,7 @@
                 <a:ea typeface="Calibri" pitchFamily="34" charset="-122"/>
                 <a:cs typeface="Calibri" pitchFamily="34" charset="-120"/>
               </a:rPr>
-              <a:t>Clock noise is power-law, S</a:t>
+              <a:t>ADEV, MDEV, TDEV.  Hadamard: HDEV, MHDEV, HTDEV.  Total: TOTDEV, MTOTDEV, TTOTDEV, HTOTDEV, MHTOTDEV.  Thêo1 / ThêoBR / ThêoH.  MTIE, TIE rms, PDEV.  Time-resolved DADEV / DHDEV.  Real-time ADEV / MDEV / HDEV / MHDEV.  N-cornered hat.  S</a:t>
             </a:r>
             <a:pPr indent="0" marL="0">
               <a:buNone/>
@@ -1161,13 +1176,13 @@
                 <a:ea typeface="Calibri" pitchFamily="34" charset="-122"/>
                 <a:cs typeface="Calibri" pitchFamily="34" charset="-120"/>
               </a:rPr>
-              <a:t>(f) ∝ f</a:t>
+              <a:t>, S</a:t>
             </a:r>
             <a:pPr indent="0" marL="0">
               <a:buNone/>
             </a:pPr>
             <a:r>
-              <a:rPr lang="en-US" sz="2400" baseline="30000" dirty="0">
+              <a:rPr lang="en-US" sz="2400" baseline="-40000" dirty="0">
                 <a:solidFill>
                   <a:srgbClr val="0B0B0B"/>
                 </a:solidFill>
@@ -1175,7 +1190,7 @@
                 <a:ea typeface="Calibri" pitchFamily="34" charset="-122"/>
                 <a:cs typeface="Calibri" pitchFamily="34" charset="-120"/>
               </a:rPr>
-              <a:t>α</a:t>
+              <a:t>x</a:t>
             </a:r>
             <a:pPr indent="0" marL="0">
               <a:buNone/>
@@ -1189,148 +1204,7 @@
                 <a:ea typeface="Calibri" pitchFamily="34" charset="-122"/>
                 <a:cs typeface="Calibri" pitchFamily="34" charset="-120"/>
               </a:rPr>
-              <a:t> with α ∈ {+2, +1, 0, −1, −2} (white PM to random-walk FM). From N phase samples at spacing τ₀, the number of independent samples at averaging time τ = mτ₀ is not N/m: it depends on the noise type, on τ/T and on the estimator.</a:t>
-            </a:r>
-            <a:endParaRPr lang="en-US" sz="2400" dirty="0"/>
-          </a:p>
-          <a:p>
-            <a:pPr indent="0" marL="0">
-              <a:spcAft>
-                <a:spcPts val="800"/>
-              </a:spcAft>
-              <a:buNone/>
-            </a:pPr>
-            <a:r>
-              <a:rPr lang="en-US" sz="2400" dirty="0">
-                <a:solidFill>
-                  <a:srgbClr val="0B0B0B"/>
-                </a:solidFill>
-                <a:latin typeface="Calibri" pitchFamily="34" charset="0"/>
-                <a:ea typeface="Calibri" pitchFamily="34" charset="-122"/>
-                <a:cs typeface="Calibri" pitchFamily="34" charset="-120"/>
-              </a:rPr>
-              <a:t>A usable stability point therefore needs four quantities computed together: the deviation, the noise type at that τ, the equivalent degrees of freedom (EDF) and the χ² interval.</a:t>
-            </a:r>
-            <a:endParaRPr lang="en-US" sz="2400" dirty="0"/>
-          </a:p>
-        </p:txBody>
-      </p:sp>
-      <p:sp>
-        <p:nvSpPr>
-          <p:cNvPr id="9" name="Shape 7"/>
-          <p:cNvSpPr/>
-          <p:nvPr/>
-        </p:nvSpPr>
-        <p:spPr>
-          <a:xfrm>
-            <a:off x="914400" y="9097010"/>
-            <a:ext cx="11094720" cy="13606971"/>
-          </a:xfrm>
-          <a:prstGeom prst="rect">
-            <a:avLst/>
-          </a:prstGeom>
-          <a:solidFill>
-            <a:srgbClr val="FFFFFF"/>
-          </a:solidFill>
-          <a:ln w="12700">
-            <a:solidFill>
-              <a:srgbClr val="D9D4D0"/>
-            </a:solidFill>
-            <a:prstDash val="solid"/>
-          </a:ln>
-        </p:spPr>
-      </p:sp>
-      <p:sp>
-        <p:nvSpPr>
-          <p:cNvPr id="10" name="Heading"/>
-          <p:cNvSpPr txBox="1"/>
-          <p:nvPr/>
-        </p:nvSpPr>
-        <p:spPr>
-          <a:xfrm>
-            <a:off x="1234440" y="9417050"/>
-            <a:ext cx="10454640" cy="1009650"/>
-          </a:xfrm>
-          <a:prstGeom prst="rect">
-            <a:avLst/>
-          </a:prstGeom>
-          <a:noFill/>
-          <a:ln/>
-        </p:spPr>
-        <p:txBody>
-          <a:bodyPr wrap="square" lIns="0" tIns="0" rIns="0" bIns="0" rtlCol="0" anchor="t"/>
-          <a:lstStyle/>
-          <a:p>
-            <a:pPr indent="0" marL="0">
-              <a:buNone/>
-            </a:pPr>
-            <a:r>
-              <a:rPr lang="en-US" sz="3300" b="1" dirty="0">
-                <a:solidFill>
-                  <a:srgbClr val="9E1B32"/>
-                </a:solidFill>
-                <a:latin typeface="Calibri" pitchFamily="34" charset="0"/>
-                <a:ea typeface="Calibri" pitchFamily="34" charset="-122"/>
-                <a:cs typeface="Calibri" pitchFamily="34" charset="-120"/>
-              </a:rPr>
-              <a:t>One call returns deviation, noise type, EDF and interval at every τ</a:t>
-            </a:r>
-            <a:endParaRPr lang="en-US" sz="3300" dirty="0"/>
-          </a:p>
-        </p:txBody>
-      </p:sp>
-      <p:sp>
-        <p:nvSpPr>
-          <p:cNvPr id="11" name="Bullets"/>
-          <p:cNvSpPr txBox="1"/>
-          <p:nvPr/>
-        </p:nvSpPr>
-        <p:spPr>
-          <a:xfrm>
-            <a:off x="1234440" y="10591292"/>
-            <a:ext cx="10454640" cy="5003800"/>
-          </a:xfrm>
-          <a:prstGeom prst="rect">
-            <a:avLst/>
-          </a:prstGeom>
-          <a:noFill/>
-          <a:ln/>
-        </p:spPr>
-        <p:txBody>
-          <a:bodyPr wrap="square" lIns="0" tIns="0" rIns="0" bIns="0" rtlCol="0" anchor="t"/>
-          <a:lstStyle/>
-          <a:p>
-            <a:pPr marL="279400" indent="-279400">
-              <a:spcAft>
-                <a:spcPts val="700"/>
-              </a:spcAft>
-              <a:buSzPct val="100000"/>
-              <a:buChar char="•"/>
-            </a:pPr>
-            <a:r>
-              <a:rPr lang="en-US" sz="2400" b="1" dirty="0">
-                <a:solidFill>
-                  <a:srgbClr val="0B0B0B"/>
-                </a:solidFill>
-                <a:latin typeface="Calibri" pitchFamily="34" charset="0"/>
-                <a:ea typeface="Calibri" pitchFamily="34" charset="-122"/>
-                <a:cs typeface="Calibri" pitchFamily="34" charset="-120"/>
-              </a:rPr>
-              <a:t>Estimators: </a:t>
-            </a:r>
-            <a:pPr indent="0" marL="0">
-              <a:buNone/>
-            </a:pPr>
-            <a:r>
-              <a:rPr lang="en-US" sz="2400" dirty="0">
-                <a:solidFill>
-                  <a:srgbClr val="0B0B0B"/>
-                </a:solidFill>
-                <a:latin typeface="Calibri" pitchFamily="34" charset="0"/>
-                <a:ea typeface="Calibri" pitchFamily="34" charset="-122"/>
-                <a:cs typeface="Calibri" pitchFamily="34" charset="-120"/>
-              </a:rPr>
-              <a:t>Allan, modified Allan, time; Hadamard, modified Hadamard, Hadamard time; five totals; Thêo1/ThêoBR/ThêoH; MTIE, TIE rms, PDEV; time-resolved and real-time variants.</a:t>
+              <a:t>, ℒ(f), calibrated power-law synthesis.</a:t>
             </a:r>
             <a:endParaRPr lang="en-US" sz="2400" dirty="0"/>
           </a:p>
@@ -1351,7 +1225,7 @@
                 <a:ea typeface="Calibri" pitchFamily="34" charset="-122"/>
                 <a:cs typeface="Calibri" pitchFamily="34" charset="-120"/>
               </a:rPr>
-              <a:t>Noise type per τ: </a:t>
+              <a:t>Per τ, in the same call: </a:t>
             </a:r>
             <a:pPr indent="0" marL="0">
               <a:buNone/>
@@ -1365,7 +1239,7 @@
                 <a:ea typeface="Calibri" pitchFamily="34" charset="-122"/>
                 <a:cs typeface="Calibri" pitchFamily="34" charset="-120"/>
               </a:rPr>
-              <a:t>lag-1 autocorrelation of the m-decimated, quadratically detrended phase differences, with the B1 / R(n) ratio as fallback.</a:t>
+              <a:t>the deviation, the noise type (lag-1 autocorrelation with B1 / R(n) fallback), the Greenhall–Riley EDF, and the χ² bounds at 68.3 % (switchable). Total-family bias corrections are on by default and switchable.</a:t>
             </a:r>
             <a:endParaRPr lang="en-US" sz="2400" dirty="0"/>
           </a:p>
@@ -1386,7 +1260,7 @@
                 <a:ea typeface="Calibri" pitchFamily="34" charset="-122"/>
                 <a:cs typeface="Calibri" pitchFamily="34" charset="-120"/>
               </a:rPr>
-              <a:t>EDF: </a:t>
+              <a:t>Input: </a:t>
             </a:r>
             <a:pPr indent="0" marL="0">
               <a:buNone/>
@@ -1400,7 +1274,7 @@
                 <a:ea typeface="Calibri" pitchFamily="34" charset="-122"/>
                 <a:cs typeface="Calibri" pitchFamily="34" charset="-120"/>
               </a:rPr>
-              <a:t>Greenhall–Riley 2003 for the difference families; the published total-variance tables (SP1065; Howe et al.) for TOTDEV, MTOTDEV and HTOTDEV, with documented fallbacks outside their ranges; Monte Carlo for MHTOTDEV (column 2).</a:t>
+              <a:t>phase or frequency, any τ grid; read, detrend, gap-fill and outlier tools; plain-text round-trip of results.</a:t>
             </a:r>
             <a:endParaRPr lang="en-US" sz="2400" dirty="0"/>
           </a:p>
@@ -1421,7 +1295,7 @@
                 <a:ea typeface="Calibri" pitchFamily="34" charset="-122"/>
                 <a:cs typeface="Calibri" pitchFamily="34" charset="-120"/>
               </a:rPr>
-              <a:t>Interval: </a:t>
+              <a:t>Real-time and multi-clock: </a:t>
             </a:r>
             <a:pPr indent="0" marL="0">
               <a:buNone/>
@@ -1435,254 +1309,7 @@
                 <a:ea typeface="Calibri" pitchFamily="34" charset="-122"/>
                 <a:cs typeface="Calibri" pitchFamily="34" charset="-120"/>
               </a:rPr>
-              <a:t>χ² bounds on σ² with ν = EDF, 68.3 % by default. Total-family bias corrections are applied by default and switchable.</a:t>
-            </a:r>
-            <a:endParaRPr lang="en-US" sz="2400" dirty="0"/>
-          </a:p>
-          <a:p>
-            <a:pPr marL="279400" indent="-279400">
-              <a:spcAft>
-                <a:spcPts val="700"/>
-              </a:spcAft>
-              <a:buSzPct val="100000"/>
-              <a:buChar char="•"/>
-            </a:pPr>
-            <a:r>
-              <a:rPr lang="en-US" sz="2400" b="1" dirty="0">
-                <a:solidFill>
-                  <a:srgbClr val="0B0B0B"/>
-                </a:solidFill>
-                <a:latin typeface="Calibri" pitchFamily="34" charset="0"/>
-                <a:ea typeface="Calibri" pitchFamily="34" charset="-122"/>
-                <a:cs typeface="Calibri" pitchFamily="34" charset="-120"/>
-              </a:rPr>
-              <a:t>Definitions: </a:t>
-            </a:r>
-            <a:pPr indent="0" marL="0">
-              <a:buNone/>
-            </a:pPr>
-            <a:r>
-              <a:rPr lang="en-US" sz="2400" dirty="0">
-                <a:solidFill>
-                  <a:srgbClr val="0B0B0B"/>
-                </a:solidFill>
-                <a:latin typeface="Calibri" pitchFamily="34" charset="0"/>
-                <a:ea typeface="Calibri" pitchFamily="34" charset="-122"/>
-                <a:cs typeface="Calibri" pitchFamily="34" charset="-120"/>
-              </a:rPr>
-              <a:t>NIST SP1065 and IEEE Std 1139-2022; every departure from a reference is a named, documented switch.</a:t>
-            </a:r>
-            <a:endParaRPr lang="en-US" sz="2400" dirty="0"/>
-          </a:p>
-        </p:txBody>
-      </p:sp>
-      <p:pic>
-        <p:nvPicPr>
-          <p:cNvPr id="12" name="F1_suite" descr="/home/user/SigmaTau.jl/poster/figures/F1_suite.png">    </p:cNvPr>
-          <p:cNvPicPr>
-            <a:picLocks noChangeAspect="1"/>
-          </p:cNvPicPr>
-          <p:nvPr/>
-        </p:nvPicPr>
-        <p:blipFill>
-          <a:blip r:embed="rId1"/>
-          <a:stretch>
-            <a:fillRect/>
-          </a:stretch>
-        </p:blipFill>
-        <p:spPr>
-          <a:xfrm>
-            <a:off x="2644318" y="15704820"/>
-            <a:ext cx="7634883" cy="5669280"/>
-          </a:xfrm>
-          <a:prstGeom prst="rect">
-            <a:avLst/>
-          </a:prstGeom>
-        </p:spPr>
-      </p:pic>
-      <p:sp>
-        <p:nvSpPr>
-          <p:cNvPr id="13" name="Caption"/>
-          <p:cNvSpPr txBox="1"/>
-          <p:nvPr/>
-        </p:nvSpPr>
-        <p:spPr>
-          <a:xfrm>
-            <a:off x="1234440" y="21483828"/>
-            <a:ext cx="10454640" cy="900112"/>
-          </a:xfrm>
-          <a:prstGeom prst="rect">
-            <a:avLst/>
-          </a:prstGeom>
-          <a:noFill/>
-          <a:ln/>
-        </p:spPr>
-        <p:txBody>
-          <a:bodyPr wrap="square" lIns="0" tIns="0" rIns="0" bIns="0" rtlCol="0" anchor="t"/>
-          <a:lstStyle/>
-          <a:p>
-            <a:pPr indent="0" marL="0">
-              <a:buNone/>
-            </a:pPr>
-            <a:r>
-              <a:rPr lang="en-US" sz="1950" dirty="0">
-                <a:solidFill>
-                  <a:srgbClr val="52514E"/>
-                </a:solidFill>
-                <a:latin typeface="Calibri" pitchFamily="34" charset="0"/>
-                <a:ea typeface="Calibri" pitchFamily="34" charset="-122"/>
-                <a:cs typeface="Calibri" pitchFamily="34" charset="-120"/>
-              </a:rPr>
-              <a:t>Fig. 1. Deviation suite on the shipped 8192-point validation record (τ₀ = 1 s) with 68.3 % χ² intervals. MDEV rolls white PM off as τ</a:t>
-            </a:r>
-            <a:pPr indent="0" marL="0">
-              <a:buNone/>
-            </a:pPr>
-            <a:r>
-              <a:rPr lang="en-US" sz="1950" baseline="30000" dirty="0">
-                <a:solidFill>
-                  <a:srgbClr val="52514E"/>
-                </a:solidFill>
-                <a:latin typeface="Calibri" pitchFamily="34" charset="0"/>
-                <a:ea typeface="Calibri" pitchFamily="34" charset="-122"/>
-                <a:cs typeface="Calibri" pitchFamily="34" charset="-120"/>
-              </a:rPr>
-              <a:t>−3/2</a:t>
-            </a:r>
-            <a:pPr indent="0" marL="0">
-              <a:buNone/>
-            </a:pPr>
-            <a:r>
-              <a:rPr lang="en-US" sz="1950" dirty="0">
-                <a:solidFill>
-                  <a:srgbClr val="52514E"/>
-                </a:solidFill>
-                <a:latin typeface="Calibri" pitchFamily="34" charset="0"/>
-                <a:ea typeface="Calibri" pitchFamily="34" charset="-122"/>
-                <a:cs typeface="Calibri" pitchFamily="34" charset="-120"/>
-              </a:rPr>
-              <a:t> and separates it from flicker PM; the totals reach τ = T/4 with tighter long-τ intervals.</a:t>
-            </a:r>
-            <a:endParaRPr lang="en-US" sz="1950" dirty="0"/>
-          </a:p>
-        </p:txBody>
-      </p:sp>
-      <p:sp>
-        <p:nvSpPr>
-          <p:cNvPr id="14" name="Shape 11"/>
-          <p:cNvSpPr/>
-          <p:nvPr/>
-        </p:nvSpPr>
-        <p:spPr>
-          <a:xfrm>
-            <a:off x="914400" y="23115461"/>
-            <a:ext cx="11094720" cy="3634105"/>
-          </a:xfrm>
-          <a:prstGeom prst="rect">
-            <a:avLst/>
-          </a:prstGeom>
-          <a:solidFill>
-            <a:srgbClr val="FFFFFF"/>
-          </a:solidFill>
-          <a:ln w="12700">
-            <a:solidFill>
-              <a:srgbClr val="D9D4D0"/>
-            </a:solidFill>
-            <a:prstDash val="solid"/>
-          </a:ln>
-        </p:spPr>
-      </p:sp>
-      <p:sp>
-        <p:nvSpPr>
-          <p:cNvPr id="15" name="Heading"/>
-          <p:cNvSpPr txBox="1"/>
-          <p:nvPr/>
-        </p:nvSpPr>
-        <p:spPr>
-          <a:xfrm>
-            <a:off x="1234440" y="23435501"/>
-            <a:ext cx="10454640" cy="527685"/>
-          </a:xfrm>
-          <a:prstGeom prst="rect">
-            <a:avLst/>
-          </a:prstGeom>
-          <a:noFill/>
-          <a:ln/>
-        </p:spPr>
-        <p:txBody>
-          <a:bodyPr wrap="square" lIns="0" tIns="0" rIns="0" bIns="0" rtlCol="0" anchor="t"/>
-          <a:lstStyle/>
-          <a:p>
-            <a:pPr indent="0" marL="0">
-              <a:buNone/>
-            </a:pPr>
-            <a:r>
-              <a:rPr lang="en-US" sz="3300" b="1" dirty="0">
-                <a:solidFill>
-                  <a:srgbClr val="9E1B32"/>
-                </a:solidFill>
-                <a:latin typeface="Calibri" pitchFamily="34" charset="0"/>
-                <a:ea typeface="Calibri" pitchFamily="34" charset="-122"/>
-                <a:cs typeface="Calibri" pitchFamily="34" charset="-120"/>
-              </a:rPr>
-              <a:t>Real-time and multi-clock use</a:t>
-            </a:r>
-            <a:endParaRPr lang="en-US" sz="3300" dirty="0"/>
-          </a:p>
-        </p:txBody>
-      </p:sp>
-      <p:sp>
-        <p:nvSpPr>
-          <p:cNvPr id="16" name="Bullets"/>
-          <p:cNvSpPr txBox="1"/>
-          <p:nvPr/>
-        </p:nvSpPr>
-        <p:spPr>
-          <a:xfrm>
-            <a:off x="1234440" y="24127778"/>
-            <a:ext cx="10454640" cy="2283460"/>
-          </a:xfrm>
-          <a:prstGeom prst="rect">
-            <a:avLst/>
-          </a:prstGeom>
-          <a:noFill/>
-          <a:ln/>
-        </p:spPr>
-        <p:txBody>
-          <a:bodyPr wrap="square" lIns="0" tIns="0" rIns="0" bIns="0" rtlCol="0" anchor="t"/>
-          <a:lstStyle/>
-          <a:p>
-            <a:pPr marL="279400" indent="-279400">
-              <a:spcAft>
-                <a:spcPts val="700"/>
-              </a:spcAft>
-              <a:buSzPct val="100000"/>
-              <a:buChar char="•"/>
-            </a:pPr>
-            <a:r>
-              <a:rPr lang="en-US" sz="2400" b="1" dirty="0">
-                <a:solidFill>
-                  <a:srgbClr val="0B0B0B"/>
-                </a:solidFill>
-                <a:latin typeface="Calibri" pitchFamily="34" charset="0"/>
-                <a:ea typeface="Calibri" pitchFamily="34" charset="-122"/>
-                <a:cs typeface="Calibri" pitchFamily="34" charset="-120"/>
-              </a:rPr>
-              <a:t>Streaming: </a:t>
-            </a:r>
-            <a:pPr indent="0" marL="0">
-              <a:buNone/>
-            </a:pPr>
-            <a:r>
-              <a:rPr lang="en-US" sz="2400" dirty="0">
-                <a:solidFill>
-                  <a:srgbClr val="0B0B0B"/>
-                </a:solidFill>
-                <a:latin typeface="Calibri" pitchFamily="34" charset="0"/>
-                <a:ea typeface="Calibri" pitchFamily="34" charset="-122"/>
-                <a:cs typeface="Calibri" pitchFamily="34" charset="-120"/>
-              </a:rPr>
-              <a:t>ADEV, MDEV, HDEV and MHDEV accumulate in O(1) per sample per τ (Dobrogowski–Kasznia 2007, extended to third differences) from a ring buffer of at most 4·m</a:t>
+              <a:t>ADEV, MDEV, HDEV and MHDEV accumulate in O(1) per sample per τ from a ring buffer of at most 4·m</a:t>
             </a:r>
             <a:pPr indent="0" marL="0">
               <a:buNone/>
@@ -1710,42 +1337,7 @@
                 <a:ea typeface="Calibri" pitchFamily="34" charset="-122"/>
                 <a:cs typeface="Calibri" pitchFamily="34" charset="-120"/>
               </a:rPr>
-              <a:t> + 1 samples; the running deviation equals the batch kernel on the samples seen so far.</a:t>
-            </a:r>
-            <a:endParaRPr lang="en-US" sz="2400" dirty="0"/>
-          </a:p>
-          <a:p>
-            <a:pPr marL="279400" indent="-279400">
-              <a:spcAft>
-                <a:spcPts val="700"/>
-              </a:spcAft>
-              <a:buSzPct val="100000"/>
-              <a:buChar char="•"/>
-            </a:pPr>
-            <a:r>
-              <a:rPr lang="en-US" sz="2400" b="1" dirty="0">
-                <a:solidFill>
-                  <a:srgbClr val="0B0B0B"/>
-                </a:solidFill>
-                <a:latin typeface="Calibri" pitchFamily="34" charset="0"/>
-                <a:ea typeface="Calibri" pitchFamily="34" charset="-122"/>
-                <a:cs typeface="Calibri" pitchFamily="34" charset="-120"/>
-              </a:rPr>
-              <a:t>Time-resolved and ensemble: </a:t>
-            </a:r>
-            <a:pPr indent="0" marL="0">
-              <a:buNone/>
-            </a:pPr>
-            <a:r>
-              <a:rPr lang="en-US" sz="2400" dirty="0">
-                <a:solidFill>
-                  <a:srgbClr val="0B0B0B"/>
-                </a:solidFill>
-                <a:latin typeface="Calibri" pitchFamily="34" charset="0"/>
-                <a:ea typeface="Calibri" pitchFamily="34" charset="-122"/>
-                <a:cs typeface="Calibri" pitchFamily="34" charset="-120"/>
-              </a:rPr>
-              <a:t>dynamic σ(t, τ) maps for non-stationary records; N-cornered hat for N ≥ 3 clocks with independent noises.</a:t>
+              <a:t> + 1 samples and equal the batch kernels on the samples seen so far (Dobrogowski–Kasznia 2007, extended to third differences); dynamic σ(t, τ) maps; N-cornered hat for N ≥ 3 clocks.</a:t>
             </a:r>
             <a:endParaRPr lang="en-US" sz="2400" dirty="0"/>
           </a:p>
@@ -1753,14 +1345,2875 @@
       </p:sp>
       <p:sp>
         <p:nvSpPr>
-          <p:cNvPr id="17" name="Shape 14"/>
+          <p:cNvPr id="9" name="Shape 7"/>
           <p:cNvSpPr/>
           <p:nvPr/>
         </p:nvSpPr>
         <p:spPr>
           <a:xfrm>
-            <a:off x="12740640" y="4206240"/>
-            <a:ext cx="11094720" cy="9096566"/>
+            <a:off x="1234440" y="11426190"/>
+            <a:ext cx="10454640" cy="1215390"/>
+          </a:xfrm>
+          <a:prstGeom prst="roundRect">
+            <a:avLst>
+              <a:gd name="adj" fmla="val 6019"/>
+            </a:avLst>
+          </a:prstGeom>
+          <a:solidFill>
+            <a:srgbClr val="F4F4F2"/>
+          </a:solidFill>
+          <a:ln w="9525">
+            <a:solidFill>
+              <a:srgbClr val="D9D4D0"/>
+            </a:solidFill>
+            <a:prstDash val="solid"/>
+          </a:ln>
+        </p:spPr>
+      </p:sp>
+      <p:sp>
+        <p:nvSpPr>
+          <p:cNvPr id="10" name="Code"/>
+          <p:cNvSpPr txBox="1"/>
+          <p:nvPr/>
+        </p:nvSpPr>
+        <p:spPr>
+          <a:xfrm>
+            <a:off x="1417320" y="11535918"/>
+            <a:ext cx="10088880" cy="995934"/>
+          </a:xfrm>
+          <a:prstGeom prst="rect">
+            <a:avLst/>
+          </a:prstGeom>
+          <a:noFill/>
+          <a:ln/>
+        </p:spPr>
+        <p:txBody>
+          <a:bodyPr wrap="square" lIns="0" tIns="0" rIns="0" bIns="0" rtlCol="0" anchor="ctr"/>
+          <a:lstStyle/>
+          <a:p>
+            <a:pPr indent="0" marL="0">
+              <a:buNone/>
+            </a:pPr>
+            <a:r>
+              <a:rPr lang="en-US" sz="1900" dirty="0">
+                <a:solidFill>
+                  <a:srgbClr val="0B0B0B"/>
+                </a:solidFill>
+                <a:latin typeface="Courier New" pitchFamily="34" charset="0"/>
+                <a:ea typeface="Courier New" pitchFamily="34" charset="-122"/>
+                <a:cs typeface="Courier New" pitchFamily="34" charset="-120"/>
+              </a:rPr>
+              <a:t>p = read_phase("clock.DAT"; tau0 = 1.0)</a:t>
+            </a:r>
+            <a:endParaRPr lang="en-US" sz="1900" dirty="0"/>
+          </a:p>
+          <a:p>
+            <a:pPr indent="0" marL="0">
+              <a:buNone/>
+            </a:pPr>
+            <a:r>
+              <a:rPr lang="en-US" sz="1900" dirty="0">
+                <a:solidFill>
+                  <a:srgbClr val="0B0B0B"/>
+                </a:solidFill>
+                <a:latin typeface="Courier New" pitchFamily="34" charset="0"/>
+                <a:ea typeface="Courier New" pitchFamily="34" charset="-122"/>
+                <a:cs typeface="Courier New" pitchFamily="34" charset="-120"/>
+              </a:rPr>
+              <a:t>r = adev(p)            # τ grid, σ_y, noise type, EDF, CI</a:t>
+            </a:r>
+            <a:endParaRPr lang="en-US" sz="1900" dirty="0"/>
+          </a:p>
+          <a:p>
+            <a:pPr indent="0" marL="0">
+              <a:buNone/>
+            </a:pPr>
+            <a:r>
+              <a:rPr lang="en-US" sz="1900" dirty="0">
+                <a:solidFill>
+                  <a:srgbClr val="0B0B0B"/>
+                </a:solidFill>
+                <a:latin typeface="Courier New" pitchFamily="34" charset="0"/>
+                <a:ea typeface="Courier New" pitchFamily="34" charset="-122"/>
+                <a:cs typeface="Courier New" pitchFamily="34" charset="-120"/>
+              </a:rPr>
+              <a:t>suite = stability(p; devs = (:adev, :mdev, :hdev, :mhtotdev))</a:t>
+            </a:r>
+            <a:endParaRPr lang="en-US" sz="1900" dirty="0"/>
+          </a:p>
+        </p:txBody>
+      </p:sp>
+      <p:graphicFrame>
+        <p:nvGraphicFramePr>
+          <p:cNvPr id="2" name="Feature comparison"/>
+          <p:cNvGraphicFramePr>
+            <a:graphicFrameLocks noGrp="1"/>
+          </p:cNvGraphicFramePr>
+          <p:nvPr>
+            <p:extLst>
+              <p:ext uri="{D42A27DB-BD31-4B8C-83A1-F6EECF244321}">
+                <p14:modId xmlns:p14="http://schemas.microsoft.com/office/powerpoint/2010/main" val="1579011935"/>
+              </p:ext>
+            </p:extLst>
+          </p:nvPr>
+        </p:nvGraphicFramePr>
+        <p:xfrm>
+          <a:off x="1234440" y="12778740"/>
+          <a:ext cx="10454640" cy="914400"/>
+        </p:xfrm>
+        <a:graphic>
+          <a:graphicData uri="http://schemas.openxmlformats.org/drawingml/2006/table">
+            <a:tbl>
+              <a:tblPr/>
+              <a:tblGrid>
+                <a:gridCol w="3301465"/>
+                <a:gridCol w="2109269"/>
+                <a:gridCol w="2109269"/>
+                <a:gridCol w="2934636"/>
+              </a:tblGrid>
+              <a:tr h="384048">
+                <a:tc>
+                  <a:txBody>
+                    <a:bodyPr/>
+                    <a:lstStyle/>
+                    <a:p>
+                      <a:pPr algn="ctr" indent="0" marL="0">
+                        <a:buNone/>
+                      </a:pPr>
+                      <a:endParaRPr lang="en-US" sz="1800" dirty="0">
+                        <a:latin typeface="Calibri" charset="0"/>
+                        <a:ea typeface="Calibri" charset="0"/>
+                        <a:cs typeface="Calibri" charset="0"/>
+                      </a:endParaRPr>
+                    </a:p>
+                  </a:txBody>
+                  <a:tcPr marL="45720" marR="45720" marT="45720" marB="45720" anchor="ctr">
+                    <a:lnL w="9525" cap="flat" cmpd="sng" algn="ctr">
+                      <a:solidFill>
+                        <a:srgbClr val="D9D4D0"/>
+                      </a:solidFill>
+                      <a:prstDash val="solid"/>
+                      <a:round/>
+                      <a:headEnd type="none" w="med" len="med"/>
+                      <a:tailEnd type="none" w="med" len="med"/>
+                    </a:lnL>
+                    <a:lnR w="9525" cap="flat" cmpd="sng" algn="ctr">
+                      <a:solidFill>
+                        <a:srgbClr val="D9D4D0"/>
+                      </a:solidFill>
+                      <a:prstDash val="solid"/>
+                      <a:round/>
+                      <a:headEnd type="none" w="med" len="med"/>
+                      <a:tailEnd type="none" w="med" len="med"/>
+                    </a:lnR>
+                    <a:lnT w="9525" cap="flat" cmpd="sng" algn="ctr">
+                      <a:solidFill>
+                        <a:srgbClr val="D9D4D0"/>
+                      </a:solidFill>
+                      <a:prstDash val="solid"/>
+                      <a:round/>
+                      <a:headEnd type="none" w="med" len="med"/>
+                      <a:tailEnd type="none" w="med" len="med"/>
+                    </a:lnT>
+                    <a:lnB w="9525" cap="flat" cmpd="sng" algn="ctr">
+                      <a:solidFill>
+                        <a:srgbClr val="D9D4D0"/>
+                      </a:solidFill>
+                      <a:prstDash val="solid"/>
+                      <a:round/>
+                      <a:headEnd type="none" w="med" len="med"/>
+                      <a:tailEnd type="none" w="med" len="med"/>
+                    </a:lnB>
+                    <a:solidFill>
+                      <a:srgbClr val="9E1B32"/>
+                    </a:solidFill>
+                  </a:tcPr>
+                </a:tc>
+                <a:tc>
+                  <a:txBody>
+                    <a:bodyPr/>
+                    <a:lstStyle/>
+                    <a:p>
+                      <a:pPr algn="ctr" indent="0" marL="0">
+                        <a:buNone/>
+                      </a:pPr>
+                      <a:r>
+                        <a:rPr lang="en-US" sz="1800" b="1" dirty="0">
+                          <a:solidFill>
+                            <a:srgbClr val="FFFFFF"/>
+                          </a:solidFill>
+                          <a:latin typeface="Calibri" pitchFamily="34" charset="0"/>
+                          <a:ea typeface="Calibri" pitchFamily="34" charset="-122"/>
+                          <a:cs typeface="Calibri" pitchFamily="34" charset="-120"/>
+                        </a:rPr>
+                        <a:t>Stable32</a:t>
+                      </a:r>
+                      <a:endParaRPr lang="en-US" sz="1800" dirty="0">
+                        <a:latin typeface="Calibri" charset="0"/>
+                        <a:ea typeface="Calibri" charset="0"/>
+                        <a:cs typeface="Calibri" charset="0"/>
+                      </a:endParaRPr>
+                    </a:p>
+                  </a:txBody>
+                  <a:tcPr marL="45720" marR="45720" marT="45720" marB="45720" anchor="ctr">
+                    <a:lnL w="9525" cap="flat" cmpd="sng" algn="ctr">
+                      <a:solidFill>
+                        <a:srgbClr val="D9D4D0"/>
+                      </a:solidFill>
+                      <a:prstDash val="solid"/>
+                      <a:round/>
+                      <a:headEnd type="none" w="med" len="med"/>
+                      <a:tailEnd type="none" w="med" len="med"/>
+                    </a:lnL>
+                    <a:lnR w="9525" cap="flat" cmpd="sng" algn="ctr">
+                      <a:solidFill>
+                        <a:srgbClr val="D9D4D0"/>
+                      </a:solidFill>
+                      <a:prstDash val="solid"/>
+                      <a:round/>
+                      <a:headEnd type="none" w="med" len="med"/>
+                      <a:tailEnd type="none" w="med" len="med"/>
+                    </a:lnR>
+                    <a:lnT w="9525" cap="flat" cmpd="sng" algn="ctr">
+                      <a:solidFill>
+                        <a:srgbClr val="D9D4D0"/>
+                      </a:solidFill>
+                      <a:prstDash val="solid"/>
+                      <a:round/>
+                      <a:headEnd type="none" w="med" len="med"/>
+                      <a:tailEnd type="none" w="med" len="med"/>
+                    </a:lnT>
+                    <a:lnB w="9525" cap="flat" cmpd="sng" algn="ctr">
+                      <a:solidFill>
+                        <a:srgbClr val="D9D4D0"/>
+                      </a:solidFill>
+                      <a:prstDash val="solid"/>
+                      <a:round/>
+                      <a:headEnd type="none" w="med" len="med"/>
+                      <a:tailEnd type="none" w="med" len="med"/>
+                    </a:lnB>
+                    <a:solidFill>
+                      <a:srgbClr val="9E1B32"/>
+                    </a:solidFill>
+                  </a:tcPr>
+                </a:tc>
+                <a:tc>
+                  <a:txBody>
+                    <a:bodyPr/>
+                    <a:lstStyle/>
+                    <a:p>
+                      <a:pPr algn="ctr" indent="0" marL="0">
+                        <a:buNone/>
+                      </a:pPr>
+                      <a:r>
+                        <a:rPr lang="en-US" sz="1800" b="1" dirty="0">
+                          <a:solidFill>
+                            <a:srgbClr val="FFFFFF"/>
+                          </a:solidFill>
+                          <a:latin typeface="Calibri" pitchFamily="34" charset="0"/>
+                          <a:ea typeface="Calibri" pitchFamily="34" charset="-122"/>
+                          <a:cs typeface="Calibri" pitchFamily="34" charset="-120"/>
+                        </a:rPr>
+                        <a:t>allantools</a:t>
+                      </a:r>
+                      <a:endParaRPr lang="en-US" sz="1800" dirty="0">
+                        <a:latin typeface="Calibri" charset="0"/>
+                        <a:ea typeface="Calibri" charset="0"/>
+                        <a:cs typeface="Calibri" charset="0"/>
+                      </a:endParaRPr>
+                    </a:p>
+                  </a:txBody>
+                  <a:tcPr marL="45720" marR="45720" marT="45720" marB="45720" anchor="ctr">
+                    <a:lnL w="9525" cap="flat" cmpd="sng" algn="ctr">
+                      <a:solidFill>
+                        <a:srgbClr val="D9D4D0"/>
+                      </a:solidFill>
+                      <a:prstDash val="solid"/>
+                      <a:round/>
+                      <a:headEnd type="none" w="med" len="med"/>
+                      <a:tailEnd type="none" w="med" len="med"/>
+                    </a:lnL>
+                    <a:lnR w="9525" cap="flat" cmpd="sng" algn="ctr">
+                      <a:solidFill>
+                        <a:srgbClr val="D9D4D0"/>
+                      </a:solidFill>
+                      <a:prstDash val="solid"/>
+                      <a:round/>
+                      <a:headEnd type="none" w="med" len="med"/>
+                      <a:tailEnd type="none" w="med" len="med"/>
+                    </a:lnR>
+                    <a:lnT w="9525" cap="flat" cmpd="sng" algn="ctr">
+                      <a:solidFill>
+                        <a:srgbClr val="D9D4D0"/>
+                      </a:solidFill>
+                      <a:prstDash val="solid"/>
+                      <a:round/>
+                      <a:headEnd type="none" w="med" len="med"/>
+                      <a:tailEnd type="none" w="med" len="med"/>
+                    </a:lnT>
+                    <a:lnB w="9525" cap="flat" cmpd="sng" algn="ctr">
+                      <a:solidFill>
+                        <a:srgbClr val="D9D4D0"/>
+                      </a:solidFill>
+                      <a:prstDash val="solid"/>
+                      <a:round/>
+                      <a:headEnd type="none" w="med" len="med"/>
+                      <a:tailEnd type="none" w="med" len="med"/>
+                    </a:lnB>
+                    <a:solidFill>
+                      <a:srgbClr val="9E1B32"/>
+                    </a:solidFill>
+                  </a:tcPr>
+                </a:tc>
+                <a:tc>
+                  <a:txBody>
+                    <a:bodyPr/>
+                    <a:lstStyle/>
+                    <a:p>
+                      <a:pPr algn="ctr" indent="0" marL="0">
+                        <a:buNone/>
+                      </a:pPr>
+                      <a:r>
+                        <a:rPr lang="en-US" sz="1800" b="1" dirty="0">
+                          <a:solidFill>
+                            <a:srgbClr val="FFFFFF"/>
+                          </a:solidFill>
+                          <a:latin typeface="Calibri" pitchFamily="34" charset="0"/>
+                          <a:ea typeface="Calibri" pitchFamily="34" charset="-122"/>
+                          <a:cs typeface="Calibri" pitchFamily="34" charset="-120"/>
+                        </a:rPr>
+                        <a:t>SigmaTau</a:t>
+                      </a:r>
+                      <a:endParaRPr lang="en-US" sz="1800" dirty="0">
+                        <a:latin typeface="Calibri" charset="0"/>
+                        <a:ea typeface="Calibri" charset="0"/>
+                        <a:cs typeface="Calibri" charset="0"/>
+                      </a:endParaRPr>
+                    </a:p>
+                  </a:txBody>
+                  <a:tcPr marL="45720" marR="45720" marT="45720" marB="45720" anchor="ctr">
+                    <a:lnL w="9525" cap="flat" cmpd="sng" algn="ctr">
+                      <a:solidFill>
+                        <a:srgbClr val="D9D4D0"/>
+                      </a:solidFill>
+                      <a:prstDash val="solid"/>
+                      <a:round/>
+                      <a:headEnd type="none" w="med" len="med"/>
+                      <a:tailEnd type="none" w="med" len="med"/>
+                    </a:lnL>
+                    <a:lnR w="9525" cap="flat" cmpd="sng" algn="ctr">
+                      <a:solidFill>
+                        <a:srgbClr val="D9D4D0"/>
+                      </a:solidFill>
+                      <a:prstDash val="solid"/>
+                      <a:round/>
+                      <a:headEnd type="none" w="med" len="med"/>
+                      <a:tailEnd type="none" w="med" len="med"/>
+                    </a:lnR>
+                    <a:lnT w="9525" cap="flat" cmpd="sng" algn="ctr">
+                      <a:solidFill>
+                        <a:srgbClr val="D9D4D0"/>
+                      </a:solidFill>
+                      <a:prstDash val="solid"/>
+                      <a:round/>
+                      <a:headEnd type="none" w="med" len="med"/>
+                      <a:tailEnd type="none" w="med" len="med"/>
+                    </a:lnT>
+                    <a:lnB w="9525" cap="flat" cmpd="sng" algn="ctr">
+                      <a:solidFill>
+                        <a:srgbClr val="D9D4D0"/>
+                      </a:solidFill>
+                      <a:prstDash val="solid"/>
+                      <a:round/>
+                      <a:headEnd type="none" w="med" len="med"/>
+                      <a:tailEnd type="none" w="med" len="med"/>
+                    </a:lnB>
+                    <a:solidFill>
+                      <a:srgbClr val="9E1B32"/>
+                    </a:solidFill>
+                  </a:tcPr>
+                </a:tc>
+              </a:tr>
+              <a:tr h="658368">
+                <a:tc>
+                  <a:txBody>
+                    <a:bodyPr/>
+                    <a:lstStyle/>
+                    <a:p>
+                      <a:pPr algn="l" indent="0" marL="0">
+                        <a:buNone/>
+                      </a:pPr>
+                      <a:r>
+                        <a:rPr lang="en-US" sz="1800" dirty="0">
+                          <a:solidFill>
+                            <a:srgbClr val="0B0B0B"/>
+                          </a:solidFill>
+                          <a:latin typeface="Calibri" pitchFamily="34" charset="0"/>
+                          <a:ea typeface="Calibri" pitchFamily="34" charset="-122"/>
+                          <a:cs typeface="Calibri" pitchFamily="34" charset="-120"/>
+                        </a:rPr>
+                        <a:t>Platform</a:t>
+                      </a:r>
+                      <a:endParaRPr lang="en-US" sz="1800" dirty="0">
+                        <a:latin typeface="Calibri" charset="0"/>
+                        <a:ea typeface="Calibri" charset="0"/>
+                        <a:cs typeface="Calibri" charset="0"/>
+                      </a:endParaRPr>
+                    </a:p>
+                  </a:txBody>
+                  <a:tcPr marL="45720" marR="45720" marT="45720" marB="45720" anchor="ctr">
+                    <a:lnL w="9525" cap="flat" cmpd="sng" algn="ctr">
+                      <a:solidFill>
+                        <a:srgbClr val="D9D4D0"/>
+                      </a:solidFill>
+                      <a:prstDash val="solid"/>
+                      <a:round/>
+                      <a:headEnd type="none" w="med" len="med"/>
+                      <a:tailEnd type="none" w="med" len="med"/>
+                    </a:lnL>
+                    <a:lnR w="9525" cap="flat" cmpd="sng" algn="ctr">
+                      <a:solidFill>
+                        <a:srgbClr val="D9D4D0"/>
+                      </a:solidFill>
+                      <a:prstDash val="solid"/>
+                      <a:round/>
+                      <a:headEnd type="none" w="med" len="med"/>
+                      <a:tailEnd type="none" w="med" len="med"/>
+                    </a:lnR>
+                    <a:lnT w="9525" cap="flat" cmpd="sng" algn="ctr">
+                      <a:solidFill>
+                        <a:srgbClr val="D9D4D0"/>
+                      </a:solidFill>
+                      <a:prstDash val="solid"/>
+                      <a:round/>
+                      <a:headEnd type="none" w="med" len="med"/>
+                      <a:tailEnd type="none" w="med" len="med"/>
+                    </a:lnT>
+                    <a:lnB w="9525" cap="flat" cmpd="sng" algn="ctr">
+                      <a:solidFill>
+                        <a:srgbClr val="D9D4D0"/>
+                      </a:solidFill>
+                      <a:prstDash val="solid"/>
+                      <a:round/>
+                      <a:headEnd type="none" w="med" len="med"/>
+                      <a:tailEnd type="none" w="med" len="med"/>
+                    </a:lnB>
+                    <a:solidFill>
+                      <a:srgbClr val="FFFFFF"/>
+                    </a:solidFill>
+                  </a:tcPr>
+                </a:tc>
+                <a:tc>
+                  <a:txBody>
+                    <a:bodyPr/>
+                    <a:lstStyle/>
+                    <a:p>
+                      <a:pPr algn="ctr" indent="0" marL="0">
+                        <a:buNone/>
+                      </a:pPr>
+                      <a:r>
+                        <a:rPr lang="en-US" sz="1800" dirty="0">
+                          <a:solidFill>
+                            <a:srgbClr val="0B0B0B"/>
+                          </a:solidFill>
+                          <a:latin typeface="Calibri" pitchFamily="34" charset="0"/>
+                          <a:ea typeface="Calibri" pitchFamily="34" charset="-122"/>
+                          <a:cs typeface="Calibri" pitchFamily="34" charset="-120"/>
+                        </a:rPr>
+                        <a:t>Windows GUI, closed</a:t>
+                      </a:r>
+                      <a:endParaRPr lang="en-US" sz="1800" dirty="0">
+                        <a:latin typeface="Calibri" charset="0"/>
+                        <a:ea typeface="Calibri" charset="0"/>
+                        <a:cs typeface="Calibri" charset="0"/>
+                      </a:endParaRPr>
+                    </a:p>
+                  </a:txBody>
+                  <a:tcPr marL="45720" marR="45720" marT="45720" marB="45720" anchor="ctr">
+                    <a:lnL w="9525" cap="flat" cmpd="sng" algn="ctr">
+                      <a:solidFill>
+                        <a:srgbClr val="D9D4D0"/>
+                      </a:solidFill>
+                      <a:prstDash val="solid"/>
+                      <a:round/>
+                      <a:headEnd type="none" w="med" len="med"/>
+                      <a:tailEnd type="none" w="med" len="med"/>
+                    </a:lnL>
+                    <a:lnR w="9525" cap="flat" cmpd="sng" algn="ctr">
+                      <a:solidFill>
+                        <a:srgbClr val="D9D4D0"/>
+                      </a:solidFill>
+                      <a:prstDash val="solid"/>
+                      <a:round/>
+                      <a:headEnd type="none" w="med" len="med"/>
+                      <a:tailEnd type="none" w="med" len="med"/>
+                    </a:lnR>
+                    <a:lnT w="9525" cap="flat" cmpd="sng" algn="ctr">
+                      <a:solidFill>
+                        <a:srgbClr val="D9D4D0"/>
+                      </a:solidFill>
+                      <a:prstDash val="solid"/>
+                      <a:round/>
+                      <a:headEnd type="none" w="med" len="med"/>
+                      <a:tailEnd type="none" w="med" len="med"/>
+                    </a:lnT>
+                    <a:lnB w="9525" cap="flat" cmpd="sng" algn="ctr">
+                      <a:solidFill>
+                        <a:srgbClr val="D9D4D0"/>
+                      </a:solidFill>
+                      <a:prstDash val="solid"/>
+                      <a:round/>
+                      <a:headEnd type="none" w="med" len="med"/>
+                      <a:tailEnd type="none" w="med" len="med"/>
+                    </a:lnB>
+                    <a:solidFill>
+                      <a:srgbClr val="FFFFFF"/>
+                    </a:solidFill>
+                  </a:tcPr>
+                </a:tc>
+                <a:tc>
+                  <a:txBody>
+                    <a:bodyPr/>
+                    <a:lstStyle/>
+                    <a:p>
+                      <a:pPr algn="ctr" indent="0" marL="0">
+                        <a:buNone/>
+                      </a:pPr>
+                      <a:r>
+                        <a:rPr lang="en-US" sz="1800" dirty="0">
+                          <a:solidFill>
+                            <a:srgbClr val="0B0B0B"/>
+                          </a:solidFill>
+                          <a:latin typeface="Calibri" pitchFamily="34" charset="0"/>
+                          <a:ea typeface="Calibri" pitchFamily="34" charset="-122"/>
+                          <a:cs typeface="Calibri" pitchFamily="34" charset="-120"/>
+                        </a:rPr>
+                        <a:t>Python library</a:t>
+                      </a:r>
+                      <a:endParaRPr lang="en-US" sz="1800" dirty="0">
+                        <a:latin typeface="Calibri" charset="0"/>
+                        <a:ea typeface="Calibri" charset="0"/>
+                        <a:cs typeface="Calibri" charset="0"/>
+                      </a:endParaRPr>
+                    </a:p>
+                  </a:txBody>
+                  <a:tcPr marL="45720" marR="45720" marT="45720" marB="45720" anchor="ctr">
+                    <a:lnL w="9525" cap="flat" cmpd="sng" algn="ctr">
+                      <a:solidFill>
+                        <a:srgbClr val="D9D4D0"/>
+                      </a:solidFill>
+                      <a:prstDash val="solid"/>
+                      <a:round/>
+                      <a:headEnd type="none" w="med" len="med"/>
+                      <a:tailEnd type="none" w="med" len="med"/>
+                    </a:lnL>
+                    <a:lnR w="9525" cap="flat" cmpd="sng" algn="ctr">
+                      <a:solidFill>
+                        <a:srgbClr val="D9D4D0"/>
+                      </a:solidFill>
+                      <a:prstDash val="solid"/>
+                      <a:round/>
+                      <a:headEnd type="none" w="med" len="med"/>
+                      <a:tailEnd type="none" w="med" len="med"/>
+                    </a:lnR>
+                    <a:lnT w="9525" cap="flat" cmpd="sng" algn="ctr">
+                      <a:solidFill>
+                        <a:srgbClr val="D9D4D0"/>
+                      </a:solidFill>
+                      <a:prstDash val="solid"/>
+                      <a:round/>
+                      <a:headEnd type="none" w="med" len="med"/>
+                      <a:tailEnd type="none" w="med" len="med"/>
+                    </a:lnT>
+                    <a:lnB w="9525" cap="flat" cmpd="sng" algn="ctr">
+                      <a:solidFill>
+                        <a:srgbClr val="D9D4D0"/>
+                      </a:solidFill>
+                      <a:prstDash val="solid"/>
+                      <a:round/>
+                      <a:headEnd type="none" w="med" len="med"/>
+                      <a:tailEnd type="none" w="med" len="med"/>
+                    </a:lnB>
+                    <a:solidFill>
+                      <a:srgbClr val="FFFFFF"/>
+                    </a:solidFill>
+                  </a:tcPr>
+                </a:tc>
+                <a:tc>
+                  <a:txBody>
+                    <a:bodyPr/>
+                    <a:lstStyle/>
+                    <a:p>
+                      <a:pPr algn="ctr" indent="0" marL="0">
+                        <a:buNone/>
+                      </a:pPr>
+                      <a:r>
+                        <a:rPr lang="en-US" sz="1800" dirty="0">
+                          <a:solidFill>
+                            <a:srgbClr val="0B0B0B"/>
+                          </a:solidFill>
+                          <a:latin typeface="Calibri" pitchFamily="34" charset="0"/>
+                          <a:ea typeface="Calibri" pitchFamily="34" charset="-122"/>
+                          <a:cs typeface="Calibri" pitchFamily="34" charset="-120"/>
+                        </a:rPr>
+                        <a:t>Julia library + desktop app</a:t>
+                      </a:r>
+                      <a:endParaRPr lang="en-US" sz="1800" dirty="0">
+                        <a:latin typeface="Calibri" charset="0"/>
+                        <a:ea typeface="Calibri" charset="0"/>
+                        <a:cs typeface="Calibri" charset="0"/>
+                      </a:endParaRPr>
+                    </a:p>
+                  </a:txBody>
+                  <a:tcPr marL="45720" marR="45720" marT="45720" marB="45720" anchor="ctr">
+                    <a:lnL w="9525" cap="flat" cmpd="sng" algn="ctr">
+                      <a:solidFill>
+                        <a:srgbClr val="D9D4D0"/>
+                      </a:solidFill>
+                      <a:prstDash val="solid"/>
+                      <a:round/>
+                      <a:headEnd type="none" w="med" len="med"/>
+                      <a:tailEnd type="none" w="med" len="med"/>
+                    </a:lnL>
+                    <a:lnR w="9525" cap="flat" cmpd="sng" algn="ctr">
+                      <a:solidFill>
+                        <a:srgbClr val="D9D4D0"/>
+                      </a:solidFill>
+                      <a:prstDash val="solid"/>
+                      <a:round/>
+                      <a:headEnd type="none" w="med" len="med"/>
+                      <a:tailEnd type="none" w="med" len="med"/>
+                    </a:lnR>
+                    <a:lnT w="9525" cap="flat" cmpd="sng" algn="ctr">
+                      <a:solidFill>
+                        <a:srgbClr val="D9D4D0"/>
+                      </a:solidFill>
+                      <a:prstDash val="solid"/>
+                      <a:round/>
+                      <a:headEnd type="none" w="med" len="med"/>
+                      <a:tailEnd type="none" w="med" len="med"/>
+                    </a:lnT>
+                    <a:lnB w="9525" cap="flat" cmpd="sng" algn="ctr">
+                      <a:solidFill>
+                        <a:srgbClr val="D9D4D0"/>
+                      </a:solidFill>
+                      <a:prstDash val="solid"/>
+                      <a:round/>
+                      <a:headEnd type="none" w="med" len="med"/>
+                      <a:tailEnd type="none" w="med" len="med"/>
+                    </a:lnB>
+                    <a:solidFill>
+                      <a:srgbClr val="FFFFFF"/>
+                    </a:solidFill>
+                  </a:tcPr>
+                </a:tc>
+              </a:tr>
+              <a:tr h="658368">
+                <a:tc>
+                  <a:txBody>
+                    <a:bodyPr/>
+                    <a:lstStyle/>
+                    <a:p>
+                      <a:pPr algn="l" indent="0" marL="0">
+                        <a:buNone/>
+                      </a:pPr>
+                      <a:r>
+                        <a:rPr lang="en-US" sz="1800" dirty="0">
+                          <a:solidFill>
+                            <a:srgbClr val="0B0B0B"/>
+                          </a:solidFill>
+                          <a:latin typeface="Calibri" pitchFamily="34" charset="0"/>
+                          <a:ea typeface="Calibri" pitchFamily="34" charset="-122"/>
+                          <a:cs typeface="Calibri" pitchFamily="34" charset="-120"/>
+                        </a:rPr>
+                        <a:t>χ² intervals with per-τ noise ID</a:t>
+                      </a:r>
+                      <a:endParaRPr lang="en-US" sz="1800" dirty="0">
+                        <a:latin typeface="Calibri" charset="0"/>
+                        <a:ea typeface="Calibri" charset="0"/>
+                        <a:cs typeface="Calibri" charset="0"/>
+                      </a:endParaRPr>
+                    </a:p>
+                  </a:txBody>
+                  <a:tcPr marL="45720" marR="45720" marT="45720" marB="45720" anchor="ctr">
+                    <a:lnL w="9525" cap="flat" cmpd="sng" algn="ctr">
+                      <a:solidFill>
+                        <a:srgbClr val="D9D4D0"/>
+                      </a:solidFill>
+                      <a:prstDash val="solid"/>
+                      <a:round/>
+                      <a:headEnd type="none" w="med" len="med"/>
+                      <a:tailEnd type="none" w="med" len="med"/>
+                    </a:lnL>
+                    <a:lnR w="9525" cap="flat" cmpd="sng" algn="ctr">
+                      <a:solidFill>
+                        <a:srgbClr val="D9D4D0"/>
+                      </a:solidFill>
+                      <a:prstDash val="solid"/>
+                      <a:round/>
+                      <a:headEnd type="none" w="med" len="med"/>
+                      <a:tailEnd type="none" w="med" len="med"/>
+                    </a:lnR>
+                    <a:lnT w="9525" cap="flat" cmpd="sng" algn="ctr">
+                      <a:solidFill>
+                        <a:srgbClr val="D9D4D0"/>
+                      </a:solidFill>
+                      <a:prstDash val="solid"/>
+                      <a:round/>
+                      <a:headEnd type="none" w="med" len="med"/>
+                      <a:tailEnd type="none" w="med" len="med"/>
+                    </a:lnT>
+                    <a:lnB w="9525" cap="flat" cmpd="sng" algn="ctr">
+                      <a:solidFill>
+                        <a:srgbClr val="D9D4D0"/>
+                      </a:solidFill>
+                      <a:prstDash val="solid"/>
+                      <a:round/>
+                      <a:headEnd type="none" w="med" len="med"/>
+                      <a:tailEnd type="none" w="med" len="med"/>
+                    </a:lnB>
+                    <a:solidFill>
+                      <a:srgbClr val="F7F2F3"/>
+                    </a:solidFill>
+                  </a:tcPr>
+                </a:tc>
+                <a:tc>
+                  <a:txBody>
+                    <a:bodyPr/>
+                    <a:lstStyle/>
+                    <a:p>
+                      <a:pPr algn="ctr" indent="0" marL="0">
+                        <a:buNone/>
+                      </a:pPr>
+                      <a:r>
+                        <a:rPr lang="en-US" sz="1800" dirty="0">
+                          <a:solidFill>
+                            <a:srgbClr val="0B0B0B"/>
+                          </a:solidFill>
+                          <a:latin typeface="Calibri" pitchFamily="34" charset="0"/>
+                          <a:ea typeface="Calibri" pitchFamily="34" charset="-122"/>
+                          <a:cs typeface="Calibri" pitchFamily="34" charset="-120"/>
+                        </a:rPr>
+                        <a:t>yes</a:t>
+                      </a:r>
+                      <a:endParaRPr lang="en-US" sz="1800" dirty="0">
+                        <a:latin typeface="Calibri" charset="0"/>
+                        <a:ea typeface="Calibri" charset="0"/>
+                        <a:cs typeface="Calibri" charset="0"/>
+                      </a:endParaRPr>
+                    </a:p>
+                  </a:txBody>
+                  <a:tcPr marL="45720" marR="45720" marT="45720" marB="45720" anchor="ctr">
+                    <a:lnL w="9525" cap="flat" cmpd="sng" algn="ctr">
+                      <a:solidFill>
+                        <a:srgbClr val="D9D4D0"/>
+                      </a:solidFill>
+                      <a:prstDash val="solid"/>
+                      <a:round/>
+                      <a:headEnd type="none" w="med" len="med"/>
+                      <a:tailEnd type="none" w="med" len="med"/>
+                    </a:lnL>
+                    <a:lnR w="9525" cap="flat" cmpd="sng" algn="ctr">
+                      <a:solidFill>
+                        <a:srgbClr val="D9D4D0"/>
+                      </a:solidFill>
+                      <a:prstDash val="solid"/>
+                      <a:round/>
+                      <a:headEnd type="none" w="med" len="med"/>
+                      <a:tailEnd type="none" w="med" len="med"/>
+                    </a:lnR>
+                    <a:lnT w="9525" cap="flat" cmpd="sng" algn="ctr">
+                      <a:solidFill>
+                        <a:srgbClr val="D9D4D0"/>
+                      </a:solidFill>
+                      <a:prstDash val="solid"/>
+                      <a:round/>
+                      <a:headEnd type="none" w="med" len="med"/>
+                      <a:tailEnd type="none" w="med" len="med"/>
+                    </a:lnT>
+                    <a:lnB w="9525" cap="flat" cmpd="sng" algn="ctr">
+                      <a:solidFill>
+                        <a:srgbClr val="D9D4D0"/>
+                      </a:solidFill>
+                      <a:prstDash val="solid"/>
+                      <a:round/>
+                      <a:headEnd type="none" w="med" len="med"/>
+                      <a:tailEnd type="none" w="med" len="med"/>
+                    </a:lnB>
+                    <a:solidFill>
+                      <a:srgbClr val="F7F2F3"/>
+                    </a:solidFill>
+                  </a:tcPr>
+                </a:tc>
+                <a:tc>
+                  <a:txBody>
+                    <a:bodyPr/>
+                    <a:lstStyle/>
+                    <a:p>
+                      <a:pPr algn="ctr" indent="0" marL="0">
+                        <a:buNone/>
+                      </a:pPr>
+                      <a:r>
+                        <a:rPr lang="en-US" sz="1800" dirty="0">
+                          <a:solidFill>
+                            <a:srgbClr val="0B0B0B"/>
+                          </a:solidFill>
+                          <a:latin typeface="Calibri" pitchFamily="34" charset="0"/>
+                          <a:ea typeface="Calibri" pitchFamily="34" charset="-122"/>
+                          <a:cs typeface="Calibri" pitchFamily="34" charset="-120"/>
+                        </a:rPr>
+                        <a:t>manual</a:t>
+                      </a:r>
+                      <a:endParaRPr lang="en-US" sz="1800" dirty="0">
+                        <a:latin typeface="Calibri" charset="0"/>
+                        <a:ea typeface="Calibri" charset="0"/>
+                        <a:cs typeface="Calibri" charset="0"/>
+                      </a:endParaRPr>
+                    </a:p>
+                  </a:txBody>
+                  <a:tcPr marL="45720" marR="45720" marT="45720" marB="45720" anchor="ctr">
+                    <a:lnL w="9525" cap="flat" cmpd="sng" algn="ctr">
+                      <a:solidFill>
+                        <a:srgbClr val="D9D4D0"/>
+                      </a:solidFill>
+                      <a:prstDash val="solid"/>
+                      <a:round/>
+                      <a:headEnd type="none" w="med" len="med"/>
+                      <a:tailEnd type="none" w="med" len="med"/>
+                    </a:lnL>
+                    <a:lnR w="9525" cap="flat" cmpd="sng" algn="ctr">
+                      <a:solidFill>
+                        <a:srgbClr val="D9D4D0"/>
+                      </a:solidFill>
+                      <a:prstDash val="solid"/>
+                      <a:round/>
+                      <a:headEnd type="none" w="med" len="med"/>
+                      <a:tailEnd type="none" w="med" len="med"/>
+                    </a:lnR>
+                    <a:lnT w="9525" cap="flat" cmpd="sng" algn="ctr">
+                      <a:solidFill>
+                        <a:srgbClr val="D9D4D0"/>
+                      </a:solidFill>
+                      <a:prstDash val="solid"/>
+                      <a:round/>
+                      <a:headEnd type="none" w="med" len="med"/>
+                      <a:tailEnd type="none" w="med" len="med"/>
+                    </a:lnT>
+                    <a:lnB w="9525" cap="flat" cmpd="sng" algn="ctr">
+                      <a:solidFill>
+                        <a:srgbClr val="D9D4D0"/>
+                      </a:solidFill>
+                      <a:prstDash val="solid"/>
+                      <a:round/>
+                      <a:headEnd type="none" w="med" len="med"/>
+                      <a:tailEnd type="none" w="med" len="med"/>
+                    </a:lnB>
+                    <a:solidFill>
+                      <a:srgbClr val="F7F2F3"/>
+                    </a:solidFill>
+                  </a:tcPr>
+                </a:tc>
+                <a:tc>
+                  <a:txBody>
+                    <a:bodyPr/>
+                    <a:lstStyle/>
+                    <a:p>
+                      <a:pPr algn="ctr" indent="0" marL="0">
+                        <a:buNone/>
+                      </a:pPr>
+                      <a:r>
+                        <a:rPr lang="en-US" sz="1800" dirty="0">
+                          <a:solidFill>
+                            <a:srgbClr val="0B0B0B"/>
+                          </a:solidFill>
+                          <a:latin typeface="Calibri" pitchFamily="34" charset="0"/>
+                          <a:ea typeface="Calibri" pitchFamily="34" charset="-122"/>
+                          <a:cs typeface="Calibri" pitchFamily="34" charset="-120"/>
+                        </a:rPr>
+                        <a:t>every call</a:t>
+                      </a:r>
+                      <a:endParaRPr lang="en-US" sz="1800" dirty="0">
+                        <a:latin typeface="Calibri" charset="0"/>
+                        <a:ea typeface="Calibri" charset="0"/>
+                        <a:cs typeface="Calibri" charset="0"/>
+                      </a:endParaRPr>
+                    </a:p>
+                  </a:txBody>
+                  <a:tcPr marL="45720" marR="45720" marT="45720" marB="45720" anchor="ctr">
+                    <a:lnL w="9525" cap="flat" cmpd="sng" algn="ctr">
+                      <a:solidFill>
+                        <a:srgbClr val="D9D4D0"/>
+                      </a:solidFill>
+                      <a:prstDash val="solid"/>
+                      <a:round/>
+                      <a:headEnd type="none" w="med" len="med"/>
+                      <a:tailEnd type="none" w="med" len="med"/>
+                    </a:lnL>
+                    <a:lnR w="9525" cap="flat" cmpd="sng" algn="ctr">
+                      <a:solidFill>
+                        <a:srgbClr val="D9D4D0"/>
+                      </a:solidFill>
+                      <a:prstDash val="solid"/>
+                      <a:round/>
+                      <a:headEnd type="none" w="med" len="med"/>
+                      <a:tailEnd type="none" w="med" len="med"/>
+                    </a:lnR>
+                    <a:lnT w="9525" cap="flat" cmpd="sng" algn="ctr">
+                      <a:solidFill>
+                        <a:srgbClr val="D9D4D0"/>
+                      </a:solidFill>
+                      <a:prstDash val="solid"/>
+                      <a:round/>
+                      <a:headEnd type="none" w="med" len="med"/>
+                      <a:tailEnd type="none" w="med" len="med"/>
+                    </a:lnT>
+                    <a:lnB w="9525" cap="flat" cmpd="sng" algn="ctr">
+                      <a:solidFill>
+                        <a:srgbClr val="D9D4D0"/>
+                      </a:solidFill>
+                      <a:prstDash val="solid"/>
+                      <a:round/>
+                      <a:headEnd type="none" w="med" len="med"/>
+                      <a:tailEnd type="none" w="med" len="med"/>
+                    </a:lnB>
+                    <a:solidFill>
+                      <a:srgbClr val="F7F2F3"/>
+                    </a:solidFill>
+                  </a:tcPr>
+                </a:tc>
+              </a:tr>
+              <a:tr h="384048">
+                <a:tc>
+                  <a:txBody>
+                    <a:bodyPr/>
+                    <a:lstStyle/>
+                    <a:p>
+                      <a:pPr algn="l" indent="0" marL="0">
+                        <a:buNone/>
+                      </a:pPr>
+                      <a:r>
+                        <a:rPr lang="en-US" sz="1800" dirty="0">
+                          <a:solidFill>
+                            <a:srgbClr val="0B0B0B"/>
+                          </a:solidFill>
+                          <a:latin typeface="Calibri" pitchFamily="34" charset="0"/>
+                          <a:ea typeface="Calibri" pitchFamily="34" charset="-122"/>
+                          <a:cs typeface="Calibri" pitchFamily="34" charset="-120"/>
+                        </a:rPr>
+                        <a:t>Total-family bias correction</a:t>
+                      </a:r>
+                      <a:endParaRPr lang="en-US" sz="1800" dirty="0">
+                        <a:latin typeface="Calibri" charset="0"/>
+                        <a:ea typeface="Calibri" charset="0"/>
+                        <a:cs typeface="Calibri" charset="0"/>
+                      </a:endParaRPr>
+                    </a:p>
+                  </a:txBody>
+                  <a:tcPr marL="45720" marR="45720" marT="45720" marB="45720" anchor="ctr">
+                    <a:lnL w="9525" cap="flat" cmpd="sng" algn="ctr">
+                      <a:solidFill>
+                        <a:srgbClr val="D9D4D0"/>
+                      </a:solidFill>
+                      <a:prstDash val="solid"/>
+                      <a:round/>
+                      <a:headEnd type="none" w="med" len="med"/>
+                      <a:tailEnd type="none" w="med" len="med"/>
+                    </a:lnL>
+                    <a:lnR w="9525" cap="flat" cmpd="sng" algn="ctr">
+                      <a:solidFill>
+                        <a:srgbClr val="D9D4D0"/>
+                      </a:solidFill>
+                      <a:prstDash val="solid"/>
+                      <a:round/>
+                      <a:headEnd type="none" w="med" len="med"/>
+                      <a:tailEnd type="none" w="med" len="med"/>
+                    </a:lnR>
+                    <a:lnT w="9525" cap="flat" cmpd="sng" algn="ctr">
+                      <a:solidFill>
+                        <a:srgbClr val="D9D4D0"/>
+                      </a:solidFill>
+                      <a:prstDash val="solid"/>
+                      <a:round/>
+                      <a:headEnd type="none" w="med" len="med"/>
+                      <a:tailEnd type="none" w="med" len="med"/>
+                    </a:lnT>
+                    <a:lnB w="9525" cap="flat" cmpd="sng" algn="ctr">
+                      <a:solidFill>
+                        <a:srgbClr val="D9D4D0"/>
+                      </a:solidFill>
+                      <a:prstDash val="solid"/>
+                      <a:round/>
+                      <a:headEnd type="none" w="med" len="med"/>
+                      <a:tailEnd type="none" w="med" len="med"/>
+                    </a:lnB>
+                    <a:solidFill>
+                      <a:srgbClr val="FFFFFF"/>
+                    </a:solidFill>
+                  </a:tcPr>
+                </a:tc>
+                <a:tc>
+                  <a:txBody>
+                    <a:bodyPr/>
+                    <a:lstStyle/>
+                    <a:p>
+                      <a:pPr algn="ctr" indent="0" marL="0">
+                        <a:buNone/>
+                      </a:pPr>
+                      <a:r>
+                        <a:rPr lang="en-US" sz="1800" dirty="0">
+                          <a:solidFill>
+                            <a:srgbClr val="0B0B0B"/>
+                          </a:solidFill>
+                          <a:latin typeface="Calibri" pitchFamily="34" charset="0"/>
+                          <a:ea typeface="Calibri" pitchFamily="34" charset="-122"/>
+                          <a:cs typeface="Calibri" pitchFamily="34" charset="-120"/>
+                        </a:rPr>
+                        <a:t>TOTDEV, HTOTDEV</a:t>
+                      </a:r>
+                      <a:endParaRPr lang="en-US" sz="1800" dirty="0">
+                        <a:latin typeface="Calibri" charset="0"/>
+                        <a:ea typeface="Calibri" charset="0"/>
+                        <a:cs typeface="Calibri" charset="0"/>
+                      </a:endParaRPr>
+                    </a:p>
+                  </a:txBody>
+                  <a:tcPr marL="45720" marR="45720" marT="45720" marB="45720" anchor="ctr">
+                    <a:lnL w="9525" cap="flat" cmpd="sng" algn="ctr">
+                      <a:solidFill>
+                        <a:srgbClr val="D9D4D0"/>
+                      </a:solidFill>
+                      <a:prstDash val="solid"/>
+                      <a:round/>
+                      <a:headEnd type="none" w="med" len="med"/>
+                      <a:tailEnd type="none" w="med" len="med"/>
+                    </a:lnL>
+                    <a:lnR w="9525" cap="flat" cmpd="sng" algn="ctr">
+                      <a:solidFill>
+                        <a:srgbClr val="D9D4D0"/>
+                      </a:solidFill>
+                      <a:prstDash val="solid"/>
+                      <a:round/>
+                      <a:headEnd type="none" w="med" len="med"/>
+                      <a:tailEnd type="none" w="med" len="med"/>
+                    </a:lnR>
+                    <a:lnT w="9525" cap="flat" cmpd="sng" algn="ctr">
+                      <a:solidFill>
+                        <a:srgbClr val="D9D4D0"/>
+                      </a:solidFill>
+                      <a:prstDash val="solid"/>
+                      <a:round/>
+                      <a:headEnd type="none" w="med" len="med"/>
+                      <a:tailEnd type="none" w="med" len="med"/>
+                    </a:lnT>
+                    <a:lnB w="9525" cap="flat" cmpd="sng" algn="ctr">
+                      <a:solidFill>
+                        <a:srgbClr val="D9D4D0"/>
+                      </a:solidFill>
+                      <a:prstDash val="solid"/>
+                      <a:round/>
+                      <a:headEnd type="none" w="med" len="med"/>
+                      <a:tailEnd type="none" w="med" len="med"/>
+                    </a:lnB>
+                    <a:solidFill>
+                      <a:srgbClr val="FFFFFF"/>
+                    </a:solidFill>
+                  </a:tcPr>
+                </a:tc>
+                <a:tc>
+                  <a:txBody>
+                    <a:bodyPr/>
+                    <a:lstStyle/>
+                    <a:p>
+                      <a:pPr algn="ctr" indent="0" marL="0">
+                        <a:buNone/>
+                      </a:pPr>
+                      <a:r>
+                        <a:rPr lang="en-US" sz="1800" dirty="0">
+                          <a:solidFill>
+                            <a:srgbClr val="0B0B0B"/>
+                          </a:solidFill>
+                          <a:latin typeface="Calibri" pitchFamily="34" charset="0"/>
+                          <a:ea typeface="Calibri" pitchFamily="34" charset="-122"/>
+                          <a:cs typeface="Calibri" pitchFamily="34" charset="-120"/>
+                        </a:rPr>
+                        <a:t>none</a:t>
+                      </a:r>
+                      <a:endParaRPr lang="en-US" sz="1800" dirty="0">
+                        <a:latin typeface="Calibri" charset="0"/>
+                        <a:ea typeface="Calibri" charset="0"/>
+                        <a:cs typeface="Calibri" charset="0"/>
+                      </a:endParaRPr>
+                    </a:p>
+                  </a:txBody>
+                  <a:tcPr marL="45720" marR="45720" marT="45720" marB="45720" anchor="ctr">
+                    <a:lnL w="9525" cap="flat" cmpd="sng" algn="ctr">
+                      <a:solidFill>
+                        <a:srgbClr val="D9D4D0"/>
+                      </a:solidFill>
+                      <a:prstDash val="solid"/>
+                      <a:round/>
+                      <a:headEnd type="none" w="med" len="med"/>
+                      <a:tailEnd type="none" w="med" len="med"/>
+                    </a:lnL>
+                    <a:lnR w="9525" cap="flat" cmpd="sng" algn="ctr">
+                      <a:solidFill>
+                        <a:srgbClr val="D9D4D0"/>
+                      </a:solidFill>
+                      <a:prstDash val="solid"/>
+                      <a:round/>
+                      <a:headEnd type="none" w="med" len="med"/>
+                      <a:tailEnd type="none" w="med" len="med"/>
+                    </a:lnR>
+                    <a:lnT w="9525" cap="flat" cmpd="sng" algn="ctr">
+                      <a:solidFill>
+                        <a:srgbClr val="D9D4D0"/>
+                      </a:solidFill>
+                      <a:prstDash val="solid"/>
+                      <a:round/>
+                      <a:headEnd type="none" w="med" len="med"/>
+                      <a:tailEnd type="none" w="med" len="med"/>
+                    </a:lnT>
+                    <a:lnB w="9525" cap="flat" cmpd="sng" algn="ctr">
+                      <a:solidFill>
+                        <a:srgbClr val="D9D4D0"/>
+                      </a:solidFill>
+                      <a:prstDash val="solid"/>
+                      <a:round/>
+                      <a:headEnd type="none" w="med" len="med"/>
+                      <a:tailEnd type="none" w="med" len="med"/>
+                    </a:lnB>
+                    <a:solidFill>
+                      <a:srgbClr val="FFFFFF"/>
+                    </a:solidFill>
+                  </a:tcPr>
+                </a:tc>
+                <a:tc>
+                  <a:txBody>
+                    <a:bodyPr/>
+                    <a:lstStyle/>
+                    <a:p>
+                      <a:pPr algn="ctr" indent="0" marL="0">
+                        <a:buNone/>
+                      </a:pPr>
+                      <a:r>
+                        <a:rPr lang="en-US" sz="1800" dirty="0">
+                          <a:solidFill>
+                            <a:srgbClr val="0B0B0B"/>
+                          </a:solidFill>
+                          <a:latin typeface="Calibri" pitchFamily="34" charset="0"/>
+                          <a:ea typeface="Calibri" pitchFamily="34" charset="-122"/>
+                          <a:cs typeface="Calibri" pitchFamily="34" charset="-120"/>
+                        </a:rPr>
+                        <a:t>all five, switchable</a:t>
+                      </a:r>
+                      <a:endParaRPr lang="en-US" sz="1800" dirty="0">
+                        <a:latin typeface="Calibri" charset="0"/>
+                        <a:ea typeface="Calibri" charset="0"/>
+                        <a:cs typeface="Calibri" charset="0"/>
+                      </a:endParaRPr>
+                    </a:p>
+                  </a:txBody>
+                  <a:tcPr marL="45720" marR="45720" marT="45720" marB="45720" anchor="ctr">
+                    <a:lnL w="9525" cap="flat" cmpd="sng" algn="ctr">
+                      <a:solidFill>
+                        <a:srgbClr val="D9D4D0"/>
+                      </a:solidFill>
+                      <a:prstDash val="solid"/>
+                      <a:round/>
+                      <a:headEnd type="none" w="med" len="med"/>
+                      <a:tailEnd type="none" w="med" len="med"/>
+                    </a:lnL>
+                    <a:lnR w="9525" cap="flat" cmpd="sng" algn="ctr">
+                      <a:solidFill>
+                        <a:srgbClr val="D9D4D0"/>
+                      </a:solidFill>
+                      <a:prstDash val="solid"/>
+                      <a:round/>
+                      <a:headEnd type="none" w="med" len="med"/>
+                      <a:tailEnd type="none" w="med" len="med"/>
+                    </a:lnR>
+                    <a:lnT w="9525" cap="flat" cmpd="sng" algn="ctr">
+                      <a:solidFill>
+                        <a:srgbClr val="D9D4D0"/>
+                      </a:solidFill>
+                      <a:prstDash val="solid"/>
+                      <a:round/>
+                      <a:headEnd type="none" w="med" len="med"/>
+                      <a:tailEnd type="none" w="med" len="med"/>
+                    </a:lnT>
+                    <a:lnB w="9525" cap="flat" cmpd="sng" algn="ctr">
+                      <a:solidFill>
+                        <a:srgbClr val="D9D4D0"/>
+                      </a:solidFill>
+                      <a:prstDash val="solid"/>
+                      <a:round/>
+                      <a:headEnd type="none" w="med" len="med"/>
+                      <a:tailEnd type="none" w="med" len="med"/>
+                    </a:lnB>
+                    <a:solidFill>
+                      <a:srgbClr val="FFFFFF"/>
+                    </a:solidFill>
+                  </a:tcPr>
+                </a:tc>
+              </a:tr>
+              <a:tr h="658368">
+                <a:tc>
+                  <a:txBody>
+                    <a:bodyPr/>
+                    <a:lstStyle/>
+                    <a:p>
+                      <a:pPr algn="l" indent="0" marL="0">
+                        <a:buNone/>
+                      </a:pPr>
+                      <a:r>
+                        <a:rPr lang="en-US" sz="1800" dirty="0">
+                          <a:solidFill>
+                            <a:srgbClr val="0B0B0B"/>
+                          </a:solidFill>
+                          <a:latin typeface="Calibri" pitchFamily="34" charset="0"/>
+                          <a:ea typeface="Calibri" pitchFamily="34" charset="-122"/>
+                          <a:cs typeface="Calibri" pitchFamily="34" charset="-120"/>
+                        </a:rPr>
+                        <a:t>MDEV-class Hadamard (MHDEV, HTDEV, MHTOTDEV)</a:t>
+                      </a:r>
+                      <a:endParaRPr lang="en-US" sz="1800" dirty="0">
+                        <a:latin typeface="Calibri" charset="0"/>
+                        <a:ea typeface="Calibri" charset="0"/>
+                        <a:cs typeface="Calibri" charset="0"/>
+                      </a:endParaRPr>
+                    </a:p>
+                  </a:txBody>
+                  <a:tcPr marL="45720" marR="45720" marT="45720" marB="45720" anchor="ctr">
+                    <a:lnL w="9525" cap="flat" cmpd="sng" algn="ctr">
+                      <a:solidFill>
+                        <a:srgbClr val="D9D4D0"/>
+                      </a:solidFill>
+                      <a:prstDash val="solid"/>
+                      <a:round/>
+                      <a:headEnd type="none" w="med" len="med"/>
+                      <a:tailEnd type="none" w="med" len="med"/>
+                    </a:lnL>
+                    <a:lnR w="9525" cap="flat" cmpd="sng" algn="ctr">
+                      <a:solidFill>
+                        <a:srgbClr val="D9D4D0"/>
+                      </a:solidFill>
+                      <a:prstDash val="solid"/>
+                      <a:round/>
+                      <a:headEnd type="none" w="med" len="med"/>
+                      <a:tailEnd type="none" w="med" len="med"/>
+                    </a:lnR>
+                    <a:lnT w="9525" cap="flat" cmpd="sng" algn="ctr">
+                      <a:solidFill>
+                        <a:srgbClr val="D9D4D0"/>
+                      </a:solidFill>
+                      <a:prstDash val="solid"/>
+                      <a:round/>
+                      <a:headEnd type="none" w="med" len="med"/>
+                      <a:tailEnd type="none" w="med" len="med"/>
+                    </a:lnT>
+                    <a:lnB w="9525" cap="flat" cmpd="sng" algn="ctr">
+                      <a:solidFill>
+                        <a:srgbClr val="D9D4D0"/>
+                      </a:solidFill>
+                      <a:prstDash val="solid"/>
+                      <a:round/>
+                      <a:headEnd type="none" w="med" len="med"/>
+                      <a:tailEnd type="none" w="med" len="med"/>
+                    </a:lnB>
+                    <a:solidFill>
+                      <a:srgbClr val="F7F2F3"/>
+                    </a:solidFill>
+                  </a:tcPr>
+                </a:tc>
+                <a:tc>
+                  <a:txBody>
+                    <a:bodyPr/>
+                    <a:lstStyle/>
+                    <a:p>
+                      <a:pPr algn="ctr" indent="0" marL="0">
+                        <a:buNone/>
+                      </a:pPr>
+                      <a:r>
+                        <a:rPr lang="en-US" sz="1800" dirty="0">
+                          <a:solidFill>
+                            <a:srgbClr val="0B0B0B"/>
+                          </a:solidFill>
+                          <a:latin typeface="Calibri" pitchFamily="34" charset="0"/>
+                          <a:ea typeface="Calibri" pitchFamily="34" charset="-122"/>
+                          <a:cs typeface="Calibri" pitchFamily="34" charset="-120"/>
+                        </a:rPr>
+                        <a:t>no</a:t>
+                      </a:r>
+                      <a:endParaRPr lang="en-US" sz="1800" dirty="0">
+                        <a:latin typeface="Calibri" charset="0"/>
+                        <a:ea typeface="Calibri" charset="0"/>
+                        <a:cs typeface="Calibri" charset="0"/>
+                      </a:endParaRPr>
+                    </a:p>
+                  </a:txBody>
+                  <a:tcPr marL="45720" marR="45720" marT="45720" marB="45720" anchor="ctr">
+                    <a:lnL w="9525" cap="flat" cmpd="sng" algn="ctr">
+                      <a:solidFill>
+                        <a:srgbClr val="D9D4D0"/>
+                      </a:solidFill>
+                      <a:prstDash val="solid"/>
+                      <a:round/>
+                      <a:headEnd type="none" w="med" len="med"/>
+                      <a:tailEnd type="none" w="med" len="med"/>
+                    </a:lnL>
+                    <a:lnR w="9525" cap="flat" cmpd="sng" algn="ctr">
+                      <a:solidFill>
+                        <a:srgbClr val="D9D4D0"/>
+                      </a:solidFill>
+                      <a:prstDash val="solid"/>
+                      <a:round/>
+                      <a:headEnd type="none" w="med" len="med"/>
+                      <a:tailEnd type="none" w="med" len="med"/>
+                    </a:lnR>
+                    <a:lnT w="9525" cap="flat" cmpd="sng" algn="ctr">
+                      <a:solidFill>
+                        <a:srgbClr val="D9D4D0"/>
+                      </a:solidFill>
+                      <a:prstDash val="solid"/>
+                      <a:round/>
+                      <a:headEnd type="none" w="med" len="med"/>
+                      <a:tailEnd type="none" w="med" len="med"/>
+                    </a:lnT>
+                    <a:lnB w="9525" cap="flat" cmpd="sng" algn="ctr">
+                      <a:solidFill>
+                        <a:srgbClr val="D9D4D0"/>
+                      </a:solidFill>
+                      <a:prstDash val="solid"/>
+                      <a:round/>
+                      <a:headEnd type="none" w="med" len="med"/>
+                      <a:tailEnd type="none" w="med" len="med"/>
+                    </a:lnB>
+                    <a:solidFill>
+                      <a:srgbClr val="F7F2F3"/>
+                    </a:solidFill>
+                  </a:tcPr>
+                </a:tc>
+                <a:tc>
+                  <a:txBody>
+                    <a:bodyPr/>
+                    <a:lstStyle/>
+                    <a:p>
+                      <a:pPr algn="ctr" indent="0" marL="0">
+                        <a:buNone/>
+                      </a:pPr>
+                      <a:r>
+                        <a:rPr lang="en-US" sz="1800" dirty="0">
+                          <a:solidFill>
+                            <a:srgbClr val="0B0B0B"/>
+                          </a:solidFill>
+                          <a:latin typeface="Calibri" pitchFamily="34" charset="0"/>
+                          <a:ea typeface="Calibri" pitchFamily="34" charset="-122"/>
+                          <a:cs typeface="Calibri" pitchFamily="34" charset="-120"/>
+                        </a:rPr>
+                        <a:t>no</a:t>
+                      </a:r>
+                      <a:endParaRPr lang="en-US" sz="1800" dirty="0">
+                        <a:latin typeface="Calibri" charset="0"/>
+                        <a:ea typeface="Calibri" charset="0"/>
+                        <a:cs typeface="Calibri" charset="0"/>
+                      </a:endParaRPr>
+                    </a:p>
+                  </a:txBody>
+                  <a:tcPr marL="45720" marR="45720" marT="45720" marB="45720" anchor="ctr">
+                    <a:lnL w="9525" cap="flat" cmpd="sng" algn="ctr">
+                      <a:solidFill>
+                        <a:srgbClr val="D9D4D0"/>
+                      </a:solidFill>
+                      <a:prstDash val="solid"/>
+                      <a:round/>
+                      <a:headEnd type="none" w="med" len="med"/>
+                      <a:tailEnd type="none" w="med" len="med"/>
+                    </a:lnL>
+                    <a:lnR w="9525" cap="flat" cmpd="sng" algn="ctr">
+                      <a:solidFill>
+                        <a:srgbClr val="D9D4D0"/>
+                      </a:solidFill>
+                      <a:prstDash val="solid"/>
+                      <a:round/>
+                      <a:headEnd type="none" w="med" len="med"/>
+                      <a:tailEnd type="none" w="med" len="med"/>
+                    </a:lnR>
+                    <a:lnT w="9525" cap="flat" cmpd="sng" algn="ctr">
+                      <a:solidFill>
+                        <a:srgbClr val="D9D4D0"/>
+                      </a:solidFill>
+                      <a:prstDash val="solid"/>
+                      <a:round/>
+                      <a:headEnd type="none" w="med" len="med"/>
+                      <a:tailEnd type="none" w="med" len="med"/>
+                    </a:lnT>
+                    <a:lnB w="9525" cap="flat" cmpd="sng" algn="ctr">
+                      <a:solidFill>
+                        <a:srgbClr val="D9D4D0"/>
+                      </a:solidFill>
+                      <a:prstDash val="solid"/>
+                      <a:round/>
+                      <a:headEnd type="none" w="med" len="med"/>
+                      <a:tailEnd type="none" w="med" len="med"/>
+                    </a:lnB>
+                    <a:solidFill>
+                      <a:srgbClr val="F7F2F3"/>
+                    </a:solidFill>
+                  </a:tcPr>
+                </a:tc>
+                <a:tc>
+                  <a:txBody>
+                    <a:bodyPr/>
+                    <a:lstStyle/>
+                    <a:p>
+                      <a:pPr algn="ctr" indent="0" marL="0">
+                        <a:buNone/>
+                      </a:pPr>
+                      <a:r>
+                        <a:rPr lang="en-US" sz="1800" dirty="0">
+                          <a:solidFill>
+                            <a:srgbClr val="0B0B0B"/>
+                          </a:solidFill>
+                          <a:latin typeface="Calibri" pitchFamily="34" charset="0"/>
+                          <a:ea typeface="Calibri" pitchFamily="34" charset="-122"/>
+                          <a:cs typeface="Calibri" pitchFamily="34" charset="-120"/>
+                        </a:rPr>
+                        <a:t>yes</a:t>
+                      </a:r>
+                      <a:endParaRPr lang="en-US" sz="1800" dirty="0">
+                        <a:latin typeface="Calibri" charset="0"/>
+                        <a:ea typeface="Calibri" charset="0"/>
+                        <a:cs typeface="Calibri" charset="0"/>
+                      </a:endParaRPr>
+                    </a:p>
+                  </a:txBody>
+                  <a:tcPr marL="45720" marR="45720" marT="45720" marB="45720" anchor="ctr">
+                    <a:lnL w="9525" cap="flat" cmpd="sng" algn="ctr">
+                      <a:solidFill>
+                        <a:srgbClr val="D9D4D0"/>
+                      </a:solidFill>
+                      <a:prstDash val="solid"/>
+                      <a:round/>
+                      <a:headEnd type="none" w="med" len="med"/>
+                      <a:tailEnd type="none" w="med" len="med"/>
+                    </a:lnL>
+                    <a:lnR w="9525" cap="flat" cmpd="sng" algn="ctr">
+                      <a:solidFill>
+                        <a:srgbClr val="D9D4D0"/>
+                      </a:solidFill>
+                      <a:prstDash val="solid"/>
+                      <a:round/>
+                      <a:headEnd type="none" w="med" len="med"/>
+                      <a:tailEnd type="none" w="med" len="med"/>
+                    </a:lnR>
+                    <a:lnT w="9525" cap="flat" cmpd="sng" algn="ctr">
+                      <a:solidFill>
+                        <a:srgbClr val="D9D4D0"/>
+                      </a:solidFill>
+                      <a:prstDash val="solid"/>
+                      <a:round/>
+                      <a:headEnd type="none" w="med" len="med"/>
+                      <a:tailEnd type="none" w="med" len="med"/>
+                    </a:lnT>
+                    <a:lnB w="9525" cap="flat" cmpd="sng" algn="ctr">
+                      <a:solidFill>
+                        <a:srgbClr val="D9D4D0"/>
+                      </a:solidFill>
+                      <a:prstDash val="solid"/>
+                      <a:round/>
+                      <a:headEnd type="none" w="med" len="med"/>
+                      <a:tailEnd type="none" w="med" len="med"/>
+                    </a:lnB>
+                    <a:solidFill>
+                      <a:srgbClr val="F7F2F3"/>
+                    </a:solidFill>
+                  </a:tcPr>
+                </a:tc>
+              </a:tr>
+              <a:tr h="384048">
+                <a:tc>
+                  <a:txBody>
+                    <a:bodyPr/>
+                    <a:lstStyle/>
+                    <a:p>
+                      <a:pPr algn="l" indent="0" marL="0">
+                        <a:buNone/>
+                      </a:pPr>
+                      <a:r>
+                        <a:rPr lang="en-US" sz="1800" dirty="0">
+                          <a:solidFill>
+                            <a:srgbClr val="0B0B0B"/>
+                          </a:solidFill>
+                          <a:latin typeface="Calibri" pitchFamily="34" charset="0"/>
+                          <a:ea typeface="Calibri" pitchFamily="34" charset="-122"/>
+                          <a:cs typeface="Calibri" pitchFamily="34" charset="-120"/>
+                        </a:rPr>
+                        <a:t>Thêo1 / ThêoBR / ThêoH</a:t>
+                      </a:r>
+                      <a:endParaRPr lang="en-US" sz="1800" dirty="0">
+                        <a:latin typeface="Calibri" charset="0"/>
+                        <a:ea typeface="Calibri" charset="0"/>
+                        <a:cs typeface="Calibri" charset="0"/>
+                      </a:endParaRPr>
+                    </a:p>
+                  </a:txBody>
+                  <a:tcPr marL="45720" marR="45720" marT="45720" marB="45720" anchor="ctr">
+                    <a:lnL w="9525" cap="flat" cmpd="sng" algn="ctr">
+                      <a:solidFill>
+                        <a:srgbClr val="D9D4D0"/>
+                      </a:solidFill>
+                      <a:prstDash val="solid"/>
+                      <a:round/>
+                      <a:headEnd type="none" w="med" len="med"/>
+                      <a:tailEnd type="none" w="med" len="med"/>
+                    </a:lnL>
+                    <a:lnR w="9525" cap="flat" cmpd="sng" algn="ctr">
+                      <a:solidFill>
+                        <a:srgbClr val="D9D4D0"/>
+                      </a:solidFill>
+                      <a:prstDash val="solid"/>
+                      <a:round/>
+                      <a:headEnd type="none" w="med" len="med"/>
+                      <a:tailEnd type="none" w="med" len="med"/>
+                    </a:lnR>
+                    <a:lnT w="9525" cap="flat" cmpd="sng" algn="ctr">
+                      <a:solidFill>
+                        <a:srgbClr val="D9D4D0"/>
+                      </a:solidFill>
+                      <a:prstDash val="solid"/>
+                      <a:round/>
+                      <a:headEnd type="none" w="med" len="med"/>
+                      <a:tailEnd type="none" w="med" len="med"/>
+                    </a:lnT>
+                    <a:lnB w="9525" cap="flat" cmpd="sng" algn="ctr">
+                      <a:solidFill>
+                        <a:srgbClr val="D9D4D0"/>
+                      </a:solidFill>
+                      <a:prstDash val="solid"/>
+                      <a:round/>
+                      <a:headEnd type="none" w="med" len="med"/>
+                      <a:tailEnd type="none" w="med" len="med"/>
+                    </a:lnB>
+                    <a:solidFill>
+                      <a:srgbClr val="FFFFFF"/>
+                    </a:solidFill>
+                  </a:tcPr>
+                </a:tc>
+                <a:tc>
+                  <a:txBody>
+                    <a:bodyPr/>
+                    <a:lstStyle/>
+                    <a:p>
+                      <a:pPr algn="ctr" indent="0" marL="0">
+                        <a:buNone/>
+                      </a:pPr>
+                      <a:r>
+                        <a:rPr lang="en-US" sz="1800" dirty="0">
+                          <a:solidFill>
+                            <a:srgbClr val="0B0B0B"/>
+                          </a:solidFill>
+                          <a:latin typeface="Calibri" pitchFamily="34" charset="0"/>
+                          <a:ea typeface="Calibri" pitchFamily="34" charset="-122"/>
+                          <a:cs typeface="Calibri" pitchFamily="34" charset="-120"/>
+                        </a:rPr>
+                        <a:t>yes</a:t>
+                      </a:r>
+                      <a:endParaRPr lang="en-US" sz="1800" dirty="0">
+                        <a:latin typeface="Calibri" charset="0"/>
+                        <a:ea typeface="Calibri" charset="0"/>
+                        <a:cs typeface="Calibri" charset="0"/>
+                      </a:endParaRPr>
+                    </a:p>
+                  </a:txBody>
+                  <a:tcPr marL="45720" marR="45720" marT="45720" marB="45720" anchor="ctr">
+                    <a:lnL w="9525" cap="flat" cmpd="sng" algn="ctr">
+                      <a:solidFill>
+                        <a:srgbClr val="D9D4D0"/>
+                      </a:solidFill>
+                      <a:prstDash val="solid"/>
+                      <a:round/>
+                      <a:headEnd type="none" w="med" len="med"/>
+                      <a:tailEnd type="none" w="med" len="med"/>
+                    </a:lnL>
+                    <a:lnR w="9525" cap="flat" cmpd="sng" algn="ctr">
+                      <a:solidFill>
+                        <a:srgbClr val="D9D4D0"/>
+                      </a:solidFill>
+                      <a:prstDash val="solid"/>
+                      <a:round/>
+                      <a:headEnd type="none" w="med" len="med"/>
+                      <a:tailEnd type="none" w="med" len="med"/>
+                    </a:lnR>
+                    <a:lnT w="9525" cap="flat" cmpd="sng" algn="ctr">
+                      <a:solidFill>
+                        <a:srgbClr val="D9D4D0"/>
+                      </a:solidFill>
+                      <a:prstDash val="solid"/>
+                      <a:round/>
+                      <a:headEnd type="none" w="med" len="med"/>
+                      <a:tailEnd type="none" w="med" len="med"/>
+                    </a:lnT>
+                    <a:lnB w="9525" cap="flat" cmpd="sng" algn="ctr">
+                      <a:solidFill>
+                        <a:srgbClr val="D9D4D0"/>
+                      </a:solidFill>
+                      <a:prstDash val="solid"/>
+                      <a:round/>
+                      <a:headEnd type="none" w="med" len="med"/>
+                      <a:tailEnd type="none" w="med" len="med"/>
+                    </a:lnB>
+                    <a:solidFill>
+                      <a:srgbClr val="FFFFFF"/>
+                    </a:solidFill>
+                  </a:tcPr>
+                </a:tc>
+                <a:tc>
+                  <a:txBody>
+                    <a:bodyPr/>
+                    <a:lstStyle/>
+                    <a:p>
+                      <a:pPr algn="ctr" indent="0" marL="0">
+                        <a:buNone/>
+                      </a:pPr>
+                      <a:r>
+                        <a:rPr lang="en-US" sz="1800" dirty="0">
+                          <a:solidFill>
+                            <a:srgbClr val="0B0B0B"/>
+                          </a:solidFill>
+                          <a:latin typeface="Calibri" pitchFamily="34" charset="0"/>
+                          <a:ea typeface="Calibri" pitchFamily="34" charset="-122"/>
+                          <a:cs typeface="Calibri" pitchFamily="34" charset="-120"/>
+                        </a:rPr>
+                        <a:t>Thêo1 only</a:t>
+                      </a:r>
+                      <a:endParaRPr lang="en-US" sz="1800" dirty="0">
+                        <a:latin typeface="Calibri" charset="0"/>
+                        <a:ea typeface="Calibri" charset="0"/>
+                        <a:cs typeface="Calibri" charset="0"/>
+                      </a:endParaRPr>
+                    </a:p>
+                  </a:txBody>
+                  <a:tcPr marL="45720" marR="45720" marT="45720" marB="45720" anchor="ctr">
+                    <a:lnL w="9525" cap="flat" cmpd="sng" algn="ctr">
+                      <a:solidFill>
+                        <a:srgbClr val="D9D4D0"/>
+                      </a:solidFill>
+                      <a:prstDash val="solid"/>
+                      <a:round/>
+                      <a:headEnd type="none" w="med" len="med"/>
+                      <a:tailEnd type="none" w="med" len="med"/>
+                    </a:lnL>
+                    <a:lnR w="9525" cap="flat" cmpd="sng" algn="ctr">
+                      <a:solidFill>
+                        <a:srgbClr val="D9D4D0"/>
+                      </a:solidFill>
+                      <a:prstDash val="solid"/>
+                      <a:round/>
+                      <a:headEnd type="none" w="med" len="med"/>
+                      <a:tailEnd type="none" w="med" len="med"/>
+                    </a:lnR>
+                    <a:lnT w="9525" cap="flat" cmpd="sng" algn="ctr">
+                      <a:solidFill>
+                        <a:srgbClr val="D9D4D0"/>
+                      </a:solidFill>
+                      <a:prstDash val="solid"/>
+                      <a:round/>
+                      <a:headEnd type="none" w="med" len="med"/>
+                      <a:tailEnd type="none" w="med" len="med"/>
+                    </a:lnT>
+                    <a:lnB w="9525" cap="flat" cmpd="sng" algn="ctr">
+                      <a:solidFill>
+                        <a:srgbClr val="D9D4D0"/>
+                      </a:solidFill>
+                      <a:prstDash val="solid"/>
+                      <a:round/>
+                      <a:headEnd type="none" w="med" len="med"/>
+                      <a:tailEnd type="none" w="med" len="med"/>
+                    </a:lnB>
+                    <a:solidFill>
+                      <a:srgbClr val="FFFFFF"/>
+                    </a:solidFill>
+                  </a:tcPr>
+                </a:tc>
+                <a:tc>
+                  <a:txBody>
+                    <a:bodyPr/>
+                    <a:lstStyle/>
+                    <a:p>
+                      <a:pPr algn="ctr" indent="0" marL="0">
+                        <a:buNone/>
+                      </a:pPr>
+                      <a:r>
+                        <a:rPr lang="en-US" sz="1800" dirty="0">
+                          <a:solidFill>
+                            <a:srgbClr val="0B0B0B"/>
+                          </a:solidFill>
+                          <a:latin typeface="Calibri" pitchFamily="34" charset="0"/>
+                          <a:ea typeface="Calibri" pitchFamily="34" charset="-122"/>
+                          <a:cs typeface="Calibri" pitchFamily="34" charset="-120"/>
+                        </a:rPr>
+                        <a:t>yes</a:t>
+                      </a:r>
+                      <a:endParaRPr lang="en-US" sz="1800" dirty="0">
+                        <a:latin typeface="Calibri" charset="0"/>
+                        <a:ea typeface="Calibri" charset="0"/>
+                        <a:cs typeface="Calibri" charset="0"/>
+                      </a:endParaRPr>
+                    </a:p>
+                  </a:txBody>
+                  <a:tcPr marL="45720" marR="45720" marT="45720" marB="45720" anchor="ctr">
+                    <a:lnL w="9525" cap="flat" cmpd="sng" algn="ctr">
+                      <a:solidFill>
+                        <a:srgbClr val="D9D4D0"/>
+                      </a:solidFill>
+                      <a:prstDash val="solid"/>
+                      <a:round/>
+                      <a:headEnd type="none" w="med" len="med"/>
+                      <a:tailEnd type="none" w="med" len="med"/>
+                    </a:lnL>
+                    <a:lnR w="9525" cap="flat" cmpd="sng" algn="ctr">
+                      <a:solidFill>
+                        <a:srgbClr val="D9D4D0"/>
+                      </a:solidFill>
+                      <a:prstDash val="solid"/>
+                      <a:round/>
+                      <a:headEnd type="none" w="med" len="med"/>
+                      <a:tailEnd type="none" w="med" len="med"/>
+                    </a:lnR>
+                    <a:lnT w="9525" cap="flat" cmpd="sng" algn="ctr">
+                      <a:solidFill>
+                        <a:srgbClr val="D9D4D0"/>
+                      </a:solidFill>
+                      <a:prstDash val="solid"/>
+                      <a:round/>
+                      <a:headEnd type="none" w="med" len="med"/>
+                      <a:tailEnd type="none" w="med" len="med"/>
+                    </a:lnT>
+                    <a:lnB w="9525" cap="flat" cmpd="sng" algn="ctr">
+                      <a:solidFill>
+                        <a:srgbClr val="D9D4D0"/>
+                      </a:solidFill>
+                      <a:prstDash val="solid"/>
+                      <a:round/>
+                      <a:headEnd type="none" w="med" len="med"/>
+                      <a:tailEnd type="none" w="med" len="med"/>
+                    </a:lnB>
+                    <a:solidFill>
+                      <a:srgbClr val="FFFFFF"/>
+                    </a:solidFill>
+                  </a:tcPr>
+                </a:tc>
+              </a:tr>
+              <a:tr h="658368">
+                <a:tc>
+                  <a:txBody>
+                    <a:bodyPr/>
+                    <a:lstStyle/>
+                    <a:p>
+                      <a:pPr algn="l" indent="0" marL="0">
+                        <a:buNone/>
+                      </a:pPr>
+                      <a:r>
+                        <a:rPr lang="en-US" sz="1800" dirty="0">
+                          <a:solidFill>
+                            <a:srgbClr val="0B0B0B"/>
+                          </a:solidFill>
+                          <a:latin typeface="Calibri" pitchFamily="34" charset="0"/>
+                          <a:ea typeface="Calibri" pitchFamily="34" charset="-122"/>
+                          <a:cs typeface="Calibri" pitchFamily="34" charset="-120"/>
+                        </a:rPr>
+                        <a:t>Dynamic (time-resolved) deviation</a:t>
+                      </a:r>
+                      <a:endParaRPr lang="en-US" sz="1800" dirty="0">
+                        <a:latin typeface="Calibri" charset="0"/>
+                        <a:ea typeface="Calibri" charset="0"/>
+                        <a:cs typeface="Calibri" charset="0"/>
+                      </a:endParaRPr>
+                    </a:p>
+                  </a:txBody>
+                  <a:tcPr marL="45720" marR="45720" marT="45720" marB="45720" anchor="ctr">
+                    <a:lnL w="9525" cap="flat" cmpd="sng" algn="ctr">
+                      <a:solidFill>
+                        <a:srgbClr val="D9D4D0"/>
+                      </a:solidFill>
+                      <a:prstDash val="solid"/>
+                      <a:round/>
+                      <a:headEnd type="none" w="med" len="med"/>
+                      <a:tailEnd type="none" w="med" len="med"/>
+                    </a:lnL>
+                    <a:lnR w="9525" cap="flat" cmpd="sng" algn="ctr">
+                      <a:solidFill>
+                        <a:srgbClr val="D9D4D0"/>
+                      </a:solidFill>
+                      <a:prstDash val="solid"/>
+                      <a:round/>
+                      <a:headEnd type="none" w="med" len="med"/>
+                      <a:tailEnd type="none" w="med" len="med"/>
+                    </a:lnR>
+                    <a:lnT w="9525" cap="flat" cmpd="sng" algn="ctr">
+                      <a:solidFill>
+                        <a:srgbClr val="D9D4D0"/>
+                      </a:solidFill>
+                      <a:prstDash val="solid"/>
+                      <a:round/>
+                      <a:headEnd type="none" w="med" len="med"/>
+                      <a:tailEnd type="none" w="med" len="med"/>
+                    </a:lnT>
+                    <a:lnB w="9525" cap="flat" cmpd="sng" algn="ctr">
+                      <a:solidFill>
+                        <a:srgbClr val="D9D4D0"/>
+                      </a:solidFill>
+                      <a:prstDash val="solid"/>
+                      <a:round/>
+                      <a:headEnd type="none" w="med" len="med"/>
+                      <a:tailEnd type="none" w="med" len="med"/>
+                    </a:lnB>
+                    <a:solidFill>
+                      <a:srgbClr val="F7F2F3"/>
+                    </a:solidFill>
+                  </a:tcPr>
+                </a:tc>
+                <a:tc>
+                  <a:txBody>
+                    <a:bodyPr/>
+                    <a:lstStyle/>
+                    <a:p>
+                      <a:pPr algn="ctr" indent="0" marL="0">
+                        <a:buNone/>
+                      </a:pPr>
+                      <a:r>
+                        <a:rPr lang="en-US" sz="1800" dirty="0">
+                          <a:solidFill>
+                            <a:srgbClr val="0B0B0B"/>
+                          </a:solidFill>
+                          <a:latin typeface="Calibri" pitchFamily="34" charset="0"/>
+                          <a:ea typeface="Calibri" pitchFamily="34" charset="-122"/>
+                          <a:cs typeface="Calibri" pitchFamily="34" charset="-120"/>
+                        </a:rPr>
+                        <a:t>yes</a:t>
+                      </a:r>
+                      <a:endParaRPr lang="en-US" sz="1800" dirty="0">
+                        <a:latin typeface="Calibri" charset="0"/>
+                        <a:ea typeface="Calibri" charset="0"/>
+                        <a:cs typeface="Calibri" charset="0"/>
+                      </a:endParaRPr>
+                    </a:p>
+                  </a:txBody>
+                  <a:tcPr marL="45720" marR="45720" marT="45720" marB="45720" anchor="ctr">
+                    <a:lnL w="9525" cap="flat" cmpd="sng" algn="ctr">
+                      <a:solidFill>
+                        <a:srgbClr val="D9D4D0"/>
+                      </a:solidFill>
+                      <a:prstDash val="solid"/>
+                      <a:round/>
+                      <a:headEnd type="none" w="med" len="med"/>
+                      <a:tailEnd type="none" w="med" len="med"/>
+                    </a:lnL>
+                    <a:lnR w="9525" cap="flat" cmpd="sng" algn="ctr">
+                      <a:solidFill>
+                        <a:srgbClr val="D9D4D0"/>
+                      </a:solidFill>
+                      <a:prstDash val="solid"/>
+                      <a:round/>
+                      <a:headEnd type="none" w="med" len="med"/>
+                      <a:tailEnd type="none" w="med" len="med"/>
+                    </a:lnR>
+                    <a:lnT w="9525" cap="flat" cmpd="sng" algn="ctr">
+                      <a:solidFill>
+                        <a:srgbClr val="D9D4D0"/>
+                      </a:solidFill>
+                      <a:prstDash val="solid"/>
+                      <a:round/>
+                      <a:headEnd type="none" w="med" len="med"/>
+                      <a:tailEnd type="none" w="med" len="med"/>
+                    </a:lnT>
+                    <a:lnB w="9525" cap="flat" cmpd="sng" algn="ctr">
+                      <a:solidFill>
+                        <a:srgbClr val="D9D4D0"/>
+                      </a:solidFill>
+                      <a:prstDash val="solid"/>
+                      <a:round/>
+                      <a:headEnd type="none" w="med" len="med"/>
+                      <a:tailEnd type="none" w="med" len="med"/>
+                    </a:lnB>
+                    <a:solidFill>
+                      <a:srgbClr val="F7F2F3"/>
+                    </a:solidFill>
+                  </a:tcPr>
+                </a:tc>
+                <a:tc>
+                  <a:txBody>
+                    <a:bodyPr/>
+                    <a:lstStyle/>
+                    <a:p>
+                      <a:pPr algn="ctr" indent="0" marL="0">
+                        <a:buNone/>
+                      </a:pPr>
+                      <a:r>
+                        <a:rPr lang="en-US" sz="1800" dirty="0">
+                          <a:solidFill>
+                            <a:srgbClr val="0B0B0B"/>
+                          </a:solidFill>
+                          <a:latin typeface="Calibri" pitchFamily="34" charset="0"/>
+                          <a:ea typeface="Calibri" pitchFamily="34" charset="-122"/>
+                          <a:cs typeface="Calibri" pitchFamily="34" charset="-120"/>
+                        </a:rPr>
+                        <a:t>no</a:t>
+                      </a:r>
+                      <a:endParaRPr lang="en-US" sz="1800" dirty="0">
+                        <a:latin typeface="Calibri" charset="0"/>
+                        <a:ea typeface="Calibri" charset="0"/>
+                        <a:cs typeface="Calibri" charset="0"/>
+                      </a:endParaRPr>
+                    </a:p>
+                  </a:txBody>
+                  <a:tcPr marL="45720" marR="45720" marT="45720" marB="45720" anchor="ctr">
+                    <a:lnL w="9525" cap="flat" cmpd="sng" algn="ctr">
+                      <a:solidFill>
+                        <a:srgbClr val="D9D4D0"/>
+                      </a:solidFill>
+                      <a:prstDash val="solid"/>
+                      <a:round/>
+                      <a:headEnd type="none" w="med" len="med"/>
+                      <a:tailEnd type="none" w="med" len="med"/>
+                    </a:lnL>
+                    <a:lnR w="9525" cap="flat" cmpd="sng" algn="ctr">
+                      <a:solidFill>
+                        <a:srgbClr val="D9D4D0"/>
+                      </a:solidFill>
+                      <a:prstDash val="solid"/>
+                      <a:round/>
+                      <a:headEnd type="none" w="med" len="med"/>
+                      <a:tailEnd type="none" w="med" len="med"/>
+                    </a:lnR>
+                    <a:lnT w="9525" cap="flat" cmpd="sng" algn="ctr">
+                      <a:solidFill>
+                        <a:srgbClr val="D9D4D0"/>
+                      </a:solidFill>
+                      <a:prstDash val="solid"/>
+                      <a:round/>
+                      <a:headEnd type="none" w="med" len="med"/>
+                      <a:tailEnd type="none" w="med" len="med"/>
+                    </a:lnT>
+                    <a:lnB w="9525" cap="flat" cmpd="sng" algn="ctr">
+                      <a:solidFill>
+                        <a:srgbClr val="D9D4D0"/>
+                      </a:solidFill>
+                      <a:prstDash val="solid"/>
+                      <a:round/>
+                      <a:headEnd type="none" w="med" len="med"/>
+                      <a:tailEnd type="none" w="med" len="med"/>
+                    </a:lnB>
+                    <a:solidFill>
+                      <a:srgbClr val="F7F2F3"/>
+                    </a:solidFill>
+                  </a:tcPr>
+                </a:tc>
+                <a:tc>
+                  <a:txBody>
+                    <a:bodyPr/>
+                    <a:lstStyle/>
+                    <a:p>
+                      <a:pPr algn="ctr" indent="0" marL="0">
+                        <a:buNone/>
+                      </a:pPr>
+                      <a:r>
+                        <a:rPr lang="en-US" sz="1800" dirty="0">
+                          <a:solidFill>
+                            <a:srgbClr val="0B0B0B"/>
+                          </a:solidFill>
+                          <a:latin typeface="Calibri" pitchFamily="34" charset="0"/>
+                          <a:ea typeface="Calibri" pitchFamily="34" charset="-122"/>
+                          <a:cs typeface="Calibri" pitchFamily="34" charset="-120"/>
+                        </a:rPr>
+                        <a:t>yes</a:t>
+                      </a:r>
+                      <a:endParaRPr lang="en-US" sz="1800" dirty="0">
+                        <a:latin typeface="Calibri" charset="0"/>
+                        <a:ea typeface="Calibri" charset="0"/>
+                        <a:cs typeface="Calibri" charset="0"/>
+                      </a:endParaRPr>
+                    </a:p>
+                  </a:txBody>
+                  <a:tcPr marL="45720" marR="45720" marT="45720" marB="45720" anchor="ctr">
+                    <a:lnL w="9525" cap="flat" cmpd="sng" algn="ctr">
+                      <a:solidFill>
+                        <a:srgbClr val="D9D4D0"/>
+                      </a:solidFill>
+                      <a:prstDash val="solid"/>
+                      <a:round/>
+                      <a:headEnd type="none" w="med" len="med"/>
+                      <a:tailEnd type="none" w="med" len="med"/>
+                    </a:lnL>
+                    <a:lnR w="9525" cap="flat" cmpd="sng" algn="ctr">
+                      <a:solidFill>
+                        <a:srgbClr val="D9D4D0"/>
+                      </a:solidFill>
+                      <a:prstDash val="solid"/>
+                      <a:round/>
+                      <a:headEnd type="none" w="med" len="med"/>
+                      <a:tailEnd type="none" w="med" len="med"/>
+                    </a:lnR>
+                    <a:lnT w="9525" cap="flat" cmpd="sng" algn="ctr">
+                      <a:solidFill>
+                        <a:srgbClr val="D9D4D0"/>
+                      </a:solidFill>
+                      <a:prstDash val="solid"/>
+                      <a:round/>
+                      <a:headEnd type="none" w="med" len="med"/>
+                      <a:tailEnd type="none" w="med" len="med"/>
+                    </a:lnT>
+                    <a:lnB w="9525" cap="flat" cmpd="sng" algn="ctr">
+                      <a:solidFill>
+                        <a:srgbClr val="D9D4D0"/>
+                      </a:solidFill>
+                      <a:prstDash val="solid"/>
+                      <a:round/>
+                      <a:headEnd type="none" w="med" len="med"/>
+                      <a:tailEnd type="none" w="med" len="med"/>
+                    </a:lnB>
+                    <a:solidFill>
+                      <a:srgbClr val="F7F2F3"/>
+                    </a:solidFill>
+                  </a:tcPr>
+                </a:tc>
+              </a:tr>
+              <a:tr h="384048">
+                <a:tc>
+                  <a:txBody>
+                    <a:bodyPr/>
+                    <a:lstStyle/>
+                    <a:p>
+                      <a:pPr algn="l" indent="0" marL="0">
+                        <a:buNone/>
+                      </a:pPr>
+                      <a:r>
+                        <a:rPr lang="en-US" sz="1800" dirty="0">
+                          <a:solidFill>
+                            <a:srgbClr val="0B0B0B"/>
+                          </a:solidFill>
+                          <a:latin typeface="Calibri" pitchFamily="34" charset="0"/>
+                          <a:ea typeface="Calibri" pitchFamily="34" charset="-122"/>
+                          <a:cs typeface="Calibri" pitchFamily="34" charset="-120"/>
+                        </a:rPr>
+                        <a:t>Real-time accumulators</a:t>
+                      </a:r>
+                      <a:endParaRPr lang="en-US" sz="1800" dirty="0">
+                        <a:latin typeface="Calibri" charset="0"/>
+                        <a:ea typeface="Calibri" charset="0"/>
+                        <a:cs typeface="Calibri" charset="0"/>
+                      </a:endParaRPr>
+                    </a:p>
+                  </a:txBody>
+                  <a:tcPr marL="45720" marR="45720" marT="45720" marB="45720" anchor="ctr">
+                    <a:lnL w="9525" cap="flat" cmpd="sng" algn="ctr">
+                      <a:solidFill>
+                        <a:srgbClr val="D9D4D0"/>
+                      </a:solidFill>
+                      <a:prstDash val="solid"/>
+                      <a:round/>
+                      <a:headEnd type="none" w="med" len="med"/>
+                      <a:tailEnd type="none" w="med" len="med"/>
+                    </a:lnL>
+                    <a:lnR w="9525" cap="flat" cmpd="sng" algn="ctr">
+                      <a:solidFill>
+                        <a:srgbClr val="D9D4D0"/>
+                      </a:solidFill>
+                      <a:prstDash val="solid"/>
+                      <a:round/>
+                      <a:headEnd type="none" w="med" len="med"/>
+                      <a:tailEnd type="none" w="med" len="med"/>
+                    </a:lnR>
+                    <a:lnT w="9525" cap="flat" cmpd="sng" algn="ctr">
+                      <a:solidFill>
+                        <a:srgbClr val="D9D4D0"/>
+                      </a:solidFill>
+                      <a:prstDash val="solid"/>
+                      <a:round/>
+                      <a:headEnd type="none" w="med" len="med"/>
+                      <a:tailEnd type="none" w="med" len="med"/>
+                    </a:lnT>
+                    <a:lnB w="9525" cap="flat" cmpd="sng" algn="ctr">
+                      <a:solidFill>
+                        <a:srgbClr val="D9D4D0"/>
+                      </a:solidFill>
+                      <a:prstDash val="solid"/>
+                      <a:round/>
+                      <a:headEnd type="none" w="med" len="med"/>
+                      <a:tailEnd type="none" w="med" len="med"/>
+                    </a:lnB>
+                    <a:solidFill>
+                      <a:srgbClr val="FFFFFF"/>
+                    </a:solidFill>
+                  </a:tcPr>
+                </a:tc>
+                <a:tc>
+                  <a:txBody>
+                    <a:bodyPr/>
+                    <a:lstStyle/>
+                    <a:p>
+                      <a:pPr algn="ctr" indent="0" marL="0">
+                        <a:buNone/>
+                      </a:pPr>
+                      <a:r>
+                        <a:rPr lang="en-US" sz="1800" dirty="0">
+                          <a:solidFill>
+                            <a:srgbClr val="0B0B0B"/>
+                          </a:solidFill>
+                          <a:latin typeface="Calibri" pitchFamily="34" charset="0"/>
+                          <a:ea typeface="Calibri" pitchFamily="34" charset="-122"/>
+                          <a:cs typeface="Calibri" pitchFamily="34" charset="-120"/>
+                        </a:rPr>
+                        <a:t>no</a:t>
+                      </a:r>
+                      <a:endParaRPr lang="en-US" sz="1800" dirty="0">
+                        <a:latin typeface="Calibri" charset="0"/>
+                        <a:ea typeface="Calibri" charset="0"/>
+                        <a:cs typeface="Calibri" charset="0"/>
+                      </a:endParaRPr>
+                    </a:p>
+                  </a:txBody>
+                  <a:tcPr marL="45720" marR="45720" marT="45720" marB="45720" anchor="ctr">
+                    <a:lnL w="9525" cap="flat" cmpd="sng" algn="ctr">
+                      <a:solidFill>
+                        <a:srgbClr val="D9D4D0"/>
+                      </a:solidFill>
+                      <a:prstDash val="solid"/>
+                      <a:round/>
+                      <a:headEnd type="none" w="med" len="med"/>
+                      <a:tailEnd type="none" w="med" len="med"/>
+                    </a:lnL>
+                    <a:lnR w="9525" cap="flat" cmpd="sng" algn="ctr">
+                      <a:solidFill>
+                        <a:srgbClr val="D9D4D0"/>
+                      </a:solidFill>
+                      <a:prstDash val="solid"/>
+                      <a:round/>
+                      <a:headEnd type="none" w="med" len="med"/>
+                      <a:tailEnd type="none" w="med" len="med"/>
+                    </a:lnR>
+                    <a:lnT w="9525" cap="flat" cmpd="sng" algn="ctr">
+                      <a:solidFill>
+                        <a:srgbClr val="D9D4D0"/>
+                      </a:solidFill>
+                      <a:prstDash val="solid"/>
+                      <a:round/>
+                      <a:headEnd type="none" w="med" len="med"/>
+                      <a:tailEnd type="none" w="med" len="med"/>
+                    </a:lnT>
+                    <a:lnB w="9525" cap="flat" cmpd="sng" algn="ctr">
+                      <a:solidFill>
+                        <a:srgbClr val="D9D4D0"/>
+                      </a:solidFill>
+                      <a:prstDash val="solid"/>
+                      <a:round/>
+                      <a:headEnd type="none" w="med" len="med"/>
+                      <a:tailEnd type="none" w="med" len="med"/>
+                    </a:lnB>
+                    <a:solidFill>
+                      <a:srgbClr val="FFFFFF"/>
+                    </a:solidFill>
+                  </a:tcPr>
+                </a:tc>
+                <a:tc>
+                  <a:txBody>
+                    <a:bodyPr/>
+                    <a:lstStyle/>
+                    <a:p>
+                      <a:pPr algn="ctr" indent="0" marL="0">
+                        <a:buNone/>
+                      </a:pPr>
+                      <a:r>
+                        <a:rPr lang="en-US" sz="1800" dirty="0">
+                          <a:solidFill>
+                            <a:srgbClr val="0B0B0B"/>
+                          </a:solidFill>
+                          <a:latin typeface="Calibri" pitchFamily="34" charset="0"/>
+                          <a:ea typeface="Calibri" pitchFamily="34" charset="-122"/>
+                          <a:cs typeface="Calibri" pitchFamily="34" charset="-120"/>
+                        </a:rPr>
+                        <a:t>ADEV, HDEV, TDEV</a:t>
+                      </a:r>
+                      <a:endParaRPr lang="en-US" sz="1800" dirty="0">
+                        <a:latin typeface="Calibri" charset="0"/>
+                        <a:ea typeface="Calibri" charset="0"/>
+                        <a:cs typeface="Calibri" charset="0"/>
+                      </a:endParaRPr>
+                    </a:p>
+                  </a:txBody>
+                  <a:tcPr marL="45720" marR="45720" marT="45720" marB="45720" anchor="ctr">
+                    <a:lnL w="9525" cap="flat" cmpd="sng" algn="ctr">
+                      <a:solidFill>
+                        <a:srgbClr val="D9D4D0"/>
+                      </a:solidFill>
+                      <a:prstDash val="solid"/>
+                      <a:round/>
+                      <a:headEnd type="none" w="med" len="med"/>
+                      <a:tailEnd type="none" w="med" len="med"/>
+                    </a:lnL>
+                    <a:lnR w="9525" cap="flat" cmpd="sng" algn="ctr">
+                      <a:solidFill>
+                        <a:srgbClr val="D9D4D0"/>
+                      </a:solidFill>
+                      <a:prstDash val="solid"/>
+                      <a:round/>
+                      <a:headEnd type="none" w="med" len="med"/>
+                      <a:tailEnd type="none" w="med" len="med"/>
+                    </a:lnR>
+                    <a:lnT w="9525" cap="flat" cmpd="sng" algn="ctr">
+                      <a:solidFill>
+                        <a:srgbClr val="D9D4D0"/>
+                      </a:solidFill>
+                      <a:prstDash val="solid"/>
+                      <a:round/>
+                      <a:headEnd type="none" w="med" len="med"/>
+                      <a:tailEnd type="none" w="med" len="med"/>
+                    </a:lnT>
+                    <a:lnB w="9525" cap="flat" cmpd="sng" algn="ctr">
+                      <a:solidFill>
+                        <a:srgbClr val="D9D4D0"/>
+                      </a:solidFill>
+                      <a:prstDash val="solid"/>
+                      <a:round/>
+                      <a:headEnd type="none" w="med" len="med"/>
+                      <a:tailEnd type="none" w="med" len="med"/>
+                    </a:lnB>
+                    <a:solidFill>
+                      <a:srgbClr val="FFFFFF"/>
+                    </a:solidFill>
+                  </a:tcPr>
+                </a:tc>
+                <a:tc>
+                  <a:txBody>
+                    <a:bodyPr/>
+                    <a:lstStyle/>
+                    <a:p>
+                      <a:pPr algn="ctr" indent="0" marL="0">
+                        <a:buNone/>
+                      </a:pPr>
+                      <a:r>
+                        <a:rPr lang="en-US" sz="1800" dirty="0">
+                          <a:solidFill>
+                            <a:srgbClr val="0B0B0B"/>
+                          </a:solidFill>
+                          <a:latin typeface="Calibri" pitchFamily="34" charset="0"/>
+                          <a:ea typeface="Calibri" pitchFamily="34" charset="-122"/>
+                          <a:cs typeface="Calibri" pitchFamily="34" charset="-120"/>
+                        </a:rPr>
+                        <a:t>ADEV, MDEV, HDEV, MHDEV</a:t>
+                      </a:r>
+                      <a:endParaRPr lang="en-US" sz="1800" dirty="0">
+                        <a:latin typeface="Calibri" charset="0"/>
+                        <a:ea typeface="Calibri" charset="0"/>
+                        <a:cs typeface="Calibri" charset="0"/>
+                      </a:endParaRPr>
+                    </a:p>
+                  </a:txBody>
+                  <a:tcPr marL="45720" marR="45720" marT="45720" marB="45720" anchor="ctr">
+                    <a:lnL w="9525" cap="flat" cmpd="sng" algn="ctr">
+                      <a:solidFill>
+                        <a:srgbClr val="D9D4D0"/>
+                      </a:solidFill>
+                      <a:prstDash val="solid"/>
+                      <a:round/>
+                      <a:headEnd type="none" w="med" len="med"/>
+                      <a:tailEnd type="none" w="med" len="med"/>
+                    </a:lnL>
+                    <a:lnR w="9525" cap="flat" cmpd="sng" algn="ctr">
+                      <a:solidFill>
+                        <a:srgbClr val="D9D4D0"/>
+                      </a:solidFill>
+                      <a:prstDash val="solid"/>
+                      <a:round/>
+                      <a:headEnd type="none" w="med" len="med"/>
+                      <a:tailEnd type="none" w="med" len="med"/>
+                    </a:lnR>
+                    <a:lnT w="9525" cap="flat" cmpd="sng" algn="ctr">
+                      <a:solidFill>
+                        <a:srgbClr val="D9D4D0"/>
+                      </a:solidFill>
+                      <a:prstDash val="solid"/>
+                      <a:round/>
+                      <a:headEnd type="none" w="med" len="med"/>
+                      <a:tailEnd type="none" w="med" len="med"/>
+                    </a:lnT>
+                    <a:lnB w="9525" cap="flat" cmpd="sng" algn="ctr">
+                      <a:solidFill>
+                        <a:srgbClr val="D9D4D0"/>
+                      </a:solidFill>
+                      <a:prstDash val="solid"/>
+                      <a:round/>
+                      <a:headEnd type="none" w="med" len="med"/>
+                      <a:tailEnd type="none" w="med" len="med"/>
+                    </a:lnB>
+                    <a:solidFill>
+                      <a:srgbClr val="FFFFFF"/>
+                    </a:solidFill>
+                  </a:tcPr>
+                </a:tc>
+              </a:tr>
+              <a:tr h="384048">
+                <a:tc>
+                  <a:txBody>
+                    <a:bodyPr/>
+                    <a:lstStyle/>
+                    <a:p>
+                      <a:pPr algn="l" indent="0" marL="0">
+                        <a:buNone/>
+                      </a:pPr>
+                      <a:r>
+                        <a:rPr lang="en-US" sz="1800" dirty="0">
+                          <a:solidFill>
+                            <a:srgbClr val="0B0B0B"/>
+                          </a:solidFill>
+                          <a:latin typeface="Calibri" pitchFamily="34" charset="0"/>
+                          <a:ea typeface="Calibri" pitchFamily="34" charset="-122"/>
+                          <a:cs typeface="Calibri" pitchFamily="34" charset="-120"/>
+                        </a:rPr>
+                        <a:t>N-cornered hat</a:t>
+                      </a:r>
+                      <a:endParaRPr lang="en-US" sz="1800" dirty="0">
+                        <a:latin typeface="Calibri" charset="0"/>
+                        <a:ea typeface="Calibri" charset="0"/>
+                        <a:cs typeface="Calibri" charset="0"/>
+                      </a:endParaRPr>
+                    </a:p>
+                  </a:txBody>
+                  <a:tcPr marL="45720" marR="45720" marT="45720" marB="45720" anchor="ctr">
+                    <a:lnL w="9525" cap="flat" cmpd="sng" algn="ctr">
+                      <a:solidFill>
+                        <a:srgbClr val="D9D4D0"/>
+                      </a:solidFill>
+                      <a:prstDash val="solid"/>
+                      <a:round/>
+                      <a:headEnd type="none" w="med" len="med"/>
+                      <a:tailEnd type="none" w="med" len="med"/>
+                    </a:lnL>
+                    <a:lnR w="9525" cap="flat" cmpd="sng" algn="ctr">
+                      <a:solidFill>
+                        <a:srgbClr val="D9D4D0"/>
+                      </a:solidFill>
+                      <a:prstDash val="solid"/>
+                      <a:round/>
+                      <a:headEnd type="none" w="med" len="med"/>
+                      <a:tailEnd type="none" w="med" len="med"/>
+                    </a:lnR>
+                    <a:lnT w="9525" cap="flat" cmpd="sng" algn="ctr">
+                      <a:solidFill>
+                        <a:srgbClr val="D9D4D0"/>
+                      </a:solidFill>
+                      <a:prstDash val="solid"/>
+                      <a:round/>
+                      <a:headEnd type="none" w="med" len="med"/>
+                      <a:tailEnd type="none" w="med" len="med"/>
+                    </a:lnT>
+                    <a:lnB w="9525" cap="flat" cmpd="sng" algn="ctr">
+                      <a:solidFill>
+                        <a:srgbClr val="D9D4D0"/>
+                      </a:solidFill>
+                      <a:prstDash val="solid"/>
+                      <a:round/>
+                      <a:headEnd type="none" w="med" len="med"/>
+                      <a:tailEnd type="none" w="med" len="med"/>
+                    </a:lnB>
+                    <a:solidFill>
+                      <a:srgbClr val="F7F2F3"/>
+                    </a:solidFill>
+                  </a:tcPr>
+                </a:tc>
+                <a:tc>
+                  <a:txBody>
+                    <a:bodyPr/>
+                    <a:lstStyle/>
+                    <a:p>
+                      <a:pPr algn="ctr" indent="0" marL="0">
+                        <a:buNone/>
+                      </a:pPr>
+                      <a:r>
+                        <a:rPr lang="en-US" sz="1800" dirty="0">
+                          <a:solidFill>
+                            <a:srgbClr val="0B0B0B"/>
+                          </a:solidFill>
+                          <a:latin typeface="Calibri" pitchFamily="34" charset="0"/>
+                          <a:ea typeface="Calibri" pitchFamily="34" charset="-122"/>
+                          <a:cs typeface="Calibri" pitchFamily="34" charset="-120"/>
+                        </a:rPr>
+                        <a:t>three clocks</a:t>
+                      </a:r>
+                      <a:endParaRPr lang="en-US" sz="1800" dirty="0">
+                        <a:latin typeface="Calibri" charset="0"/>
+                        <a:ea typeface="Calibri" charset="0"/>
+                        <a:cs typeface="Calibri" charset="0"/>
+                      </a:endParaRPr>
+                    </a:p>
+                  </a:txBody>
+                  <a:tcPr marL="45720" marR="45720" marT="45720" marB="45720" anchor="ctr">
+                    <a:lnL w="9525" cap="flat" cmpd="sng" algn="ctr">
+                      <a:solidFill>
+                        <a:srgbClr val="D9D4D0"/>
+                      </a:solidFill>
+                      <a:prstDash val="solid"/>
+                      <a:round/>
+                      <a:headEnd type="none" w="med" len="med"/>
+                      <a:tailEnd type="none" w="med" len="med"/>
+                    </a:lnL>
+                    <a:lnR w="9525" cap="flat" cmpd="sng" algn="ctr">
+                      <a:solidFill>
+                        <a:srgbClr val="D9D4D0"/>
+                      </a:solidFill>
+                      <a:prstDash val="solid"/>
+                      <a:round/>
+                      <a:headEnd type="none" w="med" len="med"/>
+                      <a:tailEnd type="none" w="med" len="med"/>
+                    </a:lnR>
+                    <a:lnT w="9525" cap="flat" cmpd="sng" algn="ctr">
+                      <a:solidFill>
+                        <a:srgbClr val="D9D4D0"/>
+                      </a:solidFill>
+                      <a:prstDash val="solid"/>
+                      <a:round/>
+                      <a:headEnd type="none" w="med" len="med"/>
+                      <a:tailEnd type="none" w="med" len="med"/>
+                    </a:lnT>
+                    <a:lnB w="9525" cap="flat" cmpd="sng" algn="ctr">
+                      <a:solidFill>
+                        <a:srgbClr val="D9D4D0"/>
+                      </a:solidFill>
+                      <a:prstDash val="solid"/>
+                      <a:round/>
+                      <a:headEnd type="none" w="med" len="med"/>
+                      <a:tailEnd type="none" w="med" len="med"/>
+                    </a:lnB>
+                    <a:solidFill>
+                      <a:srgbClr val="F7F2F3"/>
+                    </a:solidFill>
+                  </a:tcPr>
+                </a:tc>
+                <a:tc>
+                  <a:txBody>
+                    <a:bodyPr/>
+                    <a:lstStyle/>
+                    <a:p>
+                      <a:pPr algn="ctr" indent="0" marL="0">
+                        <a:buNone/>
+                      </a:pPr>
+                      <a:r>
+                        <a:rPr lang="en-US" sz="1800" dirty="0">
+                          <a:solidFill>
+                            <a:srgbClr val="0B0B0B"/>
+                          </a:solidFill>
+                          <a:latin typeface="Calibri" pitchFamily="34" charset="0"/>
+                          <a:ea typeface="Calibri" pitchFamily="34" charset="-122"/>
+                          <a:cs typeface="Calibri" pitchFamily="34" charset="-120"/>
+                        </a:rPr>
+                        <a:t>three clocks</a:t>
+                      </a:r>
+                      <a:endParaRPr lang="en-US" sz="1800" dirty="0">
+                        <a:latin typeface="Calibri" charset="0"/>
+                        <a:ea typeface="Calibri" charset="0"/>
+                        <a:cs typeface="Calibri" charset="0"/>
+                      </a:endParaRPr>
+                    </a:p>
+                  </a:txBody>
+                  <a:tcPr marL="45720" marR="45720" marT="45720" marB="45720" anchor="ctr">
+                    <a:lnL w="9525" cap="flat" cmpd="sng" algn="ctr">
+                      <a:solidFill>
+                        <a:srgbClr val="D9D4D0"/>
+                      </a:solidFill>
+                      <a:prstDash val="solid"/>
+                      <a:round/>
+                      <a:headEnd type="none" w="med" len="med"/>
+                      <a:tailEnd type="none" w="med" len="med"/>
+                    </a:lnL>
+                    <a:lnR w="9525" cap="flat" cmpd="sng" algn="ctr">
+                      <a:solidFill>
+                        <a:srgbClr val="D9D4D0"/>
+                      </a:solidFill>
+                      <a:prstDash val="solid"/>
+                      <a:round/>
+                      <a:headEnd type="none" w="med" len="med"/>
+                      <a:tailEnd type="none" w="med" len="med"/>
+                    </a:lnR>
+                    <a:lnT w="9525" cap="flat" cmpd="sng" algn="ctr">
+                      <a:solidFill>
+                        <a:srgbClr val="D9D4D0"/>
+                      </a:solidFill>
+                      <a:prstDash val="solid"/>
+                      <a:round/>
+                      <a:headEnd type="none" w="med" len="med"/>
+                      <a:tailEnd type="none" w="med" len="med"/>
+                    </a:lnT>
+                    <a:lnB w="9525" cap="flat" cmpd="sng" algn="ctr">
+                      <a:solidFill>
+                        <a:srgbClr val="D9D4D0"/>
+                      </a:solidFill>
+                      <a:prstDash val="solid"/>
+                      <a:round/>
+                      <a:headEnd type="none" w="med" len="med"/>
+                      <a:tailEnd type="none" w="med" len="med"/>
+                    </a:lnB>
+                    <a:solidFill>
+                      <a:srgbClr val="F7F2F3"/>
+                    </a:solidFill>
+                  </a:tcPr>
+                </a:tc>
+                <a:tc>
+                  <a:txBody>
+                    <a:bodyPr/>
+                    <a:lstStyle/>
+                    <a:p>
+                      <a:pPr algn="ctr" indent="0" marL="0">
+                        <a:buNone/>
+                      </a:pPr>
+                      <a:r>
+                        <a:rPr lang="en-US" sz="1800" dirty="0">
+                          <a:solidFill>
+                            <a:srgbClr val="0B0B0B"/>
+                          </a:solidFill>
+                          <a:latin typeface="Calibri" pitchFamily="34" charset="0"/>
+                          <a:ea typeface="Calibri" pitchFamily="34" charset="-122"/>
+                          <a:cs typeface="Calibri" pitchFamily="34" charset="-120"/>
+                        </a:rPr>
+                        <a:t>N ≥ 3</a:t>
+                      </a:r>
+                      <a:endParaRPr lang="en-US" sz="1800" dirty="0">
+                        <a:latin typeface="Calibri" charset="0"/>
+                        <a:ea typeface="Calibri" charset="0"/>
+                        <a:cs typeface="Calibri" charset="0"/>
+                      </a:endParaRPr>
+                    </a:p>
+                  </a:txBody>
+                  <a:tcPr marL="45720" marR="45720" marT="45720" marB="45720" anchor="ctr">
+                    <a:lnL w="9525" cap="flat" cmpd="sng" algn="ctr">
+                      <a:solidFill>
+                        <a:srgbClr val="D9D4D0"/>
+                      </a:solidFill>
+                      <a:prstDash val="solid"/>
+                      <a:round/>
+                      <a:headEnd type="none" w="med" len="med"/>
+                      <a:tailEnd type="none" w="med" len="med"/>
+                    </a:lnL>
+                    <a:lnR w="9525" cap="flat" cmpd="sng" algn="ctr">
+                      <a:solidFill>
+                        <a:srgbClr val="D9D4D0"/>
+                      </a:solidFill>
+                      <a:prstDash val="solid"/>
+                      <a:round/>
+                      <a:headEnd type="none" w="med" len="med"/>
+                      <a:tailEnd type="none" w="med" len="med"/>
+                    </a:lnR>
+                    <a:lnT w="9525" cap="flat" cmpd="sng" algn="ctr">
+                      <a:solidFill>
+                        <a:srgbClr val="D9D4D0"/>
+                      </a:solidFill>
+                      <a:prstDash val="solid"/>
+                      <a:round/>
+                      <a:headEnd type="none" w="med" len="med"/>
+                      <a:tailEnd type="none" w="med" len="med"/>
+                    </a:lnT>
+                    <a:lnB w="9525" cap="flat" cmpd="sng" algn="ctr">
+                      <a:solidFill>
+                        <a:srgbClr val="D9D4D0"/>
+                      </a:solidFill>
+                      <a:prstDash val="solid"/>
+                      <a:round/>
+                      <a:headEnd type="none" w="med" len="med"/>
+                      <a:tailEnd type="none" w="med" len="med"/>
+                    </a:lnB>
+                    <a:solidFill>
+                      <a:srgbClr val="F7F2F3"/>
+                    </a:solidFill>
+                  </a:tcPr>
+                </a:tc>
+              </a:tr>
+              <a:tr h="384048">
+                <a:tc>
+                  <a:txBody>
+                    <a:bodyPr/>
+                    <a:lstStyle/>
+                    <a:p>
+                      <a:pPr algn="l" indent="0" marL="0">
+                        <a:buNone/>
+                      </a:pPr>
+                      <a:r>
+                        <a:rPr lang="en-US" sz="1800" dirty="0">
+                          <a:solidFill>
+                            <a:srgbClr val="0B0B0B"/>
+                          </a:solidFill>
+                          <a:latin typeface="Calibri" pitchFamily="34" charset="0"/>
+                          <a:ea typeface="Calibri" pitchFamily="34" charset="-122"/>
+                          <a:cs typeface="Calibri" pitchFamily="34" charset="-120"/>
+                        </a:rPr>
+                        <a:t>Multithreaded kernels</a:t>
+                      </a:r>
+                      <a:endParaRPr lang="en-US" sz="1800" dirty="0">
+                        <a:latin typeface="Calibri" charset="0"/>
+                        <a:ea typeface="Calibri" charset="0"/>
+                        <a:cs typeface="Calibri" charset="0"/>
+                      </a:endParaRPr>
+                    </a:p>
+                  </a:txBody>
+                  <a:tcPr marL="45720" marR="45720" marT="45720" marB="45720" anchor="ctr">
+                    <a:lnL w="9525" cap="flat" cmpd="sng" algn="ctr">
+                      <a:solidFill>
+                        <a:srgbClr val="D9D4D0"/>
+                      </a:solidFill>
+                      <a:prstDash val="solid"/>
+                      <a:round/>
+                      <a:headEnd type="none" w="med" len="med"/>
+                      <a:tailEnd type="none" w="med" len="med"/>
+                    </a:lnL>
+                    <a:lnR w="9525" cap="flat" cmpd="sng" algn="ctr">
+                      <a:solidFill>
+                        <a:srgbClr val="D9D4D0"/>
+                      </a:solidFill>
+                      <a:prstDash val="solid"/>
+                      <a:round/>
+                      <a:headEnd type="none" w="med" len="med"/>
+                      <a:tailEnd type="none" w="med" len="med"/>
+                    </a:lnR>
+                    <a:lnT w="9525" cap="flat" cmpd="sng" algn="ctr">
+                      <a:solidFill>
+                        <a:srgbClr val="D9D4D0"/>
+                      </a:solidFill>
+                      <a:prstDash val="solid"/>
+                      <a:round/>
+                      <a:headEnd type="none" w="med" len="med"/>
+                      <a:tailEnd type="none" w="med" len="med"/>
+                    </a:lnT>
+                    <a:lnB w="9525" cap="flat" cmpd="sng" algn="ctr">
+                      <a:solidFill>
+                        <a:srgbClr val="D9D4D0"/>
+                      </a:solidFill>
+                      <a:prstDash val="solid"/>
+                      <a:round/>
+                      <a:headEnd type="none" w="med" len="med"/>
+                      <a:tailEnd type="none" w="med" len="med"/>
+                    </a:lnB>
+                    <a:solidFill>
+                      <a:srgbClr val="FFFFFF"/>
+                    </a:solidFill>
+                  </a:tcPr>
+                </a:tc>
+                <a:tc>
+                  <a:txBody>
+                    <a:bodyPr/>
+                    <a:lstStyle/>
+                    <a:p>
+                      <a:pPr algn="ctr" indent="0" marL="0">
+                        <a:buNone/>
+                      </a:pPr>
+                      <a:r>
+                        <a:rPr lang="en-US" sz="1800" dirty="0">
+                          <a:solidFill>
+                            <a:srgbClr val="0B0B0B"/>
+                          </a:solidFill>
+                          <a:latin typeface="Calibri" pitchFamily="34" charset="0"/>
+                          <a:ea typeface="Calibri" pitchFamily="34" charset="-122"/>
+                          <a:cs typeface="Calibri" pitchFamily="34" charset="-120"/>
+                        </a:rPr>
+                        <a:t>n/a</a:t>
+                      </a:r>
+                      <a:endParaRPr lang="en-US" sz="1800" dirty="0">
+                        <a:latin typeface="Calibri" charset="0"/>
+                        <a:ea typeface="Calibri" charset="0"/>
+                        <a:cs typeface="Calibri" charset="0"/>
+                      </a:endParaRPr>
+                    </a:p>
+                  </a:txBody>
+                  <a:tcPr marL="45720" marR="45720" marT="45720" marB="45720" anchor="ctr">
+                    <a:lnL w="9525" cap="flat" cmpd="sng" algn="ctr">
+                      <a:solidFill>
+                        <a:srgbClr val="D9D4D0"/>
+                      </a:solidFill>
+                      <a:prstDash val="solid"/>
+                      <a:round/>
+                      <a:headEnd type="none" w="med" len="med"/>
+                      <a:tailEnd type="none" w="med" len="med"/>
+                    </a:lnL>
+                    <a:lnR w="9525" cap="flat" cmpd="sng" algn="ctr">
+                      <a:solidFill>
+                        <a:srgbClr val="D9D4D0"/>
+                      </a:solidFill>
+                      <a:prstDash val="solid"/>
+                      <a:round/>
+                      <a:headEnd type="none" w="med" len="med"/>
+                      <a:tailEnd type="none" w="med" len="med"/>
+                    </a:lnR>
+                    <a:lnT w="9525" cap="flat" cmpd="sng" algn="ctr">
+                      <a:solidFill>
+                        <a:srgbClr val="D9D4D0"/>
+                      </a:solidFill>
+                      <a:prstDash val="solid"/>
+                      <a:round/>
+                      <a:headEnd type="none" w="med" len="med"/>
+                      <a:tailEnd type="none" w="med" len="med"/>
+                    </a:lnT>
+                    <a:lnB w="9525" cap="flat" cmpd="sng" algn="ctr">
+                      <a:solidFill>
+                        <a:srgbClr val="D9D4D0"/>
+                      </a:solidFill>
+                      <a:prstDash val="solid"/>
+                      <a:round/>
+                      <a:headEnd type="none" w="med" len="med"/>
+                      <a:tailEnd type="none" w="med" len="med"/>
+                    </a:lnB>
+                    <a:solidFill>
+                      <a:srgbClr val="FFFFFF"/>
+                    </a:solidFill>
+                  </a:tcPr>
+                </a:tc>
+                <a:tc>
+                  <a:txBody>
+                    <a:bodyPr/>
+                    <a:lstStyle/>
+                    <a:p>
+                      <a:pPr algn="ctr" indent="0" marL="0">
+                        <a:buNone/>
+                      </a:pPr>
+                      <a:r>
+                        <a:rPr lang="en-US" sz="1800" dirty="0">
+                          <a:solidFill>
+                            <a:srgbClr val="0B0B0B"/>
+                          </a:solidFill>
+                          <a:latin typeface="Calibri" pitchFamily="34" charset="0"/>
+                          <a:ea typeface="Calibri" pitchFamily="34" charset="-122"/>
+                          <a:cs typeface="Calibri" pitchFamily="34" charset="-120"/>
+                        </a:rPr>
+                        <a:t>no</a:t>
+                      </a:r>
+                      <a:endParaRPr lang="en-US" sz="1800" dirty="0">
+                        <a:latin typeface="Calibri" charset="0"/>
+                        <a:ea typeface="Calibri" charset="0"/>
+                        <a:cs typeface="Calibri" charset="0"/>
+                      </a:endParaRPr>
+                    </a:p>
+                  </a:txBody>
+                  <a:tcPr marL="45720" marR="45720" marT="45720" marB="45720" anchor="ctr">
+                    <a:lnL w="9525" cap="flat" cmpd="sng" algn="ctr">
+                      <a:solidFill>
+                        <a:srgbClr val="D9D4D0"/>
+                      </a:solidFill>
+                      <a:prstDash val="solid"/>
+                      <a:round/>
+                      <a:headEnd type="none" w="med" len="med"/>
+                      <a:tailEnd type="none" w="med" len="med"/>
+                    </a:lnL>
+                    <a:lnR w="9525" cap="flat" cmpd="sng" algn="ctr">
+                      <a:solidFill>
+                        <a:srgbClr val="D9D4D0"/>
+                      </a:solidFill>
+                      <a:prstDash val="solid"/>
+                      <a:round/>
+                      <a:headEnd type="none" w="med" len="med"/>
+                      <a:tailEnd type="none" w="med" len="med"/>
+                    </a:lnR>
+                    <a:lnT w="9525" cap="flat" cmpd="sng" algn="ctr">
+                      <a:solidFill>
+                        <a:srgbClr val="D9D4D0"/>
+                      </a:solidFill>
+                      <a:prstDash val="solid"/>
+                      <a:round/>
+                      <a:headEnd type="none" w="med" len="med"/>
+                      <a:tailEnd type="none" w="med" len="med"/>
+                    </a:lnT>
+                    <a:lnB w="9525" cap="flat" cmpd="sng" algn="ctr">
+                      <a:solidFill>
+                        <a:srgbClr val="D9D4D0"/>
+                      </a:solidFill>
+                      <a:prstDash val="solid"/>
+                      <a:round/>
+                      <a:headEnd type="none" w="med" len="med"/>
+                      <a:tailEnd type="none" w="med" len="med"/>
+                    </a:lnB>
+                    <a:solidFill>
+                      <a:srgbClr val="FFFFFF"/>
+                    </a:solidFill>
+                  </a:tcPr>
+                </a:tc>
+                <a:tc>
+                  <a:txBody>
+                    <a:bodyPr/>
+                    <a:lstStyle/>
+                    <a:p>
+                      <a:pPr algn="ctr" indent="0" marL="0">
+                        <a:buNone/>
+                      </a:pPr>
+                      <a:r>
+                        <a:rPr lang="en-US" sz="1800" dirty="0">
+                          <a:solidFill>
+                            <a:srgbClr val="0B0B0B"/>
+                          </a:solidFill>
+                          <a:latin typeface="Calibri" pitchFamily="34" charset="0"/>
+                          <a:ea typeface="Calibri" pitchFamily="34" charset="-122"/>
+                          <a:cs typeface="Calibri" pitchFamily="34" charset="-120"/>
+                        </a:rPr>
+                        <a:t>yes</a:t>
+                      </a:r>
+                      <a:endParaRPr lang="en-US" sz="1800" dirty="0">
+                        <a:latin typeface="Calibri" charset="0"/>
+                        <a:ea typeface="Calibri" charset="0"/>
+                        <a:cs typeface="Calibri" charset="0"/>
+                      </a:endParaRPr>
+                    </a:p>
+                  </a:txBody>
+                  <a:tcPr marL="45720" marR="45720" marT="45720" marB="45720" anchor="ctr">
+                    <a:lnL w="9525" cap="flat" cmpd="sng" algn="ctr">
+                      <a:solidFill>
+                        <a:srgbClr val="D9D4D0"/>
+                      </a:solidFill>
+                      <a:prstDash val="solid"/>
+                      <a:round/>
+                      <a:headEnd type="none" w="med" len="med"/>
+                      <a:tailEnd type="none" w="med" len="med"/>
+                    </a:lnL>
+                    <a:lnR w="9525" cap="flat" cmpd="sng" algn="ctr">
+                      <a:solidFill>
+                        <a:srgbClr val="D9D4D0"/>
+                      </a:solidFill>
+                      <a:prstDash val="solid"/>
+                      <a:round/>
+                      <a:headEnd type="none" w="med" len="med"/>
+                      <a:tailEnd type="none" w="med" len="med"/>
+                    </a:lnR>
+                    <a:lnT w="9525" cap="flat" cmpd="sng" algn="ctr">
+                      <a:solidFill>
+                        <a:srgbClr val="D9D4D0"/>
+                      </a:solidFill>
+                      <a:prstDash val="solid"/>
+                      <a:round/>
+                      <a:headEnd type="none" w="med" len="med"/>
+                      <a:tailEnd type="none" w="med" len="med"/>
+                    </a:lnT>
+                    <a:lnB w="9525" cap="flat" cmpd="sng" algn="ctr">
+                      <a:solidFill>
+                        <a:srgbClr val="D9D4D0"/>
+                      </a:solidFill>
+                      <a:prstDash val="solid"/>
+                      <a:round/>
+                      <a:headEnd type="none" w="med" len="med"/>
+                      <a:tailEnd type="none" w="med" len="med"/>
+                    </a:lnB>
+                    <a:solidFill>
+                      <a:srgbClr val="FFFFFF"/>
+                    </a:solidFill>
+                  </a:tcPr>
+                </a:tc>
+              </a:tr>
+            </a:tbl>
+          </a:graphicData>
+        </a:graphic>
+      </p:graphicFrame>
+      <p:sp>
+        <p:nvSpPr>
+          <p:cNvPr id="12" name="Shape 9"/>
+          <p:cNvSpPr/>
+          <p:nvPr/>
+        </p:nvSpPr>
+        <p:spPr>
+          <a:xfrm>
+            <a:off x="914400" y="18493740"/>
+            <a:ext cx="11094720" cy="7645718"/>
           </a:xfrm>
           <a:prstGeom prst="rect">
             <a:avLst/>
@@ -1778,7 +4231,134 @@
       </p:sp>
       <p:sp>
         <p:nvSpPr>
-          <p:cNvPr id="18" name="Heading"/>
+          <p:cNvPr id="13" name="Heading"/>
+          <p:cNvSpPr txBox="1"/>
+          <p:nvPr/>
+        </p:nvSpPr>
+        <p:spPr>
+          <a:xfrm>
+            <a:off x="1234440" y="18813780"/>
+            <a:ext cx="10454640" cy="527685"/>
+          </a:xfrm>
+          <a:prstGeom prst="rect">
+            <a:avLst/>
+          </a:prstGeom>
+          <a:noFill/>
+          <a:ln/>
+        </p:spPr>
+        <p:txBody>
+          <a:bodyPr wrap="square" lIns="0" tIns="0" rIns="0" bIns="0" rtlCol="0" anchor="t"/>
+          <a:lstStyle/>
+          <a:p>
+            <a:pPr indent="0" marL="0">
+              <a:buNone/>
+            </a:pPr>
+            <a:r>
+              <a:rPr lang="en-US" sz="3300" b="1" dirty="0">
+                <a:solidFill>
+                  <a:srgbClr val="9E1B32"/>
+                </a:solidFill>
+                <a:latin typeface="Calibri" pitchFamily="34" charset="0"/>
+                <a:ea typeface="Calibri" pitchFamily="34" charset="-122"/>
+                <a:cs typeface="Calibri" pitchFamily="34" charset="-120"/>
+              </a:rPr>
+              <a:t>Deviation, noise type and interval at every τ</a:t>
+            </a:r>
+            <a:endParaRPr lang="en-US" sz="3300" dirty="0"/>
+          </a:p>
+        </p:txBody>
+      </p:sp>
+      <p:pic>
+        <p:nvPicPr>
+          <p:cNvPr id="14" name="F1_suite" descr="/home/user/SigmaTau.jl/poster/figures/F1_suite.png">    </p:cNvPr>
+          <p:cNvPicPr>
+            <a:picLocks noChangeAspect="1"/>
+          </p:cNvPicPr>
+          <p:nvPr/>
+        </p:nvPicPr>
+        <p:blipFill>
+          <a:blip r:embed="rId1"/>
+          <a:stretch>
+            <a:fillRect/>
+          </a:stretch>
+        </p:blipFill>
+        <p:spPr>
+          <a:xfrm>
+            <a:off x="2890605" y="19506057"/>
+            <a:ext cx="7142310" cy="5303520"/>
+          </a:xfrm>
+          <a:prstGeom prst="rect">
+            <a:avLst/>
+          </a:prstGeom>
+        </p:spPr>
+      </p:pic>
+      <p:sp>
+        <p:nvSpPr>
+          <p:cNvPr id="15" name="Caption"/>
+          <p:cNvSpPr txBox="1"/>
+          <p:nvPr/>
+        </p:nvSpPr>
+        <p:spPr>
+          <a:xfrm>
+            <a:off x="1234440" y="24919305"/>
+            <a:ext cx="10454640" cy="900112"/>
+          </a:xfrm>
+          <a:prstGeom prst="rect">
+            <a:avLst/>
+          </a:prstGeom>
+          <a:noFill/>
+          <a:ln/>
+        </p:spPr>
+        <p:txBody>
+          <a:bodyPr wrap="square" lIns="0" tIns="0" rIns="0" bIns="0" rtlCol="0" anchor="t"/>
+          <a:lstStyle/>
+          <a:p>
+            <a:pPr indent="0" marL="0">
+              <a:buNone/>
+            </a:pPr>
+            <a:r>
+              <a:rPr lang="en-US" sz="1950" dirty="0">
+                <a:solidFill>
+                  <a:srgbClr val="52514E"/>
+                </a:solidFill>
+                <a:latin typeface="Calibri" pitchFamily="34" charset="0"/>
+                <a:ea typeface="Calibri" pitchFamily="34" charset="-122"/>
+                <a:cs typeface="Calibri" pitchFamily="34" charset="-120"/>
+              </a:rPr>
+              <a:t>Fig. 1. One call on the shipped 8192-point validation record (τ₀ = 1 s): five estimators with 68.3 % χ² intervals from the per-τ identified noise type. The totals reach further (TOTDEV to τ = T/2, HTOTDEV to T/3) with tighter long-τ bounds; MDEV separates white from flicker PM.</a:t>
+            </a:r>
+            <a:endParaRPr lang="en-US" sz="1950" dirty="0"/>
+          </a:p>
+        </p:txBody>
+      </p:sp>
+      <p:sp>
+        <p:nvSpPr>
+          <p:cNvPr id="16" name="Shape 12"/>
+          <p:cNvSpPr/>
+          <p:nvPr/>
+        </p:nvSpPr>
+        <p:spPr>
+          <a:xfrm>
+            <a:off x="12740640" y="4206240"/>
+            <a:ext cx="11094720" cy="10701528"/>
+          </a:xfrm>
+          <a:prstGeom prst="rect">
+            <a:avLst/>
+          </a:prstGeom>
+          <a:solidFill>
+            <a:srgbClr val="FFFFFF"/>
+          </a:solidFill>
+          <a:ln w="12700">
+            <a:solidFill>
+              <a:srgbClr val="D9D4D0"/>
+            </a:solidFill>
+            <a:prstDash val="solid"/>
+          </a:ln>
+        </p:spPr>
+      </p:sp>
+      <p:sp>
+        <p:nvSpPr>
+          <p:cNvPr id="17" name="Heading"/>
           <p:cNvSpPr txBox="1"/>
           <p:nvPr/>
         </p:nvSpPr>
@@ -1809,7 +4389,7 @@
                 <a:ea typeface="Calibri" pitchFamily="34" charset="-122"/>
                 <a:cs typeface="Calibri" pitchFamily="34" charset="-120"/>
               </a:rPr>
-              <a:t>MHTOTDEV: a modified-Hadamard total deviation with no published coefficients</a:t>
+              <a:t>Matches Stable32 to its printed precision and allantools to machine precision</a:t>
             </a:r>
             <a:endParaRPr lang="en-US" sz="3300" dirty="0"/>
           </a:p>
@@ -1817,14 +4397,14 @@
       </p:sp>
       <p:sp>
         <p:nvSpPr>
-          <p:cNvPr id="19" name="Body"/>
+          <p:cNvPr id="18" name="Body"/>
           <p:cNvSpPr txBox="1"/>
           <p:nvPr/>
         </p:nvSpPr>
         <p:spPr>
           <a:xfrm>
             <a:off x="13060680" y="5700522"/>
-            <a:ext cx="10454640" cy="1844040"/>
+            <a:ext cx="10454640" cy="2545080"/>
           </a:xfrm>
           <a:prstGeom prst="rect">
             <a:avLst/>
@@ -1851,7 +4431,7 @@
                 <a:ea typeface="Calibri" pitchFamily="34" charset="-122"/>
                 <a:cs typeface="Calibri" pitchFamily="34" charset="-120"/>
               </a:rPr>
-              <a:t>The Hadamard (third-difference) family rejects linear frequency drift; the modified form separates white from flicker PM; the total form extends each window by reflection to recover confidence at long τ. MHTOTDEV combines all three. Every other total estimator inherits a published bias and EDF table; this one had none, so both were measured.</a:t>
+              <a:t>Shipped fixture: an 8192-point phase record with Stable32 and allantools outputs beside it. ADEV, MDEV, TDEV and HDEV agree with Stable32 to ≤ 0.005 % (its five significant figures) and with allantools to ≤ 1 × 10⁻¹³; the raw total kernels agree with allantools to ≤ 4.4 × 10⁻¹⁵; confidence bounds agree with Stable32 to ≤ 0.05 % at 11 of 12 τ. Where a default differs from a reference (MTOTDEV bias policy, noise-ID detrending), the per-τ tables name the keyword that reproduces the reference.</a:t>
             </a:r>
             <a:endParaRPr lang="en-US" sz="2400" dirty="0"/>
           </a:p>
@@ -1859,7 +4439,7 @@
       </p:sp>
       <p:pic>
         <p:nvPicPr>
-          <p:cNvPr id="20" name="F6_mhtot_construction" descr="/home/user/SigmaTau.jl/poster/figures/F6_mhtot_construction.png">    </p:cNvPr>
+          <p:cNvPr id="19" name="F2_validation" descr="/home/user/SigmaTau.jl/poster/figures/F2_validation.png">    </p:cNvPr>
           <p:cNvPicPr>
             <a:picLocks noChangeAspect="1"/>
           </p:cNvPicPr>
@@ -1873,8 +4453,8 @@
         </p:blipFill>
         <p:spPr>
           <a:xfrm>
-            <a:off x="15733979" y="7654290"/>
-            <a:ext cx="5108042" cy="3749040"/>
+            <a:off x="13902693" y="8355330"/>
+            <a:ext cx="8770615" cy="4937760"/>
           </a:xfrm>
           <a:prstGeom prst="rect">
             <a:avLst/>
@@ -1883,14 +4463,14 @@
       </p:pic>
       <p:sp>
         <p:nvSpPr>
-          <p:cNvPr id="21" name="Caption"/>
+          <p:cNvPr id="20" name="Caption"/>
           <p:cNvSpPr txBox="1"/>
           <p:nvPr/>
         </p:nvSpPr>
         <p:spPr>
           <a:xfrm>
-            <a:off x="13060680" y="11513058"/>
-            <a:ext cx="10454640" cy="1469708"/>
+            <a:off x="13060680" y="13402818"/>
+            <a:ext cx="10454640" cy="1184910"/>
           </a:xfrm>
           <a:prstGeom prst="rect">
             <a:avLst/>
@@ -1914,7 +4494,7 @@
                 <a:ea typeface="Calibri" pitchFamily="34" charset="-122"/>
                 <a:cs typeface="Calibri" pitchFamily="34" charset="-120"/>
               </a:rPr>
-              <a:t>Fig. 2. Construction (Greenhall scheme, as for MTOTDEV and HTOTDEV): each of the N − 4m + 1 windows of length L = 4m has its half-mean slope removed and is extended by two time-reversed copies; the third difference at lag m is averaged over m positions, squared, normalised by 6m²τ² and averaged over all windows. The public call first removes the record's least-squares frequency drift.</a:t>
+              <a:t>Fig. 2. Relative difference to Stable32 at every τ for seven estimators. Filled points lie at or below the 5 × 10⁻⁵ floor set by Stable32's printed precision; open points are the τ = 256 s noise-ID convention (Stable32 α = +2, detrended identifier α = 0). MTOTDEV compared raw, as Stable32 reports the uncorrected statistic.</a:t>
             </a:r>
             <a:endParaRPr lang="en-US" sz="1950" dirty="0"/>
           </a:p>
@@ -1922,14 +4502,14 @@
       </p:sp>
       <p:sp>
         <p:nvSpPr>
-          <p:cNvPr id="22" name="Shape 18"/>
+          <p:cNvPr id="21" name="Shape 16"/>
           <p:cNvSpPr/>
           <p:nvPr/>
         </p:nvSpPr>
         <p:spPr>
           <a:xfrm>
-            <a:off x="12740640" y="13714285"/>
-            <a:ext cx="11094720" cy="13236956"/>
+            <a:off x="12740640" y="15319248"/>
+            <a:ext cx="11094720" cy="9700451"/>
           </a:xfrm>
           <a:prstGeom prst="rect">
             <a:avLst/>
@@ -1947,13 +4527,13 @@
       </p:sp>
       <p:sp>
         <p:nvSpPr>
-          <p:cNvPr id="23" name="Heading"/>
+          <p:cNvPr id="22" name="Heading"/>
           <p:cNvSpPr txBox="1"/>
           <p:nvPr/>
         </p:nvSpPr>
         <p:spPr>
           <a:xfrm>
-            <a:off x="13060680" y="14034325"/>
+            <a:off x="13060680" y="15639288"/>
             <a:ext cx="10454640" cy="1009650"/>
           </a:xfrm>
           <a:prstGeom prst="rect">
@@ -1978,7 +4558,7 @@
                 <a:ea typeface="Calibri" pitchFamily="34" charset="-122"/>
                 <a:cs typeface="Calibri" pitchFamily="34" charset="-120"/>
               </a:rPr>
-              <a:t>Monte Carlo against synthesized noise measures both the bias and the EDF</a:t>
+              <a:t>Modified totals on a 4 × 10⁵-sample record: 0.47 s instead of 30 min</a:t>
             </a:r>
             <a:endParaRPr lang="en-US" sz="3300" dirty="0"/>
           </a:p>
@@ -1986,14 +4566,14 @@
       </p:sp>
       <p:sp>
         <p:nvSpPr>
-          <p:cNvPr id="24" name="Bullets"/>
+          <p:cNvPr id="23" name="Body"/>
           <p:cNvSpPr txBox="1"/>
           <p:nvPr/>
         </p:nvSpPr>
         <p:spPr>
           <a:xfrm>
-            <a:off x="13060680" y="15208567"/>
-            <a:ext cx="10454640" cy="4124960"/>
+            <a:off x="13060680" y="16813530"/>
+            <a:ext cx="10454640" cy="2194560"/>
           </a:xfrm>
           <a:prstGeom prst="rect">
             <a:avLst/>
@@ -2005,25 +4585,10 @@
           <a:bodyPr wrap="square" lIns="0" tIns="0" rIns="0" bIns="0" rtlCol="0" anchor="t"/>
           <a:lstStyle/>
           <a:p>
-            <a:pPr marL="279400" indent="-279400">
+            <a:pPr indent="0" marL="0">
               <a:spcAft>
-                <a:spcPts val="700"/>
+                <a:spcPts val="800"/>
               </a:spcAft>
-              <a:buSzPct val="100000"/>
-              <a:buChar char="•"/>
-            </a:pPr>
-            <a:r>
-              <a:rPr lang="en-US" sz="2400" b="1" dirty="0">
-                <a:solidFill>
-                  <a:srgbClr val="0B0B0B"/>
-                </a:solidFill>
-                <a:latin typeface="Calibri" pitchFamily="34" charset="0"/>
-                <a:ea typeface="Calibri" pitchFamily="34" charset="-122"/>
-                <a:cs typeface="Calibri" pitchFamily="34" charset="-120"/>
-              </a:rPr>
-              <a:t>Design: </a:t>
-            </a:r>
-            <a:pPr indent="0" marL="0">
               <a:buNone/>
             </a:pPr>
             <a:r>
@@ -2035,105 +4600,7 @@
                 <a:ea typeface="Calibri" pitchFamily="34" charset="-122"/>
                 <a:cs typeface="Calibri" pitchFamily="34" charset="-120"/>
               </a:rPr>
-              <a:t>α ∈ {+2, +1, 0, −1, −2}; N ∈ {1024, …, 32768}; octave m grid; R = 3000 realizations per cell; one independent random stream per (seed, α, N, r). The statistic calibrated is the shipped pipeline, including its default drift removal.</a:t>
-            </a:r>
-            <a:endParaRPr lang="en-US" sz="2400" dirty="0"/>
-          </a:p>
-          <a:p>
-            <a:pPr marL="279400" indent="-279400">
-              <a:spcAft>
-                <a:spcPts val="700"/>
-              </a:spcAft>
-              <a:buSzPct val="100000"/>
-              <a:buChar char="•"/>
-            </a:pPr>
-            <a:r>
-              <a:rPr lang="en-US" sz="2400" b="1" dirty="0">
-                <a:solidFill>
-                  <a:srgbClr val="0B0B0B"/>
-                </a:solidFill>
-                <a:latin typeface="Calibri" pitchFamily="34" charset="0"/>
-                <a:ea typeface="Calibri" pitchFamily="34" charset="-122"/>
-                <a:cs typeface="Calibri" pitchFamily="34" charset="-120"/>
-              </a:rPr>
-              <a:t>Reference: </a:t>
-            </a:r>
-            <a:pPr indent="0" marL="0">
-              <a:buNone/>
-            </a:pPr>
-            <a:r>
-              <a:rPr lang="en-US" sz="2400" dirty="0">
-                <a:solidFill>
-                  <a:srgbClr val="0B0B0B"/>
-                </a:solidFill>
-                <a:latin typeface="Calibri" pitchFamily="34" charset="0"/>
-                <a:ea typeface="Calibri" pitchFamily="34" charset="-122"/>
-                <a:cs typeface="Calibri" pitchFamily="34" charset="-120"/>
-              </a:rPr>
-              <a:t>MHDEV on the same realization (its EDF follows from the Greenhall–Riley spectral sum). Bias B = E[MHTOTVAR] / E[MHVAR]; EDF = 2 mean(V)</a:t>
-            </a:r>
-            <a:pPr indent="0" marL="0">
-              <a:buNone/>
-            </a:pPr>
-            <a:r>
-              <a:rPr lang="en-US" sz="2400" baseline="30000" dirty="0">
-                <a:solidFill>
-                  <a:srgbClr val="0B0B0B"/>
-                </a:solidFill>
-                <a:latin typeface="Calibri" pitchFamily="34" charset="0"/>
-                <a:ea typeface="Calibri" pitchFamily="34" charset="-122"/>
-                <a:cs typeface="Calibri" pitchFamily="34" charset="-120"/>
-              </a:rPr>
-              <a:t>2</a:t>
-            </a:r>
-            <a:pPr indent="0" marL="0">
-              <a:buNone/>
-            </a:pPr>
-            <a:r>
-              <a:rPr lang="en-US" sz="2400" dirty="0">
-                <a:solidFill>
-                  <a:srgbClr val="0B0B0B"/>
-                </a:solidFill>
-                <a:latin typeface="Calibri" pitchFamily="34" charset="0"/>
-                <a:ea typeface="Calibri" pitchFamily="34" charset="-122"/>
-                <a:cs typeface="Calibri" pitchFamily="34" charset="-120"/>
-              </a:rPr>
-              <a:t> / var(V), bootstrap standard error ≈ √(2/R) = 2.6 %.</a:t>
-            </a:r>
-            <a:endParaRPr lang="en-US" sz="2400" dirty="0"/>
-          </a:p>
-          <a:p>
-            <a:pPr marL="279400" indent="-279400">
-              <a:spcAft>
-                <a:spcPts val="700"/>
-              </a:spcAft>
-              <a:buSzPct val="100000"/>
-              <a:buChar char="•"/>
-            </a:pPr>
-            <a:r>
-              <a:rPr lang="en-US" sz="2400" b="1" dirty="0">
-                <a:solidFill>
-                  <a:srgbClr val="0B0B0B"/>
-                </a:solidFill>
-                <a:latin typeface="Calibri" pitchFamily="34" charset="0"/>
-                <a:ea typeface="Calibri" pitchFamily="34" charset="-122"/>
-                <a:cs typeface="Calibri" pitchFamily="34" charset="-120"/>
-              </a:rPr>
-              <a:t>Fits: </a:t>
-            </a:r>
-            <a:pPr indent="0" marL="0">
-              <a:buNone/>
-            </a:pPr>
-            <a:r>
-              <a:rPr lang="en-US" sz="2400" dirty="0">
-                <a:solidFill>
-                  <a:srgbClr val="0B0B0B"/>
-                </a:solidFill>
-                <a:latin typeface="Calibri" pitchFamily="34" charset="0"/>
-                <a:ea typeface="Calibri" pitchFamily="34" charset="-122"/>
-                <a:cs typeface="Calibri" pitchFamily="34" charset="-120"/>
-              </a:rPr>
-              <a:t>over τ/τ₀ ≥ 16, the validity window of the total-variance literature. EDF ν = b T/τ − c (Mod-Totvar; the TotHvar form is better by at most ΔR² = 8 × 10⁻⁴, at α = ±2) and bias B = b₀ + b₁ τ/T, both by weighted least squares.</a:t>
+              <a:t>Same samples, same τ grid, same statistic, kernel-only timing; allantools is single-threaded as it has no parallel path. On a measured 406 763-sample phase record MTOTDEV takes 0.469 s against 1 803.6 s and HTOTDEV 0.455 s against 1 928.0 s (3,842× and 4,233×). The gap is algorithmic as well as compiled-versus-interpreted: the reflected extension is streamed through a per-thread buffer and the window sum is split across threads.</a:t>
             </a:r>
             <a:endParaRPr lang="en-US" sz="2400" dirty="0"/>
           </a:p>
@@ -2141,7 +4608,7 @@
       </p:sp>
       <p:pic>
         <p:nvPicPr>
-          <p:cNvPr id="25" name="F4_mhtot_bias" descr="/home/user/SigmaTau.jl/poster/figures/F4_mhtot_bias.png">    </p:cNvPr>
+          <p:cNvPr id="24" name="F3_speed" descr="/home/user/SigmaTau.jl/poster/figures/F3_speed.png">    </p:cNvPr>
           <p:cNvPicPr>
             <a:picLocks noChangeAspect="1"/>
           </p:cNvPicPr>
@@ -2155,17 +4622,162 @@
         </p:blipFill>
         <p:spPr>
           <a:xfrm>
-            <a:off x="13577222" y="19443255"/>
-            <a:ext cx="4057075" cy="3520440"/>
+            <a:off x="14208763" y="19117818"/>
+            <a:ext cx="8158473" cy="4572000"/>
           </a:xfrm>
           <a:prstGeom prst="rect">
             <a:avLst/>
           </a:prstGeom>
         </p:spPr>
       </p:pic>
+      <p:sp>
+        <p:nvSpPr>
+          <p:cNvPr id="25" name="Caption"/>
+          <p:cNvSpPr txBox="1"/>
+          <p:nvPr/>
+        </p:nvSpPr>
+        <p:spPr>
+          <a:xfrm>
+            <a:off x="13060680" y="23799546"/>
+            <a:ext cx="10454640" cy="900112"/>
+          </a:xfrm>
+          <a:prstGeom prst="rect">
+            <a:avLst/>
+          </a:prstGeom>
+          <a:noFill/>
+          <a:ln/>
+        </p:spPr>
+        <p:txBody>
+          <a:bodyPr wrap="square" lIns="0" tIns="0" rIns="0" bIns="0" rtlCol="0" anchor="t"/>
+          <a:lstStyle/>
+          <a:p>
+            <a:pPr indent="0" marL="0">
+              <a:buNone/>
+            </a:pPr>
+            <a:r>
+              <a:rPr lang="en-US" sz="1950" dirty="0">
+                <a:solidFill>
+                  <a:srgbClr val="52514E"/>
+                </a:solidFill>
+                <a:latin typeface="Calibri" pitchFamily="34" charset="0"/>
+                <a:ea typeface="Calibri" pitchFamily="34" charset="-122"/>
+                <a:cs typeface="Calibri" pitchFamily="34" charset="-120"/>
+              </a:rPr>
+              <a:t>Fig. 3. Speed-up per kernel on an N = 25 000 white-PM record (bench/, 12-core workstation; diamonds: independent 4-core re-run). Ratios are the portable result; absolute times depend on the machine.</a:t>
+            </a:r>
+            <a:endParaRPr lang="en-US" sz="1950" dirty="0"/>
+          </a:p>
+        </p:txBody>
+      </p:sp>
+      <p:sp>
+        <p:nvSpPr>
+          <p:cNvPr id="26" name="Shape 20"/>
+          <p:cNvSpPr/>
+          <p:nvPr/>
+        </p:nvSpPr>
+        <p:spPr>
+          <a:xfrm>
+            <a:off x="24566880" y="4206240"/>
+            <a:ext cx="11094720" cy="9329928"/>
+          </a:xfrm>
+          <a:prstGeom prst="rect">
+            <a:avLst/>
+          </a:prstGeom>
+          <a:solidFill>
+            <a:srgbClr val="FFFFFF"/>
+          </a:solidFill>
+          <a:ln w="12700">
+            <a:solidFill>
+              <a:srgbClr val="D9D4D0"/>
+            </a:solidFill>
+            <a:prstDash val="solid"/>
+          </a:ln>
+        </p:spPr>
+      </p:sp>
+      <p:sp>
+        <p:nvSpPr>
+          <p:cNvPr id="27" name="Heading"/>
+          <p:cNvSpPr txBox="1"/>
+          <p:nvPr/>
+        </p:nvSpPr>
+        <p:spPr>
+          <a:xfrm>
+            <a:off x="24886920" y="4526280"/>
+            <a:ext cx="10454640" cy="1009650"/>
+          </a:xfrm>
+          <a:prstGeom prst="rect">
+            <a:avLst/>
+          </a:prstGeom>
+          <a:noFill/>
+          <a:ln/>
+        </p:spPr>
+        <p:txBody>
+          <a:bodyPr wrap="square" lIns="0" tIns="0" rIns="0" bIns="0" rtlCol="0" anchor="t"/>
+          <a:lstStyle/>
+          <a:p>
+            <a:pPr indent="0" marL="0">
+              <a:buNone/>
+            </a:pPr>
+            <a:r>
+              <a:rPr lang="en-US" sz="3300" b="1" dirty="0">
+                <a:solidFill>
+                  <a:srgbClr val="9E1B32"/>
+                </a:solidFill>
+                <a:latin typeface="Calibri" pitchFamily="34" charset="0"/>
+                <a:ea typeface="Calibri" pitchFamily="34" charset="-122"/>
+                <a:cs typeface="Calibri" pitchFamily="34" charset="-120"/>
+              </a:rPr>
+              <a:t>MHTOTDEV: a new total estimator, calibrated by Monte Carlo</a:t>
+            </a:r>
+            <a:endParaRPr lang="en-US" sz="3300" dirty="0"/>
+          </a:p>
+        </p:txBody>
+      </p:sp>
+      <p:sp>
+        <p:nvSpPr>
+          <p:cNvPr id="28" name="Body"/>
+          <p:cNvSpPr txBox="1"/>
+          <p:nvPr/>
+        </p:nvSpPr>
+        <p:spPr>
+          <a:xfrm>
+            <a:off x="24886920" y="5700522"/>
+            <a:ext cx="10454640" cy="2545080"/>
+          </a:xfrm>
+          <a:prstGeom prst="rect">
+            <a:avLst/>
+          </a:prstGeom>
+          <a:noFill/>
+          <a:ln/>
+        </p:spPr>
+        <p:txBody>
+          <a:bodyPr wrap="square" lIns="0" tIns="0" rIns="0" bIns="0" rtlCol="0" anchor="t"/>
+          <a:lstStyle/>
+          <a:p>
+            <a:pPr indent="0" marL="0">
+              <a:spcAft>
+                <a:spcPts val="800"/>
+              </a:spcAft>
+              <a:buNone/>
+            </a:pPr>
+            <a:r>
+              <a:rPr lang="en-US" sz="2400" dirty="0">
+                <a:solidFill>
+                  <a:srgbClr val="0B0B0B"/>
+                </a:solidFill>
+                <a:latin typeface="Calibri" pitchFamily="34" charset="0"/>
+                <a:ea typeface="Calibri" pitchFamily="34" charset="-122"/>
+                <a:cs typeface="Calibri" pitchFamily="34" charset="-120"/>
+              </a:rPr>
+              <a:t>Modified Hadamard total deviation combines drift rejection (third differences), white-from-flicker PM separation (modified form) and long-τ confidence (reflected extension). No published bias or EDF existed, so both were measured against synthesized noise: α ∈ {+2 … −2}, N ∈ {1024 … 32768}, R = 3000 realizations per cell, one seeded stream per (α, N, r), fits over τ/τ₀ ≥ 16. Bias B = E[MHTOTVAR]/E[MHVAR] against MHDEV on the same realization; EDF from the χ² variance relation; bootstrap standard error 2.6 %.</a:t>
+            </a:r>
+            <a:endParaRPr lang="en-US" sz="2400" dirty="0"/>
+          </a:p>
+        </p:txBody>
+      </p:sp>
       <p:pic>
         <p:nvPicPr>
-          <p:cNvPr id="26" name="F5_mhtot_edf" descr="/home/user/SigmaTau.jl/poster/figures/F5_mhtot_edf.png">    </p:cNvPr>
+          <p:cNvPr id="29" name="F6_mhtot_construction" descr="/home/user/SigmaTau.jl/poster/figures/F6_mhtot_construction.png">    </p:cNvPr>
           <p:cNvPicPr>
             <a:picLocks noChangeAspect="1"/>
           </p:cNvPicPr>
@@ -2179,8 +4791,8 @@
         </p:blipFill>
         <p:spPr>
           <a:xfrm>
-            <a:off x="18943827" y="19443255"/>
-            <a:ext cx="4052826" cy="3520440"/>
+            <a:off x="27684805" y="8355330"/>
+            <a:ext cx="4858870" cy="3566160"/>
           </a:xfrm>
           <a:prstGeom prst="rect">
             <a:avLst/>
@@ -2189,13 +4801,13 @@
       </p:pic>
       <p:sp>
         <p:nvSpPr>
-          <p:cNvPr id="27" name="Caption"/>
+          <p:cNvPr id="30" name="Caption"/>
           <p:cNvSpPr txBox="1"/>
           <p:nvPr/>
         </p:nvSpPr>
         <p:spPr>
           <a:xfrm>
-            <a:off x="13060680" y="23073423"/>
+            <a:off x="24886920" y="12031218"/>
             <a:ext cx="10454640" cy="1184910"/>
           </a:xfrm>
           <a:prstGeom prst="rect">
@@ -2220,7 +4832,158 @@
                 <a:ea typeface="Calibri" pitchFamily="34" charset="-122"/>
                 <a:cs typeface="Calibri" pitchFamily="34" charset="-120"/>
               </a:rPr>
-              <a:t>Fig. 3. Shipped models. Left: ≈ unbiased for the PM noises, reads high for red FM (B ≈ 2.2 for random-walk FM at small τ/T). Right: EDF, R² ≥ 0.9982 for every α; below T/τ ≈ 5–6 the interval is indicative only, while σ itself is valid to the reach limit τ = T/4. Table: shipped coefficients (seed 20260531, R = 3000, N ≤ 32768).</a:t>
+              <a:t>Fig. 4. Kernel (Greenhall scheme): each of the N − 4m + 1 windows of length 4m has its half-mean slope removed and is extended by two time-reversed copies; the third difference at lag m is averaged over m, squared, normalised by 6m²τ² and averaged over all windows. The public call removes the least-squares frequency drift first.</a:t>
+            </a:r>
+            <a:endParaRPr lang="en-US" sz="1950" dirty="0"/>
+          </a:p>
+        </p:txBody>
+      </p:sp>
+      <p:sp>
+        <p:nvSpPr>
+          <p:cNvPr id="31" name="Shape 24"/>
+          <p:cNvSpPr/>
+          <p:nvPr/>
+        </p:nvSpPr>
+        <p:spPr>
+          <a:xfrm>
+            <a:off x="24566880" y="13947648"/>
+            <a:ext cx="11094720" cy="8455533"/>
+          </a:xfrm>
+          <a:prstGeom prst="rect">
+            <a:avLst/>
+          </a:prstGeom>
+          <a:solidFill>
+            <a:srgbClr val="FFFFFF"/>
+          </a:solidFill>
+          <a:ln w="12700">
+            <a:solidFill>
+              <a:srgbClr val="D9D4D0"/>
+            </a:solidFill>
+            <a:prstDash val="solid"/>
+          </a:ln>
+        </p:spPr>
+      </p:sp>
+      <p:sp>
+        <p:nvSpPr>
+          <p:cNvPr id="32" name="Heading"/>
+          <p:cNvSpPr txBox="1"/>
+          <p:nvPr/>
+        </p:nvSpPr>
+        <p:spPr>
+          <a:xfrm>
+            <a:off x="24886920" y="14267688"/>
+            <a:ext cx="10454640" cy="1009650"/>
+          </a:xfrm>
+          <a:prstGeom prst="rect">
+            <a:avLst/>
+          </a:prstGeom>
+          <a:noFill/>
+          <a:ln/>
+        </p:spPr>
+        <p:txBody>
+          <a:bodyPr wrap="square" lIns="0" tIns="0" rIns="0" bIns="0" rtlCol="0" anchor="t"/>
+          <a:lstStyle/>
+          <a:p>
+            <a:pPr indent="0" marL="0">
+              <a:buNone/>
+            </a:pPr>
+            <a:r>
+              <a:rPr lang="en-US" sz="3300" b="1" dirty="0">
+                <a:solidFill>
+                  <a:srgbClr val="9E1B32"/>
+                </a:solidFill>
+                <a:latin typeface="Calibri" pitchFamily="34" charset="0"/>
+                <a:ea typeface="Calibri" pitchFamily="34" charset="-122"/>
+                <a:cs typeface="Calibri" pitchFamily="34" charset="-120"/>
+              </a:rPr>
+              <a:t>Unbiased for PM noise, reads high for red FM; EDF fits with R² ≥ 0.9982</a:t>
+            </a:r>
+            <a:endParaRPr lang="en-US" sz="3300" dirty="0"/>
+          </a:p>
+        </p:txBody>
+      </p:sp>
+      <p:pic>
+        <p:nvPicPr>
+          <p:cNvPr id="33" name="F4_mhtot_bias" descr="/home/user/SigmaTau.jl/poster/figures/F4_mhtot_bias.png">    </p:cNvPr>
+          <p:cNvPicPr>
+            <a:picLocks noChangeAspect="1"/>
+          </p:cNvPicPr>
+          <p:nvPr/>
+        </p:nvPicPr>
+        <p:blipFill>
+          <a:blip r:embed="rId5"/>
+          <a:stretch>
+            <a:fillRect/>
+          </a:stretch>
+        </p:blipFill>
+        <p:spPr>
+          <a:xfrm>
+            <a:off x="25429807" y="15441930"/>
+            <a:ext cx="4004386" cy="3474720"/>
+          </a:xfrm>
+          <a:prstGeom prst="rect">
+            <a:avLst/>
+          </a:prstGeom>
+        </p:spPr>
+      </p:pic>
+      <p:pic>
+        <p:nvPicPr>
+          <p:cNvPr id="34" name="F5_mhtot_edf" descr="/home/user/SigmaTau.jl/poster/figures/F5_mhtot_edf.png">    </p:cNvPr>
+          <p:cNvPicPr>
+            <a:picLocks noChangeAspect="1"/>
+          </p:cNvPicPr>
+          <p:nvPr/>
+        </p:nvPicPr>
+        <p:blipFill>
+          <a:blip r:embed="rId6"/>
+          <a:stretch>
+            <a:fillRect/>
+          </a:stretch>
+        </p:blipFill>
+        <p:spPr>
+          <a:xfrm>
+            <a:off x="30796384" y="15441930"/>
+            <a:ext cx="4000192" cy="3474720"/>
+          </a:xfrm>
+          <a:prstGeom prst="rect">
+            <a:avLst/>
+          </a:prstGeom>
+        </p:spPr>
+      </p:pic>
+      <p:sp>
+        <p:nvSpPr>
+          <p:cNvPr id="35" name="Caption"/>
+          <p:cNvSpPr txBox="1"/>
+          <p:nvPr/>
+        </p:nvSpPr>
+        <p:spPr>
+          <a:xfrm>
+            <a:off x="24886920" y="19026378"/>
+            <a:ext cx="10454640" cy="615315"/>
+          </a:xfrm>
+          <a:prstGeom prst="rect">
+            <a:avLst/>
+          </a:prstGeom>
+          <a:noFill/>
+          <a:ln/>
+        </p:spPr>
+        <p:txBody>
+          <a:bodyPr wrap="square" lIns="0" tIns="0" rIns="0" bIns="0" rtlCol="0" anchor="t"/>
+          <a:lstStyle/>
+          <a:p>
+            <a:pPr indent="0" marL="0">
+              <a:buNone/>
+            </a:pPr>
+            <a:r>
+              <a:rPr lang="en-US" sz="1950" dirty="0">
+                <a:solidFill>
+                  <a:srgbClr val="52514E"/>
+                </a:solidFill>
+                <a:latin typeface="Calibri" pitchFamily="34" charset="0"/>
+                <a:ea typeface="Calibri" pitchFamily="34" charset="-122"/>
+                <a:cs typeface="Calibri" pitchFamily="34" charset="-120"/>
+              </a:rPr>
+              <a:t>Fig. 5. Shipped models B = b₀ + b₁ τ/T and ν = b T/τ − c (seed 20260531). Below T/τ ≈ 5–6 the interval is indicative only; σ itself is valid to the reach limit τ = T/4.</a:t>
             </a:r>
             <a:endParaRPr lang="en-US" sz="1950" dirty="0"/>
           </a:p>
@@ -2228,7 +4991,7 @@
       </p:sp>
       <p:graphicFrame>
         <p:nvGraphicFramePr>
-          <p:cNvPr id="2" name="Coefficient table"/>
+          <p:cNvPr id="3" name="MHTOTDEV coefficients"/>
           <p:cNvGraphicFramePr>
             <a:graphicFrameLocks noGrp="1"/>
           </p:cNvGraphicFramePr>
@@ -2241,7 +5004,7 @@
           </p:nvPr>
         </p:nvGraphicFramePr>
         <p:xfrm>
-          <a:off x="13060680" y="24349773"/>
+          <a:off x="24886920" y="19733133"/>
           <a:ext cx="10454640" cy="914400"/>
         </p:xfrm>
         <a:graphic>
@@ -2257,7 +5020,7 @@
                 <a:gridCol w="1355231"/>
                 <a:gridCol w="1355231"/>
               </a:tblGrid>
-              <a:tr h="377190">
+              <a:tr h="384048">
                 <a:tc>
                   <a:txBody>
                     <a:bodyPr/>
@@ -2683,7 +5446,7 @@
                           <a:ea typeface="Calibri" pitchFamily="34" charset="-122"/>
                           <a:cs typeface="Calibri" pitchFamily="34" charset="-120"/>
                         </a:rPr>
-                        <a:t>EDF R²</a:t>
+                        <a:t>R²</a:t>
                       </a:r>
                       <a:endParaRPr lang="en-US" sz="1800" dirty="0">
                         <a:latin typeface="Calibri" charset="0"/>
@@ -2735,7 +5498,7 @@
                   </a:tcPr>
                 </a:tc>
               </a:tr>
-              <a:tr h="377190">
+              <a:tr h="384048">
                 <a:tc>
                   <a:txBody>
                     <a:bodyPr/>
@@ -3213,7 +5976,7 @@
                   </a:tcPr>
                 </a:tc>
               </a:tr>
-              <a:tr h="377190">
+              <a:tr h="384048">
                 <a:tc>
                   <a:txBody>
                     <a:bodyPr/>
@@ -3691,7 +6454,7 @@
                   </a:tcPr>
                 </a:tc>
               </a:tr>
-              <a:tr h="377190">
+              <a:tr h="384048">
                 <a:tc>
                   <a:txBody>
                     <a:bodyPr/>
@@ -4169,7 +6932,7 @@
                   </a:tcPr>
                 </a:tc>
               </a:tr>
-              <a:tr h="377190">
+              <a:tr h="384048">
                 <a:tc>
                   <a:txBody>
                     <a:bodyPr/>
@@ -4647,7 +7410,7 @@
                   </a:tcPr>
                 </a:tc>
               </a:tr>
-              <a:tr h="377190">
+              <a:tr h="384048">
                 <a:tc>
                   <a:txBody>
                     <a:bodyPr/>
@@ -5131,14 +7894,14 @@
       </p:graphicFrame>
       <p:sp>
         <p:nvSpPr>
-          <p:cNvPr id="29" name="Shape 22"/>
+          <p:cNvPr id="37" name="Shape 27"/>
           <p:cNvSpPr/>
           <p:nvPr/>
         </p:nvSpPr>
         <p:spPr>
           <a:xfrm>
-            <a:off x="24566880" y="4206240"/>
-            <a:ext cx="11094720" cy="10477690"/>
+            <a:off x="24566880" y="22814661"/>
+            <a:ext cx="11094720" cy="3634105"/>
           </a:xfrm>
           <a:prstGeom prst="rect">
             <a:avLst/>
@@ -5156,351 +7919,13 @@
       </p:sp>
       <p:sp>
         <p:nvSpPr>
-          <p:cNvPr id="30" name="Heading"/>
+          <p:cNvPr id="38" name="Heading"/>
           <p:cNvSpPr txBox="1"/>
           <p:nvPr/>
         </p:nvSpPr>
         <p:spPr>
           <a:xfrm>
-            <a:off x="24886920" y="4526280"/>
-            <a:ext cx="10454640" cy="1009650"/>
-          </a:xfrm>
-          <a:prstGeom prst="rect">
-            <a:avLst/>
-          </a:prstGeom>
-          <a:noFill/>
-          <a:ln/>
-        </p:spPr>
-        <p:txBody>
-          <a:bodyPr wrap="square" lIns="0" tIns="0" rIns="0" bIns="0" rtlCol="0" anchor="t"/>
-          <a:lstStyle/>
-          <a:p>
-            <a:pPr indent="0" marL="0">
-              <a:buNone/>
-            </a:pPr>
-            <a:r>
-              <a:rPr lang="en-US" sz="3300" b="1" dirty="0">
-                <a:solidFill>
-                  <a:srgbClr val="9E1B32"/>
-                </a:solidFill>
-                <a:latin typeface="Calibri" pitchFamily="34" charset="0"/>
-                <a:ea typeface="Calibri" pitchFamily="34" charset="-122"/>
-                <a:cs typeface="Calibri" pitchFamily="34" charset="-120"/>
-              </a:rPr>
-              <a:t>Agreement with Stable32 to its printed precision and with allantools to 10⁻¹³</a:t>
-            </a:r>
-            <a:endParaRPr lang="en-US" sz="3300" dirty="0"/>
-          </a:p>
-        </p:txBody>
-      </p:sp>
-      <p:sp>
-        <p:nvSpPr>
-          <p:cNvPr id="31" name="Body"/>
-          <p:cNvSpPr txBox="1"/>
-          <p:nvPr/>
-        </p:nvSpPr>
-        <p:spPr>
-          <a:xfrm>
-            <a:off x="24886920" y="5700522"/>
-            <a:ext cx="10454640" cy="3246120"/>
-          </a:xfrm>
-          <a:prstGeom prst="rect">
-            <a:avLst/>
-          </a:prstGeom>
-          <a:noFill/>
-          <a:ln/>
-        </p:spPr>
-        <p:txBody>
-          <a:bodyPr wrap="square" lIns="0" tIns="0" rIns="0" bIns="0" rtlCol="0" anchor="t"/>
-          <a:lstStyle/>
-          <a:p>
-            <a:pPr indent="0" marL="0">
-              <a:spcAft>
-                <a:spcPts val="800"/>
-              </a:spcAft>
-              <a:buNone/>
-            </a:pPr>
-            <a:r>
-              <a:rPr lang="en-US" sz="2400" dirty="0">
-                <a:solidFill>
-                  <a:srgbClr val="0B0B0B"/>
-                </a:solidFill>
-                <a:latin typeface="Calibri" pitchFamily="34" charset="0"/>
-                <a:ea typeface="Calibri" pitchFamily="34" charset="-122"/>
-                <a:cs typeface="Calibri" pitchFamily="34" charset="-120"/>
-              </a:rPr>
-              <a:t>On the shipped 8192-point record, ADEV, MDEV, TDEV and HDEV match Stable32 to ≤ 0.005 % (its five-significant-figure output) and allantools to ≤ 1 × 10⁻¹³; the raw total kernels match allantools to ≤ 4.4 × 10⁻¹⁵. Confidence bounds agree with Stable32 to ≤ 0.05 % at 11 of 12 τ. The one recurring residual is a convention: at τ = 256 s Stable32 assigns α = +2 where the detrended identifier assigns α = 0; one keyword reproduces Stable32 at every τ. Estimators neither reference implements (MHDEV, HTDEV, MHTOTDEV, ThêoH, nch, dynamic, streaming) are checked against inlined textbook kernels and algebraic identities.</a:t>
-            </a:r>
-            <a:endParaRPr lang="en-US" sz="2400" dirty="0"/>
-          </a:p>
-        </p:txBody>
-      </p:sp>
-      <p:pic>
-        <p:nvPicPr>
-          <p:cNvPr id="32" name="F2_validation" descr="/home/user/SigmaTau.jl/poster/figures/F2_validation.png">    </p:cNvPr>
-          <p:cNvPicPr>
-            <a:picLocks noChangeAspect="1"/>
-          </p:cNvPicPr>
-          <p:nvPr/>
-        </p:nvPicPr>
-        <p:blipFill>
-          <a:blip r:embed="rId5"/>
-          <a:stretch>
-            <a:fillRect/>
-          </a:stretch>
-        </p:blipFill>
-        <p:spPr>
-          <a:xfrm>
-            <a:off x="26297398" y="9056370"/>
-            <a:ext cx="7633683" cy="4297680"/>
-          </a:xfrm>
-          <a:prstGeom prst="rect">
-            <a:avLst/>
-          </a:prstGeom>
-        </p:spPr>
-      </p:pic>
-      <p:sp>
-        <p:nvSpPr>
-          <p:cNvPr id="33" name="Caption"/>
-          <p:cNvSpPr txBox="1"/>
-          <p:nvPr/>
-        </p:nvSpPr>
-        <p:spPr>
-          <a:xfrm>
-            <a:off x="24886920" y="13463778"/>
-            <a:ext cx="10454640" cy="900112"/>
-          </a:xfrm>
-          <a:prstGeom prst="rect">
-            <a:avLst/>
-          </a:prstGeom>
-          <a:noFill/>
-          <a:ln/>
-        </p:spPr>
-        <p:txBody>
-          <a:bodyPr wrap="square" lIns="0" tIns="0" rIns="0" bIns="0" rtlCol="0" anchor="t"/>
-          <a:lstStyle/>
-          <a:p>
-            <a:pPr indent="0" marL="0">
-              <a:buNone/>
-            </a:pPr>
-            <a:r>
-              <a:rPr lang="en-US" sz="1950" dirty="0">
-                <a:solidFill>
-                  <a:srgbClr val="52514E"/>
-                </a:solidFill>
-                <a:latin typeface="Calibri" pitchFamily="34" charset="0"/>
-                <a:ea typeface="Calibri" pitchFamily="34" charset="-122"/>
-                <a:cs typeface="Calibri" pitchFamily="34" charset="-120"/>
-              </a:rPr>
-              <a:t>Fig. 4. Relative difference to Stable32 at every τ for seven estimators. Filled points lie at or below the 5 × 10⁻⁵ floor set by Stable32's printed precision; open points are the τ = 256 s convention. MTOTDEV is compared raw, as Stable32 reports the uncorrected statistic.</a:t>
-            </a:r>
-            <a:endParaRPr lang="en-US" sz="1950" dirty="0"/>
-          </a:p>
-        </p:txBody>
-      </p:sp>
-      <p:sp>
-        <p:nvSpPr>
-          <p:cNvPr id="34" name="Shape 26"/>
-          <p:cNvSpPr/>
-          <p:nvPr/>
-        </p:nvSpPr>
-        <p:spPr>
-          <a:xfrm>
-            <a:off x="24566880" y="15095410"/>
-            <a:ext cx="11094720" cy="8618411"/>
-          </a:xfrm>
-          <a:prstGeom prst="rect">
-            <a:avLst/>
-          </a:prstGeom>
-          <a:solidFill>
-            <a:srgbClr val="FFFFFF"/>
-          </a:solidFill>
-          <a:ln w="12700">
-            <a:solidFill>
-              <a:srgbClr val="D9D4D0"/>
-            </a:solidFill>
-            <a:prstDash val="solid"/>
-          </a:ln>
-        </p:spPr>
-      </p:sp>
-      <p:sp>
-        <p:nvSpPr>
-          <p:cNvPr id="35" name="Heading"/>
-          <p:cNvSpPr txBox="1"/>
-          <p:nvPr/>
-        </p:nvSpPr>
-        <p:spPr>
-          <a:xfrm>
-            <a:off x="24886920" y="15415450"/>
-            <a:ext cx="10454640" cy="1009650"/>
-          </a:xfrm>
-          <a:prstGeom prst="rect">
-            <a:avLst/>
-          </a:prstGeom>
-          <a:noFill/>
-          <a:ln/>
-        </p:spPr>
-        <p:txBody>
-          <a:bodyPr wrap="square" lIns="0" tIns="0" rIns="0" bIns="0" rtlCol="0" anchor="t"/>
-          <a:lstStyle/>
-          <a:p>
-            <a:pPr indent="0" marL="0">
-              <a:buNone/>
-            </a:pPr>
-            <a:r>
-              <a:rPr lang="en-US" sz="3300" b="1" dirty="0">
-                <a:solidFill>
-                  <a:srgbClr val="9E1B32"/>
-                </a:solidFill>
-                <a:latin typeface="Calibri" pitchFamily="34" charset="0"/>
-                <a:ea typeface="Calibri" pitchFamily="34" charset="-122"/>
-                <a:cs typeface="Calibri" pitchFamily="34" charset="-120"/>
-              </a:rPr>
-              <a:t>Modified-total analysis of a day-long record takes seconds, not half an hour</a:t>
-            </a:r>
-            <a:endParaRPr lang="en-US" sz="3300" dirty="0"/>
-          </a:p>
-        </p:txBody>
-      </p:sp>
-      <p:sp>
-        <p:nvSpPr>
-          <p:cNvPr id="36" name="Body"/>
-          <p:cNvSpPr txBox="1"/>
-          <p:nvPr/>
-        </p:nvSpPr>
-        <p:spPr>
-          <a:xfrm>
-            <a:off x="24886920" y="16589692"/>
-            <a:ext cx="10454640" cy="1844040"/>
-          </a:xfrm>
-          <a:prstGeom prst="rect">
-            <a:avLst/>
-          </a:prstGeom>
-          <a:noFill/>
-          <a:ln/>
-        </p:spPr>
-        <p:txBody>
-          <a:bodyPr wrap="square" lIns="0" tIns="0" rIns="0" bIns="0" rtlCol="0" anchor="t"/>
-          <a:lstStyle/>
-          <a:p>
-            <a:pPr indent="0" marL="0">
-              <a:spcAft>
-                <a:spcPts val="800"/>
-              </a:spcAft>
-              <a:buNone/>
-            </a:pPr>
-            <a:r>
-              <a:rPr lang="en-US" sz="2400" dirty="0">
-                <a:solidFill>
-                  <a:srgbClr val="0B0B0B"/>
-                </a:solidFill>
-                <a:latin typeface="Calibri" pitchFamily="34" charset="0"/>
-                <a:ea typeface="Calibri" pitchFamily="34" charset="-122"/>
-                <a:cs typeface="Calibri" pitchFamily="34" charset="-120"/>
-              </a:rPr>
-              <a:t>Same samples, same τ grid, same statistic; allantools is single-threaded as it has no parallel path. On a measured 406 763-sample phase record MTOTDEV takes 0.469 s against 1 803.6 s. The gap is algorithmic as well as compiled-versus-interpreted: the reflected extension is streamed through a per-thread buffer and the window sum is split across threads.</a:t>
-            </a:r>
-            <a:endParaRPr lang="en-US" sz="2400" dirty="0"/>
-          </a:p>
-        </p:txBody>
-      </p:sp>
-      <p:pic>
-        <p:nvPicPr>
-          <p:cNvPr id="37" name="F3_speed" descr="/home/user/SigmaTau.jl/poster/figures/F3_speed.png">    </p:cNvPr>
-          <p:cNvPicPr>
-            <a:picLocks noChangeAspect="1"/>
-          </p:cNvPicPr>
-          <p:nvPr/>
-        </p:nvPicPr>
-        <p:blipFill>
-          <a:blip r:embed="rId6"/>
-          <a:stretch>
-            <a:fillRect/>
-          </a:stretch>
-        </p:blipFill>
-        <p:spPr>
-          <a:xfrm>
-            <a:off x="26687681" y="18543461"/>
-            <a:ext cx="6853118" cy="3840480"/>
-          </a:xfrm>
-          <a:prstGeom prst="rect">
-            <a:avLst/>
-          </a:prstGeom>
-        </p:spPr>
-      </p:pic>
-      <p:sp>
-        <p:nvSpPr>
-          <p:cNvPr id="38" name="Caption"/>
-          <p:cNvSpPr txBox="1"/>
-          <p:nvPr/>
-        </p:nvSpPr>
-        <p:spPr>
-          <a:xfrm>
-            <a:off x="24886920" y="22493669"/>
-            <a:ext cx="10454640" cy="900112"/>
-          </a:xfrm>
-          <a:prstGeom prst="rect">
-            <a:avLst/>
-          </a:prstGeom>
-          <a:noFill/>
-          <a:ln/>
-        </p:spPr>
-        <p:txBody>
-          <a:bodyPr wrap="square" lIns="0" tIns="0" rIns="0" bIns="0" rtlCol="0" anchor="t"/>
-          <a:lstStyle/>
-          <a:p>
-            <a:pPr indent="0" marL="0">
-              <a:buNone/>
-            </a:pPr>
-            <a:r>
-              <a:rPr lang="en-US" sz="1950" dirty="0">
-                <a:solidFill>
-                  <a:srgbClr val="52514E"/>
-                </a:solidFill>
-                <a:latin typeface="Calibri" pitchFamily="34" charset="0"/>
-                <a:ea typeface="Calibri" pitchFamily="34" charset="-122"/>
-                <a:cs typeface="Calibri" pitchFamily="34" charset="-120"/>
-              </a:rPr>
-              <a:t>Fig. 5. Kernel-only speed-up (no intervals, raw totals) on an N = 25 000 white-PM record (bench/, mean of 30 realizations, 12 cores; diamonds: independent 4-core re-run). Ratios are the portable result; absolute times depend on the machine.</a:t>
-            </a:r>
-            <a:endParaRPr lang="en-US" sz="1950" dirty="0"/>
-          </a:p>
-        </p:txBody>
-      </p:sp>
-      <p:sp>
-        <p:nvSpPr>
-          <p:cNvPr id="39" name="Shape 30"/>
-          <p:cNvSpPr/>
-          <p:nvPr/>
-        </p:nvSpPr>
-        <p:spPr>
-          <a:xfrm>
-            <a:off x="24566880" y="24125301"/>
-            <a:ext cx="11094720" cy="2933065"/>
-          </a:xfrm>
-          <a:prstGeom prst="rect">
-            <a:avLst/>
-          </a:prstGeom>
-          <a:solidFill>
-            <a:srgbClr val="FFFFFF"/>
-          </a:solidFill>
-          <a:ln w="12700">
-            <a:solidFill>
-              <a:srgbClr val="D9D4D0"/>
-            </a:solidFill>
-            <a:prstDash val="solid"/>
-          </a:ln>
-        </p:spPr>
-      </p:sp>
-      <p:sp>
-        <p:nvSpPr>
-          <p:cNvPr id="40" name="Heading"/>
-          <p:cNvSpPr txBox="1"/>
-          <p:nvPr/>
-        </p:nvSpPr>
-        <p:spPr>
-          <a:xfrm>
-            <a:off x="24886920" y="24445341"/>
+            <a:off x="24886920" y="23134701"/>
             <a:ext cx="10454640" cy="527685"/>
           </a:xfrm>
           <a:prstGeom prst="rect">
@@ -5525,7 +7950,7 @@
                 <a:ea typeface="Calibri" pitchFamily="34" charset="-122"/>
                 <a:cs typeface="Calibri" pitchFamily="34" charset="-120"/>
               </a:rPr>
-              <a:t>Next steps</a:t>
+              <a:t>Reproducible by construction</a:t>
             </a:r>
             <a:endParaRPr lang="en-US" sz="3300" dirty="0"/>
           </a:p>
@@ -5533,14 +7958,14 @@
       </p:sp>
       <p:sp>
         <p:nvSpPr>
-          <p:cNvPr id="41" name="Bullets"/>
+          <p:cNvPr id="39" name="Bullets"/>
           <p:cNvSpPr txBox="1"/>
           <p:nvPr/>
         </p:nvSpPr>
         <p:spPr>
           <a:xfrm>
-            <a:off x="24886920" y="25137618"/>
-            <a:ext cx="10454640" cy="1582420"/>
+            <a:off x="24886920" y="23826978"/>
+            <a:ext cx="10454640" cy="2283460"/>
           </a:xfrm>
           <a:prstGeom prst="rect">
             <a:avLst/>
@@ -5568,7 +7993,7 @@
                 <a:ea typeface="Calibri" pitchFamily="34" charset="-122"/>
                 <a:cs typeface="Calibri" pitchFamily="34" charset="-120"/>
               </a:rPr>
-              <a:t>Laboratory records: </a:t>
+              <a:t>Shipped with the code: </a:t>
             </a:r>
             <a:pPr indent="0" marL="0">
               <a:buNone/>
@@ -5582,7 +8007,7 @@
                 <a:ea typeface="Calibri" pitchFamily="34" charset="-122"/>
                 <a:cs typeface="Calibri" pitchFamily="34" charset="-120"/>
               </a:rPr>
-              <a:t>apply the drift-tolerant Hadamard family and the real-time accumulators to the Rb-87 clock comparisons.</a:t>
+              <a:t>the validation fixture with Stable32 and allantools outputs, the per-τ comparison tables, the benchmark scripts for both libraries, and the Monte Carlo harness with its seed and tracked fit artifact.</a:t>
             </a:r>
             <a:endParaRPr lang="en-US" sz="2400" dirty="0"/>
           </a:p>
@@ -5603,7 +8028,7 @@
                 <a:ea typeface="Calibri" pitchFamily="34" charset="-122"/>
                 <a:cs typeface="Calibri" pitchFamily="34" charset="-120"/>
               </a:rPr>
-              <a:t>Calibration: </a:t>
+              <a:t>Next: </a:t>
             </a:r>
             <a:pPr indent="0" marL="0">
               <a:buNone/>
@@ -5617,7 +8042,7 @@
                 <a:ea typeface="Calibri" pitchFamily="34" charset="-122"/>
                 <a:cs typeface="Calibri" pitchFamily="34" charset="-120"/>
               </a:rPr>
-              <a:t>extend the Monte Carlo method to the Thêo family and gapped records.</a:t>
+              <a:t>real-time monitoring of the laboratory Rb-87 clock comparisons with the Hadamard family; Monte Carlo calibration of the Thêo family and of gapped records.</a:t>
             </a:r>
             <a:endParaRPr lang="en-US" sz="2400" dirty="0"/>
           </a:p>
@@ -5625,7 +8050,7 @@
       </p:sp>
       <p:sp>
         <p:nvSpPr>
-          <p:cNvPr id="42" name="Shape 33"/>
+          <p:cNvPr id="40" name="Shape 30"/>
           <p:cNvSpPr/>
           <p:nvPr/>
         </p:nvSpPr>
@@ -5648,7 +8073,7 @@
       </p:sp>
       <p:sp>
         <p:nvSpPr>
-          <p:cNvPr id="43" name="References A"/>
+          <p:cNvPr id="41" name="References A"/>
           <p:cNvSpPr txBox="1"/>
           <p:nvPr/>
         </p:nvSpPr>
@@ -5767,7 +8192,7 @@
       </p:sp>
       <p:sp>
         <p:nvSpPr>
-          <p:cNvPr id="44" name="References B"/>
+          <p:cNvPr id="42" name="References B"/>
           <p:cNvSpPr txBox="1"/>
           <p:nvPr/>
         </p:nvSpPr>
@@ -5818,7 +8243,7 @@
                 <a:ea typeface="Calibri" pitchFamily="34" charset="-122"/>
                 <a:cs typeface="Calibri" pitchFamily="34" charset="-120"/>
               </a:rPr>
-              <a:t>5. F. Vernotte and D. A. Howe, Generalization of the total variance approach to the different classes of structure functions, Proc. EFTF (2000).</a:t>
+              <a:t>5. F. Vernotte and D. A. Howe, Generalization of the total variance approach to the different classes of structure functions, Proc. 14th EFTF (2000).</a:t>
             </a:r>
             <a:endParaRPr lang="en-US" sz="1500" dirty="0"/>
           </a:p>
@@ -5866,7 +8291,7 @@
       </p:sp>
       <p:sp>
         <p:nvSpPr>
-          <p:cNvPr id="45" name="Acknowledgments"/>
+          <p:cNvPr id="43" name="Acknowledgments"/>
           <p:cNvSpPr txBox="1"/>
           <p:nvPr/>
         </p:nvSpPr>
@@ -5897,7 +8322,7 @@
                 <a:ea typeface="Calibri" pitchFamily="34" charset="-122"/>
                 <a:cs typeface="Calibri" pitchFamily="34" charset="-120"/>
               </a:rPr>
-              <a:t>Acknowledgments: [funding / program / advisor placeholder]. Validation fixtures, benchmark scripts and the Monte Carlo harness are in the repository.</a:t>
+              <a:t>Acknowledgments: [funding / program / advisor placeholder]. Documentation: ianlap.github.io/SigmaTau.jl</a:t>
             </a:r>
             <a:endParaRPr lang="en-US" sz="1500" dirty="0"/>
           </a:p>

--- a/poster/SigmaTau_poster_draft.pptx
+++ b/poster/SigmaTau_poster_draft.pptx
@@ -1337,7 +1337,7 @@
                 <a:ea typeface="Calibri" pitchFamily="34" charset="-122"/>
                 <a:cs typeface="Calibri" pitchFamily="34" charset="-120"/>
               </a:rPr>
-              <a:t> + 1 samples and equal the batch kernels on the samples seen so far (Dobrogowski–Kasznia 2007, extended to third differences); dynamic σ(t, τ) maps; N-cornered hat for N ≥ 3 clocks.</a:t>
+              <a:t> + 1 samples and reproduce the batch kernels on the samples seen so far to ≤ 2 × 10⁻¹¹ relative (Dobrogowski–Kasznia 2007, extended to third differences); dynamic σ(t, τ) maps; N-cornered hat for N ≥ 3 clocks.</a:t>
             </a:r>
             <a:endParaRPr lang="en-US" sz="2400" dirty="0"/>
           </a:p>
@@ -4213,7 +4213,7 @@
         <p:spPr>
           <a:xfrm>
             <a:off x="914400" y="18493740"/>
-            <a:ext cx="11094720" cy="7645718"/>
+            <a:ext cx="11094720" cy="8113395"/>
           </a:xfrm>
           <a:prstGeom prst="rect">
             <a:avLst/>
@@ -4284,8 +4284,8 @@
         </p:blipFill>
         <p:spPr>
           <a:xfrm>
-            <a:off x="2890605" y="19506057"/>
-            <a:ext cx="7142310" cy="5303520"/>
+            <a:off x="2670243" y="19506057"/>
+            <a:ext cx="7583033" cy="5486400"/>
           </a:xfrm>
           <a:prstGeom prst="rect">
             <a:avLst/>
@@ -4300,8 +4300,8 @@
         </p:nvSpPr>
         <p:spPr>
           <a:xfrm>
-            <a:off x="1234440" y="24919305"/>
-            <a:ext cx="10454640" cy="900112"/>
+            <a:off x="1234440" y="25102185"/>
+            <a:ext cx="10454640" cy="1184910"/>
           </a:xfrm>
           <a:prstGeom prst="rect">
             <a:avLst/>
@@ -4325,7 +4325,7 @@
                 <a:ea typeface="Calibri" pitchFamily="34" charset="-122"/>
                 <a:cs typeface="Calibri" pitchFamily="34" charset="-120"/>
               </a:rPr>
-              <a:t>Fig. 1. One call on the shipped 8192-point validation record (τ₀ = 1 s): five estimators with 68.3 % χ² intervals from the per-τ identified noise type. The totals reach further (TOTDEV to τ = T/2, HTOTDEV to T/3) with tighter long-τ bounds; MDEV separates white from flicker PM.</a:t>
+              <a:t>Fig. 1. One call on the shipped 8192-point validation record (τ₀ = 1 s): five estimators with 68.3 % χ² intervals from the noise type identified at each τ (top strip). The totals reach further (TOTDEV to τ = T/2, MHTOTDEV to T/4) with tighter long-τ bounds; MDEV separates white from flicker PM.</a:t>
             </a:r>
             <a:endParaRPr lang="en-US" sz="1950" dirty="0"/>
           </a:p>
@@ -4340,7 +4340,7 @@
         <p:spPr>
           <a:xfrm>
             <a:off x="12740640" y="4206240"/>
-            <a:ext cx="11094720" cy="10701528"/>
+            <a:ext cx="11094720" cy="9695688"/>
           </a:xfrm>
           <a:prstGeom prst="rect">
             <a:avLst/>
@@ -4431,7 +4431,7 @@
                 <a:ea typeface="Calibri" pitchFamily="34" charset="-122"/>
                 <a:cs typeface="Calibri" pitchFamily="34" charset="-120"/>
               </a:rPr>
-              <a:t>Shipped fixture: an 8192-point phase record with Stable32 and allantools outputs beside it. ADEV, MDEV, TDEV and HDEV agree with Stable32 to ≤ 0.005 % (its five significant figures) and with allantools to ≤ 1 × 10⁻¹³; the raw total kernels agree with allantools to ≤ 4.4 × 10⁻¹⁵; confidence bounds agree with Stable32 to ≤ 0.05 % at 11 of 12 τ. Where a default differs from a reference (MTOTDEV bias policy, noise-ID detrending), the per-τ tables name the keyword that reproduces the reference.</a:t>
+              <a:t>Shipped fixture: an 8192-point phase record with the Stable32 and allantools outputs beside it. ADEV, MDEV, TDEV and HDEV agree with Stable32 to ≤ 0.005 % (its five significant figures) and with allantools to ≤ 1 × 10⁻¹³; raw total kernels agree with allantools to ≤ 4.4 × 10⁻¹⁵; confidence bounds agree with Stable32 to ≤ 0.05 % at 11 of 12 τ. Where a default differs from a reference (MTOTDEV bias policy, noise-ID detrending), the per-τ tables name the keyword that reproduces it.</a:t>
             </a:r>
             <a:endParaRPr lang="en-US" sz="2400" dirty="0"/>
           </a:p>
@@ -4453,8 +4453,8 @@
         </p:blipFill>
         <p:spPr>
           <a:xfrm>
-            <a:off x="13902693" y="8355330"/>
-            <a:ext cx="8770615" cy="4937760"/>
+            <a:off x="14795996" y="8355330"/>
+            <a:ext cx="6984008" cy="3931920"/>
           </a:xfrm>
           <a:prstGeom prst="rect">
             <a:avLst/>
@@ -4469,7 +4469,7 @@
         </p:nvSpPr>
         <p:spPr>
           <a:xfrm>
-            <a:off x="13060680" y="13402818"/>
+            <a:off x="13060680" y="12396978"/>
             <a:ext cx="10454640" cy="1184910"/>
           </a:xfrm>
           <a:prstGeom prst="rect">
@@ -4508,8 +4508,8 @@
         </p:nvSpPr>
         <p:spPr>
           <a:xfrm>
-            <a:off x="12740640" y="15319248"/>
-            <a:ext cx="11094720" cy="9700451"/>
+            <a:off x="12740640" y="14313408"/>
+            <a:ext cx="11094720" cy="8968931"/>
           </a:xfrm>
           <a:prstGeom prst="rect">
             <a:avLst/>
@@ -4533,7 +4533,7 @@
         </p:nvSpPr>
         <p:spPr>
           <a:xfrm>
-            <a:off x="13060680" y="15639288"/>
+            <a:off x="13060680" y="14633448"/>
             <a:ext cx="10454640" cy="1009650"/>
           </a:xfrm>
           <a:prstGeom prst="rect">
@@ -4572,7 +4572,7 @@
         </p:nvSpPr>
         <p:spPr>
           <a:xfrm>
-            <a:off x="13060680" y="16813530"/>
+            <a:off x="13060680" y="15807690"/>
             <a:ext cx="10454640" cy="2194560"/>
           </a:xfrm>
           <a:prstGeom prst="rect">
@@ -4622,8 +4622,8 @@
         </p:blipFill>
         <p:spPr>
           <a:xfrm>
-            <a:off x="14208763" y="19117818"/>
-            <a:ext cx="8158473" cy="4572000"/>
+            <a:off x="14861441" y="18111978"/>
+            <a:ext cx="6853118" cy="3840480"/>
           </a:xfrm>
           <a:prstGeom prst="rect">
             <a:avLst/>
@@ -4638,7 +4638,7 @@
         </p:nvSpPr>
         <p:spPr>
           <a:xfrm>
-            <a:off x="13060680" y="23799546"/>
+            <a:off x="13060680" y="22062186"/>
             <a:ext cx="10454640" cy="900112"/>
           </a:xfrm>
           <a:prstGeom prst="rect">
@@ -4677,8 +4677,8 @@
         </p:nvSpPr>
         <p:spPr>
           <a:xfrm>
-            <a:off x="24566880" y="4206240"/>
-            <a:ext cx="11094720" cy="9329928"/>
+            <a:off x="12740640" y="23693819"/>
+            <a:ext cx="11094720" cy="3283585"/>
           </a:xfrm>
           <a:prstGeom prst="rect">
             <a:avLst/>
@@ -4702,3230 +4702,7 @@
         </p:nvSpPr>
         <p:spPr>
           <a:xfrm>
-            <a:off x="24886920" y="4526280"/>
-            <a:ext cx="10454640" cy="1009650"/>
-          </a:xfrm>
-          <a:prstGeom prst="rect">
-            <a:avLst/>
-          </a:prstGeom>
-          <a:noFill/>
-          <a:ln/>
-        </p:spPr>
-        <p:txBody>
-          <a:bodyPr wrap="square" lIns="0" tIns="0" rIns="0" bIns="0" rtlCol="0" anchor="t"/>
-          <a:lstStyle/>
-          <a:p>
-            <a:pPr indent="0" marL="0">
-              <a:buNone/>
-            </a:pPr>
-            <a:r>
-              <a:rPr lang="en-US" sz="3300" b="1" dirty="0">
-                <a:solidFill>
-                  <a:srgbClr val="9E1B32"/>
-                </a:solidFill>
-                <a:latin typeface="Calibri" pitchFamily="34" charset="0"/>
-                <a:ea typeface="Calibri" pitchFamily="34" charset="-122"/>
-                <a:cs typeface="Calibri" pitchFamily="34" charset="-120"/>
-              </a:rPr>
-              <a:t>MHTOTDEV: a new total estimator, calibrated by Monte Carlo</a:t>
-            </a:r>
-            <a:endParaRPr lang="en-US" sz="3300" dirty="0"/>
-          </a:p>
-        </p:txBody>
-      </p:sp>
-      <p:sp>
-        <p:nvSpPr>
-          <p:cNvPr id="28" name="Body"/>
-          <p:cNvSpPr txBox="1"/>
-          <p:nvPr/>
-        </p:nvSpPr>
-        <p:spPr>
-          <a:xfrm>
-            <a:off x="24886920" y="5700522"/>
-            <a:ext cx="10454640" cy="2545080"/>
-          </a:xfrm>
-          <a:prstGeom prst="rect">
-            <a:avLst/>
-          </a:prstGeom>
-          <a:noFill/>
-          <a:ln/>
-        </p:spPr>
-        <p:txBody>
-          <a:bodyPr wrap="square" lIns="0" tIns="0" rIns="0" bIns="0" rtlCol="0" anchor="t"/>
-          <a:lstStyle/>
-          <a:p>
-            <a:pPr indent="0" marL="0">
-              <a:spcAft>
-                <a:spcPts val="800"/>
-              </a:spcAft>
-              <a:buNone/>
-            </a:pPr>
-            <a:r>
-              <a:rPr lang="en-US" sz="2400" dirty="0">
-                <a:solidFill>
-                  <a:srgbClr val="0B0B0B"/>
-                </a:solidFill>
-                <a:latin typeface="Calibri" pitchFamily="34" charset="0"/>
-                <a:ea typeface="Calibri" pitchFamily="34" charset="-122"/>
-                <a:cs typeface="Calibri" pitchFamily="34" charset="-120"/>
-              </a:rPr>
-              <a:t>Modified Hadamard total deviation combines drift rejection (third differences), white-from-flicker PM separation (modified form) and long-τ confidence (reflected extension). No published bias or EDF existed, so both were measured against synthesized noise: α ∈ {+2 … −2}, N ∈ {1024 … 32768}, R = 3000 realizations per cell, one seeded stream per (α, N, r), fits over τ/τ₀ ≥ 16. Bias B = E[MHTOTVAR]/E[MHVAR] against MHDEV on the same realization; EDF from the χ² variance relation; bootstrap standard error 2.6 %.</a:t>
-            </a:r>
-            <a:endParaRPr lang="en-US" sz="2400" dirty="0"/>
-          </a:p>
-        </p:txBody>
-      </p:sp>
-      <p:pic>
-        <p:nvPicPr>
-          <p:cNvPr id="29" name="F6_mhtot_construction" descr="/home/user/SigmaTau.jl/poster/figures/F6_mhtot_construction.png">    </p:cNvPr>
-          <p:cNvPicPr>
-            <a:picLocks noChangeAspect="1"/>
-          </p:cNvPicPr>
-          <p:nvPr/>
-        </p:nvPicPr>
-        <p:blipFill>
-          <a:blip r:embed="rId4"/>
-          <a:stretch>
-            <a:fillRect/>
-          </a:stretch>
-        </p:blipFill>
-        <p:spPr>
-          <a:xfrm>
-            <a:off x="27684805" y="8355330"/>
-            <a:ext cx="4858870" cy="3566160"/>
-          </a:xfrm>
-          <a:prstGeom prst="rect">
-            <a:avLst/>
-          </a:prstGeom>
-        </p:spPr>
-      </p:pic>
-      <p:sp>
-        <p:nvSpPr>
-          <p:cNvPr id="30" name="Caption"/>
-          <p:cNvSpPr txBox="1"/>
-          <p:nvPr/>
-        </p:nvSpPr>
-        <p:spPr>
-          <a:xfrm>
-            <a:off x="24886920" y="12031218"/>
-            <a:ext cx="10454640" cy="1184910"/>
-          </a:xfrm>
-          <a:prstGeom prst="rect">
-            <a:avLst/>
-          </a:prstGeom>
-          <a:noFill/>
-          <a:ln/>
-        </p:spPr>
-        <p:txBody>
-          <a:bodyPr wrap="square" lIns="0" tIns="0" rIns="0" bIns="0" rtlCol="0" anchor="t"/>
-          <a:lstStyle/>
-          <a:p>
-            <a:pPr indent="0" marL="0">
-              <a:buNone/>
-            </a:pPr>
-            <a:r>
-              <a:rPr lang="en-US" sz="1950" dirty="0">
-                <a:solidFill>
-                  <a:srgbClr val="52514E"/>
-                </a:solidFill>
-                <a:latin typeface="Calibri" pitchFamily="34" charset="0"/>
-                <a:ea typeface="Calibri" pitchFamily="34" charset="-122"/>
-                <a:cs typeface="Calibri" pitchFamily="34" charset="-120"/>
-              </a:rPr>
-              <a:t>Fig. 4. Kernel (Greenhall scheme): each of the N − 4m + 1 windows of length 4m has its half-mean slope removed and is extended by two time-reversed copies; the third difference at lag m is averaged over m, squared, normalised by 6m²τ² and averaged over all windows. The public call removes the least-squares frequency drift first.</a:t>
-            </a:r>
-            <a:endParaRPr lang="en-US" sz="1950" dirty="0"/>
-          </a:p>
-        </p:txBody>
-      </p:sp>
-      <p:sp>
-        <p:nvSpPr>
-          <p:cNvPr id="31" name="Shape 24"/>
-          <p:cNvSpPr/>
-          <p:nvPr/>
-        </p:nvSpPr>
-        <p:spPr>
-          <a:xfrm>
-            <a:off x="24566880" y="13947648"/>
-            <a:ext cx="11094720" cy="8455533"/>
-          </a:xfrm>
-          <a:prstGeom prst="rect">
-            <a:avLst/>
-          </a:prstGeom>
-          <a:solidFill>
-            <a:srgbClr val="FFFFFF"/>
-          </a:solidFill>
-          <a:ln w="12700">
-            <a:solidFill>
-              <a:srgbClr val="D9D4D0"/>
-            </a:solidFill>
-            <a:prstDash val="solid"/>
-          </a:ln>
-        </p:spPr>
-      </p:sp>
-      <p:sp>
-        <p:nvSpPr>
-          <p:cNvPr id="32" name="Heading"/>
-          <p:cNvSpPr txBox="1"/>
-          <p:nvPr/>
-        </p:nvSpPr>
-        <p:spPr>
-          <a:xfrm>
-            <a:off x="24886920" y="14267688"/>
-            <a:ext cx="10454640" cy="1009650"/>
-          </a:xfrm>
-          <a:prstGeom prst="rect">
-            <a:avLst/>
-          </a:prstGeom>
-          <a:noFill/>
-          <a:ln/>
-        </p:spPr>
-        <p:txBody>
-          <a:bodyPr wrap="square" lIns="0" tIns="0" rIns="0" bIns="0" rtlCol="0" anchor="t"/>
-          <a:lstStyle/>
-          <a:p>
-            <a:pPr indent="0" marL="0">
-              <a:buNone/>
-            </a:pPr>
-            <a:r>
-              <a:rPr lang="en-US" sz="3300" b="1" dirty="0">
-                <a:solidFill>
-                  <a:srgbClr val="9E1B32"/>
-                </a:solidFill>
-                <a:latin typeface="Calibri" pitchFamily="34" charset="0"/>
-                <a:ea typeface="Calibri" pitchFamily="34" charset="-122"/>
-                <a:cs typeface="Calibri" pitchFamily="34" charset="-120"/>
-              </a:rPr>
-              <a:t>Unbiased for PM noise, reads high for red FM; EDF fits with R² ≥ 0.9982</a:t>
-            </a:r>
-            <a:endParaRPr lang="en-US" sz="3300" dirty="0"/>
-          </a:p>
-        </p:txBody>
-      </p:sp>
-      <p:pic>
-        <p:nvPicPr>
-          <p:cNvPr id="33" name="F4_mhtot_bias" descr="/home/user/SigmaTau.jl/poster/figures/F4_mhtot_bias.png">    </p:cNvPr>
-          <p:cNvPicPr>
-            <a:picLocks noChangeAspect="1"/>
-          </p:cNvPicPr>
-          <p:nvPr/>
-        </p:nvPicPr>
-        <p:blipFill>
-          <a:blip r:embed="rId5"/>
-          <a:stretch>
-            <a:fillRect/>
-          </a:stretch>
-        </p:blipFill>
-        <p:spPr>
-          <a:xfrm>
-            <a:off x="25429807" y="15441930"/>
-            <a:ext cx="4004386" cy="3474720"/>
-          </a:xfrm>
-          <a:prstGeom prst="rect">
-            <a:avLst/>
-          </a:prstGeom>
-        </p:spPr>
-      </p:pic>
-      <p:pic>
-        <p:nvPicPr>
-          <p:cNvPr id="34" name="F5_mhtot_edf" descr="/home/user/SigmaTau.jl/poster/figures/F5_mhtot_edf.png">    </p:cNvPr>
-          <p:cNvPicPr>
-            <a:picLocks noChangeAspect="1"/>
-          </p:cNvPicPr>
-          <p:nvPr/>
-        </p:nvPicPr>
-        <p:blipFill>
-          <a:blip r:embed="rId6"/>
-          <a:stretch>
-            <a:fillRect/>
-          </a:stretch>
-        </p:blipFill>
-        <p:spPr>
-          <a:xfrm>
-            <a:off x="30796384" y="15441930"/>
-            <a:ext cx="4000192" cy="3474720"/>
-          </a:xfrm>
-          <a:prstGeom prst="rect">
-            <a:avLst/>
-          </a:prstGeom>
-        </p:spPr>
-      </p:pic>
-      <p:sp>
-        <p:nvSpPr>
-          <p:cNvPr id="35" name="Caption"/>
-          <p:cNvSpPr txBox="1"/>
-          <p:nvPr/>
-        </p:nvSpPr>
-        <p:spPr>
-          <a:xfrm>
-            <a:off x="24886920" y="19026378"/>
-            <a:ext cx="10454640" cy="615315"/>
-          </a:xfrm>
-          <a:prstGeom prst="rect">
-            <a:avLst/>
-          </a:prstGeom>
-          <a:noFill/>
-          <a:ln/>
-        </p:spPr>
-        <p:txBody>
-          <a:bodyPr wrap="square" lIns="0" tIns="0" rIns="0" bIns="0" rtlCol="0" anchor="t"/>
-          <a:lstStyle/>
-          <a:p>
-            <a:pPr indent="0" marL="0">
-              <a:buNone/>
-            </a:pPr>
-            <a:r>
-              <a:rPr lang="en-US" sz="1950" dirty="0">
-                <a:solidFill>
-                  <a:srgbClr val="52514E"/>
-                </a:solidFill>
-                <a:latin typeface="Calibri" pitchFamily="34" charset="0"/>
-                <a:ea typeface="Calibri" pitchFamily="34" charset="-122"/>
-                <a:cs typeface="Calibri" pitchFamily="34" charset="-120"/>
-              </a:rPr>
-              <a:t>Fig. 5. Shipped models B = b₀ + b₁ τ/T and ν = b T/τ − c (seed 20260531). Below T/τ ≈ 5–6 the interval is indicative only; σ itself is valid to the reach limit τ = T/4.</a:t>
-            </a:r>
-            <a:endParaRPr lang="en-US" sz="1950" dirty="0"/>
-          </a:p>
-        </p:txBody>
-      </p:sp>
-      <p:graphicFrame>
-        <p:nvGraphicFramePr>
-          <p:cNvPr id="3" name="MHTOTDEV coefficients"/>
-          <p:cNvGraphicFramePr>
-            <a:graphicFrameLocks noGrp="1"/>
-          </p:cNvGraphicFramePr>
-          <p:nvPr>
-            <p:extLst>
-              <p:ext uri="{D42A27DB-BD31-4B8C-83A1-F6EECF244321}">
-                <p14:modId xmlns:p14="http://schemas.microsoft.com/office/powerpoint/2010/main" val="1579011935"/>
-              </p:ext>
-            </p:extLst>
-          </p:nvPr>
-        </p:nvGraphicFramePr>
-        <p:xfrm>
-          <a:off x="24886920" y="19733133"/>
-          <a:ext cx="10454640" cy="914400"/>
-        </p:xfrm>
-        <a:graphic>
-          <a:graphicData uri="http://schemas.openxmlformats.org/drawingml/2006/table">
-            <a:tbl>
-              <a:tblPr/>
-              <a:tblGrid>
-                <a:gridCol w="871220"/>
-                <a:gridCol w="2516858"/>
-                <a:gridCol w="1452033"/>
-                <a:gridCol w="1548836"/>
-                <a:gridCol w="1355231"/>
-                <a:gridCol w="1355231"/>
-                <a:gridCol w="1355231"/>
-              </a:tblGrid>
-              <a:tr h="384048">
-                <a:tc>
-                  <a:txBody>
-                    <a:bodyPr/>
-                    <a:lstStyle/>
-                    <a:p>
-                      <a:pPr algn="ctr" indent="0" marL="0">
-                        <a:buNone/>
-                      </a:pPr>
-                      <a:r>
-                        <a:rPr lang="en-US" sz="1800" b="1" dirty="0">
-                          <a:solidFill>
-                            <a:srgbClr val="FFFFFF"/>
-                          </a:solidFill>
-                          <a:latin typeface="Calibri" pitchFamily="34" charset="0"/>
-                          <a:ea typeface="Calibri" pitchFamily="34" charset="-122"/>
-                          <a:cs typeface="Calibri" pitchFamily="34" charset="-120"/>
-                        </a:rPr>
-                        <a:t>α</a:t>
-                      </a:r>
-                      <a:endParaRPr lang="en-US" sz="1800" dirty="0">
-                        <a:latin typeface="Calibri" charset="0"/>
-                        <a:ea typeface="Calibri" charset="0"/>
-                        <a:cs typeface="Calibri" charset="0"/>
-                      </a:endParaRPr>
-                    </a:p>
-                  </a:txBody>
-                  <a:tcPr marL="45720" marR="45720" marT="45720" marB="45720" anchor="ctr">
-                    <a:lnL w="9525" cap="flat" cmpd="sng" algn="ctr">
-                      <a:solidFill>
-                        <a:srgbClr val="D9D4D0"/>
-                      </a:solidFill>
-                      <a:prstDash val="solid"/>
-                      <a:round/>
-                      <a:headEnd type="none" w="med" len="med"/>
-                      <a:tailEnd type="none" w="med" len="med"/>
-                    </a:lnL>
-                    <a:lnR w="9525" cap="flat" cmpd="sng" algn="ctr">
-                      <a:solidFill>
-                        <a:srgbClr val="D9D4D0"/>
-                      </a:solidFill>
-                      <a:prstDash val="solid"/>
-                      <a:round/>
-                      <a:headEnd type="none" w="med" len="med"/>
-                      <a:tailEnd type="none" w="med" len="med"/>
-                    </a:lnR>
-                    <a:lnT w="9525" cap="flat" cmpd="sng" algn="ctr">
-                      <a:solidFill>
-                        <a:srgbClr val="D9D4D0"/>
-                      </a:solidFill>
-                      <a:prstDash val="solid"/>
-                      <a:round/>
-                      <a:headEnd type="none" w="med" len="med"/>
-                      <a:tailEnd type="none" w="med" len="med"/>
-                    </a:lnT>
-                    <a:lnB w="9525" cap="flat" cmpd="sng" algn="ctr">
-                      <a:solidFill>
-                        <a:srgbClr val="D9D4D0"/>
-                      </a:solidFill>
-                      <a:prstDash val="solid"/>
-                      <a:round/>
-                      <a:headEnd type="none" w="med" len="med"/>
-                      <a:tailEnd type="none" w="med" len="med"/>
-                    </a:lnB>
-                    <a:solidFill>
-                      <a:srgbClr val="9E1B32"/>
-                    </a:solidFill>
-                  </a:tcPr>
-                </a:tc>
-                <a:tc>
-                  <a:txBody>
-                    <a:bodyPr/>
-                    <a:lstStyle/>
-                    <a:p>
-                      <a:pPr algn="ctr" indent="0" marL="0">
-                        <a:buNone/>
-                      </a:pPr>
-                      <a:r>
-                        <a:rPr lang="en-US" sz="1800" b="1" dirty="0">
-                          <a:solidFill>
-                            <a:srgbClr val="FFFFFF"/>
-                          </a:solidFill>
-                          <a:latin typeface="Calibri" pitchFamily="34" charset="0"/>
-                          <a:ea typeface="Calibri" pitchFamily="34" charset="-122"/>
-                          <a:cs typeface="Calibri" pitchFamily="34" charset="-120"/>
-                        </a:rPr>
-                        <a:t>noise</a:t>
-                      </a:r>
-                      <a:endParaRPr lang="en-US" sz="1800" dirty="0">
-                        <a:latin typeface="Calibri" charset="0"/>
-                        <a:ea typeface="Calibri" charset="0"/>
-                        <a:cs typeface="Calibri" charset="0"/>
-                      </a:endParaRPr>
-                    </a:p>
-                  </a:txBody>
-                  <a:tcPr marL="45720" marR="45720" marT="45720" marB="45720" anchor="ctr">
-                    <a:lnL w="9525" cap="flat" cmpd="sng" algn="ctr">
-                      <a:solidFill>
-                        <a:srgbClr val="D9D4D0"/>
-                      </a:solidFill>
-                      <a:prstDash val="solid"/>
-                      <a:round/>
-                      <a:headEnd type="none" w="med" len="med"/>
-                      <a:tailEnd type="none" w="med" len="med"/>
-                    </a:lnL>
-                    <a:lnR w="9525" cap="flat" cmpd="sng" algn="ctr">
-                      <a:solidFill>
-                        <a:srgbClr val="D9D4D0"/>
-                      </a:solidFill>
-                      <a:prstDash val="solid"/>
-                      <a:round/>
-                      <a:headEnd type="none" w="med" len="med"/>
-                      <a:tailEnd type="none" w="med" len="med"/>
-                    </a:lnR>
-                    <a:lnT w="9525" cap="flat" cmpd="sng" algn="ctr">
-                      <a:solidFill>
-                        <a:srgbClr val="D9D4D0"/>
-                      </a:solidFill>
-                      <a:prstDash val="solid"/>
-                      <a:round/>
-                      <a:headEnd type="none" w="med" len="med"/>
-                      <a:tailEnd type="none" w="med" len="med"/>
-                    </a:lnT>
-                    <a:lnB w="9525" cap="flat" cmpd="sng" algn="ctr">
-                      <a:solidFill>
-                        <a:srgbClr val="D9D4D0"/>
-                      </a:solidFill>
-                      <a:prstDash val="solid"/>
-                      <a:round/>
-                      <a:headEnd type="none" w="med" len="med"/>
-                      <a:tailEnd type="none" w="med" len="med"/>
-                    </a:lnB>
-                    <a:solidFill>
-                      <a:srgbClr val="9E1B32"/>
-                    </a:solidFill>
-                  </a:tcPr>
-                </a:tc>
-                <a:tc>
-                  <a:txBody>
-                    <a:bodyPr/>
-                    <a:lstStyle/>
-                    <a:p>
-                      <a:pPr algn="ctr" indent="0" marL="0">
-                        <a:buNone/>
-                      </a:pPr>
-                      <a:r>
-                        <a:rPr lang="en-US" sz="1800" b="1" dirty="0">
-                          <a:solidFill>
-                            <a:srgbClr val="FFFFFF"/>
-                          </a:solidFill>
-                          <a:latin typeface="Calibri" pitchFamily="34" charset="0"/>
-                          <a:ea typeface="Calibri" pitchFamily="34" charset="-122"/>
-                          <a:cs typeface="Calibri" pitchFamily="34" charset="-120"/>
-                        </a:rPr>
-                        <a:t>bias b₀</a:t>
-                      </a:r>
-                      <a:endParaRPr lang="en-US" sz="1800" dirty="0">
-                        <a:latin typeface="Calibri" charset="0"/>
-                        <a:ea typeface="Calibri" charset="0"/>
-                        <a:cs typeface="Calibri" charset="0"/>
-                      </a:endParaRPr>
-                    </a:p>
-                  </a:txBody>
-                  <a:tcPr marL="45720" marR="45720" marT="45720" marB="45720" anchor="ctr">
-                    <a:lnL w="9525" cap="flat" cmpd="sng" algn="ctr">
-                      <a:solidFill>
-                        <a:srgbClr val="D9D4D0"/>
-                      </a:solidFill>
-                      <a:prstDash val="solid"/>
-                      <a:round/>
-                      <a:headEnd type="none" w="med" len="med"/>
-                      <a:tailEnd type="none" w="med" len="med"/>
-                    </a:lnL>
-                    <a:lnR w="9525" cap="flat" cmpd="sng" algn="ctr">
-                      <a:solidFill>
-                        <a:srgbClr val="D9D4D0"/>
-                      </a:solidFill>
-                      <a:prstDash val="solid"/>
-                      <a:round/>
-                      <a:headEnd type="none" w="med" len="med"/>
-                      <a:tailEnd type="none" w="med" len="med"/>
-                    </a:lnR>
-                    <a:lnT w="9525" cap="flat" cmpd="sng" algn="ctr">
-                      <a:solidFill>
-                        <a:srgbClr val="D9D4D0"/>
-                      </a:solidFill>
-                      <a:prstDash val="solid"/>
-                      <a:round/>
-                      <a:headEnd type="none" w="med" len="med"/>
-                      <a:tailEnd type="none" w="med" len="med"/>
-                    </a:lnT>
-                    <a:lnB w="9525" cap="flat" cmpd="sng" algn="ctr">
-                      <a:solidFill>
-                        <a:srgbClr val="D9D4D0"/>
-                      </a:solidFill>
-                      <a:prstDash val="solid"/>
-                      <a:round/>
-                      <a:headEnd type="none" w="med" len="med"/>
-                      <a:tailEnd type="none" w="med" len="med"/>
-                    </a:lnB>
-                    <a:solidFill>
-                      <a:srgbClr val="9E1B32"/>
-                    </a:solidFill>
-                  </a:tcPr>
-                </a:tc>
-                <a:tc>
-                  <a:txBody>
-                    <a:bodyPr/>
-                    <a:lstStyle/>
-                    <a:p>
-                      <a:pPr algn="ctr" indent="0" marL="0">
-                        <a:buNone/>
-                      </a:pPr>
-                      <a:r>
-                        <a:rPr lang="en-US" sz="1800" b="1" dirty="0">
-                          <a:solidFill>
-                            <a:srgbClr val="FFFFFF"/>
-                          </a:solidFill>
-                          <a:latin typeface="Calibri" pitchFamily="34" charset="0"/>
-                          <a:ea typeface="Calibri" pitchFamily="34" charset="-122"/>
-                          <a:cs typeface="Calibri" pitchFamily="34" charset="-120"/>
-                        </a:rPr>
-                        <a:t>bias b₁</a:t>
-                      </a:r>
-                      <a:endParaRPr lang="en-US" sz="1800" dirty="0">
-                        <a:latin typeface="Calibri" charset="0"/>
-                        <a:ea typeface="Calibri" charset="0"/>
-                        <a:cs typeface="Calibri" charset="0"/>
-                      </a:endParaRPr>
-                    </a:p>
-                  </a:txBody>
-                  <a:tcPr marL="45720" marR="45720" marT="45720" marB="45720" anchor="ctr">
-                    <a:lnL w="9525" cap="flat" cmpd="sng" algn="ctr">
-                      <a:solidFill>
-                        <a:srgbClr val="D9D4D0"/>
-                      </a:solidFill>
-                      <a:prstDash val="solid"/>
-                      <a:round/>
-                      <a:headEnd type="none" w="med" len="med"/>
-                      <a:tailEnd type="none" w="med" len="med"/>
-                    </a:lnL>
-                    <a:lnR w="9525" cap="flat" cmpd="sng" algn="ctr">
-                      <a:solidFill>
-                        <a:srgbClr val="D9D4D0"/>
-                      </a:solidFill>
-                      <a:prstDash val="solid"/>
-                      <a:round/>
-                      <a:headEnd type="none" w="med" len="med"/>
-                      <a:tailEnd type="none" w="med" len="med"/>
-                    </a:lnR>
-                    <a:lnT w="9525" cap="flat" cmpd="sng" algn="ctr">
-                      <a:solidFill>
-                        <a:srgbClr val="D9D4D0"/>
-                      </a:solidFill>
-                      <a:prstDash val="solid"/>
-                      <a:round/>
-                      <a:headEnd type="none" w="med" len="med"/>
-                      <a:tailEnd type="none" w="med" len="med"/>
-                    </a:lnT>
-                    <a:lnB w="9525" cap="flat" cmpd="sng" algn="ctr">
-                      <a:solidFill>
-                        <a:srgbClr val="D9D4D0"/>
-                      </a:solidFill>
-                      <a:prstDash val="solid"/>
-                      <a:round/>
-                      <a:headEnd type="none" w="med" len="med"/>
-                      <a:tailEnd type="none" w="med" len="med"/>
-                    </a:lnB>
-                    <a:solidFill>
-                      <a:srgbClr val="9E1B32"/>
-                    </a:solidFill>
-                  </a:tcPr>
-                </a:tc>
-                <a:tc>
-                  <a:txBody>
-                    <a:bodyPr/>
-                    <a:lstStyle/>
-                    <a:p>
-                      <a:pPr algn="ctr" indent="0" marL="0">
-                        <a:buNone/>
-                      </a:pPr>
-                      <a:r>
-                        <a:rPr lang="en-US" sz="1800" b="1" dirty="0">
-                          <a:solidFill>
-                            <a:srgbClr val="FFFFFF"/>
-                          </a:solidFill>
-                          <a:latin typeface="Calibri" pitchFamily="34" charset="0"/>
-                          <a:ea typeface="Calibri" pitchFamily="34" charset="-122"/>
-                          <a:cs typeface="Calibri" pitchFamily="34" charset="-120"/>
-                        </a:rPr>
-                        <a:t>EDF b</a:t>
-                      </a:r>
-                      <a:endParaRPr lang="en-US" sz="1800" dirty="0">
-                        <a:latin typeface="Calibri" charset="0"/>
-                        <a:ea typeface="Calibri" charset="0"/>
-                        <a:cs typeface="Calibri" charset="0"/>
-                      </a:endParaRPr>
-                    </a:p>
-                  </a:txBody>
-                  <a:tcPr marL="45720" marR="45720" marT="45720" marB="45720" anchor="ctr">
-                    <a:lnL w="9525" cap="flat" cmpd="sng" algn="ctr">
-                      <a:solidFill>
-                        <a:srgbClr val="D9D4D0"/>
-                      </a:solidFill>
-                      <a:prstDash val="solid"/>
-                      <a:round/>
-                      <a:headEnd type="none" w="med" len="med"/>
-                      <a:tailEnd type="none" w="med" len="med"/>
-                    </a:lnL>
-                    <a:lnR w="9525" cap="flat" cmpd="sng" algn="ctr">
-                      <a:solidFill>
-                        <a:srgbClr val="D9D4D0"/>
-                      </a:solidFill>
-                      <a:prstDash val="solid"/>
-                      <a:round/>
-                      <a:headEnd type="none" w="med" len="med"/>
-                      <a:tailEnd type="none" w="med" len="med"/>
-                    </a:lnR>
-                    <a:lnT w="9525" cap="flat" cmpd="sng" algn="ctr">
-                      <a:solidFill>
-                        <a:srgbClr val="D9D4D0"/>
-                      </a:solidFill>
-                      <a:prstDash val="solid"/>
-                      <a:round/>
-                      <a:headEnd type="none" w="med" len="med"/>
-                      <a:tailEnd type="none" w="med" len="med"/>
-                    </a:lnT>
-                    <a:lnB w="9525" cap="flat" cmpd="sng" algn="ctr">
-                      <a:solidFill>
-                        <a:srgbClr val="D9D4D0"/>
-                      </a:solidFill>
-                      <a:prstDash val="solid"/>
-                      <a:round/>
-                      <a:headEnd type="none" w="med" len="med"/>
-                      <a:tailEnd type="none" w="med" len="med"/>
-                    </a:lnB>
-                    <a:solidFill>
-                      <a:srgbClr val="9E1B32"/>
-                    </a:solidFill>
-                  </a:tcPr>
-                </a:tc>
-                <a:tc>
-                  <a:txBody>
-                    <a:bodyPr/>
-                    <a:lstStyle/>
-                    <a:p>
-                      <a:pPr algn="ctr" indent="0" marL="0">
-                        <a:buNone/>
-                      </a:pPr>
-                      <a:r>
-                        <a:rPr lang="en-US" sz="1800" b="1" dirty="0">
-                          <a:solidFill>
-                            <a:srgbClr val="FFFFFF"/>
-                          </a:solidFill>
-                          <a:latin typeface="Calibri" pitchFamily="34" charset="0"/>
-                          <a:ea typeface="Calibri" pitchFamily="34" charset="-122"/>
-                          <a:cs typeface="Calibri" pitchFamily="34" charset="-120"/>
-                        </a:rPr>
-                        <a:t>EDF c</a:t>
-                      </a:r>
-                      <a:endParaRPr lang="en-US" sz="1800" dirty="0">
-                        <a:latin typeface="Calibri" charset="0"/>
-                        <a:ea typeface="Calibri" charset="0"/>
-                        <a:cs typeface="Calibri" charset="0"/>
-                      </a:endParaRPr>
-                    </a:p>
-                  </a:txBody>
-                  <a:tcPr marL="45720" marR="45720" marT="45720" marB="45720" anchor="ctr">
-                    <a:lnL w="9525" cap="flat" cmpd="sng" algn="ctr">
-                      <a:solidFill>
-                        <a:srgbClr val="D9D4D0"/>
-                      </a:solidFill>
-                      <a:prstDash val="solid"/>
-                      <a:round/>
-                      <a:headEnd type="none" w="med" len="med"/>
-                      <a:tailEnd type="none" w="med" len="med"/>
-                    </a:lnL>
-                    <a:lnR w="9525" cap="flat" cmpd="sng" algn="ctr">
-                      <a:solidFill>
-                        <a:srgbClr val="D9D4D0"/>
-                      </a:solidFill>
-                      <a:prstDash val="solid"/>
-                      <a:round/>
-                      <a:headEnd type="none" w="med" len="med"/>
-                      <a:tailEnd type="none" w="med" len="med"/>
-                    </a:lnR>
-                    <a:lnT w="9525" cap="flat" cmpd="sng" algn="ctr">
-                      <a:solidFill>
-                        <a:srgbClr val="D9D4D0"/>
-                      </a:solidFill>
-                      <a:prstDash val="solid"/>
-                      <a:round/>
-                      <a:headEnd type="none" w="med" len="med"/>
-                      <a:tailEnd type="none" w="med" len="med"/>
-                    </a:lnT>
-                    <a:lnB w="9525" cap="flat" cmpd="sng" algn="ctr">
-                      <a:solidFill>
-                        <a:srgbClr val="D9D4D0"/>
-                      </a:solidFill>
-                      <a:prstDash val="solid"/>
-                      <a:round/>
-                      <a:headEnd type="none" w="med" len="med"/>
-                      <a:tailEnd type="none" w="med" len="med"/>
-                    </a:lnB>
-                    <a:solidFill>
-                      <a:srgbClr val="9E1B32"/>
-                    </a:solidFill>
-                  </a:tcPr>
-                </a:tc>
-                <a:tc>
-                  <a:txBody>
-                    <a:bodyPr/>
-                    <a:lstStyle/>
-                    <a:p>
-                      <a:pPr algn="ctr" indent="0" marL="0">
-                        <a:buNone/>
-                      </a:pPr>
-                      <a:r>
-                        <a:rPr lang="en-US" sz="1800" b="1" dirty="0">
-                          <a:solidFill>
-                            <a:srgbClr val="FFFFFF"/>
-                          </a:solidFill>
-                          <a:latin typeface="Calibri" pitchFamily="34" charset="0"/>
-                          <a:ea typeface="Calibri" pitchFamily="34" charset="-122"/>
-                          <a:cs typeface="Calibri" pitchFamily="34" charset="-120"/>
-                        </a:rPr>
-                        <a:t>R²</a:t>
-                      </a:r>
-                      <a:endParaRPr lang="en-US" sz="1800" dirty="0">
-                        <a:latin typeface="Calibri" charset="0"/>
-                        <a:ea typeface="Calibri" charset="0"/>
-                        <a:cs typeface="Calibri" charset="0"/>
-                      </a:endParaRPr>
-                    </a:p>
-                  </a:txBody>
-                  <a:tcPr marL="45720" marR="45720" marT="45720" marB="45720" anchor="ctr">
-                    <a:lnL w="9525" cap="flat" cmpd="sng" algn="ctr">
-                      <a:solidFill>
-                        <a:srgbClr val="D9D4D0"/>
-                      </a:solidFill>
-                      <a:prstDash val="solid"/>
-                      <a:round/>
-                      <a:headEnd type="none" w="med" len="med"/>
-                      <a:tailEnd type="none" w="med" len="med"/>
-                    </a:lnL>
-                    <a:lnR w="9525" cap="flat" cmpd="sng" algn="ctr">
-                      <a:solidFill>
-                        <a:srgbClr val="D9D4D0"/>
-                      </a:solidFill>
-                      <a:prstDash val="solid"/>
-                      <a:round/>
-                      <a:headEnd type="none" w="med" len="med"/>
-                      <a:tailEnd type="none" w="med" len="med"/>
-                    </a:lnR>
-                    <a:lnT w="9525" cap="flat" cmpd="sng" algn="ctr">
-                      <a:solidFill>
-                        <a:srgbClr val="D9D4D0"/>
-                      </a:solidFill>
-                      <a:prstDash val="solid"/>
-                      <a:round/>
-                      <a:headEnd type="none" w="med" len="med"/>
-                      <a:tailEnd type="none" w="med" len="med"/>
-                    </a:lnT>
-                    <a:lnB w="9525" cap="flat" cmpd="sng" algn="ctr">
-                      <a:solidFill>
-                        <a:srgbClr val="D9D4D0"/>
-                      </a:solidFill>
-                      <a:prstDash val="solid"/>
-                      <a:round/>
-                      <a:headEnd type="none" w="med" len="med"/>
-                      <a:tailEnd type="none" w="med" len="med"/>
-                    </a:lnB>
-                    <a:solidFill>
-                      <a:srgbClr val="9E1B32"/>
-                    </a:solidFill>
-                  </a:tcPr>
-                </a:tc>
-              </a:tr>
-              <a:tr h="384048">
-                <a:tc>
-                  <a:txBody>
-                    <a:bodyPr/>
-                    <a:lstStyle/>
-                    <a:p>
-                      <a:pPr algn="ctr" indent="0" marL="0">
-                        <a:buNone/>
-                      </a:pPr>
-                      <a:r>
-                        <a:rPr lang="en-US" sz="1800" dirty="0">
-                          <a:solidFill>
-                            <a:srgbClr val="0B0B0B"/>
-                          </a:solidFill>
-                          <a:latin typeface="Calibri" pitchFamily="34" charset="0"/>
-                          <a:ea typeface="Calibri" pitchFamily="34" charset="-122"/>
-                          <a:cs typeface="Calibri" pitchFamily="34" charset="-120"/>
-                        </a:rPr>
-                        <a:t>+2</a:t>
-                      </a:r>
-                      <a:endParaRPr lang="en-US" sz="1800" dirty="0">
-                        <a:latin typeface="Calibri" charset="0"/>
-                        <a:ea typeface="Calibri" charset="0"/>
-                        <a:cs typeface="Calibri" charset="0"/>
-                      </a:endParaRPr>
-                    </a:p>
-                  </a:txBody>
-                  <a:tcPr marL="45720" marR="45720" marT="45720" marB="45720" anchor="ctr">
-                    <a:lnL w="9525" cap="flat" cmpd="sng" algn="ctr">
-                      <a:solidFill>
-                        <a:srgbClr val="D9D4D0"/>
-                      </a:solidFill>
-                      <a:prstDash val="solid"/>
-                      <a:round/>
-                      <a:headEnd type="none" w="med" len="med"/>
-                      <a:tailEnd type="none" w="med" len="med"/>
-                    </a:lnL>
-                    <a:lnR w="9525" cap="flat" cmpd="sng" algn="ctr">
-                      <a:solidFill>
-                        <a:srgbClr val="D9D4D0"/>
-                      </a:solidFill>
-                      <a:prstDash val="solid"/>
-                      <a:round/>
-                      <a:headEnd type="none" w="med" len="med"/>
-                      <a:tailEnd type="none" w="med" len="med"/>
-                    </a:lnR>
-                    <a:lnT w="9525" cap="flat" cmpd="sng" algn="ctr">
-                      <a:solidFill>
-                        <a:srgbClr val="D9D4D0"/>
-                      </a:solidFill>
-                      <a:prstDash val="solid"/>
-                      <a:round/>
-                      <a:headEnd type="none" w="med" len="med"/>
-                      <a:tailEnd type="none" w="med" len="med"/>
-                    </a:lnT>
-                    <a:lnB w="9525" cap="flat" cmpd="sng" algn="ctr">
-                      <a:solidFill>
-                        <a:srgbClr val="D9D4D0"/>
-                      </a:solidFill>
-                      <a:prstDash val="solid"/>
-                      <a:round/>
-                      <a:headEnd type="none" w="med" len="med"/>
-                      <a:tailEnd type="none" w="med" len="med"/>
-                    </a:lnB>
-                    <a:solidFill>
-                      <a:srgbClr val="FFFFFF"/>
-                    </a:solidFill>
-                  </a:tcPr>
-                </a:tc>
-                <a:tc>
-                  <a:txBody>
-                    <a:bodyPr/>
-                    <a:lstStyle/>
-                    <a:p>
-                      <a:pPr algn="l" indent="0" marL="0">
-                        <a:buNone/>
-                      </a:pPr>
-                      <a:r>
-                        <a:rPr lang="en-US" sz="1800" dirty="0">
-                          <a:solidFill>
-                            <a:srgbClr val="0B0B0B"/>
-                          </a:solidFill>
-                          <a:latin typeface="Calibri" pitchFamily="34" charset="0"/>
-                          <a:ea typeface="Calibri" pitchFamily="34" charset="-122"/>
-                          <a:cs typeface="Calibri" pitchFamily="34" charset="-120"/>
-                        </a:rPr>
-                        <a:t>white PM</a:t>
-                      </a:r>
-                      <a:endParaRPr lang="en-US" sz="1800" dirty="0">
-                        <a:latin typeface="Calibri" charset="0"/>
-                        <a:ea typeface="Calibri" charset="0"/>
-                        <a:cs typeface="Calibri" charset="0"/>
-                      </a:endParaRPr>
-                    </a:p>
-                  </a:txBody>
-                  <a:tcPr marL="45720" marR="45720" marT="45720" marB="45720" anchor="ctr">
-                    <a:lnL w="9525" cap="flat" cmpd="sng" algn="ctr">
-                      <a:solidFill>
-                        <a:srgbClr val="D9D4D0"/>
-                      </a:solidFill>
-                      <a:prstDash val="solid"/>
-                      <a:round/>
-                      <a:headEnd type="none" w="med" len="med"/>
-                      <a:tailEnd type="none" w="med" len="med"/>
-                    </a:lnL>
-                    <a:lnR w="9525" cap="flat" cmpd="sng" algn="ctr">
-                      <a:solidFill>
-                        <a:srgbClr val="D9D4D0"/>
-                      </a:solidFill>
-                      <a:prstDash val="solid"/>
-                      <a:round/>
-                      <a:headEnd type="none" w="med" len="med"/>
-                      <a:tailEnd type="none" w="med" len="med"/>
-                    </a:lnR>
-                    <a:lnT w="9525" cap="flat" cmpd="sng" algn="ctr">
-                      <a:solidFill>
-                        <a:srgbClr val="D9D4D0"/>
-                      </a:solidFill>
-                      <a:prstDash val="solid"/>
-                      <a:round/>
-                      <a:headEnd type="none" w="med" len="med"/>
-                      <a:tailEnd type="none" w="med" len="med"/>
-                    </a:lnT>
-                    <a:lnB w="9525" cap="flat" cmpd="sng" algn="ctr">
-                      <a:solidFill>
-                        <a:srgbClr val="D9D4D0"/>
-                      </a:solidFill>
-                      <a:prstDash val="solid"/>
-                      <a:round/>
-                      <a:headEnd type="none" w="med" len="med"/>
-                      <a:tailEnd type="none" w="med" len="med"/>
-                    </a:lnB>
-                    <a:solidFill>
-                      <a:srgbClr val="FFFFFF"/>
-                    </a:solidFill>
-                  </a:tcPr>
-                </a:tc>
-                <a:tc>
-                  <a:txBody>
-                    <a:bodyPr/>
-                    <a:lstStyle/>
-                    <a:p>
-                      <a:pPr algn="ctr" indent="0" marL="0">
-                        <a:buNone/>
-                      </a:pPr>
-                      <a:r>
-                        <a:rPr lang="en-US" sz="1800" dirty="0">
-                          <a:solidFill>
-                            <a:srgbClr val="0B0B0B"/>
-                          </a:solidFill>
-                          <a:latin typeface="Calibri" pitchFamily="34" charset="0"/>
-                          <a:ea typeface="Calibri" pitchFamily="34" charset="-122"/>
-                          <a:cs typeface="Calibri" pitchFamily="34" charset="-120"/>
-                        </a:rPr>
-                        <a:t>1.0308</a:t>
-                      </a:r>
-                      <a:endParaRPr lang="en-US" sz="1800" dirty="0">
-                        <a:latin typeface="Calibri" charset="0"/>
-                        <a:ea typeface="Calibri" charset="0"/>
-                        <a:cs typeface="Calibri" charset="0"/>
-                      </a:endParaRPr>
-                    </a:p>
-                  </a:txBody>
-                  <a:tcPr marL="45720" marR="45720" marT="45720" marB="45720" anchor="ctr">
-                    <a:lnL w="9525" cap="flat" cmpd="sng" algn="ctr">
-                      <a:solidFill>
-                        <a:srgbClr val="D9D4D0"/>
-                      </a:solidFill>
-                      <a:prstDash val="solid"/>
-                      <a:round/>
-                      <a:headEnd type="none" w="med" len="med"/>
-                      <a:tailEnd type="none" w="med" len="med"/>
-                    </a:lnL>
-                    <a:lnR w="9525" cap="flat" cmpd="sng" algn="ctr">
-                      <a:solidFill>
-                        <a:srgbClr val="D9D4D0"/>
-                      </a:solidFill>
-                      <a:prstDash val="solid"/>
-                      <a:round/>
-                      <a:headEnd type="none" w="med" len="med"/>
-                      <a:tailEnd type="none" w="med" len="med"/>
-                    </a:lnR>
-                    <a:lnT w="9525" cap="flat" cmpd="sng" algn="ctr">
-                      <a:solidFill>
-                        <a:srgbClr val="D9D4D0"/>
-                      </a:solidFill>
-                      <a:prstDash val="solid"/>
-                      <a:round/>
-                      <a:headEnd type="none" w="med" len="med"/>
-                      <a:tailEnd type="none" w="med" len="med"/>
-                    </a:lnT>
-                    <a:lnB w="9525" cap="flat" cmpd="sng" algn="ctr">
-                      <a:solidFill>
-                        <a:srgbClr val="D9D4D0"/>
-                      </a:solidFill>
-                      <a:prstDash val="solid"/>
-                      <a:round/>
-                      <a:headEnd type="none" w="med" len="med"/>
-                      <a:tailEnd type="none" w="med" len="med"/>
-                    </a:lnB>
-                    <a:solidFill>
-                      <a:srgbClr val="FFFFFF"/>
-                    </a:solidFill>
-                  </a:tcPr>
-                </a:tc>
-                <a:tc>
-                  <a:txBody>
-                    <a:bodyPr/>
-                    <a:lstStyle/>
-                    <a:p>
-                      <a:pPr algn="ctr" indent="0" marL="0">
-                        <a:buNone/>
-                      </a:pPr>
-                      <a:r>
-                        <a:rPr lang="en-US" sz="1800" dirty="0">
-                          <a:solidFill>
-                            <a:srgbClr val="0B0B0B"/>
-                          </a:solidFill>
-                          <a:latin typeface="Calibri" pitchFamily="34" charset="0"/>
-                          <a:ea typeface="Calibri" pitchFamily="34" charset="-122"/>
-                          <a:cs typeface="Calibri" pitchFamily="34" charset="-120"/>
-                        </a:rPr>
-                        <a:t>−0.1197</a:t>
-                      </a:r>
-                      <a:endParaRPr lang="en-US" sz="1800" dirty="0">
-                        <a:latin typeface="Calibri" charset="0"/>
-                        <a:ea typeface="Calibri" charset="0"/>
-                        <a:cs typeface="Calibri" charset="0"/>
-                      </a:endParaRPr>
-                    </a:p>
-                  </a:txBody>
-                  <a:tcPr marL="45720" marR="45720" marT="45720" marB="45720" anchor="ctr">
-                    <a:lnL w="9525" cap="flat" cmpd="sng" algn="ctr">
-                      <a:solidFill>
-                        <a:srgbClr val="D9D4D0"/>
-                      </a:solidFill>
-                      <a:prstDash val="solid"/>
-                      <a:round/>
-                      <a:headEnd type="none" w="med" len="med"/>
-                      <a:tailEnd type="none" w="med" len="med"/>
-                    </a:lnL>
-                    <a:lnR w="9525" cap="flat" cmpd="sng" algn="ctr">
-                      <a:solidFill>
-                        <a:srgbClr val="D9D4D0"/>
-                      </a:solidFill>
-                      <a:prstDash val="solid"/>
-                      <a:round/>
-                      <a:headEnd type="none" w="med" len="med"/>
-                      <a:tailEnd type="none" w="med" len="med"/>
-                    </a:lnR>
-                    <a:lnT w="9525" cap="flat" cmpd="sng" algn="ctr">
-                      <a:solidFill>
-                        <a:srgbClr val="D9D4D0"/>
-                      </a:solidFill>
-                      <a:prstDash val="solid"/>
-                      <a:round/>
-                      <a:headEnd type="none" w="med" len="med"/>
-                      <a:tailEnd type="none" w="med" len="med"/>
-                    </a:lnT>
-                    <a:lnB w="9525" cap="flat" cmpd="sng" algn="ctr">
-                      <a:solidFill>
-                        <a:srgbClr val="D9D4D0"/>
-                      </a:solidFill>
-                      <a:prstDash val="solid"/>
-                      <a:round/>
-                      <a:headEnd type="none" w="med" len="med"/>
-                      <a:tailEnd type="none" w="med" len="med"/>
-                    </a:lnB>
-                    <a:solidFill>
-                      <a:srgbClr val="FFFFFF"/>
-                    </a:solidFill>
-                  </a:tcPr>
-                </a:tc>
-                <a:tc>
-                  <a:txBody>
-                    <a:bodyPr/>
-                    <a:lstStyle/>
-                    <a:p>
-                      <a:pPr algn="ctr" indent="0" marL="0">
-                        <a:buNone/>
-                      </a:pPr>
-                      <a:r>
-                        <a:rPr lang="en-US" sz="1800" dirty="0">
-                          <a:solidFill>
-                            <a:srgbClr val="0B0B0B"/>
-                          </a:solidFill>
-                          <a:latin typeface="Calibri" pitchFamily="34" charset="0"/>
-                          <a:ea typeface="Calibri" pitchFamily="34" charset="-122"/>
-                          <a:cs typeface="Calibri" pitchFamily="34" charset="-120"/>
-                        </a:rPr>
-                        <a:t>1.6869</a:t>
-                      </a:r>
-                      <a:endParaRPr lang="en-US" sz="1800" dirty="0">
-                        <a:latin typeface="Calibri" charset="0"/>
-                        <a:ea typeface="Calibri" charset="0"/>
-                        <a:cs typeface="Calibri" charset="0"/>
-                      </a:endParaRPr>
-                    </a:p>
-                  </a:txBody>
-                  <a:tcPr marL="45720" marR="45720" marT="45720" marB="45720" anchor="ctr">
-                    <a:lnL w="9525" cap="flat" cmpd="sng" algn="ctr">
-                      <a:solidFill>
-                        <a:srgbClr val="D9D4D0"/>
-                      </a:solidFill>
-                      <a:prstDash val="solid"/>
-                      <a:round/>
-                      <a:headEnd type="none" w="med" len="med"/>
-                      <a:tailEnd type="none" w="med" len="med"/>
-                    </a:lnL>
-                    <a:lnR w="9525" cap="flat" cmpd="sng" algn="ctr">
-                      <a:solidFill>
-                        <a:srgbClr val="D9D4D0"/>
-                      </a:solidFill>
-                      <a:prstDash val="solid"/>
-                      <a:round/>
-                      <a:headEnd type="none" w="med" len="med"/>
-                      <a:tailEnd type="none" w="med" len="med"/>
-                    </a:lnR>
-                    <a:lnT w="9525" cap="flat" cmpd="sng" algn="ctr">
-                      <a:solidFill>
-                        <a:srgbClr val="D9D4D0"/>
-                      </a:solidFill>
-                      <a:prstDash val="solid"/>
-                      <a:round/>
-                      <a:headEnd type="none" w="med" len="med"/>
-                      <a:tailEnd type="none" w="med" len="med"/>
-                    </a:lnT>
-                    <a:lnB w="9525" cap="flat" cmpd="sng" algn="ctr">
-                      <a:solidFill>
-                        <a:srgbClr val="D9D4D0"/>
-                      </a:solidFill>
-                      <a:prstDash val="solid"/>
-                      <a:round/>
-                      <a:headEnd type="none" w="med" len="med"/>
-                      <a:tailEnd type="none" w="med" len="med"/>
-                    </a:lnB>
-                    <a:solidFill>
-                      <a:srgbClr val="FFFFFF"/>
-                    </a:solidFill>
-                  </a:tcPr>
-                </a:tc>
-                <a:tc>
-                  <a:txBody>
-                    <a:bodyPr/>
-                    <a:lstStyle/>
-                    <a:p>
-                      <a:pPr algn="ctr" indent="0" marL="0">
-                        <a:buNone/>
-                      </a:pPr>
-                      <a:r>
-                        <a:rPr lang="en-US" sz="1800" dirty="0">
-                          <a:solidFill>
-                            <a:srgbClr val="0B0B0B"/>
-                          </a:solidFill>
-                          <a:latin typeface="Calibri" pitchFamily="34" charset="0"/>
-                          <a:ea typeface="Calibri" pitchFamily="34" charset="-122"/>
-                          <a:cs typeface="Calibri" pitchFamily="34" charset="-120"/>
-                        </a:rPr>
-                        <a:t>4.3166</a:t>
-                      </a:r>
-                      <a:endParaRPr lang="en-US" sz="1800" dirty="0">
-                        <a:latin typeface="Calibri" charset="0"/>
-                        <a:ea typeface="Calibri" charset="0"/>
-                        <a:cs typeface="Calibri" charset="0"/>
-                      </a:endParaRPr>
-                    </a:p>
-                  </a:txBody>
-                  <a:tcPr marL="45720" marR="45720" marT="45720" marB="45720" anchor="ctr">
-                    <a:lnL w="9525" cap="flat" cmpd="sng" algn="ctr">
-                      <a:solidFill>
-                        <a:srgbClr val="D9D4D0"/>
-                      </a:solidFill>
-                      <a:prstDash val="solid"/>
-                      <a:round/>
-                      <a:headEnd type="none" w="med" len="med"/>
-                      <a:tailEnd type="none" w="med" len="med"/>
-                    </a:lnL>
-                    <a:lnR w="9525" cap="flat" cmpd="sng" algn="ctr">
-                      <a:solidFill>
-                        <a:srgbClr val="D9D4D0"/>
-                      </a:solidFill>
-                      <a:prstDash val="solid"/>
-                      <a:round/>
-                      <a:headEnd type="none" w="med" len="med"/>
-                      <a:tailEnd type="none" w="med" len="med"/>
-                    </a:lnR>
-                    <a:lnT w="9525" cap="flat" cmpd="sng" algn="ctr">
-                      <a:solidFill>
-                        <a:srgbClr val="D9D4D0"/>
-                      </a:solidFill>
-                      <a:prstDash val="solid"/>
-                      <a:round/>
-                      <a:headEnd type="none" w="med" len="med"/>
-                      <a:tailEnd type="none" w="med" len="med"/>
-                    </a:lnT>
-                    <a:lnB w="9525" cap="flat" cmpd="sng" algn="ctr">
-                      <a:solidFill>
-                        <a:srgbClr val="D9D4D0"/>
-                      </a:solidFill>
-                      <a:prstDash val="solid"/>
-                      <a:round/>
-                      <a:headEnd type="none" w="med" len="med"/>
-                      <a:tailEnd type="none" w="med" len="med"/>
-                    </a:lnB>
-                    <a:solidFill>
-                      <a:srgbClr val="FFFFFF"/>
-                    </a:solidFill>
-                  </a:tcPr>
-                </a:tc>
-                <a:tc>
-                  <a:txBody>
-                    <a:bodyPr/>
-                    <a:lstStyle/>
-                    <a:p>
-                      <a:pPr algn="ctr" indent="0" marL="0">
-                        <a:buNone/>
-                      </a:pPr>
-                      <a:r>
-                        <a:rPr lang="en-US" sz="1800" dirty="0">
-                          <a:solidFill>
-                            <a:srgbClr val="0B0B0B"/>
-                          </a:solidFill>
-                          <a:latin typeface="Calibri" pitchFamily="34" charset="0"/>
-                          <a:ea typeface="Calibri" pitchFamily="34" charset="-122"/>
-                          <a:cs typeface="Calibri" pitchFamily="34" charset="-120"/>
-                        </a:rPr>
-                        <a:t>0.9982</a:t>
-                      </a:r>
-                      <a:endParaRPr lang="en-US" sz="1800" dirty="0">
-                        <a:latin typeface="Calibri" charset="0"/>
-                        <a:ea typeface="Calibri" charset="0"/>
-                        <a:cs typeface="Calibri" charset="0"/>
-                      </a:endParaRPr>
-                    </a:p>
-                  </a:txBody>
-                  <a:tcPr marL="45720" marR="45720" marT="45720" marB="45720" anchor="ctr">
-                    <a:lnL w="9525" cap="flat" cmpd="sng" algn="ctr">
-                      <a:solidFill>
-                        <a:srgbClr val="D9D4D0"/>
-                      </a:solidFill>
-                      <a:prstDash val="solid"/>
-                      <a:round/>
-                      <a:headEnd type="none" w="med" len="med"/>
-                      <a:tailEnd type="none" w="med" len="med"/>
-                    </a:lnL>
-                    <a:lnR w="9525" cap="flat" cmpd="sng" algn="ctr">
-                      <a:solidFill>
-                        <a:srgbClr val="D9D4D0"/>
-                      </a:solidFill>
-                      <a:prstDash val="solid"/>
-                      <a:round/>
-                      <a:headEnd type="none" w="med" len="med"/>
-                      <a:tailEnd type="none" w="med" len="med"/>
-                    </a:lnR>
-                    <a:lnT w="9525" cap="flat" cmpd="sng" algn="ctr">
-                      <a:solidFill>
-                        <a:srgbClr val="D9D4D0"/>
-                      </a:solidFill>
-                      <a:prstDash val="solid"/>
-                      <a:round/>
-                      <a:headEnd type="none" w="med" len="med"/>
-                      <a:tailEnd type="none" w="med" len="med"/>
-                    </a:lnT>
-                    <a:lnB w="9525" cap="flat" cmpd="sng" algn="ctr">
-                      <a:solidFill>
-                        <a:srgbClr val="D9D4D0"/>
-                      </a:solidFill>
-                      <a:prstDash val="solid"/>
-                      <a:round/>
-                      <a:headEnd type="none" w="med" len="med"/>
-                      <a:tailEnd type="none" w="med" len="med"/>
-                    </a:lnB>
-                    <a:solidFill>
-                      <a:srgbClr val="FFFFFF"/>
-                    </a:solidFill>
-                  </a:tcPr>
-                </a:tc>
-              </a:tr>
-              <a:tr h="384048">
-                <a:tc>
-                  <a:txBody>
-                    <a:bodyPr/>
-                    <a:lstStyle/>
-                    <a:p>
-                      <a:pPr algn="ctr" indent="0" marL="0">
-                        <a:buNone/>
-                      </a:pPr>
-                      <a:r>
-                        <a:rPr lang="en-US" sz="1800" dirty="0">
-                          <a:solidFill>
-                            <a:srgbClr val="0B0B0B"/>
-                          </a:solidFill>
-                          <a:latin typeface="Calibri" pitchFamily="34" charset="0"/>
-                          <a:ea typeface="Calibri" pitchFamily="34" charset="-122"/>
-                          <a:cs typeface="Calibri" pitchFamily="34" charset="-120"/>
-                        </a:rPr>
-                        <a:t>+1</a:t>
-                      </a:r>
-                      <a:endParaRPr lang="en-US" sz="1800" dirty="0">
-                        <a:latin typeface="Calibri" charset="0"/>
-                        <a:ea typeface="Calibri" charset="0"/>
-                        <a:cs typeface="Calibri" charset="0"/>
-                      </a:endParaRPr>
-                    </a:p>
-                  </a:txBody>
-                  <a:tcPr marL="45720" marR="45720" marT="45720" marB="45720" anchor="ctr">
-                    <a:lnL w="9525" cap="flat" cmpd="sng" algn="ctr">
-                      <a:solidFill>
-                        <a:srgbClr val="D9D4D0"/>
-                      </a:solidFill>
-                      <a:prstDash val="solid"/>
-                      <a:round/>
-                      <a:headEnd type="none" w="med" len="med"/>
-                      <a:tailEnd type="none" w="med" len="med"/>
-                    </a:lnL>
-                    <a:lnR w="9525" cap="flat" cmpd="sng" algn="ctr">
-                      <a:solidFill>
-                        <a:srgbClr val="D9D4D0"/>
-                      </a:solidFill>
-                      <a:prstDash val="solid"/>
-                      <a:round/>
-                      <a:headEnd type="none" w="med" len="med"/>
-                      <a:tailEnd type="none" w="med" len="med"/>
-                    </a:lnR>
-                    <a:lnT w="9525" cap="flat" cmpd="sng" algn="ctr">
-                      <a:solidFill>
-                        <a:srgbClr val="D9D4D0"/>
-                      </a:solidFill>
-                      <a:prstDash val="solid"/>
-                      <a:round/>
-                      <a:headEnd type="none" w="med" len="med"/>
-                      <a:tailEnd type="none" w="med" len="med"/>
-                    </a:lnT>
-                    <a:lnB w="9525" cap="flat" cmpd="sng" algn="ctr">
-                      <a:solidFill>
-                        <a:srgbClr val="D9D4D0"/>
-                      </a:solidFill>
-                      <a:prstDash val="solid"/>
-                      <a:round/>
-                      <a:headEnd type="none" w="med" len="med"/>
-                      <a:tailEnd type="none" w="med" len="med"/>
-                    </a:lnB>
-                    <a:solidFill>
-                      <a:srgbClr val="F7F2F3"/>
-                    </a:solidFill>
-                  </a:tcPr>
-                </a:tc>
-                <a:tc>
-                  <a:txBody>
-                    <a:bodyPr/>
-                    <a:lstStyle/>
-                    <a:p>
-                      <a:pPr algn="l" indent="0" marL="0">
-                        <a:buNone/>
-                      </a:pPr>
-                      <a:r>
-                        <a:rPr lang="en-US" sz="1800" dirty="0">
-                          <a:solidFill>
-                            <a:srgbClr val="0B0B0B"/>
-                          </a:solidFill>
-                          <a:latin typeface="Calibri" pitchFamily="34" charset="0"/>
-                          <a:ea typeface="Calibri" pitchFamily="34" charset="-122"/>
-                          <a:cs typeface="Calibri" pitchFamily="34" charset="-120"/>
-                        </a:rPr>
-                        <a:t>flicker PM</a:t>
-                      </a:r>
-                      <a:endParaRPr lang="en-US" sz="1800" dirty="0">
-                        <a:latin typeface="Calibri" charset="0"/>
-                        <a:ea typeface="Calibri" charset="0"/>
-                        <a:cs typeface="Calibri" charset="0"/>
-                      </a:endParaRPr>
-                    </a:p>
-                  </a:txBody>
-                  <a:tcPr marL="45720" marR="45720" marT="45720" marB="45720" anchor="ctr">
-                    <a:lnL w="9525" cap="flat" cmpd="sng" algn="ctr">
-                      <a:solidFill>
-                        <a:srgbClr val="D9D4D0"/>
-                      </a:solidFill>
-                      <a:prstDash val="solid"/>
-                      <a:round/>
-                      <a:headEnd type="none" w="med" len="med"/>
-                      <a:tailEnd type="none" w="med" len="med"/>
-                    </a:lnL>
-                    <a:lnR w="9525" cap="flat" cmpd="sng" algn="ctr">
-                      <a:solidFill>
-                        <a:srgbClr val="D9D4D0"/>
-                      </a:solidFill>
-                      <a:prstDash val="solid"/>
-                      <a:round/>
-                      <a:headEnd type="none" w="med" len="med"/>
-                      <a:tailEnd type="none" w="med" len="med"/>
-                    </a:lnR>
-                    <a:lnT w="9525" cap="flat" cmpd="sng" algn="ctr">
-                      <a:solidFill>
-                        <a:srgbClr val="D9D4D0"/>
-                      </a:solidFill>
-                      <a:prstDash val="solid"/>
-                      <a:round/>
-                      <a:headEnd type="none" w="med" len="med"/>
-                      <a:tailEnd type="none" w="med" len="med"/>
-                    </a:lnT>
-                    <a:lnB w="9525" cap="flat" cmpd="sng" algn="ctr">
-                      <a:solidFill>
-                        <a:srgbClr val="D9D4D0"/>
-                      </a:solidFill>
-                      <a:prstDash val="solid"/>
-                      <a:round/>
-                      <a:headEnd type="none" w="med" len="med"/>
-                      <a:tailEnd type="none" w="med" len="med"/>
-                    </a:lnB>
-                    <a:solidFill>
-                      <a:srgbClr val="F7F2F3"/>
-                    </a:solidFill>
-                  </a:tcPr>
-                </a:tc>
-                <a:tc>
-                  <a:txBody>
-                    <a:bodyPr/>
-                    <a:lstStyle/>
-                    <a:p>
-                      <a:pPr algn="ctr" indent="0" marL="0">
-                        <a:buNone/>
-                      </a:pPr>
-                      <a:r>
-                        <a:rPr lang="en-US" sz="1800" dirty="0">
-                          <a:solidFill>
-                            <a:srgbClr val="0B0B0B"/>
-                          </a:solidFill>
-                          <a:latin typeface="Calibri" pitchFamily="34" charset="0"/>
-                          <a:ea typeface="Calibri" pitchFamily="34" charset="-122"/>
-                          <a:cs typeface="Calibri" pitchFamily="34" charset="-120"/>
-                        </a:rPr>
-                        <a:t>0.9883</a:t>
-                      </a:r>
-                      <a:endParaRPr lang="en-US" sz="1800" dirty="0">
-                        <a:latin typeface="Calibri" charset="0"/>
-                        <a:ea typeface="Calibri" charset="0"/>
-                        <a:cs typeface="Calibri" charset="0"/>
-                      </a:endParaRPr>
-                    </a:p>
-                  </a:txBody>
-                  <a:tcPr marL="45720" marR="45720" marT="45720" marB="45720" anchor="ctr">
-                    <a:lnL w="9525" cap="flat" cmpd="sng" algn="ctr">
-                      <a:solidFill>
-                        <a:srgbClr val="D9D4D0"/>
-                      </a:solidFill>
-                      <a:prstDash val="solid"/>
-                      <a:round/>
-                      <a:headEnd type="none" w="med" len="med"/>
-                      <a:tailEnd type="none" w="med" len="med"/>
-                    </a:lnL>
-                    <a:lnR w="9525" cap="flat" cmpd="sng" algn="ctr">
-                      <a:solidFill>
-                        <a:srgbClr val="D9D4D0"/>
-                      </a:solidFill>
-                      <a:prstDash val="solid"/>
-                      <a:round/>
-                      <a:headEnd type="none" w="med" len="med"/>
-                      <a:tailEnd type="none" w="med" len="med"/>
-                    </a:lnR>
-                    <a:lnT w="9525" cap="flat" cmpd="sng" algn="ctr">
-                      <a:solidFill>
-                        <a:srgbClr val="D9D4D0"/>
-                      </a:solidFill>
-                      <a:prstDash val="solid"/>
-                      <a:round/>
-                      <a:headEnd type="none" w="med" len="med"/>
-                      <a:tailEnd type="none" w="med" len="med"/>
-                    </a:lnT>
-                    <a:lnB w="9525" cap="flat" cmpd="sng" algn="ctr">
-                      <a:solidFill>
-                        <a:srgbClr val="D9D4D0"/>
-                      </a:solidFill>
-                      <a:prstDash val="solid"/>
-                      <a:round/>
-                      <a:headEnd type="none" w="med" len="med"/>
-                      <a:tailEnd type="none" w="med" len="med"/>
-                    </a:lnB>
-                    <a:solidFill>
-                      <a:srgbClr val="F7F2F3"/>
-                    </a:solidFill>
-                  </a:tcPr>
-                </a:tc>
-                <a:tc>
-                  <a:txBody>
-                    <a:bodyPr/>
-                    <a:lstStyle/>
-                    <a:p>
-                      <a:pPr algn="ctr" indent="0" marL="0">
-                        <a:buNone/>
-                      </a:pPr>
-                      <a:r>
-                        <a:rPr lang="en-US" sz="1800" dirty="0">
-                          <a:solidFill>
-                            <a:srgbClr val="0B0B0B"/>
-                          </a:solidFill>
-                          <a:latin typeface="Calibri" pitchFamily="34" charset="0"/>
-                          <a:ea typeface="Calibri" pitchFamily="34" charset="-122"/>
-                          <a:cs typeface="Calibri" pitchFamily="34" charset="-120"/>
-                        </a:rPr>
-                        <a:t>−0.0686</a:t>
-                      </a:r>
-                      <a:endParaRPr lang="en-US" sz="1800" dirty="0">
-                        <a:latin typeface="Calibri" charset="0"/>
-                        <a:ea typeface="Calibri" charset="0"/>
-                        <a:cs typeface="Calibri" charset="0"/>
-                      </a:endParaRPr>
-                    </a:p>
-                  </a:txBody>
-                  <a:tcPr marL="45720" marR="45720" marT="45720" marB="45720" anchor="ctr">
-                    <a:lnL w="9525" cap="flat" cmpd="sng" algn="ctr">
-                      <a:solidFill>
-                        <a:srgbClr val="D9D4D0"/>
-                      </a:solidFill>
-                      <a:prstDash val="solid"/>
-                      <a:round/>
-                      <a:headEnd type="none" w="med" len="med"/>
-                      <a:tailEnd type="none" w="med" len="med"/>
-                    </a:lnL>
-                    <a:lnR w="9525" cap="flat" cmpd="sng" algn="ctr">
-                      <a:solidFill>
-                        <a:srgbClr val="D9D4D0"/>
-                      </a:solidFill>
-                      <a:prstDash val="solid"/>
-                      <a:round/>
-                      <a:headEnd type="none" w="med" len="med"/>
-                      <a:tailEnd type="none" w="med" len="med"/>
-                    </a:lnR>
-                    <a:lnT w="9525" cap="flat" cmpd="sng" algn="ctr">
-                      <a:solidFill>
-                        <a:srgbClr val="D9D4D0"/>
-                      </a:solidFill>
-                      <a:prstDash val="solid"/>
-                      <a:round/>
-                      <a:headEnd type="none" w="med" len="med"/>
-                      <a:tailEnd type="none" w="med" len="med"/>
-                    </a:lnT>
-                    <a:lnB w="9525" cap="flat" cmpd="sng" algn="ctr">
-                      <a:solidFill>
-                        <a:srgbClr val="D9D4D0"/>
-                      </a:solidFill>
-                      <a:prstDash val="solid"/>
-                      <a:round/>
-                      <a:headEnd type="none" w="med" len="med"/>
-                      <a:tailEnd type="none" w="med" len="med"/>
-                    </a:lnB>
-                    <a:solidFill>
-                      <a:srgbClr val="F7F2F3"/>
-                    </a:solidFill>
-                  </a:tcPr>
-                </a:tc>
-                <a:tc>
-                  <a:txBody>
-                    <a:bodyPr/>
-                    <a:lstStyle/>
-                    <a:p>
-                      <a:pPr algn="ctr" indent="0" marL="0">
-                        <a:buNone/>
-                      </a:pPr>
-                      <a:r>
-                        <a:rPr lang="en-US" sz="1800" dirty="0">
-                          <a:solidFill>
-                            <a:srgbClr val="0B0B0B"/>
-                          </a:solidFill>
-                          <a:latin typeface="Calibri" pitchFamily="34" charset="0"/>
-                          <a:ea typeface="Calibri" pitchFamily="34" charset="-122"/>
-                          <a:cs typeface="Calibri" pitchFamily="34" charset="-120"/>
-                        </a:rPr>
-                        <a:t>1.1671</a:t>
-                      </a:r>
-                      <a:endParaRPr lang="en-US" sz="1800" dirty="0">
-                        <a:latin typeface="Calibri" charset="0"/>
-                        <a:ea typeface="Calibri" charset="0"/>
-                        <a:cs typeface="Calibri" charset="0"/>
-                      </a:endParaRPr>
-                    </a:p>
-                  </a:txBody>
-                  <a:tcPr marL="45720" marR="45720" marT="45720" marB="45720" anchor="ctr">
-                    <a:lnL w="9525" cap="flat" cmpd="sng" algn="ctr">
-                      <a:solidFill>
-                        <a:srgbClr val="D9D4D0"/>
-                      </a:solidFill>
-                      <a:prstDash val="solid"/>
-                      <a:round/>
-                      <a:headEnd type="none" w="med" len="med"/>
-                      <a:tailEnd type="none" w="med" len="med"/>
-                    </a:lnL>
-                    <a:lnR w="9525" cap="flat" cmpd="sng" algn="ctr">
-                      <a:solidFill>
-                        <a:srgbClr val="D9D4D0"/>
-                      </a:solidFill>
-                      <a:prstDash val="solid"/>
-                      <a:round/>
-                      <a:headEnd type="none" w="med" len="med"/>
-                      <a:tailEnd type="none" w="med" len="med"/>
-                    </a:lnR>
-                    <a:lnT w="9525" cap="flat" cmpd="sng" algn="ctr">
-                      <a:solidFill>
-                        <a:srgbClr val="D9D4D0"/>
-                      </a:solidFill>
-                      <a:prstDash val="solid"/>
-                      <a:round/>
-                      <a:headEnd type="none" w="med" len="med"/>
-                      <a:tailEnd type="none" w="med" len="med"/>
-                    </a:lnT>
-                    <a:lnB w="9525" cap="flat" cmpd="sng" algn="ctr">
-                      <a:solidFill>
-                        <a:srgbClr val="D9D4D0"/>
-                      </a:solidFill>
-                      <a:prstDash val="solid"/>
-                      <a:round/>
-                      <a:headEnd type="none" w="med" len="med"/>
-                      <a:tailEnd type="none" w="med" len="med"/>
-                    </a:lnB>
-                    <a:solidFill>
-                      <a:srgbClr val="F7F2F3"/>
-                    </a:solidFill>
-                  </a:tcPr>
-                </a:tc>
-                <a:tc>
-                  <a:txBody>
-                    <a:bodyPr/>
-                    <a:lstStyle/>
-                    <a:p>
-                      <a:pPr algn="ctr" indent="0" marL="0">
-                        <a:buNone/>
-                      </a:pPr>
-                      <a:r>
-                        <a:rPr lang="en-US" sz="1800" dirty="0">
-                          <a:solidFill>
-                            <a:srgbClr val="0B0B0B"/>
-                          </a:solidFill>
-                          <a:latin typeface="Calibri" pitchFamily="34" charset="0"/>
-                          <a:ea typeface="Calibri" pitchFamily="34" charset="-122"/>
-                          <a:cs typeface="Calibri" pitchFamily="34" charset="-120"/>
-                        </a:rPr>
-                        <a:t>3.2107</a:t>
-                      </a:r>
-                      <a:endParaRPr lang="en-US" sz="1800" dirty="0">
-                        <a:latin typeface="Calibri" charset="0"/>
-                        <a:ea typeface="Calibri" charset="0"/>
-                        <a:cs typeface="Calibri" charset="0"/>
-                      </a:endParaRPr>
-                    </a:p>
-                  </a:txBody>
-                  <a:tcPr marL="45720" marR="45720" marT="45720" marB="45720" anchor="ctr">
-                    <a:lnL w="9525" cap="flat" cmpd="sng" algn="ctr">
-                      <a:solidFill>
-                        <a:srgbClr val="D9D4D0"/>
-                      </a:solidFill>
-                      <a:prstDash val="solid"/>
-                      <a:round/>
-                      <a:headEnd type="none" w="med" len="med"/>
-                      <a:tailEnd type="none" w="med" len="med"/>
-                    </a:lnL>
-                    <a:lnR w="9525" cap="flat" cmpd="sng" algn="ctr">
-                      <a:solidFill>
-                        <a:srgbClr val="D9D4D0"/>
-                      </a:solidFill>
-                      <a:prstDash val="solid"/>
-                      <a:round/>
-                      <a:headEnd type="none" w="med" len="med"/>
-                      <a:tailEnd type="none" w="med" len="med"/>
-                    </a:lnR>
-                    <a:lnT w="9525" cap="flat" cmpd="sng" algn="ctr">
-                      <a:solidFill>
-                        <a:srgbClr val="D9D4D0"/>
-                      </a:solidFill>
-                      <a:prstDash val="solid"/>
-                      <a:round/>
-                      <a:headEnd type="none" w="med" len="med"/>
-                      <a:tailEnd type="none" w="med" len="med"/>
-                    </a:lnT>
-                    <a:lnB w="9525" cap="flat" cmpd="sng" algn="ctr">
-                      <a:solidFill>
-                        <a:srgbClr val="D9D4D0"/>
-                      </a:solidFill>
-                      <a:prstDash val="solid"/>
-                      <a:round/>
-                      <a:headEnd type="none" w="med" len="med"/>
-                      <a:tailEnd type="none" w="med" len="med"/>
-                    </a:lnB>
-                    <a:solidFill>
-                      <a:srgbClr val="F7F2F3"/>
-                    </a:solidFill>
-                  </a:tcPr>
-                </a:tc>
-                <a:tc>
-                  <a:txBody>
-                    <a:bodyPr/>
-                    <a:lstStyle/>
-                    <a:p>
-                      <a:pPr algn="ctr" indent="0" marL="0">
-                        <a:buNone/>
-                      </a:pPr>
-                      <a:r>
-                        <a:rPr lang="en-US" sz="1800" dirty="0">
-                          <a:solidFill>
-                            <a:srgbClr val="0B0B0B"/>
-                          </a:solidFill>
-                          <a:latin typeface="Calibri" pitchFamily="34" charset="0"/>
-                          <a:ea typeface="Calibri" pitchFamily="34" charset="-122"/>
-                          <a:cs typeface="Calibri" pitchFamily="34" charset="-120"/>
-                        </a:rPr>
-                        <a:t>0.9988</a:t>
-                      </a:r>
-                      <a:endParaRPr lang="en-US" sz="1800" dirty="0">
-                        <a:latin typeface="Calibri" charset="0"/>
-                        <a:ea typeface="Calibri" charset="0"/>
-                        <a:cs typeface="Calibri" charset="0"/>
-                      </a:endParaRPr>
-                    </a:p>
-                  </a:txBody>
-                  <a:tcPr marL="45720" marR="45720" marT="45720" marB="45720" anchor="ctr">
-                    <a:lnL w="9525" cap="flat" cmpd="sng" algn="ctr">
-                      <a:solidFill>
-                        <a:srgbClr val="D9D4D0"/>
-                      </a:solidFill>
-                      <a:prstDash val="solid"/>
-                      <a:round/>
-                      <a:headEnd type="none" w="med" len="med"/>
-                      <a:tailEnd type="none" w="med" len="med"/>
-                    </a:lnL>
-                    <a:lnR w="9525" cap="flat" cmpd="sng" algn="ctr">
-                      <a:solidFill>
-                        <a:srgbClr val="D9D4D0"/>
-                      </a:solidFill>
-                      <a:prstDash val="solid"/>
-                      <a:round/>
-                      <a:headEnd type="none" w="med" len="med"/>
-                      <a:tailEnd type="none" w="med" len="med"/>
-                    </a:lnR>
-                    <a:lnT w="9525" cap="flat" cmpd="sng" algn="ctr">
-                      <a:solidFill>
-                        <a:srgbClr val="D9D4D0"/>
-                      </a:solidFill>
-                      <a:prstDash val="solid"/>
-                      <a:round/>
-                      <a:headEnd type="none" w="med" len="med"/>
-                      <a:tailEnd type="none" w="med" len="med"/>
-                    </a:lnT>
-                    <a:lnB w="9525" cap="flat" cmpd="sng" algn="ctr">
-                      <a:solidFill>
-                        <a:srgbClr val="D9D4D0"/>
-                      </a:solidFill>
-                      <a:prstDash val="solid"/>
-                      <a:round/>
-                      <a:headEnd type="none" w="med" len="med"/>
-                      <a:tailEnd type="none" w="med" len="med"/>
-                    </a:lnB>
-                    <a:solidFill>
-                      <a:srgbClr val="F7F2F3"/>
-                    </a:solidFill>
-                  </a:tcPr>
-                </a:tc>
-              </a:tr>
-              <a:tr h="384048">
-                <a:tc>
-                  <a:txBody>
-                    <a:bodyPr/>
-                    <a:lstStyle/>
-                    <a:p>
-                      <a:pPr algn="ctr" indent="0" marL="0">
-                        <a:buNone/>
-                      </a:pPr>
-                      <a:r>
-                        <a:rPr lang="en-US" sz="1800" dirty="0">
-                          <a:solidFill>
-                            <a:srgbClr val="0B0B0B"/>
-                          </a:solidFill>
-                          <a:latin typeface="Calibri" pitchFamily="34" charset="0"/>
-                          <a:ea typeface="Calibri" pitchFamily="34" charset="-122"/>
-                          <a:cs typeface="Calibri" pitchFamily="34" charset="-120"/>
-                        </a:rPr>
-                        <a:t>0</a:t>
-                      </a:r>
-                      <a:endParaRPr lang="en-US" sz="1800" dirty="0">
-                        <a:latin typeface="Calibri" charset="0"/>
-                        <a:ea typeface="Calibri" charset="0"/>
-                        <a:cs typeface="Calibri" charset="0"/>
-                      </a:endParaRPr>
-                    </a:p>
-                  </a:txBody>
-                  <a:tcPr marL="45720" marR="45720" marT="45720" marB="45720" anchor="ctr">
-                    <a:lnL w="9525" cap="flat" cmpd="sng" algn="ctr">
-                      <a:solidFill>
-                        <a:srgbClr val="D9D4D0"/>
-                      </a:solidFill>
-                      <a:prstDash val="solid"/>
-                      <a:round/>
-                      <a:headEnd type="none" w="med" len="med"/>
-                      <a:tailEnd type="none" w="med" len="med"/>
-                    </a:lnL>
-                    <a:lnR w="9525" cap="flat" cmpd="sng" algn="ctr">
-                      <a:solidFill>
-                        <a:srgbClr val="D9D4D0"/>
-                      </a:solidFill>
-                      <a:prstDash val="solid"/>
-                      <a:round/>
-                      <a:headEnd type="none" w="med" len="med"/>
-                      <a:tailEnd type="none" w="med" len="med"/>
-                    </a:lnR>
-                    <a:lnT w="9525" cap="flat" cmpd="sng" algn="ctr">
-                      <a:solidFill>
-                        <a:srgbClr val="D9D4D0"/>
-                      </a:solidFill>
-                      <a:prstDash val="solid"/>
-                      <a:round/>
-                      <a:headEnd type="none" w="med" len="med"/>
-                      <a:tailEnd type="none" w="med" len="med"/>
-                    </a:lnT>
-                    <a:lnB w="9525" cap="flat" cmpd="sng" algn="ctr">
-                      <a:solidFill>
-                        <a:srgbClr val="D9D4D0"/>
-                      </a:solidFill>
-                      <a:prstDash val="solid"/>
-                      <a:round/>
-                      <a:headEnd type="none" w="med" len="med"/>
-                      <a:tailEnd type="none" w="med" len="med"/>
-                    </a:lnB>
-                    <a:solidFill>
-                      <a:srgbClr val="FFFFFF"/>
-                    </a:solidFill>
-                  </a:tcPr>
-                </a:tc>
-                <a:tc>
-                  <a:txBody>
-                    <a:bodyPr/>
-                    <a:lstStyle/>
-                    <a:p>
-                      <a:pPr algn="l" indent="0" marL="0">
-                        <a:buNone/>
-                      </a:pPr>
-                      <a:r>
-                        <a:rPr lang="en-US" sz="1800" dirty="0">
-                          <a:solidFill>
-                            <a:srgbClr val="0B0B0B"/>
-                          </a:solidFill>
-                          <a:latin typeface="Calibri" pitchFamily="34" charset="0"/>
-                          <a:ea typeface="Calibri" pitchFamily="34" charset="-122"/>
-                          <a:cs typeface="Calibri" pitchFamily="34" charset="-120"/>
-                        </a:rPr>
-                        <a:t>white FM</a:t>
-                      </a:r>
-                      <a:endParaRPr lang="en-US" sz="1800" dirty="0">
-                        <a:latin typeface="Calibri" charset="0"/>
-                        <a:ea typeface="Calibri" charset="0"/>
-                        <a:cs typeface="Calibri" charset="0"/>
-                      </a:endParaRPr>
-                    </a:p>
-                  </a:txBody>
-                  <a:tcPr marL="45720" marR="45720" marT="45720" marB="45720" anchor="ctr">
-                    <a:lnL w="9525" cap="flat" cmpd="sng" algn="ctr">
-                      <a:solidFill>
-                        <a:srgbClr val="D9D4D0"/>
-                      </a:solidFill>
-                      <a:prstDash val="solid"/>
-                      <a:round/>
-                      <a:headEnd type="none" w="med" len="med"/>
-                      <a:tailEnd type="none" w="med" len="med"/>
-                    </a:lnL>
-                    <a:lnR w="9525" cap="flat" cmpd="sng" algn="ctr">
-                      <a:solidFill>
-                        <a:srgbClr val="D9D4D0"/>
-                      </a:solidFill>
-                      <a:prstDash val="solid"/>
-                      <a:round/>
-                      <a:headEnd type="none" w="med" len="med"/>
-                      <a:tailEnd type="none" w="med" len="med"/>
-                    </a:lnR>
-                    <a:lnT w="9525" cap="flat" cmpd="sng" algn="ctr">
-                      <a:solidFill>
-                        <a:srgbClr val="D9D4D0"/>
-                      </a:solidFill>
-                      <a:prstDash val="solid"/>
-                      <a:round/>
-                      <a:headEnd type="none" w="med" len="med"/>
-                      <a:tailEnd type="none" w="med" len="med"/>
-                    </a:lnT>
-                    <a:lnB w="9525" cap="flat" cmpd="sng" algn="ctr">
-                      <a:solidFill>
-                        <a:srgbClr val="D9D4D0"/>
-                      </a:solidFill>
-                      <a:prstDash val="solid"/>
-                      <a:round/>
-                      <a:headEnd type="none" w="med" len="med"/>
-                      <a:tailEnd type="none" w="med" len="med"/>
-                    </a:lnB>
-                    <a:solidFill>
-                      <a:srgbClr val="FFFFFF"/>
-                    </a:solidFill>
-                  </a:tcPr>
-                </a:tc>
-                <a:tc>
-                  <a:txBody>
-                    <a:bodyPr/>
-                    <a:lstStyle/>
-                    <a:p>
-                      <a:pPr algn="ctr" indent="0" marL="0">
-                        <a:buNone/>
-                      </a:pPr>
-                      <a:r>
-                        <a:rPr lang="en-US" sz="1800" dirty="0">
-                          <a:solidFill>
-                            <a:srgbClr val="0B0B0B"/>
-                          </a:solidFill>
-                          <a:latin typeface="Calibri" pitchFamily="34" charset="0"/>
-                          <a:ea typeface="Calibri" pitchFamily="34" charset="-122"/>
-                          <a:cs typeface="Calibri" pitchFamily="34" charset="-120"/>
-                        </a:rPr>
-                        <a:t>1.0545</a:t>
-                      </a:r>
-                      <a:endParaRPr lang="en-US" sz="1800" dirty="0">
-                        <a:latin typeface="Calibri" charset="0"/>
-                        <a:ea typeface="Calibri" charset="0"/>
-                        <a:cs typeface="Calibri" charset="0"/>
-                      </a:endParaRPr>
-                    </a:p>
-                  </a:txBody>
-                  <a:tcPr marL="45720" marR="45720" marT="45720" marB="45720" anchor="ctr">
-                    <a:lnL w="9525" cap="flat" cmpd="sng" algn="ctr">
-                      <a:solidFill>
-                        <a:srgbClr val="D9D4D0"/>
-                      </a:solidFill>
-                      <a:prstDash val="solid"/>
-                      <a:round/>
-                      <a:headEnd type="none" w="med" len="med"/>
-                      <a:tailEnd type="none" w="med" len="med"/>
-                    </a:lnL>
-                    <a:lnR w="9525" cap="flat" cmpd="sng" algn="ctr">
-                      <a:solidFill>
-                        <a:srgbClr val="D9D4D0"/>
-                      </a:solidFill>
-                      <a:prstDash val="solid"/>
-                      <a:round/>
-                      <a:headEnd type="none" w="med" len="med"/>
-                      <a:tailEnd type="none" w="med" len="med"/>
-                    </a:lnR>
-                    <a:lnT w="9525" cap="flat" cmpd="sng" algn="ctr">
-                      <a:solidFill>
-                        <a:srgbClr val="D9D4D0"/>
-                      </a:solidFill>
-                      <a:prstDash val="solid"/>
-                      <a:round/>
-                      <a:headEnd type="none" w="med" len="med"/>
-                      <a:tailEnd type="none" w="med" len="med"/>
-                    </a:lnT>
-                    <a:lnB w="9525" cap="flat" cmpd="sng" algn="ctr">
-                      <a:solidFill>
-                        <a:srgbClr val="D9D4D0"/>
-                      </a:solidFill>
-                      <a:prstDash val="solid"/>
-                      <a:round/>
-                      <a:headEnd type="none" w="med" len="med"/>
-                      <a:tailEnd type="none" w="med" len="med"/>
-                    </a:lnB>
-                    <a:solidFill>
-                      <a:srgbClr val="FFFFFF"/>
-                    </a:solidFill>
-                  </a:tcPr>
-                </a:tc>
-                <a:tc>
-                  <a:txBody>
-                    <a:bodyPr/>
-                    <a:lstStyle/>
-                    <a:p>
-                      <a:pPr algn="ctr" indent="0" marL="0">
-                        <a:buNone/>
-                      </a:pPr>
-                      <a:r>
-                        <a:rPr lang="en-US" sz="1800" dirty="0">
-                          <a:solidFill>
-                            <a:srgbClr val="0B0B0B"/>
-                          </a:solidFill>
-                          <a:latin typeface="Calibri" pitchFamily="34" charset="0"/>
-                          <a:ea typeface="Calibri" pitchFamily="34" charset="-122"/>
-                          <a:cs typeface="Calibri" pitchFamily="34" charset="-120"/>
-                        </a:rPr>
-                        <a:t>−0.1706</a:t>
-                      </a:r>
-                      <a:endParaRPr lang="en-US" sz="1800" dirty="0">
-                        <a:latin typeface="Calibri" charset="0"/>
-                        <a:ea typeface="Calibri" charset="0"/>
-                        <a:cs typeface="Calibri" charset="0"/>
-                      </a:endParaRPr>
-                    </a:p>
-                  </a:txBody>
-                  <a:tcPr marL="45720" marR="45720" marT="45720" marB="45720" anchor="ctr">
-                    <a:lnL w="9525" cap="flat" cmpd="sng" algn="ctr">
-                      <a:solidFill>
-                        <a:srgbClr val="D9D4D0"/>
-                      </a:solidFill>
-                      <a:prstDash val="solid"/>
-                      <a:round/>
-                      <a:headEnd type="none" w="med" len="med"/>
-                      <a:tailEnd type="none" w="med" len="med"/>
-                    </a:lnL>
-                    <a:lnR w="9525" cap="flat" cmpd="sng" algn="ctr">
-                      <a:solidFill>
-                        <a:srgbClr val="D9D4D0"/>
-                      </a:solidFill>
-                      <a:prstDash val="solid"/>
-                      <a:round/>
-                      <a:headEnd type="none" w="med" len="med"/>
-                      <a:tailEnd type="none" w="med" len="med"/>
-                    </a:lnR>
-                    <a:lnT w="9525" cap="flat" cmpd="sng" algn="ctr">
-                      <a:solidFill>
-                        <a:srgbClr val="D9D4D0"/>
-                      </a:solidFill>
-                      <a:prstDash val="solid"/>
-                      <a:round/>
-                      <a:headEnd type="none" w="med" len="med"/>
-                      <a:tailEnd type="none" w="med" len="med"/>
-                    </a:lnT>
-                    <a:lnB w="9525" cap="flat" cmpd="sng" algn="ctr">
-                      <a:solidFill>
-                        <a:srgbClr val="D9D4D0"/>
-                      </a:solidFill>
-                      <a:prstDash val="solid"/>
-                      <a:round/>
-                      <a:headEnd type="none" w="med" len="med"/>
-                      <a:tailEnd type="none" w="med" len="med"/>
-                    </a:lnB>
-                    <a:solidFill>
-                      <a:srgbClr val="FFFFFF"/>
-                    </a:solidFill>
-                  </a:tcPr>
-                </a:tc>
-                <a:tc>
-                  <a:txBody>
-                    <a:bodyPr/>
-                    <a:lstStyle/>
-                    <a:p>
-                      <a:pPr algn="ctr" indent="0" marL="0">
-                        <a:buNone/>
-                      </a:pPr>
-                      <a:r>
-                        <a:rPr lang="en-US" sz="1800" dirty="0">
-                          <a:solidFill>
-                            <a:srgbClr val="0B0B0B"/>
-                          </a:solidFill>
-                          <a:latin typeface="Calibri" pitchFamily="34" charset="0"/>
-                          <a:ea typeface="Calibri" pitchFamily="34" charset="-122"/>
-                          <a:cs typeface="Calibri" pitchFamily="34" charset="-120"/>
-                        </a:rPr>
-                        <a:t>1.0861</a:t>
-                      </a:r>
-                      <a:endParaRPr lang="en-US" sz="1800" dirty="0">
-                        <a:latin typeface="Calibri" charset="0"/>
-                        <a:ea typeface="Calibri" charset="0"/>
-                        <a:cs typeface="Calibri" charset="0"/>
-                      </a:endParaRPr>
-                    </a:p>
-                  </a:txBody>
-                  <a:tcPr marL="45720" marR="45720" marT="45720" marB="45720" anchor="ctr">
-                    <a:lnL w="9525" cap="flat" cmpd="sng" algn="ctr">
-                      <a:solidFill>
-                        <a:srgbClr val="D9D4D0"/>
-                      </a:solidFill>
-                      <a:prstDash val="solid"/>
-                      <a:round/>
-                      <a:headEnd type="none" w="med" len="med"/>
-                      <a:tailEnd type="none" w="med" len="med"/>
-                    </a:lnL>
-                    <a:lnR w="9525" cap="flat" cmpd="sng" algn="ctr">
-                      <a:solidFill>
-                        <a:srgbClr val="D9D4D0"/>
-                      </a:solidFill>
-                      <a:prstDash val="solid"/>
-                      <a:round/>
-                      <a:headEnd type="none" w="med" len="med"/>
-                      <a:tailEnd type="none" w="med" len="med"/>
-                    </a:lnR>
-                    <a:lnT w="9525" cap="flat" cmpd="sng" algn="ctr">
-                      <a:solidFill>
-                        <a:srgbClr val="D9D4D0"/>
-                      </a:solidFill>
-                      <a:prstDash val="solid"/>
-                      <a:round/>
-                      <a:headEnd type="none" w="med" len="med"/>
-                      <a:tailEnd type="none" w="med" len="med"/>
-                    </a:lnT>
-                    <a:lnB w="9525" cap="flat" cmpd="sng" algn="ctr">
-                      <a:solidFill>
-                        <a:srgbClr val="D9D4D0"/>
-                      </a:solidFill>
-                      <a:prstDash val="solid"/>
-                      <a:round/>
-                      <a:headEnd type="none" w="med" len="med"/>
-                      <a:tailEnd type="none" w="med" len="med"/>
-                    </a:lnB>
-                    <a:solidFill>
-                      <a:srgbClr val="FFFFFF"/>
-                    </a:solidFill>
-                  </a:tcPr>
-                </a:tc>
-                <a:tc>
-                  <a:txBody>
-                    <a:bodyPr/>
-                    <a:lstStyle/>
-                    <a:p>
-                      <a:pPr algn="ctr" indent="0" marL="0">
-                        <a:buNone/>
-                      </a:pPr>
-                      <a:r>
-                        <a:rPr lang="en-US" sz="1800" dirty="0">
-                          <a:solidFill>
-                            <a:srgbClr val="0B0B0B"/>
-                          </a:solidFill>
-                          <a:latin typeface="Calibri" pitchFamily="34" charset="0"/>
-                          <a:ea typeface="Calibri" pitchFamily="34" charset="-122"/>
-                          <a:cs typeface="Calibri" pitchFamily="34" charset="-120"/>
-                        </a:rPr>
-                        <a:t>3.3451</a:t>
-                      </a:r>
-                      <a:endParaRPr lang="en-US" sz="1800" dirty="0">
-                        <a:latin typeface="Calibri" charset="0"/>
-                        <a:ea typeface="Calibri" charset="0"/>
-                        <a:cs typeface="Calibri" charset="0"/>
-                      </a:endParaRPr>
-                    </a:p>
-                  </a:txBody>
-                  <a:tcPr marL="45720" marR="45720" marT="45720" marB="45720" anchor="ctr">
-                    <a:lnL w="9525" cap="flat" cmpd="sng" algn="ctr">
-                      <a:solidFill>
-                        <a:srgbClr val="D9D4D0"/>
-                      </a:solidFill>
-                      <a:prstDash val="solid"/>
-                      <a:round/>
-                      <a:headEnd type="none" w="med" len="med"/>
-                      <a:tailEnd type="none" w="med" len="med"/>
-                    </a:lnL>
-                    <a:lnR w="9525" cap="flat" cmpd="sng" algn="ctr">
-                      <a:solidFill>
-                        <a:srgbClr val="D9D4D0"/>
-                      </a:solidFill>
-                      <a:prstDash val="solid"/>
-                      <a:round/>
-                      <a:headEnd type="none" w="med" len="med"/>
-                      <a:tailEnd type="none" w="med" len="med"/>
-                    </a:lnR>
-                    <a:lnT w="9525" cap="flat" cmpd="sng" algn="ctr">
-                      <a:solidFill>
-                        <a:srgbClr val="D9D4D0"/>
-                      </a:solidFill>
-                      <a:prstDash val="solid"/>
-                      <a:round/>
-                      <a:headEnd type="none" w="med" len="med"/>
-                      <a:tailEnd type="none" w="med" len="med"/>
-                    </a:lnT>
-                    <a:lnB w="9525" cap="flat" cmpd="sng" algn="ctr">
-                      <a:solidFill>
-                        <a:srgbClr val="D9D4D0"/>
-                      </a:solidFill>
-                      <a:prstDash val="solid"/>
-                      <a:round/>
-                      <a:headEnd type="none" w="med" len="med"/>
-                      <a:tailEnd type="none" w="med" len="med"/>
-                    </a:lnB>
-                    <a:solidFill>
-                      <a:srgbClr val="FFFFFF"/>
-                    </a:solidFill>
-                  </a:tcPr>
-                </a:tc>
-                <a:tc>
-                  <a:txBody>
-                    <a:bodyPr/>
-                    <a:lstStyle/>
-                    <a:p>
-                      <a:pPr algn="ctr" indent="0" marL="0">
-                        <a:buNone/>
-                      </a:pPr>
-                      <a:r>
-                        <a:rPr lang="en-US" sz="1800" dirty="0">
-                          <a:solidFill>
-                            <a:srgbClr val="0B0B0B"/>
-                          </a:solidFill>
-                          <a:latin typeface="Calibri" pitchFamily="34" charset="0"/>
-                          <a:ea typeface="Calibri" pitchFamily="34" charset="-122"/>
-                          <a:cs typeface="Calibri" pitchFamily="34" charset="-120"/>
-                        </a:rPr>
-                        <a:t>0.9991</a:t>
-                      </a:r>
-                      <a:endParaRPr lang="en-US" sz="1800" dirty="0">
-                        <a:latin typeface="Calibri" charset="0"/>
-                        <a:ea typeface="Calibri" charset="0"/>
-                        <a:cs typeface="Calibri" charset="0"/>
-                      </a:endParaRPr>
-                    </a:p>
-                  </a:txBody>
-                  <a:tcPr marL="45720" marR="45720" marT="45720" marB="45720" anchor="ctr">
-                    <a:lnL w="9525" cap="flat" cmpd="sng" algn="ctr">
-                      <a:solidFill>
-                        <a:srgbClr val="D9D4D0"/>
-                      </a:solidFill>
-                      <a:prstDash val="solid"/>
-                      <a:round/>
-                      <a:headEnd type="none" w="med" len="med"/>
-                      <a:tailEnd type="none" w="med" len="med"/>
-                    </a:lnL>
-                    <a:lnR w="9525" cap="flat" cmpd="sng" algn="ctr">
-                      <a:solidFill>
-                        <a:srgbClr val="D9D4D0"/>
-                      </a:solidFill>
-                      <a:prstDash val="solid"/>
-                      <a:round/>
-                      <a:headEnd type="none" w="med" len="med"/>
-                      <a:tailEnd type="none" w="med" len="med"/>
-                    </a:lnR>
-                    <a:lnT w="9525" cap="flat" cmpd="sng" algn="ctr">
-                      <a:solidFill>
-                        <a:srgbClr val="D9D4D0"/>
-                      </a:solidFill>
-                      <a:prstDash val="solid"/>
-                      <a:round/>
-                      <a:headEnd type="none" w="med" len="med"/>
-                      <a:tailEnd type="none" w="med" len="med"/>
-                    </a:lnT>
-                    <a:lnB w="9525" cap="flat" cmpd="sng" algn="ctr">
-                      <a:solidFill>
-                        <a:srgbClr val="D9D4D0"/>
-                      </a:solidFill>
-                      <a:prstDash val="solid"/>
-                      <a:round/>
-                      <a:headEnd type="none" w="med" len="med"/>
-                      <a:tailEnd type="none" w="med" len="med"/>
-                    </a:lnB>
-                    <a:solidFill>
-                      <a:srgbClr val="FFFFFF"/>
-                    </a:solidFill>
-                  </a:tcPr>
-                </a:tc>
-              </a:tr>
-              <a:tr h="384048">
-                <a:tc>
-                  <a:txBody>
-                    <a:bodyPr/>
-                    <a:lstStyle/>
-                    <a:p>
-                      <a:pPr algn="ctr" indent="0" marL="0">
-                        <a:buNone/>
-                      </a:pPr>
-                      <a:r>
-                        <a:rPr lang="en-US" sz="1800" dirty="0">
-                          <a:solidFill>
-                            <a:srgbClr val="0B0B0B"/>
-                          </a:solidFill>
-                          <a:latin typeface="Calibri" pitchFamily="34" charset="0"/>
-                          <a:ea typeface="Calibri" pitchFamily="34" charset="-122"/>
-                          <a:cs typeface="Calibri" pitchFamily="34" charset="-120"/>
-                        </a:rPr>
-                        <a:t>−1</a:t>
-                      </a:r>
-                      <a:endParaRPr lang="en-US" sz="1800" dirty="0">
-                        <a:latin typeface="Calibri" charset="0"/>
-                        <a:ea typeface="Calibri" charset="0"/>
-                        <a:cs typeface="Calibri" charset="0"/>
-                      </a:endParaRPr>
-                    </a:p>
-                  </a:txBody>
-                  <a:tcPr marL="45720" marR="45720" marT="45720" marB="45720" anchor="ctr">
-                    <a:lnL w="9525" cap="flat" cmpd="sng" algn="ctr">
-                      <a:solidFill>
-                        <a:srgbClr val="D9D4D0"/>
-                      </a:solidFill>
-                      <a:prstDash val="solid"/>
-                      <a:round/>
-                      <a:headEnd type="none" w="med" len="med"/>
-                      <a:tailEnd type="none" w="med" len="med"/>
-                    </a:lnL>
-                    <a:lnR w="9525" cap="flat" cmpd="sng" algn="ctr">
-                      <a:solidFill>
-                        <a:srgbClr val="D9D4D0"/>
-                      </a:solidFill>
-                      <a:prstDash val="solid"/>
-                      <a:round/>
-                      <a:headEnd type="none" w="med" len="med"/>
-                      <a:tailEnd type="none" w="med" len="med"/>
-                    </a:lnR>
-                    <a:lnT w="9525" cap="flat" cmpd="sng" algn="ctr">
-                      <a:solidFill>
-                        <a:srgbClr val="D9D4D0"/>
-                      </a:solidFill>
-                      <a:prstDash val="solid"/>
-                      <a:round/>
-                      <a:headEnd type="none" w="med" len="med"/>
-                      <a:tailEnd type="none" w="med" len="med"/>
-                    </a:lnT>
-                    <a:lnB w="9525" cap="flat" cmpd="sng" algn="ctr">
-                      <a:solidFill>
-                        <a:srgbClr val="D9D4D0"/>
-                      </a:solidFill>
-                      <a:prstDash val="solid"/>
-                      <a:round/>
-                      <a:headEnd type="none" w="med" len="med"/>
-                      <a:tailEnd type="none" w="med" len="med"/>
-                    </a:lnB>
-                    <a:solidFill>
-                      <a:srgbClr val="F7F2F3"/>
-                    </a:solidFill>
-                  </a:tcPr>
-                </a:tc>
-                <a:tc>
-                  <a:txBody>
-                    <a:bodyPr/>
-                    <a:lstStyle/>
-                    <a:p>
-                      <a:pPr algn="l" indent="0" marL="0">
-                        <a:buNone/>
-                      </a:pPr>
-                      <a:r>
-                        <a:rPr lang="en-US" sz="1800" dirty="0">
-                          <a:solidFill>
-                            <a:srgbClr val="0B0B0B"/>
-                          </a:solidFill>
-                          <a:latin typeface="Calibri" pitchFamily="34" charset="0"/>
-                          <a:ea typeface="Calibri" pitchFamily="34" charset="-122"/>
-                          <a:cs typeface="Calibri" pitchFamily="34" charset="-120"/>
-                        </a:rPr>
-                        <a:t>flicker FM</a:t>
-                      </a:r>
-                      <a:endParaRPr lang="en-US" sz="1800" dirty="0">
-                        <a:latin typeface="Calibri" charset="0"/>
-                        <a:ea typeface="Calibri" charset="0"/>
-                        <a:cs typeface="Calibri" charset="0"/>
-                      </a:endParaRPr>
-                    </a:p>
-                  </a:txBody>
-                  <a:tcPr marL="45720" marR="45720" marT="45720" marB="45720" anchor="ctr">
-                    <a:lnL w="9525" cap="flat" cmpd="sng" algn="ctr">
-                      <a:solidFill>
-                        <a:srgbClr val="D9D4D0"/>
-                      </a:solidFill>
-                      <a:prstDash val="solid"/>
-                      <a:round/>
-                      <a:headEnd type="none" w="med" len="med"/>
-                      <a:tailEnd type="none" w="med" len="med"/>
-                    </a:lnL>
-                    <a:lnR w="9525" cap="flat" cmpd="sng" algn="ctr">
-                      <a:solidFill>
-                        <a:srgbClr val="D9D4D0"/>
-                      </a:solidFill>
-                      <a:prstDash val="solid"/>
-                      <a:round/>
-                      <a:headEnd type="none" w="med" len="med"/>
-                      <a:tailEnd type="none" w="med" len="med"/>
-                    </a:lnR>
-                    <a:lnT w="9525" cap="flat" cmpd="sng" algn="ctr">
-                      <a:solidFill>
-                        <a:srgbClr val="D9D4D0"/>
-                      </a:solidFill>
-                      <a:prstDash val="solid"/>
-                      <a:round/>
-                      <a:headEnd type="none" w="med" len="med"/>
-                      <a:tailEnd type="none" w="med" len="med"/>
-                    </a:lnT>
-                    <a:lnB w="9525" cap="flat" cmpd="sng" algn="ctr">
-                      <a:solidFill>
-                        <a:srgbClr val="D9D4D0"/>
-                      </a:solidFill>
-                      <a:prstDash val="solid"/>
-                      <a:round/>
-                      <a:headEnd type="none" w="med" len="med"/>
-                      <a:tailEnd type="none" w="med" len="med"/>
-                    </a:lnB>
-                    <a:solidFill>
-                      <a:srgbClr val="F7F2F3"/>
-                    </a:solidFill>
-                  </a:tcPr>
-                </a:tc>
-                <a:tc>
-                  <a:txBody>
-                    <a:bodyPr/>
-                    <a:lstStyle/>
-                    <a:p>
-                      <a:pPr algn="ctr" indent="0" marL="0">
-                        <a:buNone/>
-                      </a:pPr>
-                      <a:r>
-                        <a:rPr lang="en-US" sz="1800" dirty="0">
-                          <a:solidFill>
-                            <a:srgbClr val="0B0B0B"/>
-                          </a:solidFill>
-                          <a:latin typeface="Calibri" pitchFamily="34" charset="0"/>
-                          <a:ea typeface="Calibri" pitchFamily="34" charset="-122"/>
-                          <a:cs typeface="Calibri" pitchFamily="34" charset="-120"/>
-                        </a:rPr>
-                        <a:t>1.2947</a:t>
-                      </a:r>
-                      <a:endParaRPr lang="en-US" sz="1800" dirty="0">
-                        <a:latin typeface="Calibri" charset="0"/>
-                        <a:ea typeface="Calibri" charset="0"/>
-                        <a:cs typeface="Calibri" charset="0"/>
-                      </a:endParaRPr>
-                    </a:p>
-                  </a:txBody>
-                  <a:tcPr marL="45720" marR="45720" marT="45720" marB="45720" anchor="ctr">
-                    <a:lnL w="9525" cap="flat" cmpd="sng" algn="ctr">
-                      <a:solidFill>
-                        <a:srgbClr val="D9D4D0"/>
-                      </a:solidFill>
-                      <a:prstDash val="solid"/>
-                      <a:round/>
-                      <a:headEnd type="none" w="med" len="med"/>
-                      <a:tailEnd type="none" w="med" len="med"/>
-                    </a:lnL>
-                    <a:lnR w="9525" cap="flat" cmpd="sng" algn="ctr">
-                      <a:solidFill>
-                        <a:srgbClr val="D9D4D0"/>
-                      </a:solidFill>
-                      <a:prstDash val="solid"/>
-                      <a:round/>
-                      <a:headEnd type="none" w="med" len="med"/>
-                      <a:tailEnd type="none" w="med" len="med"/>
-                    </a:lnR>
-                    <a:lnT w="9525" cap="flat" cmpd="sng" algn="ctr">
-                      <a:solidFill>
-                        <a:srgbClr val="D9D4D0"/>
-                      </a:solidFill>
-                      <a:prstDash val="solid"/>
-                      <a:round/>
-                      <a:headEnd type="none" w="med" len="med"/>
-                      <a:tailEnd type="none" w="med" len="med"/>
-                    </a:lnT>
-                    <a:lnB w="9525" cap="flat" cmpd="sng" algn="ctr">
-                      <a:solidFill>
-                        <a:srgbClr val="D9D4D0"/>
-                      </a:solidFill>
-                      <a:prstDash val="solid"/>
-                      <a:round/>
-                      <a:headEnd type="none" w="med" len="med"/>
-                      <a:tailEnd type="none" w="med" len="med"/>
-                    </a:lnB>
-                    <a:solidFill>
-                      <a:srgbClr val="F7F2F3"/>
-                    </a:solidFill>
-                  </a:tcPr>
-                </a:tc>
-                <a:tc>
-                  <a:txBody>
-                    <a:bodyPr/>
-                    <a:lstStyle/>
-                    <a:p>
-                      <a:pPr algn="ctr" indent="0" marL="0">
-                        <a:buNone/>
-                      </a:pPr>
-                      <a:r>
-                        <a:rPr lang="en-US" sz="1800" dirty="0">
-                          <a:solidFill>
-                            <a:srgbClr val="0B0B0B"/>
-                          </a:solidFill>
-                          <a:latin typeface="Calibri" pitchFamily="34" charset="0"/>
-                          <a:ea typeface="Calibri" pitchFamily="34" charset="-122"/>
-                          <a:cs typeface="Calibri" pitchFamily="34" charset="-120"/>
-                        </a:rPr>
-                        <a:t>−0.7193</a:t>
-                      </a:r>
-                      <a:endParaRPr lang="en-US" sz="1800" dirty="0">
-                        <a:latin typeface="Calibri" charset="0"/>
-                        <a:ea typeface="Calibri" charset="0"/>
-                        <a:cs typeface="Calibri" charset="0"/>
-                      </a:endParaRPr>
-                    </a:p>
-                  </a:txBody>
-                  <a:tcPr marL="45720" marR="45720" marT="45720" marB="45720" anchor="ctr">
-                    <a:lnL w="9525" cap="flat" cmpd="sng" algn="ctr">
-                      <a:solidFill>
-                        <a:srgbClr val="D9D4D0"/>
-                      </a:solidFill>
-                      <a:prstDash val="solid"/>
-                      <a:round/>
-                      <a:headEnd type="none" w="med" len="med"/>
-                      <a:tailEnd type="none" w="med" len="med"/>
-                    </a:lnL>
-                    <a:lnR w="9525" cap="flat" cmpd="sng" algn="ctr">
-                      <a:solidFill>
-                        <a:srgbClr val="D9D4D0"/>
-                      </a:solidFill>
-                      <a:prstDash val="solid"/>
-                      <a:round/>
-                      <a:headEnd type="none" w="med" len="med"/>
-                      <a:tailEnd type="none" w="med" len="med"/>
-                    </a:lnR>
-                    <a:lnT w="9525" cap="flat" cmpd="sng" algn="ctr">
-                      <a:solidFill>
-                        <a:srgbClr val="D9D4D0"/>
-                      </a:solidFill>
-                      <a:prstDash val="solid"/>
-                      <a:round/>
-                      <a:headEnd type="none" w="med" len="med"/>
-                      <a:tailEnd type="none" w="med" len="med"/>
-                    </a:lnT>
-                    <a:lnB w="9525" cap="flat" cmpd="sng" algn="ctr">
-                      <a:solidFill>
-                        <a:srgbClr val="D9D4D0"/>
-                      </a:solidFill>
-                      <a:prstDash val="solid"/>
-                      <a:round/>
-                      <a:headEnd type="none" w="med" len="med"/>
-                      <a:tailEnd type="none" w="med" len="med"/>
-                    </a:lnB>
-                    <a:solidFill>
-                      <a:srgbClr val="F7F2F3"/>
-                    </a:solidFill>
-                  </a:tcPr>
-                </a:tc>
-                <a:tc>
-                  <a:txBody>
-                    <a:bodyPr/>
-                    <a:lstStyle/>
-                    <a:p>
-                      <a:pPr algn="ctr" indent="0" marL="0">
-                        <a:buNone/>
-                      </a:pPr>
-                      <a:r>
-                        <a:rPr lang="en-US" sz="1800" dirty="0">
-                          <a:solidFill>
-                            <a:srgbClr val="0B0B0B"/>
-                          </a:solidFill>
-                          <a:latin typeface="Calibri" pitchFamily="34" charset="0"/>
-                          <a:ea typeface="Calibri" pitchFamily="34" charset="-122"/>
-                          <a:cs typeface="Calibri" pitchFamily="34" charset="-120"/>
-                        </a:rPr>
-                        <a:t>1.0095</a:t>
-                      </a:r>
-                      <a:endParaRPr lang="en-US" sz="1800" dirty="0">
-                        <a:latin typeface="Calibri" charset="0"/>
-                        <a:ea typeface="Calibri" charset="0"/>
-                        <a:cs typeface="Calibri" charset="0"/>
-                      </a:endParaRPr>
-                    </a:p>
-                  </a:txBody>
-                  <a:tcPr marL="45720" marR="45720" marT="45720" marB="45720" anchor="ctr">
-                    <a:lnL w="9525" cap="flat" cmpd="sng" algn="ctr">
-                      <a:solidFill>
-                        <a:srgbClr val="D9D4D0"/>
-                      </a:solidFill>
-                      <a:prstDash val="solid"/>
-                      <a:round/>
-                      <a:headEnd type="none" w="med" len="med"/>
-                      <a:tailEnd type="none" w="med" len="med"/>
-                    </a:lnL>
-                    <a:lnR w="9525" cap="flat" cmpd="sng" algn="ctr">
-                      <a:solidFill>
-                        <a:srgbClr val="D9D4D0"/>
-                      </a:solidFill>
-                      <a:prstDash val="solid"/>
-                      <a:round/>
-                      <a:headEnd type="none" w="med" len="med"/>
-                      <a:tailEnd type="none" w="med" len="med"/>
-                    </a:lnR>
-                    <a:lnT w="9525" cap="flat" cmpd="sng" algn="ctr">
-                      <a:solidFill>
-                        <a:srgbClr val="D9D4D0"/>
-                      </a:solidFill>
-                      <a:prstDash val="solid"/>
-                      <a:round/>
-                      <a:headEnd type="none" w="med" len="med"/>
-                      <a:tailEnd type="none" w="med" len="med"/>
-                    </a:lnT>
-                    <a:lnB w="9525" cap="flat" cmpd="sng" algn="ctr">
-                      <a:solidFill>
-                        <a:srgbClr val="D9D4D0"/>
-                      </a:solidFill>
-                      <a:prstDash val="solid"/>
-                      <a:round/>
-                      <a:headEnd type="none" w="med" len="med"/>
-                      <a:tailEnd type="none" w="med" len="med"/>
-                    </a:lnB>
-                    <a:solidFill>
-                      <a:srgbClr val="F7F2F3"/>
-                    </a:solidFill>
-                  </a:tcPr>
-                </a:tc>
-                <a:tc>
-                  <a:txBody>
-                    <a:bodyPr/>
-                    <a:lstStyle/>
-                    <a:p>
-                      <a:pPr algn="ctr" indent="0" marL="0">
-                        <a:buNone/>
-                      </a:pPr>
-                      <a:r>
-                        <a:rPr lang="en-US" sz="1800" dirty="0">
-                          <a:solidFill>
-                            <a:srgbClr val="0B0B0B"/>
-                          </a:solidFill>
-                          <a:latin typeface="Calibri" pitchFamily="34" charset="0"/>
-                          <a:ea typeface="Calibri" pitchFamily="34" charset="-122"/>
-                          <a:cs typeface="Calibri" pitchFamily="34" charset="-120"/>
-                        </a:rPr>
-                        <a:t>3.3254</a:t>
-                      </a:r>
-                      <a:endParaRPr lang="en-US" sz="1800" dirty="0">
-                        <a:latin typeface="Calibri" charset="0"/>
-                        <a:ea typeface="Calibri" charset="0"/>
-                        <a:cs typeface="Calibri" charset="0"/>
-                      </a:endParaRPr>
-                    </a:p>
-                  </a:txBody>
-                  <a:tcPr marL="45720" marR="45720" marT="45720" marB="45720" anchor="ctr">
-                    <a:lnL w="9525" cap="flat" cmpd="sng" algn="ctr">
-                      <a:solidFill>
-                        <a:srgbClr val="D9D4D0"/>
-                      </a:solidFill>
-                      <a:prstDash val="solid"/>
-                      <a:round/>
-                      <a:headEnd type="none" w="med" len="med"/>
-                      <a:tailEnd type="none" w="med" len="med"/>
-                    </a:lnL>
-                    <a:lnR w="9525" cap="flat" cmpd="sng" algn="ctr">
-                      <a:solidFill>
-                        <a:srgbClr val="D9D4D0"/>
-                      </a:solidFill>
-                      <a:prstDash val="solid"/>
-                      <a:round/>
-                      <a:headEnd type="none" w="med" len="med"/>
-                      <a:tailEnd type="none" w="med" len="med"/>
-                    </a:lnR>
-                    <a:lnT w="9525" cap="flat" cmpd="sng" algn="ctr">
-                      <a:solidFill>
-                        <a:srgbClr val="D9D4D0"/>
-                      </a:solidFill>
-                      <a:prstDash val="solid"/>
-                      <a:round/>
-                      <a:headEnd type="none" w="med" len="med"/>
-                      <a:tailEnd type="none" w="med" len="med"/>
-                    </a:lnT>
-                    <a:lnB w="9525" cap="flat" cmpd="sng" algn="ctr">
-                      <a:solidFill>
-                        <a:srgbClr val="D9D4D0"/>
-                      </a:solidFill>
-                      <a:prstDash val="solid"/>
-                      <a:round/>
-                      <a:headEnd type="none" w="med" len="med"/>
-                      <a:tailEnd type="none" w="med" len="med"/>
-                    </a:lnB>
-                    <a:solidFill>
-                      <a:srgbClr val="F7F2F3"/>
-                    </a:solidFill>
-                  </a:tcPr>
-                </a:tc>
-                <a:tc>
-                  <a:txBody>
-                    <a:bodyPr/>
-                    <a:lstStyle/>
-                    <a:p>
-                      <a:pPr algn="ctr" indent="0" marL="0">
-                        <a:buNone/>
-                      </a:pPr>
-                      <a:r>
-                        <a:rPr lang="en-US" sz="1800" dirty="0">
-                          <a:solidFill>
-                            <a:srgbClr val="0B0B0B"/>
-                          </a:solidFill>
-                          <a:latin typeface="Calibri" pitchFamily="34" charset="0"/>
-                          <a:ea typeface="Calibri" pitchFamily="34" charset="-122"/>
-                          <a:cs typeface="Calibri" pitchFamily="34" charset="-120"/>
-                        </a:rPr>
-                        <a:t>0.9991</a:t>
-                      </a:r>
-                      <a:endParaRPr lang="en-US" sz="1800" dirty="0">
-                        <a:latin typeface="Calibri" charset="0"/>
-                        <a:ea typeface="Calibri" charset="0"/>
-                        <a:cs typeface="Calibri" charset="0"/>
-                      </a:endParaRPr>
-                    </a:p>
-                  </a:txBody>
-                  <a:tcPr marL="45720" marR="45720" marT="45720" marB="45720" anchor="ctr">
-                    <a:lnL w="9525" cap="flat" cmpd="sng" algn="ctr">
-                      <a:solidFill>
-                        <a:srgbClr val="D9D4D0"/>
-                      </a:solidFill>
-                      <a:prstDash val="solid"/>
-                      <a:round/>
-                      <a:headEnd type="none" w="med" len="med"/>
-                      <a:tailEnd type="none" w="med" len="med"/>
-                    </a:lnL>
-                    <a:lnR w="9525" cap="flat" cmpd="sng" algn="ctr">
-                      <a:solidFill>
-                        <a:srgbClr val="D9D4D0"/>
-                      </a:solidFill>
-                      <a:prstDash val="solid"/>
-                      <a:round/>
-                      <a:headEnd type="none" w="med" len="med"/>
-                      <a:tailEnd type="none" w="med" len="med"/>
-                    </a:lnR>
-                    <a:lnT w="9525" cap="flat" cmpd="sng" algn="ctr">
-                      <a:solidFill>
-                        <a:srgbClr val="D9D4D0"/>
-                      </a:solidFill>
-                      <a:prstDash val="solid"/>
-                      <a:round/>
-                      <a:headEnd type="none" w="med" len="med"/>
-                      <a:tailEnd type="none" w="med" len="med"/>
-                    </a:lnT>
-                    <a:lnB w="9525" cap="flat" cmpd="sng" algn="ctr">
-                      <a:solidFill>
-                        <a:srgbClr val="D9D4D0"/>
-                      </a:solidFill>
-                      <a:prstDash val="solid"/>
-                      <a:round/>
-                      <a:headEnd type="none" w="med" len="med"/>
-                      <a:tailEnd type="none" w="med" len="med"/>
-                    </a:lnB>
-                    <a:solidFill>
-                      <a:srgbClr val="F7F2F3"/>
-                    </a:solidFill>
-                  </a:tcPr>
-                </a:tc>
-              </a:tr>
-              <a:tr h="384048">
-                <a:tc>
-                  <a:txBody>
-                    <a:bodyPr/>
-                    <a:lstStyle/>
-                    <a:p>
-                      <a:pPr algn="ctr" indent="0" marL="0">
-                        <a:buNone/>
-                      </a:pPr>
-                      <a:r>
-                        <a:rPr lang="en-US" sz="1800" dirty="0">
-                          <a:solidFill>
-                            <a:srgbClr val="0B0B0B"/>
-                          </a:solidFill>
-                          <a:latin typeface="Calibri" pitchFamily="34" charset="0"/>
-                          <a:ea typeface="Calibri" pitchFamily="34" charset="-122"/>
-                          <a:cs typeface="Calibri" pitchFamily="34" charset="-120"/>
-                        </a:rPr>
-                        <a:t>−2</a:t>
-                      </a:r>
-                      <a:endParaRPr lang="en-US" sz="1800" dirty="0">
-                        <a:latin typeface="Calibri" charset="0"/>
-                        <a:ea typeface="Calibri" charset="0"/>
-                        <a:cs typeface="Calibri" charset="0"/>
-                      </a:endParaRPr>
-                    </a:p>
-                  </a:txBody>
-                  <a:tcPr marL="45720" marR="45720" marT="45720" marB="45720" anchor="ctr">
-                    <a:lnL w="9525" cap="flat" cmpd="sng" algn="ctr">
-                      <a:solidFill>
-                        <a:srgbClr val="D9D4D0"/>
-                      </a:solidFill>
-                      <a:prstDash val="solid"/>
-                      <a:round/>
-                      <a:headEnd type="none" w="med" len="med"/>
-                      <a:tailEnd type="none" w="med" len="med"/>
-                    </a:lnL>
-                    <a:lnR w="9525" cap="flat" cmpd="sng" algn="ctr">
-                      <a:solidFill>
-                        <a:srgbClr val="D9D4D0"/>
-                      </a:solidFill>
-                      <a:prstDash val="solid"/>
-                      <a:round/>
-                      <a:headEnd type="none" w="med" len="med"/>
-                      <a:tailEnd type="none" w="med" len="med"/>
-                    </a:lnR>
-                    <a:lnT w="9525" cap="flat" cmpd="sng" algn="ctr">
-                      <a:solidFill>
-                        <a:srgbClr val="D9D4D0"/>
-                      </a:solidFill>
-                      <a:prstDash val="solid"/>
-                      <a:round/>
-                      <a:headEnd type="none" w="med" len="med"/>
-                      <a:tailEnd type="none" w="med" len="med"/>
-                    </a:lnT>
-                    <a:lnB w="9525" cap="flat" cmpd="sng" algn="ctr">
-                      <a:solidFill>
-                        <a:srgbClr val="D9D4D0"/>
-                      </a:solidFill>
-                      <a:prstDash val="solid"/>
-                      <a:round/>
-                      <a:headEnd type="none" w="med" len="med"/>
-                      <a:tailEnd type="none" w="med" len="med"/>
-                    </a:lnB>
-                    <a:solidFill>
-                      <a:srgbClr val="FFFFFF"/>
-                    </a:solidFill>
-                  </a:tcPr>
-                </a:tc>
-                <a:tc>
-                  <a:txBody>
-                    <a:bodyPr/>
-                    <a:lstStyle/>
-                    <a:p>
-                      <a:pPr algn="l" indent="0" marL="0">
-                        <a:buNone/>
-                      </a:pPr>
-                      <a:r>
-                        <a:rPr lang="en-US" sz="1800" dirty="0">
-                          <a:solidFill>
-                            <a:srgbClr val="0B0B0B"/>
-                          </a:solidFill>
-                          <a:latin typeface="Calibri" pitchFamily="34" charset="0"/>
-                          <a:ea typeface="Calibri" pitchFamily="34" charset="-122"/>
-                          <a:cs typeface="Calibri" pitchFamily="34" charset="-120"/>
-                        </a:rPr>
-                        <a:t>random-walk FM</a:t>
-                      </a:r>
-                      <a:endParaRPr lang="en-US" sz="1800" dirty="0">
-                        <a:latin typeface="Calibri" charset="0"/>
-                        <a:ea typeface="Calibri" charset="0"/>
-                        <a:cs typeface="Calibri" charset="0"/>
-                      </a:endParaRPr>
-                    </a:p>
-                  </a:txBody>
-                  <a:tcPr marL="45720" marR="45720" marT="45720" marB="45720" anchor="ctr">
-                    <a:lnL w="9525" cap="flat" cmpd="sng" algn="ctr">
-                      <a:solidFill>
-                        <a:srgbClr val="D9D4D0"/>
-                      </a:solidFill>
-                      <a:prstDash val="solid"/>
-                      <a:round/>
-                      <a:headEnd type="none" w="med" len="med"/>
-                      <a:tailEnd type="none" w="med" len="med"/>
-                    </a:lnL>
-                    <a:lnR w="9525" cap="flat" cmpd="sng" algn="ctr">
-                      <a:solidFill>
-                        <a:srgbClr val="D9D4D0"/>
-                      </a:solidFill>
-                      <a:prstDash val="solid"/>
-                      <a:round/>
-                      <a:headEnd type="none" w="med" len="med"/>
-                      <a:tailEnd type="none" w="med" len="med"/>
-                    </a:lnR>
-                    <a:lnT w="9525" cap="flat" cmpd="sng" algn="ctr">
-                      <a:solidFill>
-                        <a:srgbClr val="D9D4D0"/>
-                      </a:solidFill>
-                      <a:prstDash val="solid"/>
-                      <a:round/>
-                      <a:headEnd type="none" w="med" len="med"/>
-                      <a:tailEnd type="none" w="med" len="med"/>
-                    </a:lnT>
-                    <a:lnB w="9525" cap="flat" cmpd="sng" algn="ctr">
-                      <a:solidFill>
-                        <a:srgbClr val="D9D4D0"/>
-                      </a:solidFill>
-                      <a:prstDash val="solid"/>
-                      <a:round/>
-                      <a:headEnd type="none" w="med" len="med"/>
-                      <a:tailEnd type="none" w="med" len="med"/>
-                    </a:lnB>
-                    <a:solidFill>
-                      <a:srgbClr val="FFFFFF"/>
-                    </a:solidFill>
-                  </a:tcPr>
-                </a:tc>
-                <a:tc>
-                  <a:txBody>
-                    <a:bodyPr/>
-                    <a:lstStyle/>
-                    <a:p>
-                      <a:pPr algn="ctr" indent="0" marL="0">
-                        <a:buNone/>
-                      </a:pPr>
-                      <a:r>
-                        <a:rPr lang="en-US" sz="1800" dirty="0">
-                          <a:solidFill>
-                            <a:srgbClr val="0B0B0B"/>
-                          </a:solidFill>
-                          <a:latin typeface="Calibri" pitchFamily="34" charset="0"/>
-                          <a:ea typeface="Calibri" pitchFamily="34" charset="-122"/>
-                          <a:cs typeface="Calibri" pitchFamily="34" charset="-120"/>
-                        </a:rPr>
-                        <a:t>2.1686</a:t>
-                      </a:r>
-                      <a:endParaRPr lang="en-US" sz="1800" dirty="0">
-                        <a:latin typeface="Calibri" charset="0"/>
-                        <a:ea typeface="Calibri" charset="0"/>
-                        <a:cs typeface="Calibri" charset="0"/>
-                      </a:endParaRPr>
-                    </a:p>
-                  </a:txBody>
-                  <a:tcPr marL="45720" marR="45720" marT="45720" marB="45720" anchor="ctr">
-                    <a:lnL w="9525" cap="flat" cmpd="sng" algn="ctr">
-                      <a:solidFill>
-                        <a:srgbClr val="D9D4D0"/>
-                      </a:solidFill>
-                      <a:prstDash val="solid"/>
-                      <a:round/>
-                      <a:headEnd type="none" w="med" len="med"/>
-                      <a:tailEnd type="none" w="med" len="med"/>
-                    </a:lnL>
-                    <a:lnR w="9525" cap="flat" cmpd="sng" algn="ctr">
-                      <a:solidFill>
-                        <a:srgbClr val="D9D4D0"/>
-                      </a:solidFill>
-                      <a:prstDash val="solid"/>
-                      <a:round/>
-                      <a:headEnd type="none" w="med" len="med"/>
-                      <a:tailEnd type="none" w="med" len="med"/>
-                    </a:lnR>
-                    <a:lnT w="9525" cap="flat" cmpd="sng" algn="ctr">
-                      <a:solidFill>
-                        <a:srgbClr val="D9D4D0"/>
-                      </a:solidFill>
-                      <a:prstDash val="solid"/>
-                      <a:round/>
-                      <a:headEnd type="none" w="med" len="med"/>
-                      <a:tailEnd type="none" w="med" len="med"/>
-                    </a:lnT>
-                    <a:lnB w="9525" cap="flat" cmpd="sng" algn="ctr">
-                      <a:solidFill>
-                        <a:srgbClr val="D9D4D0"/>
-                      </a:solidFill>
-                      <a:prstDash val="solid"/>
-                      <a:round/>
-                      <a:headEnd type="none" w="med" len="med"/>
-                      <a:tailEnd type="none" w="med" len="med"/>
-                    </a:lnB>
-                    <a:solidFill>
-                      <a:srgbClr val="FFFFFF"/>
-                    </a:solidFill>
-                  </a:tcPr>
-                </a:tc>
-                <a:tc>
-                  <a:txBody>
-                    <a:bodyPr/>
-                    <a:lstStyle/>
-                    <a:p>
-                      <a:pPr algn="ctr" indent="0" marL="0">
-                        <a:buNone/>
-                      </a:pPr>
-                      <a:r>
-                        <a:rPr lang="en-US" sz="1800" dirty="0">
-                          <a:solidFill>
-                            <a:srgbClr val="0B0B0B"/>
-                          </a:solidFill>
-                          <a:latin typeface="Calibri" pitchFamily="34" charset="0"/>
-                          <a:ea typeface="Calibri" pitchFamily="34" charset="-122"/>
-                          <a:cs typeface="Calibri" pitchFamily="34" charset="-120"/>
-                        </a:rPr>
-                        <a:t>−5.5884</a:t>
-                      </a:r>
-                      <a:endParaRPr lang="en-US" sz="1800" dirty="0">
-                        <a:latin typeface="Calibri" charset="0"/>
-                        <a:ea typeface="Calibri" charset="0"/>
-                        <a:cs typeface="Calibri" charset="0"/>
-                      </a:endParaRPr>
-                    </a:p>
-                  </a:txBody>
-                  <a:tcPr marL="45720" marR="45720" marT="45720" marB="45720" anchor="ctr">
-                    <a:lnL w="9525" cap="flat" cmpd="sng" algn="ctr">
-                      <a:solidFill>
-                        <a:srgbClr val="D9D4D0"/>
-                      </a:solidFill>
-                      <a:prstDash val="solid"/>
-                      <a:round/>
-                      <a:headEnd type="none" w="med" len="med"/>
-                      <a:tailEnd type="none" w="med" len="med"/>
-                    </a:lnL>
-                    <a:lnR w="9525" cap="flat" cmpd="sng" algn="ctr">
-                      <a:solidFill>
-                        <a:srgbClr val="D9D4D0"/>
-                      </a:solidFill>
-                      <a:prstDash val="solid"/>
-                      <a:round/>
-                      <a:headEnd type="none" w="med" len="med"/>
-                      <a:tailEnd type="none" w="med" len="med"/>
-                    </a:lnR>
-                    <a:lnT w="9525" cap="flat" cmpd="sng" algn="ctr">
-                      <a:solidFill>
-                        <a:srgbClr val="D9D4D0"/>
-                      </a:solidFill>
-                      <a:prstDash val="solid"/>
-                      <a:round/>
-                      <a:headEnd type="none" w="med" len="med"/>
-                      <a:tailEnd type="none" w="med" len="med"/>
-                    </a:lnT>
-                    <a:lnB w="9525" cap="flat" cmpd="sng" algn="ctr">
-                      <a:solidFill>
-                        <a:srgbClr val="D9D4D0"/>
-                      </a:solidFill>
-                      <a:prstDash val="solid"/>
-                      <a:round/>
-                      <a:headEnd type="none" w="med" len="med"/>
-                      <a:tailEnd type="none" w="med" len="med"/>
-                    </a:lnB>
-                    <a:solidFill>
-                      <a:srgbClr val="FFFFFF"/>
-                    </a:solidFill>
-                  </a:tcPr>
-                </a:tc>
-                <a:tc>
-                  <a:txBody>
-                    <a:bodyPr/>
-                    <a:lstStyle/>
-                    <a:p>
-                      <a:pPr algn="ctr" indent="0" marL="0">
-                        <a:buNone/>
-                      </a:pPr>
-                      <a:r>
-                        <a:rPr lang="en-US" sz="1800" dirty="0">
-                          <a:solidFill>
-                            <a:srgbClr val="0B0B0B"/>
-                          </a:solidFill>
-                          <a:latin typeface="Calibri" pitchFamily="34" charset="0"/>
-                          <a:ea typeface="Calibri" pitchFamily="34" charset="-122"/>
-                          <a:cs typeface="Calibri" pitchFamily="34" charset="-120"/>
-                        </a:rPr>
-                        <a:t>0.7631</a:t>
-                      </a:r>
-                      <a:endParaRPr lang="en-US" sz="1800" dirty="0">
-                        <a:latin typeface="Calibri" charset="0"/>
-                        <a:ea typeface="Calibri" charset="0"/>
-                        <a:cs typeface="Calibri" charset="0"/>
-                      </a:endParaRPr>
-                    </a:p>
-                  </a:txBody>
-                  <a:tcPr marL="45720" marR="45720" marT="45720" marB="45720" anchor="ctr">
-                    <a:lnL w="9525" cap="flat" cmpd="sng" algn="ctr">
-                      <a:solidFill>
-                        <a:srgbClr val="D9D4D0"/>
-                      </a:solidFill>
-                      <a:prstDash val="solid"/>
-                      <a:round/>
-                      <a:headEnd type="none" w="med" len="med"/>
-                      <a:tailEnd type="none" w="med" len="med"/>
-                    </a:lnL>
-                    <a:lnR w="9525" cap="flat" cmpd="sng" algn="ctr">
-                      <a:solidFill>
-                        <a:srgbClr val="D9D4D0"/>
-                      </a:solidFill>
-                      <a:prstDash val="solid"/>
-                      <a:round/>
-                      <a:headEnd type="none" w="med" len="med"/>
-                      <a:tailEnd type="none" w="med" len="med"/>
-                    </a:lnR>
-                    <a:lnT w="9525" cap="flat" cmpd="sng" algn="ctr">
-                      <a:solidFill>
-                        <a:srgbClr val="D9D4D0"/>
-                      </a:solidFill>
-                      <a:prstDash val="solid"/>
-                      <a:round/>
-                      <a:headEnd type="none" w="med" len="med"/>
-                      <a:tailEnd type="none" w="med" len="med"/>
-                    </a:lnT>
-                    <a:lnB w="9525" cap="flat" cmpd="sng" algn="ctr">
-                      <a:solidFill>
-                        <a:srgbClr val="D9D4D0"/>
-                      </a:solidFill>
-                      <a:prstDash val="solid"/>
-                      <a:round/>
-                      <a:headEnd type="none" w="med" len="med"/>
-                      <a:tailEnd type="none" w="med" len="med"/>
-                    </a:lnB>
-                    <a:solidFill>
-                      <a:srgbClr val="FFFFFF"/>
-                    </a:solidFill>
-                  </a:tcPr>
-                </a:tc>
-                <a:tc>
-                  <a:txBody>
-                    <a:bodyPr/>
-                    <a:lstStyle/>
-                    <a:p>
-                      <a:pPr algn="ctr" indent="0" marL="0">
-                        <a:buNone/>
-                      </a:pPr>
-                      <a:r>
-                        <a:rPr lang="en-US" sz="1800" dirty="0">
-                          <a:solidFill>
-                            <a:srgbClr val="0B0B0B"/>
-                          </a:solidFill>
-                          <a:latin typeface="Calibri" pitchFamily="34" charset="0"/>
-                          <a:ea typeface="Calibri" pitchFamily="34" charset="-122"/>
-                          <a:cs typeface="Calibri" pitchFamily="34" charset="-120"/>
-                        </a:rPr>
-                        <a:t>2.4490</a:t>
-                      </a:r>
-                      <a:endParaRPr lang="en-US" sz="1800" dirty="0">
-                        <a:latin typeface="Calibri" charset="0"/>
-                        <a:ea typeface="Calibri" charset="0"/>
-                        <a:cs typeface="Calibri" charset="0"/>
-                      </a:endParaRPr>
-                    </a:p>
-                  </a:txBody>
-                  <a:tcPr marL="45720" marR="45720" marT="45720" marB="45720" anchor="ctr">
-                    <a:lnL w="9525" cap="flat" cmpd="sng" algn="ctr">
-                      <a:solidFill>
-                        <a:srgbClr val="D9D4D0"/>
-                      </a:solidFill>
-                      <a:prstDash val="solid"/>
-                      <a:round/>
-                      <a:headEnd type="none" w="med" len="med"/>
-                      <a:tailEnd type="none" w="med" len="med"/>
-                    </a:lnL>
-                    <a:lnR w="9525" cap="flat" cmpd="sng" algn="ctr">
-                      <a:solidFill>
-                        <a:srgbClr val="D9D4D0"/>
-                      </a:solidFill>
-                      <a:prstDash val="solid"/>
-                      <a:round/>
-                      <a:headEnd type="none" w="med" len="med"/>
-                      <a:tailEnd type="none" w="med" len="med"/>
-                    </a:lnR>
-                    <a:lnT w="9525" cap="flat" cmpd="sng" algn="ctr">
-                      <a:solidFill>
-                        <a:srgbClr val="D9D4D0"/>
-                      </a:solidFill>
-                      <a:prstDash val="solid"/>
-                      <a:round/>
-                      <a:headEnd type="none" w="med" len="med"/>
-                      <a:tailEnd type="none" w="med" len="med"/>
-                    </a:lnT>
-                    <a:lnB w="9525" cap="flat" cmpd="sng" algn="ctr">
-                      <a:solidFill>
-                        <a:srgbClr val="D9D4D0"/>
-                      </a:solidFill>
-                      <a:prstDash val="solid"/>
-                      <a:round/>
-                      <a:headEnd type="none" w="med" len="med"/>
-                      <a:tailEnd type="none" w="med" len="med"/>
-                    </a:lnB>
-                    <a:solidFill>
-                      <a:srgbClr val="FFFFFF"/>
-                    </a:solidFill>
-                  </a:tcPr>
-                </a:tc>
-                <a:tc>
-                  <a:txBody>
-                    <a:bodyPr/>
-                    <a:lstStyle/>
-                    <a:p>
-                      <a:pPr algn="ctr" indent="0" marL="0">
-                        <a:buNone/>
-                      </a:pPr>
-                      <a:r>
-                        <a:rPr lang="en-US" sz="1800" dirty="0">
-                          <a:solidFill>
-                            <a:srgbClr val="0B0B0B"/>
-                          </a:solidFill>
-                          <a:latin typeface="Calibri" pitchFamily="34" charset="0"/>
-                          <a:ea typeface="Calibri" pitchFamily="34" charset="-122"/>
-                          <a:cs typeface="Calibri" pitchFamily="34" charset="-120"/>
-                        </a:rPr>
-                        <a:t>0.9985</a:t>
-                      </a:r>
-                      <a:endParaRPr lang="en-US" sz="1800" dirty="0">
-                        <a:latin typeface="Calibri" charset="0"/>
-                        <a:ea typeface="Calibri" charset="0"/>
-                        <a:cs typeface="Calibri" charset="0"/>
-                      </a:endParaRPr>
-                    </a:p>
-                  </a:txBody>
-                  <a:tcPr marL="45720" marR="45720" marT="45720" marB="45720" anchor="ctr">
-                    <a:lnL w="9525" cap="flat" cmpd="sng" algn="ctr">
-                      <a:solidFill>
-                        <a:srgbClr val="D9D4D0"/>
-                      </a:solidFill>
-                      <a:prstDash val="solid"/>
-                      <a:round/>
-                      <a:headEnd type="none" w="med" len="med"/>
-                      <a:tailEnd type="none" w="med" len="med"/>
-                    </a:lnL>
-                    <a:lnR w="9525" cap="flat" cmpd="sng" algn="ctr">
-                      <a:solidFill>
-                        <a:srgbClr val="D9D4D0"/>
-                      </a:solidFill>
-                      <a:prstDash val="solid"/>
-                      <a:round/>
-                      <a:headEnd type="none" w="med" len="med"/>
-                      <a:tailEnd type="none" w="med" len="med"/>
-                    </a:lnR>
-                    <a:lnT w="9525" cap="flat" cmpd="sng" algn="ctr">
-                      <a:solidFill>
-                        <a:srgbClr val="D9D4D0"/>
-                      </a:solidFill>
-                      <a:prstDash val="solid"/>
-                      <a:round/>
-                      <a:headEnd type="none" w="med" len="med"/>
-                      <a:tailEnd type="none" w="med" len="med"/>
-                    </a:lnT>
-                    <a:lnB w="9525" cap="flat" cmpd="sng" algn="ctr">
-                      <a:solidFill>
-                        <a:srgbClr val="D9D4D0"/>
-                      </a:solidFill>
-                      <a:prstDash val="solid"/>
-                      <a:round/>
-                      <a:headEnd type="none" w="med" len="med"/>
-                      <a:tailEnd type="none" w="med" len="med"/>
-                    </a:lnB>
-                    <a:solidFill>
-                      <a:srgbClr val="FFFFFF"/>
-                    </a:solidFill>
-                  </a:tcPr>
-                </a:tc>
-              </a:tr>
-            </a:tbl>
-          </a:graphicData>
-        </a:graphic>
-      </p:graphicFrame>
-      <p:sp>
-        <p:nvSpPr>
-          <p:cNvPr id="37" name="Shape 27"/>
-          <p:cNvSpPr/>
-          <p:nvPr/>
-        </p:nvSpPr>
-        <p:spPr>
-          <a:xfrm>
-            <a:off x="24566880" y="22814661"/>
-            <a:ext cx="11094720" cy="3634105"/>
-          </a:xfrm>
-          <a:prstGeom prst="rect">
-            <a:avLst/>
-          </a:prstGeom>
-          <a:solidFill>
-            <a:srgbClr val="FFFFFF"/>
-          </a:solidFill>
-          <a:ln w="12700">
-            <a:solidFill>
-              <a:srgbClr val="D9D4D0"/>
-            </a:solidFill>
-            <a:prstDash val="solid"/>
-          </a:ln>
-        </p:spPr>
-      </p:sp>
-      <p:sp>
-        <p:nvSpPr>
-          <p:cNvPr id="38" name="Heading"/>
-          <p:cNvSpPr txBox="1"/>
-          <p:nvPr/>
-        </p:nvSpPr>
-        <p:spPr>
-          <a:xfrm>
-            <a:off x="24886920" y="23134701"/>
+            <a:off x="13060680" y="24013859"/>
             <a:ext cx="10454640" cy="527685"/>
           </a:xfrm>
           <a:prstGeom prst="rect">
@@ -7958,14 +4735,14 @@
       </p:sp>
       <p:sp>
         <p:nvSpPr>
-          <p:cNvPr id="39" name="Bullets"/>
+          <p:cNvPr id="28" name="Bullets"/>
           <p:cNvSpPr txBox="1"/>
           <p:nvPr/>
         </p:nvSpPr>
         <p:spPr>
           <a:xfrm>
-            <a:off x="24886920" y="23826978"/>
-            <a:ext cx="10454640" cy="2283460"/>
+            <a:off x="13060680" y="24706136"/>
+            <a:ext cx="10454640" cy="1932940"/>
           </a:xfrm>
           <a:prstGeom prst="rect">
             <a:avLst/>
@@ -8042,7 +4819,7 @@
                 <a:ea typeface="Calibri" pitchFamily="34" charset="-122"/>
                 <a:cs typeface="Calibri" pitchFamily="34" charset="-120"/>
               </a:rPr>
-              <a:t>real-time monitoring of the laboratory Rb-87 clock comparisons with the Hadamard family; Monte Carlo calibration of the Thêo family and of gapped records.</a:t>
+              <a:t>real-time monitoring of the laboratory Rb-87 clock comparisons; Monte Carlo calibration of the Thêo family and of gapped records.</a:t>
             </a:r>
             <a:endParaRPr lang="en-US" sz="2400" dirty="0"/>
           </a:p>
@@ -8050,7 +4827,3342 @@
       </p:sp>
       <p:sp>
         <p:nvSpPr>
-          <p:cNvPr id="40" name="Shape 30"/>
+          <p:cNvPr id="29" name="Shape 23"/>
+          <p:cNvSpPr/>
+          <p:nvPr/>
+        </p:nvSpPr>
+        <p:spPr>
+          <a:xfrm>
+            <a:off x="24566880" y="4206240"/>
+            <a:ext cx="11094720" cy="5530850"/>
+          </a:xfrm>
+          <a:prstGeom prst="rect">
+            <a:avLst/>
+          </a:prstGeom>
+          <a:solidFill>
+            <a:srgbClr val="FFFFFF"/>
+          </a:solidFill>
+          <a:ln w="12700">
+            <a:solidFill>
+              <a:srgbClr val="D9D4D0"/>
+            </a:solidFill>
+            <a:prstDash val="solid"/>
+          </a:ln>
+        </p:spPr>
+      </p:sp>
+      <p:sp>
+        <p:nvSpPr>
+          <p:cNvPr id="30" name="Heading"/>
+          <p:cNvSpPr txBox="1"/>
+          <p:nvPr/>
+        </p:nvSpPr>
+        <p:spPr>
+          <a:xfrm>
+            <a:off x="24886920" y="4526280"/>
+            <a:ext cx="10454640" cy="1009650"/>
+          </a:xfrm>
+          <a:prstGeom prst="rect">
+            <a:avLst/>
+          </a:prstGeom>
+          <a:noFill/>
+          <a:ln/>
+        </p:spPr>
+        <p:txBody>
+          <a:bodyPr wrap="square" lIns="0" tIns="0" rIns="0" bIns="0" rtlCol="0" anchor="t"/>
+          <a:lstStyle/>
+          <a:p>
+            <a:pPr indent="0" marL="0">
+              <a:buNone/>
+            </a:pPr>
+            <a:r>
+              <a:rPr lang="en-US" sz="3300" b="1" dirty="0">
+                <a:solidFill>
+                  <a:srgbClr val="9E1B32"/>
+                </a:solidFill>
+                <a:latin typeface="Calibri" pitchFamily="34" charset="0"/>
+                <a:ea typeface="Calibri" pitchFamily="34" charset="-122"/>
+                <a:cs typeface="Calibri" pitchFamily="34" charset="-120"/>
+              </a:rPr>
+              <a:t>MHTOTDEV: a new total estimator, calibrated by Monte Carlo</a:t>
+            </a:r>
+            <a:endParaRPr lang="en-US" sz="3300" dirty="0"/>
+          </a:p>
+        </p:txBody>
+      </p:sp>
+      <p:sp>
+        <p:nvSpPr>
+          <p:cNvPr id="31" name="Body"/>
+          <p:cNvSpPr txBox="1"/>
+          <p:nvPr/>
+        </p:nvSpPr>
+        <p:spPr>
+          <a:xfrm>
+            <a:off x="24886920" y="5700522"/>
+            <a:ext cx="10454640" cy="3698240"/>
+          </a:xfrm>
+          <a:prstGeom prst="rect">
+            <a:avLst/>
+          </a:prstGeom>
+          <a:noFill/>
+          <a:ln/>
+        </p:spPr>
+        <p:txBody>
+          <a:bodyPr wrap="square" lIns="0" tIns="0" rIns="0" bIns="0" rtlCol="0" anchor="t"/>
+          <a:lstStyle/>
+          <a:p>
+            <a:pPr indent="0" marL="0">
+              <a:spcAft>
+                <a:spcPts val="800"/>
+              </a:spcAft>
+              <a:buNone/>
+            </a:pPr>
+            <a:r>
+              <a:rPr lang="en-US" sz="2400" dirty="0">
+                <a:solidFill>
+                  <a:srgbClr val="0B0B0B"/>
+                </a:solidFill>
+                <a:latin typeface="Calibri" pitchFamily="34" charset="0"/>
+                <a:ea typeface="Calibri" pitchFamily="34" charset="-122"/>
+                <a:cs typeface="Calibri" pitchFamily="34" charset="-120"/>
+              </a:rPr>
+              <a:t>Modified Hadamard total deviation combines drift rejection (third differences), white-from-flicker PM separation (modified form) and long-τ confidence (reflected extension). No published bias or EDF existed, so both were measured against synthesized noise: α ∈ {+2 … −2}, N ∈ {1024 … 32768}, R = 3000 realizations per cell, one seeded stream per (α, N, r), fits over τ/τ₀ ≥ 16. Bias B = E[MHTOTVAR]/E[MHVAR] against MHDEV on the same realization; EDF from the χ² variance relation, bootstrap standard error 2.6 %.</a:t>
+            </a:r>
+            <a:endParaRPr lang="en-US" sz="2400" dirty="0"/>
+          </a:p>
+          <a:p>
+            <a:pPr indent="0" marL="0">
+              <a:spcAft>
+                <a:spcPts val="800"/>
+              </a:spcAft>
+              <a:buNone/>
+            </a:pPr>
+            <a:r>
+              <a:rPr lang="en-US" sz="2400" dirty="0">
+                <a:solidFill>
+                  <a:srgbClr val="0B0B0B"/>
+                </a:solidFill>
+                <a:latin typeface="Calibri" pitchFamily="34" charset="0"/>
+                <a:ea typeface="Calibri" pitchFamily="34" charset="-122"/>
+                <a:cs typeface="Calibri" pitchFamily="34" charset="-120"/>
+              </a:rPr>
+              <a:t>Kernel: the Greenhall scheme of MTOTDEV and HTOTDEV on windows of length 4m (half-mean slope removal, 3× time-reverse extension, modified third difference), after global least-squares drift removal.</a:t>
+            </a:r>
+            <a:endParaRPr lang="en-US" sz="2400" dirty="0"/>
+          </a:p>
+        </p:txBody>
+      </p:sp>
+      <p:sp>
+        <p:nvSpPr>
+          <p:cNvPr id="32" name="Shape 26"/>
+          <p:cNvSpPr/>
+          <p:nvPr/>
+        </p:nvSpPr>
+        <p:spPr>
+          <a:xfrm>
+            <a:off x="24566880" y="10148570"/>
+            <a:ext cx="11094720" cy="8638413"/>
+          </a:xfrm>
+          <a:prstGeom prst="rect">
+            <a:avLst/>
+          </a:prstGeom>
+          <a:solidFill>
+            <a:srgbClr val="FFFFFF"/>
+          </a:solidFill>
+          <a:ln w="12700">
+            <a:solidFill>
+              <a:srgbClr val="D9D4D0"/>
+            </a:solidFill>
+            <a:prstDash val="solid"/>
+          </a:ln>
+        </p:spPr>
+      </p:sp>
+      <p:sp>
+        <p:nvSpPr>
+          <p:cNvPr id="33" name="Heading"/>
+          <p:cNvSpPr txBox="1"/>
+          <p:nvPr/>
+        </p:nvSpPr>
+        <p:spPr>
+          <a:xfrm>
+            <a:off x="24886920" y="10468610"/>
+            <a:ext cx="10454640" cy="1009650"/>
+          </a:xfrm>
+          <a:prstGeom prst="rect">
+            <a:avLst/>
+          </a:prstGeom>
+          <a:noFill/>
+          <a:ln/>
+        </p:spPr>
+        <p:txBody>
+          <a:bodyPr wrap="square" lIns="0" tIns="0" rIns="0" bIns="0" rtlCol="0" anchor="t"/>
+          <a:lstStyle/>
+          <a:p>
+            <a:pPr indent="0" marL="0">
+              <a:buNone/>
+            </a:pPr>
+            <a:r>
+              <a:rPr lang="en-US" sz="3300" b="1" dirty="0">
+                <a:solidFill>
+                  <a:srgbClr val="9E1B32"/>
+                </a:solidFill>
+                <a:latin typeface="Calibri" pitchFamily="34" charset="0"/>
+                <a:ea typeface="Calibri" pitchFamily="34" charset="-122"/>
+                <a:cs typeface="Calibri" pitchFamily="34" charset="-120"/>
+              </a:rPr>
+              <a:t>Unbiased for PM noise, reads high for red FM; EDF fits with R² ≥ 0.9982</a:t>
+            </a:r>
+            <a:endParaRPr lang="en-US" sz="3300" dirty="0"/>
+          </a:p>
+        </p:txBody>
+      </p:sp>
+      <p:pic>
+        <p:nvPicPr>
+          <p:cNvPr id="34" name="F4_mhtot_bias" descr="/home/user/SigmaTau.jl/poster/figures/F4_mhtot_bias.png">    </p:cNvPr>
+          <p:cNvPicPr>
+            <a:picLocks noChangeAspect="1"/>
+          </p:cNvPicPr>
+          <p:nvPr/>
+        </p:nvPicPr>
+        <p:blipFill>
+          <a:blip r:embed="rId4"/>
+          <a:stretch>
+            <a:fillRect/>
+          </a:stretch>
+        </p:blipFill>
+        <p:spPr>
+          <a:xfrm>
+            <a:off x="25324428" y="11642852"/>
+            <a:ext cx="4215143" cy="3657600"/>
+          </a:xfrm>
+          <a:prstGeom prst="rect">
+            <a:avLst/>
+          </a:prstGeom>
+        </p:spPr>
+      </p:pic>
+      <p:pic>
+        <p:nvPicPr>
+          <p:cNvPr id="35" name="F5_mhtot_edf" descr="/home/user/SigmaTau.jl/poster/figures/F5_mhtot_edf.png">    </p:cNvPr>
+          <p:cNvPicPr>
+            <a:picLocks noChangeAspect="1"/>
+          </p:cNvPicPr>
+          <p:nvPr/>
+        </p:nvPicPr>
+        <p:blipFill>
+          <a:blip r:embed="rId5"/>
+          <a:stretch>
+            <a:fillRect/>
+          </a:stretch>
+        </p:blipFill>
+        <p:spPr>
+          <a:xfrm>
+            <a:off x="30691116" y="11642852"/>
+            <a:ext cx="4210729" cy="3657600"/>
+          </a:xfrm>
+          <a:prstGeom prst="rect">
+            <a:avLst/>
+          </a:prstGeom>
+        </p:spPr>
+      </p:pic>
+      <p:sp>
+        <p:nvSpPr>
+          <p:cNvPr id="36" name="Caption"/>
+          <p:cNvSpPr txBox="1"/>
+          <p:nvPr/>
+        </p:nvSpPr>
+        <p:spPr>
+          <a:xfrm>
+            <a:off x="24886920" y="15410180"/>
+            <a:ext cx="10454640" cy="615315"/>
+          </a:xfrm>
+          <a:prstGeom prst="rect">
+            <a:avLst/>
+          </a:prstGeom>
+          <a:noFill/>
+          <a:ln/>
+        </p:spPr>
+        <p:txBody>
+          <a:bodyPr wrap="square" lIns="0" tIns="0" rIns="0" bIns="0" rtlCol="0" anchor="t"/>
+          <a:lstStyle/>
+          <a:p>
+            <a:pPr indent="0" marL="0">
+              <a:buNone/>
+            </a:pPr>
+            <a:r>
+              <a:rPr lang="en-US" sz="1950" dirty="0">
+                <a:solidFill>
+                  <a:srgbClr val="52514E"/>
+                </a:solidFill>
+                <a:latin typeface="Calibri" pitchFamily="34" charset="0"/>
+                <a:ea typeface="Calibri" pitchFamily="34" charset="-122"/>
+                <a:cs typeface="Calibri" pitchFamily="34" charset="-120"/>
+              </a:rPr>
+              <a:t>Fig. 4. Shipped models B = b₀ + b₁ τ/T and ν = b T/τ − c (seed 20260531). Below T/τ ≈ 5–6 the interval is indicative only; σ itself is valid to the reach limit τ = T/4.</a:t>
+            </a:r>
+            <a:endParaRPr lang="en-US" sz="1950" dirty="0"/>
+          </a:p>
+        </p:txBody>
+      </p:sp>
+      <p:graphicFrame>
+        <p:nvGraphicFramePr>
+          <p:cNvPr id="3" name="MHTOTDEV coefficients"/>
+          <p:cNvGraphicFramePr>
+            <a:graphicFrameLocks noGrp="1"/>
+          </p:cNvGraphicFramePr>
+          <p:nvPr>
+            <p:extLst>
+              <p:ext uri="{D42A27DB-BD31-4B8C-83A1-F6EECF244321}">
+                <p14:modId xmlns:p14="http://schemas.microsoft.com/office/powerpoint/2010/main" val="1579011935"/>
+              </p:ext>
+            </p:extLst>
+          </p:nvPr>
+        </p:nvGraphicFramePr>
+        <p:xfrm>
+          <a:off x="24886920" y="16116935"/>
+          <a:ext cx="10454640" cy="914400"/>
+        </p:xfrm>
+        <a:graphic>
+          <a:graphicData uri="http://schemas.openxmlformats.org/drawingml/2006/table">
+            <a:tbl>
+              <a:tblPr/>
+              <a:tblGrid>
+                <a:gridCol w="871220"/>
+                <a:gridCol w="2516858"/>
+                <a:gridCol w="1452033"/>
+                <a:gridCol w="1548836"/>
+                <a:gridCol w="1355231"/>
+                <a:gridCol w="1355231"/>
+                <a:gridCol w="1355231"/>
+              </a:tblGrid>
+              <a:tr h="384048">
+                <a:tc>
+                  <a:txBody>
+                    <a:bodyPr/>
+                    <a:lstStyle/>
+                    <a:p>
+                      <a:pPr algn="ctr" indent="0" marL="0">
+                        <a:buNone/>
+                      </a:pPr>
+                      <a:r>
+                        <a:rPr lang="en-US" sz="1800" b="1" dirty="0">
+                          <a:solidFill>
+                            <a:srgbClr val="FFFFFF"/>
+                          </a:solidFill>
+                          <a:latin typeface="Calibri" pitchFamily="34" charset="0"/>
+                          <a:ea typeface="Calibri" pitchFamily="34" charset="-122"/>
+                          <a:cs typeface="Calibri" pitchFamily="34" charset="-120"/>
+                        </a:rPr>
+                        <a:t>α</a:t>
+                      </a:r>
+                      <a:endParaRPr lang="en-US" sz="1800" dirty="0">
+                        <a:latin typeface="Calibri" charset="0"/>
+                        <a:ea typeface="Calibri" charset="0"/>
+                        <a:cs typeface="Calibri" charset="0"/>
+                      </a:endParaRPr>
+                    </a:p>
+                  </a:txBody>
+                  <a:tcPr marL="45720" marR="45720" marT="45720" marB="45720" anchor="ctr">
+                    <a:lnL w="9525" cap="flat" cmpd="sng" algn="ctr">
+                      <a:solidFill>
+                        <a:srgbClr val="D9D4D0"/>
+                      </a:solidFill>
+                      <a:prstDash val="solid"/>
+                      <a:round/>
+                      <a:headEnd type="none" w="med" len="med"/>
+                      <a:tailEnd type="none" w="med" len="med"/>
+                    </a:lnL>
+                    <a:lnR w="9525" cap="flat" cmpd="sng" algn="ctr">
+                      <a:solidFill>
+                        <a:srgbClr val="D9D4D0"/>
+                      </a:solidFill>
+                      <a:prstDash val="solid"/>
+                      <a:round/>
+                      <a:headEnd type="none" w="med" len="med"/>
+                      <a:tailEnd type="none" w="med" len="med"/>
+                    </a:lnR>
+                    <a:lnT w="9525" cap="flat" cmpd="sng" algn="ctr">
+                      <a:solidFill>
+                        <a:srgbClr val="D9D4D0"/>
+                      </a:solidFill>
+                      <a:prstDash val="solid"/>
+                      <a:round/>
+                      <a:headEnd type="none" w="med" len="med"/>
+                      <a:tailEnd type="none" w="med" len="med"/>
+                    </a:lnT>
+                    <a:lnB w="9525" cap="flat" cmpd="sng" algn="ctr">
+                      <a:solidFill>
+                        <a:srgbClr val="D9D4D0"/>
+                      </a:solidFill>
+                      <a:prstDash val="solid"/>
+                      <a:round/>
+                      <a:headEnd type="none" w="med" len="med"/>
+                      <a:tailEnd type="none" w="med" len="med"/>
+                    </a:lnB>
+                    <a:solidFill>
+                      <a:srgbClr val="9E1B32"/>
+                    </a:solidFill>
+                  </a:tcPr>
+                </a:tc>
+                <a:tc>
+                  <a:txBody>
+                    <a:bodyPr/>
+                    <a:lstStyle/>
+                    <a:p>
+                      <a:pPr algn="ctr" indent="0" marL="0">
+                        <a:buNone/>
+                      </a:pPr>
+                      <a:r>
+                        <a:rPr lang="en-US" sz="1800" b="1" dirty="0">
+                          <a:solidFill>
+                            <a:srgbClr val="FFFFFF"/>
+                          </a:solidFill>
+                          <a:latin typeface="Calibri" pitchFamily="34" charset="0"/>
+                          <a:ea typeface="Calibri" pitchFamily="34" charset="-122"/>
+                          <a:cs typeface="Calibri" pitchFamily="34" charset="-120"/>
+                        </a:rPr>
+                        <a:t>noise</a:t>
+                      </a:r>
+                      <a:endParaRPr lang="en-US" sz="1800" dirty="0">
+                        <a:latin typeface="Calibri" charset="0"/>
+                        <a:ea typeface="Calibri" charset="0"/>
+                        <a:cs typeface="Calibri" charset="0"/>
+                      </a:endParaRPr>
+                    </a:p>
+                  </a:txBody>
+                  <a:tcPr marL="45720" marR="45720" marT="45720" marB="45720" anchor="ctr">
+                    <a:lnL w="9525" cap="flat" cmpd="sng" algn="ctr">
+                      <a:solidFill>
+                        <a:srgbClr val="D9D4D0"/>
+                      </a:solidFill>
+                      <a:prstDash val="solid"/>
+                      <a:round/>
+                      <a:headEnd type="none" w="med" len="med"/>
+                      <a:tailEnd type="none" w="med" len="med"/>
+                    </a:lnL>
+                    <a:lnR w="9525" cap="flat" cmpd="sng" algn="ctr">
+                      <a:solidFill>
+                        <a:srgbClr val="D9D4D0"/>
+                      </a:solidFill>
+                      <a:prstDash val="solid"/>
+                      <a:round/>
+                      <a:headEnd type="none" w="med" len="med"/>
+                      <a:tailEnd type="none" w="med" len="med"/>
+                    </a:lnR>
+                    <a:lnT w="9525" cap="flat" cmpd="sng" algn="ctr">
+                      <a:solidFill>
+                        <a:srgbClr val="D9D4D0"/>
+                      </a:solidFill>
+                      <a:prstDash val="solid"/>
+                      <a:round/>
+                      <a:headEnd type="none" w="med" len="med"/>
+                      <a:tailEnd type="none" w="med" len="med"/>
+                    </a:lnT>
+                    <a:lnB w="9525" cap="flat" cmpd="sng" algn="ctr">
+                      <a:solidFill>
+                        <a:srgbClr val="D9D4D0"/>
+                      </a:solidFill>
+                      <a:prstDash val="solid"/>
+                      <a:round/>
+                      <a:headEnd type="none" w="med" len="med"/>
+                      <a:tailEnd type="none" w="med" len="med"/>
+                    </a:lnB>
+                    <a:solidFill>
+                      <a:srgbClr val="9E1B32"/>
+                    </a:solidFill>
+                  </a:tcPr>
+                </a:tc>
+                <a:tc>
+                  <a:txBody>
+                    <a:bodyPr/>
+                    <a:lstStyle/>
+                    <a:p>
+                      <a:pPr algn="ctr" indent="0" marL="0">
+                        <a:buNone/>
+                      </a:pPr>
+                      <a:r>
+                        <a:rPr lang="en-US" sz="1800" b="1" dirty="0">
+                          <a:solidFill>
+                            <a:srgbClr val="FFFFFF"/>
+                          </a:solidFill>
+                          <a:latin typeface="Calibri" pitchFamily="34" charset="0"/>
+                          <a:ea typeface="Calibri" pitchFamily="34" charset="-122"/>
+                          <a:cs typeface="Calibri" pitchFamily="34" charset="-120"/>
+                        </a:rPr>
+                        <a:t>bias b₀</a:t>
+                      </a:r>
+                      <a:endParaRPr lang="en-US" sz="1800" dirty="0">
+                        <a:latin typeface="Calibri" charset="0"/>
+                        <a:ea typeface="Calibri" charset="0"/>
+                        <a:cs typeface="Calibri" charset="0"/>
+                      </a:endParaRPr>
+                    </a:p>
+                  </a:txBody>
+                  <a:tcPr marL="45720" marR="45720" marT="45720" marB="45720" anchor="ctr">
+                    <a:lnL w="9525" cap="flat" cmpd="sng" algn="ctr">
+                      <a:solidFill>
+                        <a:srgbClr val="D9D4D0"/>
+                      </a:solidFill>
+                      <a:prstDash val="solid"/>
+                      <a:round/>
+                      <a:headEnd type="none" w="med" len="med"/>
+                      <a:tailEnd type="none" w="med" len="med"/>
+                    </a:lnL>
+                    <a:lnR w="9525" cap="flat" cmpd="sng" algn="ctr">
+                      <a:solidFill>
+                        <a:srgbClr val="D9D4D0"/>
+                      </a:solidFill>
+                      <a:prstDash val="solid"/>
+                      <a:round/>
+                      <a:headEnd type="none" w="med" len="med"/>
+                      <a:tailEnd type="none" w="med" len="med"/>
+                    </a:lnR>
+                    <a:lnT w="9525" cap="flat" cmpd="sng" algn="ctr">
+                      <a:solidFill>
+                        <a:srgbClr val="D9D4D0"/>
+                      </a:solidFill>
+                      <a:prstDash val="solid"/>
+                      <a:round/>
+                      <a:headEnd type="none" w="med" len="med"/>
+                      <a:tailEnd type="none" w="med" len="med"/>
+                    </a:lnT>
+                    <a:lnB w="9525" cap="flat" cmpd="sng" algn="ctr">
+                      <a:solidFill>
+                        <a:srgbClr val="D9D4D0"/>
+                      </a:solidFill>
+                      <a:prstDash val="solid"/>
+                      <a:round/>
+                      <a:headEnd type="none" w="med" len="med"/>
+                      <a:tailEnd type="none" w="med" len="med"/>
+                    </a:lnB>
+                    <a:solidFill>
+                      <a:srgbClr val="9E1B32"/>
+                    </a:solidFill>
+                  </a:tcPr>
+                </a:tc>
+                <a:tc>
+                  <a:txBody>
+                    <a:bodyPr/>
+                    <a:lstStyle/>
+                    <a:p>
+                      <a:pPr algn="ctr" indent="0" marL="0">
+                        <a:buNone/>
+                      </a:pPr>
+                      <a:r>
+                        <a:rPr lang="en-US" sz="1800" b="1" dirty="0">
+                          <a:solidFill>
+                            <a:srgbClr val="FFFFFF"/>
+                          </a:solidFill>
+                          <a:latin typeface="Calibri" pitchFamily="34" charset="0"/>
+                          <a:ea typeface="Calibri" pitchFamily="34" charset="-122"/>
+                          <a:cs typeface="Calibri" pitchFamily="34" charset="-120"/>
+                        </a:rPr>
+                        <a:t>bias b₁</a:t>
+                      </a:r>
+                      <a:endParaRPr lang="en-US" sz="1800" dirty="0">
+                        <a:latin typeface="Calibri" charset="0"/>
+                        <a:ea typeface="Calibri" charset="0"/>
+                        <a:cs typeface="Calibri" charset="0"/>
+                      </a:endParaRPr>
+                    </a:p>
+                  </a:txBody>
+                  <a:tcPr marL="45720" marR="45720" marT="45720" marB="45720" anchor="ctr">
+                    <a:lnL w="9525" cap="flat" cmpd="sng" algn="ctr">
+                      <a:solidFill>
+                        <a:srgbClr val="D9D4D0"/>
+                      </a:solidFill>
+                      <a:prstDash val="solid"/>
+                      <a:round/>
+                      <a:headEnd type="none" w="med" len="med"/>
+                      <a:tailEnd type="none" w="med" len="med"/>
+                    </a:lnL>
+                    <a:lnR w="9525" cap="flat" cmpd="sng" algn="ctr">
+                      <a:solidFill>
+                        <a:srgbClr val="D9D4D0"/>
+                      </a:solidFill>
+                      <a:prstDash val="solid"/>
+                      <a:round/>
+                      <a:headEnd type="none" w="med" len="med"/>
+                      <a:tailEnd type="none" w="med" len="med"/>
+                    </a:lnR>
+                    <a:lnT w="9525" cap="flat" cmpd="sng" algn="ctr">
+                      <a:solidFill>
+                        <a:srgbClr val="D9D4D0"/>
+                      </a:solidFill>
+                      <a:prstDash val="solid"/>
+                      <a:round/>
+                      <a:headEnd type="none" w="med" len="med"/>
+                      <a:tailEnd type="none" w="med" len="med"/>
+                    </a:lnT>
+                    <a:lnB w="9525" cap="flat" cmpd="sng" algn="ctr">
+                      <a:solidFill>
+                        <a:srgbClr val="D9D4D0"/>
+                      </a:solidFill>
+                      <a:prstDash val="solid"/>
+                      <a:round/>
+                      <a:headEnd type="none" w="med" len="med"/>
+                      <a:tailEnd type="none" w="med" len="med"/>
+                    </a:lnB>
+                    <a:solidFill>
+                      <a:srgbClr val="9E1B32"/>
+                    </a:solidFill>
+                  </a:tcPr>
+                </a:tc>
+                <a:tc>
+                  <a:txBody>
+                    <a:bodyPr/>
+                    <a:lstStyle/>
+                    <a:p>
+                      <a:pPr algn="ctr" indent="0" marL="0">
+                        <a:buNone/>
+                      </a:pPr>
+                      <a:r>
+                        <a:rPr lang="en-US" sz="1800" b="1" dirty="0">
+                          <a:solidFill>
+                            <a:srgbClr val="FFFFFF"/>
+                          </a:solidFill>
+                          <a:latin typeface="Calibri" pitchFamily="34" charset="0"/>
+                          <a:ea typeface="Calibri" pitchFamily="34" charset="-122"/>
+                          <a:cs typeface="Calibri" pitchFamily="34" charset="-120"/>
+                        </a:rPr>
+                        <a:t>EDF b</a:t>
+                      </a:r>
+                      <a:endParaRPr lang="en-US" sz="1800" dirty="0">
+                        <a:latin typeface="Calibri" charset="0"/>
+                        <a:ea typeface="Calibri" charset="0"/>
+                        <a:cs typeface="Calibri" charset="0"/>
+                      </a:endParaRPr>
+                    </a:p>
+                  </a:txBody>
+                  <a:tcPr marL="45720" marR="45720" marT="45720" marB="45720" anchor="ctr">
+                    <a:lnL w="9525" cap="flat" cmpd="sng" algn="ctr">
+                      <a:solidFill>
+                        <a:srgbClr val="D9D4D0"/>
+                      </a:solidFill>
+                      <a:prstDash val="solid"/>
+                      <a:round/>
+                      <a:headEnd type="none" w="med" len="med"/>
+                      <a:tailEnd type="none" w="med" len="med"/>
+                    </a:lnL>
+                    <a:lnR w="9525" cap="flat" cmpd="sng" algn="ctr">
+                      <a:solidFill>
+                        <a:srgbClr val="D9D4D0"/>
+                      </a:solidFill>
+                      <a:prstDash val="solid"/>
+                      <a:round/>
+                      <a:headEnd type="none" w="med" len="med"/>
+                      <a:tailEnd type="none" w="med" len="med"/>
+                    </a:lnR>
+                    <a:lnT w="9525" cap="flat" cmpd="sng" algn="ctr">
+                      <a:solidFill>
+                        <a:srgbClr val="D9D4D0"/>
+                      </a:solidFill>
+                      <a:prstDash val="solid"/>
+                      <a:round/>
+                      <a:headEnd type="none" w="med" len="med"/>
+                      <a:tailEnd type="none" w="med" len="med"/>
+                    </a:lnT>
+                    <a:lnB w="9525" cap="flat" cmpd="sng" algn="ctr">
+                      <a:solidFill>
+                        <a:srgbClr val="D9D4D0"/>
+                      </a:solidFill>
+                      <a:prstDash val="solid"/>
+                      <a:round/>
+                      <a:headEnd type="none" w="med" len="med"/>
+                      <a:tailEnd type="none" w="med" len="med"/>
+                    </a:lnB>
+                    <a:solidFill>
+                      <a:srgbClr val="9E1B32"/>
+                    </a:solidFill>
+                  </a:tcPr>
+                </a:tc>
+                <a:tc>
+                  <a:txBody>
+                    <a:bodyPr/>
+                    <a:lstStyle/>
+                    <a:p>
+                      <a:pPr algn="ctr" indent="0" marL="0">
+                        <a:buNone/>
+                      </a:pPr>
+                      <a:r>
+                        <a:rPr lang="en-US" sz="1800" b="1" dirty="0">
+                          <a:solidFill>
+                            <a:srgbClr val="FFFFFF"/>
+                          </a:solidFill>
+                          <a:latin typeface="Calibri" pitchFamily="34" charset="0"/>
+                          <a:ea typeface="Calibri" pitchFamily="34" charset="-122"/>
+                          <a:cs typeface="Calibri" pitchFamily="34" charset="-120"/>
+                        </a:rPr>
+                        <a:t>EDF c</a:t>
+                      </a:r>
+                      <a:endParaRPr lang="en-US" sz="1800" dirty="0">
+                        <a:latin typeface="Calibri" charset="0"/>
+                        <a:ea typeface="Calibri" charset="0"/>
+                        <a:cs typeface="Calibri" charset="0"/>
+                      </a:endParaRPr>
+                    </a:p>
+                  </a:txBody>
+                  <a:tcPr marL="45720" marR="45720" marT="45720" marB="45720" anchor="ctr">
+                    <a:lnL w="9525" cap="flat" cmpd="sng" algn="ctr">
+                      <a:solidFill>
+                        <a:srgbClr val="D9D4D0"/>
+                      </a:solidFill>
+                      <a:prstDash val="solid"/>
+                      <a:round/>
+                      <a:headEnd type="none" w="med" len="med"/>
+                      <a:tailEnd type="none" w="med" len="med"/>
+                    </a:lnL>
+                    <a:lnR w="9525" cap="flat" cmpd="sng" algn="ctr">
+                      <a:solidFill>
+                        <a:srgbClr val="D9D4D0"/>
+                      </a:solidFill>
+                      <a:prstDash val="solid"/>
+                      <a:round/>
+                      <a:headEnd type="none" w="med" len="med"/>
+                      <a:tailEnd type="none" w="med" len="med"/>
+                    </a:lnR>
+                    <a:lnT w="9525" cap="flat" cmpd="sng" algn="ctr">
+                      <a:solidFill>
+                        <a:srgbClr val="D9D4D0"/>
+                      </a:solidFill>
+                      <a:prstDash val="solid"/>
+                      <a:round/>
+                      <a:headEnd type="none" w="med" len="med"/>
+                      <a:tailEnd type="none" w="med" len="med"/>
+                    </a:lnT>
+                    <a:lnB w="9525" cap="flat" cmpd="sng" algn="ctr">
+                      <a:solidFill>
+                        <a:srgbClr val="D9D4D0"/>
+                      </a:solidFill>
+                      <a:prstDash val="solid"/>
+                      <a:round/>
+                      <a:headEnd type="none" w="med" len="med"/>
+                      <a:tailEnd type="none" w="med" len="med"/>
+                    </a:lnB>
+                    <a:solidFill>
+                      <a:srgbClr val="9E1B32"/>
+                    </a:solidFill>
+                  </a:tcPr>
+                </a:tc>
+                <a:tc>
+                  <a:txBody>
+                    <a:bodyPr/>
+                    <a:lstStyle/>
+                    <a:p>
+                      <a:pPr algn="ctr" indent="0" marL="0">
+                        <a:buNone/>
+                      </a:pPr>
+                      <a:r>
+                        <a:rPr lang="en-US" sz="1800" b="1" dirty="0">
+                          <a:solidFill>
+                            <a:srgbClr val="FFFFFF"/>
+                          </a:solidFill>
+                          <a:latin typeface="Calibri" pitchFamily="34" charset="0"/>
+                          <a:ea typeface="Calibri" pitchFamily="34" charset="-122"/>
+                          <a:cs typeface="Calibri" pitchFamily="34" charset="-120"/>
+                        </a:rPr>
+                        <a:t>R²</a:t>
+                      </a:r>
+                      <a:endParaRPr lang="en-US" sz="1800" dirty="0">
+                        <a:latin typeface="Calibri" charset="0"/>
+                        <a:ea typeface="Calibri" charset="0"/>
+                        <a:cs typeface="Calibri" charset="0"/>
+                      </a:endParaRPr>
+                    </a:p>
+                  </a:txBody>
+                  <a:tcPr marL="45720" marR="45720" marT="45720" marB="45720" anchor="ctr">
+                    <a:lnL w="9525" cap="flat" cmpd="sng" algn="ctr">
+                      <a:solidFill>
+                        <a:srgbClr val="D9D4D0"/>
+                      </a:solidFill>
+                      <a:prstDash val="solid"/>
+                      <a:round/>
+                      <a:headEnd type="none" w="med" len="med"/>
+                      <a:tailEnd type="none" w="med" len="med"/>
+                    </a:lnL>
+                    <a:lnR w="9525" cap="flat" cmpd="sng" algn="ctr">
+                      <a:solidFill>
+                        <a:srgbClr val="D9D4D0"/>
+                      </a:solidFill>
+                      <a:prstDash val="solid"/>
+                      <a:round/>
+                      <a:headEnd type="none" w="med" len="med"/>
+                      <a:tailEnd type="none" w="med" len="med"/>
+                    </a:lnR>
+                    <a:lnT w="9525" cap="flat" cmpd="sng" algn="ctr">
+                      <a:solidFill>
+                        <a:srgbClr val="D9D4D0"/>
+                      </a:solidFill>
+                      <a:prstDash val="solid"/>
+                      <a:round/>
+                      <a:headEnd type="none" w="med" len="med"/>
+                      <a:tailEnd type="none" w="med" len="med"/>
+                    </a:lnT>
+                    <a:lnB w="9525" cap="flat" cmpd="sng" algn="ctr">
+                      <a:solidFill>
+                        <a:srgbClr val="D9D4D0"/>
+                      </a:solidFill>
+                      <a:prstDash val="solid"/>
+                      <a:round/>
+                      <a:headEnd type="none" w="med" len="med"/>
+                      <a:tailEnd type="none" w="med" len="med"/>
+                    </a:lnB>
+                    <a:solidFill>
+                      <a:srgbClr val="9E1B32"/>
+                    </a:solidFill>
+                  </a:tcPr>
+                </a:tc>
+              </a:tr>
+              <a:tr h="384048">
+                <a:tc>
+                  <a:txBody>
+                    <a:bodyPr/>
+                    <a:lstStyle/>
+                    <a:p>
+                      <a:pPr algn="ctr" indent="0" marL="0">
+                        <a:buNone/>
+                      </a:pPr>
+                      <a:r>
+                        <a:rPr lang="en-US" sz="1800" dirty="0">
+                          <a:solidFill>
+                            <a:srgbClr val="0B0B0B"/>
+                          </a:solidFill>
+                          <a:latin typeface="Calibri" pitchFamily="34" charset="0"/>
+                          <a:ea typeface="Calibri" pitchFamily="34" charset="-122"/>
+                          <a:cs typeface="Calibri" pitchFamily="34" charset="-120"/>
+                        </a:rPr>
+                        <a:t>+2</a:t>
+                      </a:r>
+                      <a:endParaRPr lang="en-US" sz="1800" dirty="0">
+                        <a:latin typeface="Calibri" charset="0"/>
+                        <a:ea typeface="Calibri" charset="0"/>
+                        <a:cs typeface="Calibri" charset="0"/>
+                      </a:endParaRPr>
+                    </a:p>
+                  </a:txBody>
+                  <a:tcPr marL="45720" marR="45720" marT="45720" marB="45720" anchor="ctr">
+                    <a:lnL w="9525" cap="flat" cmpd="sng" algn="ctr">
+                      <a:solidFill>
+                        <a:srgbClr val="D9D4D0"/>
+                      </a:solidFill>
+                      <a:prstDash val="solid"/>
+                      <a:round/>
+                      <a:headEnd type="none" w="med" len="med"/>
+                      <a:tailEnd type="none" w="med" len="med"/>
+                    </a:lnL>
+                    <a:lnR w="9525" cap="flat" cmpd="sng" algn="ctr">
+                      <a:solidFill>
+                        <a:srgbClr val="D9D4D0"/>
+                      </a:solidFill>
+                      <a:prstDash val="solid"/>
+                      <a:round/>
+                      <a:headEnd type="none" w="med" len="med"/>
+                      <a:tailEnd type="none" w="med" len="med"/>
+                    </a:lnR>
+                    <a:lnT w="9525" cap="flat" cmpd="sng" algn="ctr">
+                      <a:solidFill>
+                        <a:srgbClr val="D9D4D0"/>
+                      </a:solidFill>
+                      <a:prstDash val="solid"/>
+                      <a:round/>
+                      <a:headEnd type="none" w="med" len="med"/>
+                      <a:tailEnd type="none" w="med" len="med"/>
+                    </a:lnT>
+                    <a:lnB w="9525" cap="flat" cmpd="sng" algn="ctr">
+                      <a:solidFill>
+                        <a:srgbClr val="D9D4D0"/>
+                      </a:solidFill>
+                      <a:prstDash val="solid"/>
+                      <a:round/>
+                      <a:headEnd type="none" w="med" len="med"/>
+                      <a:tailEnd type="none" w="med" len="med"/>
+                    </a:lnB>
+                    <a:solidFill>
+                      <a:srgbClr val="FFFFFF"/>
+                    </a:solidFill>
+                  </a:tcPr>
+                </a:tc>
+                <a:tc>
+                  <a:txBody>
+                    <a:bodyPr/>
+                    <a:lstStyle/>
+                    <a:p>
+                      <a:pPr algn="l" indent="0" marL="0">
+                        <a:buNone/>
+                      </a:pPr>
+                      <a:r>
+                        <a:rPr lang="en-US" sz="1800" dirty="0">
+                          <a:solidFill>
+                            <a:srgbClr val="0B0B0B"/>
+                          </a:solidFill>
+                          <a:latin typeface="Calibri" pitchFamily="34" charset="0"/>
+                          <a:ea typeface="Calibri" pitchFamily="34" charset="-122"/>
+                          <a:cs typeface="Calibri" pitchFamily="34" charset="-120"/>
+                        </a:rPr>
+                        <a:t>white PM</a:t>
+                      </a:r>
+                      <a:endParaRPr lang="en-US" sz="1800" dirty="0">
+                        <a:latin typeface="Calibri" charset="0"/>
+                        <a:ea typeface="Calibri" charset="0"/>
+                        <a:cs typeface="Calibri" charset="0"/>
+                      </a:endParaRPr>
+                    </a:p>
+                  </a:txBody>
+                  <a:tcPr marL="45720" marR="45720" marT="45720" marB="45720" anchor="ctr">
+                    <a:lnL w="9525" cap="flat" cmpd="sng" algn="ctr">
+                      <a:solidFill>
+                        <a:srgbClr val="D9D4D0"/>
+                      </a:solidFill>
+                      <a:prstDash val="solid"/>
+                      <a:round/>
+                      <a:headEnd type="none" w="med" len="med"/>
+                      <a:tailEnd type="none" w="med" len="med"/>
+                    </a:lnL>
+                    <a:lnR w="9525" cap="flat" cmpd="sng" algn="ctr">
+                      <a:solidFill>
+                        <a:srgbClr val="D9D4D0"/>
+                      </a:solidFill>
+                      <a:prstDash val="solid"/>
+                      <a:round/>
+                      <a:headEnd type="none" w="med" len="med"/>
+                      <a:tailEnd type="none" w="med" len="med"/>
+                    </a:lnR>
+                    <a:lnT w="9525" cap="flat" cmpd="sng" algn="ctr">
+                      <a:solidFill>
+                        <a:srgbClr val="D9D4D0"/>
+                      </a:solidFill>
+                      <a:prstDash val="solid"/>
+                      <a:round/>
+                      <a:headEnd type="none" w="med" len="med"/>
+                      <a:tailEnd type="none" w="med" len="med"/>
+                    </a:lnT>
+                    <a:lnB w="9525" cap="flat" cmpd="sng" algn="ctr">
+                      <a:solidFill>
+                        <a:srgbClr val="D9D4D0"/>
+                      </a:solidFill>
+                      <a:prstDash val="solid"/>
+                      <a:round/>
+                      <a:headEnd type="none" w="med" len="med"/>
+                      <a:tailEnd type="none" w="med" len="med"/>
+                    </a:lnB>
+                    <a:solidFill>
+                      <a:srgbClr val="FFFFFF"/>
+                    </a:solidFill>
+                  </a:tcPr>
+                </a:tc>
+                <a:tc>
+                  <a:txBody>
+                    <a:bodyPr/>
+                    <a:lstStyle/>
+                    <a:p>
+                      <a:pPr algn="ctr" indent="0" marL="0">
+                        <a:buNone/>
+                      </a:pPr>
+                      <a:r>
+                        <a:rPr lang="en-US" sz="1800" dirty="0">
+                          <a:solidFill>
+                            <a:srgbClr val="0B0B0B"/>
+                          </a:solidFill>
+                          <a:latin typeface="Calibri" pitchFamily="34" charset="0"/>
+                          <a:ea typeface="Calibri" pitchFamily="34" charset="-122"/>
+                          <a:cs typeface="Calibri" pitchFamily="34" charset="-120"/>
+                        </a:rPr>
+                        <a:t>1.0308</a:t>
+                      </a:r>
+                      <a:endParaRPr lang="en-US" sz="1800" dirty="0">
+                        <a:latin typeface="Calibri" charset="0"/>
+                        <a:ea typeface="Calibri" charset="0"/>
+                        <a:cs typeface="Calibri" charset="0"/>
+                      </a:endParaRPr>
+                    </a:p>
+                  </a:txBody>
+                  <a:tcPr marL="45720" marR="45720" marT="45720" marB="45720" anchor="ctr">
+                    <a:lnL w="9525" cap="flat" cmpd="sng" algn="ctr">
+                      <a:solidFill>
+                        <a:srgbClr val="D9D4D0"/>
+                      </a:solidFill>
+                      <a:prstDash val="solid"/>
+                      <a:round/>
+                      <a:headEnd type="none" w="med" len="med"/>
+                      <a:tailEnd type="none" w="med" len="med"/>
+                    </a:lnL>
+                    <a:lnR w="9525" cap="flat" cmpd="sng" algn="ctr">
+                      <a:solidFill>
+                        <a:srgbClr val="D9D4D0"/>
+                      </a:solidFill>
+                      <a:prstDash val="solid"/>
+                      <a:round/>
+                      <a:headEnd type="none" w="med" len="med"/>
+                      <a:tailEnd type="none" w="med" len="med"/>
+                    </a:lnR>
+                    <a:lnT w="9525" cap="flat" cmpd="sng" algn="ctr">
+                      <a:solidFill>
+                        <a:srgbClr val="D9D4D0"/>
+                      </a:solidFill>
+                      <a:prstDash val="solid"/>
+                      <a:round/>
+                      <a:headEnd type="none" w="med" len="med"/>
+                      <a:tailEnd type="none" w="med" len="med"/>
+                    </a:lnT>
+                    <a:lnB w="9525" cap="flat" cmpd="sng" algn="ctr">
+                      <a:solidFill>
+                        <a:srgbClr val="D9D4D0"/>
+                      </a:solidFill>
+                      <a:prstDash val="solid"/>
+                      <a:round/>
+                      <a:headEnd type="none" w="med" len="med"/>
+                      <a:tailEnd type="none" w="med" len="med"/>
+                    </a:lnB>
+                    <a:solidFill>
+                      <a:srgbClr val="FFFFFF"/>
+                    </a:solidFill>
+                  </a:tcPr>
+                </a:tc>
+                <a:tc>
+                  <a:txBody>
+                    <a:bodyPr/>
+                    <a:lstStyle/>
+                    <a:p>
+                      <a:pPr algn="ctr" indent="0" marL="0">
+                        <a:buNone/>
+                      </a:pPr>
+                      <a:r>
+                        <a:rPr lang="en-US" sz="1800" dirty="0">
+                          <a:solidFill>
+                            <a:srgbClr val="0B0B0B"/>
+                          </a:solidFill>
+                          <a:latin typeface="Calibri" pitchFamily="34" charset="0"/>
+                          <a:ea typeface="Calibri" pitchFamily="34" charset="-122"/>
+                          <a:cs typeface="Calibri" pitchFamily="34" charset="-120"/>
+                        </a:rPr>
+                        <a:t>−0.1197</a:t>
+                      </a:r>
+                      <a:endParaRPr lang="en-US" sz="1800" dirty="0">
+                        <a:latin typeface="Calibri" charset="0"/>
+                        <a:ea typeface="Calibri" charset="0"/>
+                        <a:cs typeface="Calibri" charset="0"/>
+                      </a:endParaRPr>
+                    </a:p>
+                  </a:txBody>
+                  <a:tcPr marL="45720" marR="45720" marT="45720" marB="45720" anchor="ctr">
+                    <a:lnL w="9525" cap="flat" cmpd="sng" algn="ctr">
+                      <a:solidFill>
+                        <a:srgbClr val="D9D4D0"/>
+                      </a:solidFill>
+                      <a:prstDash val="solid"/>
+                      <a:round/>
+                      <a:headEnd type="none" w="med" len="med"/>
+                      <a:tailEnd type="none" w="med" len="med"/>
+                    </a:lnL>
+                    <a:lnR w="9525" cap="flat" cmpd="sng" algn="ctr">
+                      <a:solidFill>
+                        <a:srgbClr val="D9D4D0"/>
+                      </a:solidFill>
+                      <a:prstDash val="solid"/>
+                      <a:round/>
+                      <a:headEnd type="none" w="med" len="med"/>
+                      <a:tailEnd type="none" w="med" len="med"/>
+                    </a:lnR>
+                    <a:lnT w="9525" cap="flat" cmpd="sng" algn="ctr">
+                      <a:solidFill>
+                        <a:srgbClr val="D9D4D0"/>
+                      </a:solidFill>
+                      <a:prstDash val="solid"/>
+                      <a:round/>
+                      <a:headEnd type="none" w="med" len="med"/>
+                      <a:tailEnd type="none" w="med" len="med"/>
+                    </a:lnT>
+                    <a:lnB w="9525" cap="flat" cmpd="sng" algn="ctr">
+                      <a:solidFill>
+                        <a:srgbClr val="D9D4D0"/>
+                      </a:solidFill>
+                      <a:prstDash val="solid"/>
+                      <a:round/>
+                      <a:headEnd type="none" w="med" len="med"/>
+                      <a:tailEnd type="none" w="med" len="med"/>
+                    </a:lnB>
+                    <a:solidFill>
+                      <a:srgbClr val="FFFFFF"/>
+                    </a:solidFill>
+                  </a:tcPr>
+                </a:tc>
+                <a:tc>
+                  <a:txBody>
+                    <a:bodyPr/>
+                    <a:lstStyle/>
+                    <a:p>
+                      <a:pPr algn="ctr" indent="0" marL="0">
+                        <a:buNone/>
+                      </a:pPr>
+                      <a:r>
+                        <a:rPr lang="en-US" sz="1800" dirty="0">
+                          <a:solidFill>
+                            <a:srgbClr val="0B0B0B"/>
+                          </a:solidFill>
+                          <a:latin typeface="Calibri" pitchFamily="34" charset="0"/>
+                          <a:ea typeface="Calibri" pitchFamily="34" charset="-122"/>
+                          <a:cs typeface="Calibri" pitchFamily="34" charset="-120"/>
+                        </a:rPr>
+                        <a:t>1.6869</a:t>
+                      </a:r>
+                      <a:endParaRPr lang="en-US" sz="1800" dirty="0">
+                        <a:latin typeface="Calibri" charset="0"/>
+                        <a:ea typeface="Calibri" charset="0"/>
+                        <a:cs typeface="Calibri" charset="0"/>
+                      </a:endParaRPr>
+                    </a:p>
+                  </a:txBody>
+                  <a:tcPr marL="45720" marR="45720" marT="45720" marB="45720" anchor="ctr">
+                    <a:lnL w="9525" cap="flat" cmpd="sng" algn="ctr">
+                      <a:solidFill>
+                        <a:srgbClr val="D9D4D0"/>
+                      </a:solidFill>
+                      <a:prstDash val="solid"/>
+                      <a:round/>
+                      <a:headEnd type="none" w="med" len="med"/>
+                      <a:tailEnd type="none" w="med" len="med"/>
+                    </a:lnL>
+                    <a:lnR w="9525" cap="flat" cmpd="sng" algn="ctr">
+                      <a:solidFill>
+                        <a:srgbClr val="D9D4D0"/>
+                      </a:solidFill>
+                      <a:prstDash val="solid"/>
+                      <a:round/>
+                      <a:headEnd type="none" w="med" len="med"/>
+                      <a:tailEnd type="none" w="med" len="med"/>
+                    </a:lnR>
+                    <a:lnT w="9525" cap="flat" cmpd="sng" algn="ctr">
+                      <a:solidFill>
+                        <a:srgbClr val="D9D4D0"/>
+                      </a:solidFill>
+                      <a:prstDash val="solid"/>
+                      <a:round/>
+                      <a:headEnd type="none" w="med" len="med"/>
+                      <a:tailEnd type="none" w="med" len="med"/>
+                    </a:lnT>
+                    <a:lnB w="9525" cap="flat" cmpd="sng" algn="ctr">
+                      <a:solidFill>
+                        <a:srgbClr val="D9D4D0"/>
+                      </a:solidFill>
+                      <a:prstDash val="solid"/>
+                      <a:round/>
+                      <a:headEnd type="none" w="med" len="med"/>
+                      <a:tailEnd type="none" w="med" len="med"/>
+                    </a:lnB>
+                    <a:solidFill>
+                      <a:srgbClr val="FFFFFF"/>
+                    </a:solidFill>
+                  </a:tcPr>
+                </a:tc>
+                <a:tc>
+                  <a:txBody>
+                    <a:bodyPr/>
+                    <a:lstStyle/>
+                    <a:p>
+                      <a:pPr algn="ctr" indent="0" marL="0">
+                        <a:buNone/>
+                      </a:pPr>
+                      <a:r>
+                        <a:rPr lang="en-US" sz="1800" dirty="0">
+                          <a:solidFill>
+                            <a:srgbClr val="0B0B0B"/>
+                          </a:solidFill>
+                          <a:latin typeface="Calibri" pitchFamily="34" charset="0"/>
+                          <a:ea typeface="Calibri" pitchFamily="34" charset="-122"/>
+                          <a:cs typeface="Calibri" pitchFamily="34" charset="-120"/>
+                        </a:rPr>
+                        <a:t>4.3166</a:t>
+                      </a:r>
+                      <a:endParaRPr lang="en-US" sz="1800" dirty="0">
+                        <a:latin typeface="Calibri" charset="0"/>
+                        <a:ea typeface="Calibri" charset="0"/>
+                        <a:cs typeface="Calibri" charset="0"/>
+                      </a:endParaRPr>
+                    </a:p>
+                  </a:txBody>
+                  <a:tcPr marL="45720" marR="45720" marT="45720" marB="45720" anchor="ctr">
+                    <a:lnL w="9525" cap="flat" cmpd="sng" algn="ctr">
+                      <a:solidFill>
+                        <a:srgbClr val="D9D4D0"/>
+                      </a:solidFill>
+                      <a:prstDash val="solid"/>
+                      <a:round/>
+                      <a:headEnd type="none" w="med" len="med"/>
+                      <a:tailEnd type="none" w="med" len="med"/>
+                    </a:lnL>
+                    <a:lnR w="9525" cap="flat" cmpd="sng" algn="ctr">
+                      <a:solidFill>
+                        <a:srgbClr val="D9D4D0"/>
+                      </a:solidFill>
+                      <a:prstDash val="solid"/>
+                      <a:round/>
+                      <a:headEnd type="none" w="med" len="med"/>
+                      <a:tailEnd type="none" w="med" len="med"/>
+                    </a:lnR>
+                    <a:lnT w="9525" cap="flat" cmpd="sng" algn="ctr">
+                      <a:solidFill>
+                        <a:srgbClr val="D9D4D0"/>
+                      </a:solidFill>
+                      <a:prstDash val="solid"/>
+                      <a:round/>
+                      <a:headEnd type="none" w="med" len="med"/>
+                      <a:tailEnd type="none" w="med" len="med"/>
+                    </a:lnT>
+                    <a:lnB w="9525" cap="flat" cmpd="sng" algn="ctr">
+                      <a:solidFill>
+                        <a:srgbClr val="D9D4D0"/>
+                      </a:solidFill>
+                      <a:prstDash val="solid"/>
+                      <a:round/>
+                      <a:headEnd type="none" w="med" len="med"/>
+                      <a:tailEnd type="none" w="med" len="med"/>
+                    </a:lnB>
+                    <a:solidFill>
+                      <a:srgbClr val="FFFFFF"/>
+                    </a:solidFill>
+                  </a:tcPr>
+                </a:tc>
+                <a:tc>
+                  <a:txBody>
+                    <a:bodyPr/>
+                    <a:lstStyle/>
+                    <a:p>
+                      <a:pPr algn="ctr" indent="0" marL="0">
+                        <a:buNone/>
+                      </a:pPr>
+                      <a:r>
+                        <a:rPr lang="en-US" sz="1800" dirty="0">
+                          <a:solidFill>
+                            <a:srgbClr val="0B0B0B"/>
+                          </a:solidFill>
+                          <a:latin typeface="Calibri" pitchFamily="34" charset="0"/>
+                          <a:ea typeface="Calibri" pitchFamily="34" charset="-122"/>
+                          <a:cs typeface="Calibri" pitchFamily="34" charset="-120"/>
+                        </a:rPr>
+                        <a:t>0.9982</a:t>
+                      </a:r>
+                      <a:endParaRPr lang="en-US" sz="1800" dirty="0">
+                        <a:latin typeface="Calibri" charset="0"/>
+                        <a:ea typeface="Calibri" charset="0"/>
+                        <a:cs typeface="Calibri" charset="0"/>
+                      </a:endParaRPr>
+                    </a:p>
+                  </a:txBody>
+                  <a:tcPr marL="45720" marR="45720" marT="45720" marB="45720" anchor="ctr">
+                    <a:lnL w="9525" cap="flat" cmpd="sng" algn="ctr">
+                      <a:solidFill>
+                        <a:srgbClr val="D9D4D0"/>
+                      </a:solidFill>
+                      <a:prstDash val="solid"/>
+                      <a:round/>
+                      <a:headEnd type="none" w="med" len="med"/>
+                      <a:tailEnd type="none" w="med" len="med"/>
+                    </a:lnL>
+                    <a:lnR w="9525" cap="flat" cmpd="sng" algn="ctr">
+                      <a:solidFill>
+                        <a:srgbClr val="D9D4D0"/>
+                      </a:solidFill>
+                      <a:prstDash val="solid"/>
+                      <a:round/>
+                      <a:headEnd type="none" w="med" len="med"/>
+                      <a:tailEnd type="none" w="med" len="med"/>
+                    </a:lnR>
+                    <a:lnT w="9525" cap="flat" cmpd="sng" algn="ctr">
+                      <a:solidFill>
+                        <a:srgbClr val="D9D4D0"/>
+                      </a:solidFill>
+                      <a:prstDash val="solid"/>
+                      <a:round/>
+                      <a:headEnd type="none" w="med" len="med"/>
+                      <a:tailEnd type="none" w="med" len="med"/>
+                    </a:lnT>
+                    <a:lnB w="9525" cap="flat" cmpd="sng" algn="ctr">
+                      <a:solidFill>
+                        <a:srgbClr val="D9D4D0"/>
+                      </a:solidFill>
+                      <a:prstDash val="solid"/>
+                      <a:round/>
+                      <a:headEnd type="none" w="med" len="med"/>
+                      <a:tailEnd type="none" w="med" len="med"/>
+                    </a:lnB>
+                    <a:solidFill>
+                      <a:srgbClr val="FFFFFF"/>
+                    </a:solidFill>
+                  </a:tcPr>
+                </a:tc>
+              </a:tr>
+              <a:tr h="384048">
+                <a:tc>
+                  <a:txBody>
+                    <a:bodyPr/>
+                    <a:lstStyle/>
+                    <a:p>
+                      <a:pPr algn="ctr" indent="0" marL="0">
+                        <a:buNone/>
+                      </a:pPr>
+                      <a:r>
+                        <a:rPr lang="en-US" sz="1800" dirty="0">
+                          <a:solidFill>
+                            <a:srgbClr val="0B0B0B"/>
+                          </a:solidFill>
+                          <a:latin typeface="Calibri" pitchFamily="34" charset="0"/>
+                          <a:ea typeface="Calibri" pitchFamily="34" charset="-122"/>
+                          <a:cs typeface="Calibri" pitchFamily="34" charset="-120"/>
+                        </a:rPr>
+                        <a:t>+1</a:t>
+                      </a:r>
+                      <a:endParaRPr lang="en-US" sz="1800" dirty="0">
+                        <a:latin typeface="Calibri" charset="0"/>
+                        <a:ea typeface="Calibri" charset="0"/>
+                        <a:cs typeface="Calibri" charset="0"/>
+                      </a:endParaRPr>
+                    </a:p>
+                  </a:txBody>
+                  <a:tcPr marL="45720" marR="45720" marT="45720" marB="45720" anchor="ctr">
+                    <a:lnL w="9525" cap="flat" cmpd="sng" algn="ctr">
+                      <a:solidFill>
+                        <a:srgbClr val="D9D4D0"/>
+                      </a:solidFill>
+                      <a:prstDash val="solid"/>
+                      <a:round/>
+                      <a:headEnd type="none" w="med" len="med"/>
+                      <a:tailEnd type="none" w="med" len="med"/>
+                    </a:lnL>
+                    <a:lnR w="9525" cap="flat" cmpd="sng" algn="ctr">
+                      <a:solidFill>
+                        <a:srgbClr val="D9D4D0"/>
+                      </a:solidFill>
+                      <a:prstDash val="solid"/>
+                      <a:round/>
+                      <a:headEnd type="none" w="med" len="med"/>
+                      <a:tailEnd type="none" w="med" len="med"/>
+                    </a:lnR>
+                    <a:lnT w="9525" cap="flat" cmpd="sng" algn="ctr">
+                      <a:solidFill>
+                        <a:srgbClr val="D9D4D0"/>
+                      </a:solidFill>
+                      <a:prstDash val="solid"/>
+                      <a:round/>
+                      <a:headEnd type="none" w="med" len="med"/>
+                      <a:tailEnd type="none" w="med" len="med"/>
+                    </a:lnT>
+                    <a:lnB w="9525" cap="flat" cmpd="sng" algn="ctr">
+                      <a:solidFill>
+                        <a:srgbClr val="D9D4D0"/>
+                      </a:solidFill>
+                      <a:prstDash val="solid"/>
+                      <a:round/>
+                      <a:headEnd type="none" w="med" len="med"/>
+                      <a:tailEnd type="none" w="med" len="med"/>
+                    </a:lnB>
+                    <a:solidFill>
+                      <a:srgbClr val="F7F2F3"/>
+                    </a:solidFill>
+                  </a:tcPr>
+                </a:tc>
+                <a:tc>
+                  <a:txBody>
+                    <a:bodyPr/>
+                    <a:lstStyle/>
+                    <a:p>
+                      <a:pPr algn="l" indent="0" marL="0">
+                        <a:buNone/>
+                      </a:pPr>
+                      <a:r>
+                        <a:rPr lang="en-US" sz="1800" dirty="0">
+                          <a:solidFill>
+                            <a:srgbClr val="0B0B0B"/>
+                          </a:solidFill>
+                          <a:latin typeface="Calibri" pitchFamily="34" charset="0"/>
+                          <a:ea typeface="Calibri" pitchFamily="34" charset="-122"/>
+                          <a:cs typeface="Calibri" pitchFamily="34" charset="-120"/>
+                        </a:rPr>
+                        <a:t>flicker PM</a:t>
+                      </a:r>
+                      <a:endParaRPr lang="en-US" sz="1800" dirty="0">
+                        <a:latin typeface="Calibri" charset="0"/>
+                        <a:ea typeface="Calibri" charset="0"/>
+                        <a:cs typeface="Calibri" charset="0"/>
+                      </a:endParaRPr>
+                    </a:p>
+                  </a:txBody>
+                  <a:tcPr marL="45720" marR="45720" marT="45720" marB="45720" anchor="ctr">
+                    <a:lnL w="9525" cap="flat" cmpd="sng" algn="ctr">
+                      <a:solidFill>
+                        <a:srgbClr val="D9D4D0"/>
+                      </a:solidFill>
+                      <a:prstDash val="solid"/>
+                      <a:round/>
+                      <a:headEnd type="none" w="med" len="med"/>
+                      <a:tailEnd type="none" w="med" len="med"/>
+                    </a:lnL>
+                    <a:lnR w="9525" cap="flat" cmpd="sng" algn="ctr">
+                      <a:solidFill>
+                        <a:srgbClr val="D9D4D0"/>
+                      </a:solidFill>
+                      <a:prstDash val="solid"/>
+                      <a:round/>
+                      <a:headEnd type="none" w="med" len="med"/>
+                      <a:tailEnd type="none" w="med" len="med"/>
+                    </a:lnR>
+                    <a:lnT w="9525" cap="flat" cmpd="sng" algn="ctr">
+                      <a:solidFill>
+                        <a:srgbClr val="D9D4D0"/>
+                      </a:solidFill>
+                      <a:prstDash val="solid"/>
+                      <a:round/>
+                      <a:headEnd type="none" w="med" len="med"/>
+                      <a:tailEnd type="none" w="med" len="med"/>
+                    </a:lnT>
+                    <a:lnB w="9525" cap="flat" cmpd="sng" algn="ctr">
+                      <a:solidFill>
+                        <a:srgbClr val="D9D4D0"/>
+                      </a:solidFill>
+                      <a:prstDash val="solid"/>
+                      <a:round/>
+                      <a:headEnd type="none" w="med" len="med"/>
+                      <a:tailEnd type="none" w="med" len="med"/>
+                    </a:lnB>
+                    <a:solidFill>
+                      <a:srgbClr val="F7F2F3"/>
+                    </a:solidFill>
+                  </a:tcPr>
+                </a:tc>
+                <a:tc>
+                  <a:txBody>
+                    <a:bodyPr/>
+                    <a:lstStyle/>
+                    <a:p>
+                      <a:pPr algn="ctr" indent="0" marL="0">
+                        <a:buNone/>
+                      </a:pPr>
+                      <a:r>
+                        <a:rPr lang="en-US" sz="1800" dirty="0">
+                          <a:solidFill>
+                            <a:srgbClr val="0B0B0B"/>
+                          </a:solidFill>
+                          <a:latin typeface="Calibri" pitchFamily="34" charset="0"/>
+                          <a:ea typeface="Calibri" pitchFamily="34" charset="-122"/>
+                          <a:cs typeface="Calibri" pitchFamily="34" charset="-120"/>
+                        </a:rPr>
+                        <a:t>0.9883</a:t>
+                      </a:r>
+                      <a:endParaRPr lang="en-US" sz="1800" dirty="0">
+                        <a:latin typeface="Calibri" charset="0"/>
+                        <a:ea typeface="Calibri" charset="0"/>
+                        <a:cs typeface="Calibri" charset="0"/>
+                      </a:endParaRPr>
+                    </a:p>
+                  </a:txBody>
+                  <a:tcPr marL="45720" marR="45720" marT="45720" marB="45720" anchor="ctr">
+                    <a:lnL w="9525" cap="flat" cmpd="sng" algn="ctr">
+                      <a:solidFill>
+                        <a:srgbClr val="D9D4D0"/>
+                      </a:solidFill>
+                      <a:prstDash val="solid"/>
+                      <a:round/>
+                      <a:headEnd type="none" w="med" len="med"/>
+                      <a:tailEnd type="none" w="med" len="med"/>
+                    </a:lnL>
+                    <a:lnR w="9525" cap="flat" cmpd="sng" algn="ctr">
+                      <a:solidFill>
+                        <a:srgbClr val="D9D4D0"/>
+                      </a:solidFill>
+                      <a:prstDash val="solid"/>
+                      <a:round/>
+                      <a:headEnd type="none" w="med" len="med"/>
+                      <a:tailEnd type="none" w="med" len="med"/>
+                    </a:lnR>
+                    <a:lnT w="9525" cap="flat" cmpd="sng" algn="ctr">
+                      <a:solidFill>
+                        <a:srgbClr val="D9D4D0"/>
+                      </a:solidFill>
+                      <a:prstDash val="solid"/>
+                      <a:round/>
+                      <a:headEnd type="none" w="med" len="med"/>
+                      <a:tailEnd type="none" w="med" len="med"/>
+                    </a:lnT>
+                    <a:lnB w="9525" cap="flat" cmpd="sng" algn="ctr">
+                      <a:solidFill>
+                        <a:srgbClr val="D9D4D0"/>
+                      </a:solidFill>
+                      <a:prstDash val="solid"/>
+                      <a:round/>
+                      <a:headEnd type="none" w="med" len="med"/>
+                      <a:tailEnd type="none" w="med" len="med"/>
+                    </a:lnB>
+                    <a:solidFill>
+                      <a:srgbClr val="F7F2F3"/>
+                    </a:solidFill>
+                  </a:tcPr>
+                </a:tc>
+                <a:tc>
+                  <a:txBody>
+                    <a:bodyPr/>
+                    <a:lstStyle/>
+                    <a:p>
+                      <a:pPr algn="ctr" indent="0" marL="0">
+                        <a:buNone/>
+                      </a:pPr>
+                      <a:r>
+                        <a:rPr lang="en-US" sz="1800" dirty="0">
+                          <a:solidFill>
+                            <a:srgbClr val="0B0B0B"/>
+                          </a:solidFill>
+                          <a:latin typeface="Calibri" pitchFamily="34" charset="0"/>
+                          <a:ea typeface="Calibri" pitchFamily="34" charset="-122"/>
+                          <a:cs typeface="Calibri" pitchFamily="34" charset="-120"/>
+                        </a:rPr>
+                        <a:t>−0.0686</a:t>
+                      </a:r>
+                      <a:endParaRPr lang="en-US" sz="1800" dirty="0">
+                        <a:latin typeface="Calibri" charset="0"/>
+                        <a:ea typeface="Calibri" charset="0"/>
+                        <a:cs typeface="Calibri" charset="0"/>
+                      </a:endParaRPr>
+                    </a:p>
+                  </a:txBody>
+                  <a:tcPr marL="45720" marR="45720" marT="45720" marB="45720" anchor="ctr">
+                    <a:lnL w="9525" cap="flat" cmpd="sng" algn="ctr">
+                      <a:solidFill>
+                        <a:srgbClr val="D9D4D0"/>
+                      </a:solidFill>
+                      <a:prstDash val="solid"/>
+                      <a:round/>
+                      <a:headEnd type="none" w="med" len="med"/>
+                      <a:tailEnd type="none" w="med" len="med"/>
+                    </a:lnL>
+                    <a:lnR w="9525" cap="flat" cmpd="sng" algn="ctr">
+                      <a:solidFill>
+                        <a:srgbClr val="D9D4D0"/>
+                      </a:solidFill>
+                      <a:prstDash val="solid"/>
+                      <a:round/>
+                      <a:headEnd type="none" w="med" len="med"/>
+                      <a:tailEnd type="none" w="med" len="med"/>
+                    </a:lnR>
+                    <a:lnT w="9525" cap="flat" cmpd="sng" algn="ctr">
+                      <a:solidFill>
+                        <a:srgbClr val="D9D4D0"/>
+                      </a:solidFill>
+                      <a:prstDash val="solid"/>
+                      <a:round/>
+                      <a:headEnd type="none" w="med" len="med"/>
+                      <a:tailEnd type="none" w="med" len="med"/>
+                    </a:lnT>
+                    <a:lnB w="9525" cap="flat" cmpd="sng" algn="ctr">
+                      <a:solidFill>
+                        <a:srgbClr val="D9D4D0"/>
+                      </a:solidFill>
+                      <a:prstDash val="solid"/>
+                      <a:round/>
+                      <a:headEnd type="none" w="med" len="med"/>
+                      <a:tailEnd type="none" w="med" len="med"/>
+                    </a:lnB>
+                    <a:solidFill>
+                      <a:srgbClr val="F7F2F3"/>
+                    </a:solidFill>
+                  </a:tcPr>
+                </a:tc>
+                <a:tc>
+                  <a:txBody>
+                    <a:bodyPr/>
+                    <a:lstStyle/>
+                    <a:p>
+                      <a:pPr algn="ctr" indent="0" marL="0">
+                        <a:buNone/>
+                      </a:pPr>
+                      <a:r>
+                        <a:rPr lang="en-US" sz="1800" dirty="0">
+                          <a:solidFill>
+                            <a:srgbClr val="0B0B0B"/>
+                          </a:solidFill>
+                          <a:latin typeface="Calibri" pitchFamily="34" charset="0"/>
+                          <a:ea typeface="Calibri" pitchFamily="34" charset="-122"/>
+                          <a:cs typeface="Calibri" pitchFamily="34" charset="-120"/>
+                        </a:rPr>
+                        <a:t>1.1671</a:t>
+                      </a:r>
+                      <a:endParaRPr lang="en-US" sz="1800" dirty="0">
+                        <a:latin typeface="Calibri" charset="0"/>
+                        <a:ea typeface="Calibri" charset="0"/>
+                        <a:cs typeface="Calibri" charset="0"/>
+                      </a:endParaRPr>
+                    </a:p>
+                  </a:txBody>
+                  <a:tcPr marL="45720" marR="45720" marT="45720" marB="45720" anchor="ctr">
+                    <a:lnL w="9525" cap="flat" cmpd="sng" algn="ctr">
+                      <a:solidFill>
+                        <a:srgbClr val="D9D4D0"/>
+                      </a:solidFill>
+                      <a:prstDash val="solid"/>
+                      <a:round/>
+                      <a:headEnd type="none" w="med" len="med"/>
+                      <a:tailEnd type="none" w="med" len="med"/>
+                    </a:lnL>
+                    <a:lnR w="9525" cap="flat" cmpd="sng" algn="ctr">
+                      <a:solidFill>
+                        <a:srgbClr val="D9D4D0"/>
+                      </a:solidFill>
+                      <a:prstDash val="solid"/>
+                      <a:round/>
+                      <a:headEnd type="none" w="med" len="med"/>
+                      <a:tailEnd type="none" w="med" len="med"/>
+                    </a:lnR>
+                    <a:lnT w="9525" cap="flat" cmpd="sng" algn="ctr">
+                      <a:solidFill>
+                        <a:srgbClr val="D9D4D0"/>
+                      </a:solidFill>
+                      <a:prstDash val="solid"/>
+                      <a:round/>
+                      <a:headEnd type="none" w="med" len="med"/>
+                      <a:tailEnd type="none" w="med" len="med"/>
+                    </a:lnT>
+                    <a:lnB w="9525" cap="flat" cmpd="sng" algn="ctr">
+                      <a:solidFill>
+                        <a:srgbClr val="D9D4D0"/>
+                      </a:solidFill>
+                      <a:prstDash val="solid"/>
+                      <a:round/>
+                      <a:headEnd type="none" w="med" len="med"/>
+                      <a:tailEnd type="none" w="med" len="med"/>
+                    </a:lnB>
+                    <a:solidFill>
+                      <a:srgbClr val="F7F2F3"/>
+                    </a:solidFill>
+                  </a:tcPr>
+                </a:tc>
+                <a:tc>
+                  <a:txBody>
+                    <a:bodyPr/>
+                    <a:lstStyle/>
+                    <a:p>
+                      <a:pPr algn="ctr" indent="0" marL="0">
+                        <a:buNone/>
+                      </a:pPr>
+                      <a:r>
+                        <a:rPr lang="en-US" sz="1800" dirty="0">
+                          <a:solidFill>
+                            <a:srgbClr val="0B0B0B"/>
+                          </a:solidFill>
+                          <a:latin typeface="Calibri" pitchFamily="34" charset="0"/>
+                          <a:ea typeface="Calibri" pitchFamily="34" charset="-122"/>
+                          <a:cs typeface="Calibri" pitchFamily="34" charset="-120"/>
+                        </a:rPr>
+                        <a:t>3.2107</a:t>
+                      </a:r>
+                      <a:endParaRPr lang="en-US" sz="1800" dirty="0">
+                        <a:latin typeface="Calibri" charset="0"/>
+                        <a:ea typeface="Calibri" charset="0"/>
+                        <a:cs typeface="Calibri" charset="0"/>
+                      </a:endParaRPr>
+                    </a:p>
+                  </a:txBody>
+                  <a:tcPr marL="45720" marR="45720" marT="45720" marB="45720" anchor="ctr">
+                    <a:lnL w="9525" cap="flat" cmpd="sng" algn="ctr">
+                      <a:solidFill>
+                        <a:srgbClr val="D9D4D0"/>
+                      </a:solidFill>
+                      <a:prstDash val="solid"/>
+                      <a:round/>
+                      <a:headEnd type="none" w="med" len="med"/>
+                      <a:tailEnd type="none" w="med" len="med"/>
+                    </a:lnL>
+                    <a:lnR w="9525" cap="flat" cmpd="sng" algn="ctr">
+                      <a:solidFill>
+                        <a:srgbClr val="D9D4D0"/>
+                      </a:solidFill>
+                      <a:prstDash val="solid"/>
+                      <a:round/>
+                      <a:headEnd type="none" w="med" len="med"/>
+                      <a:tailEnd type="none" w="med" len="med"/>
+                    </a:lnR>
+                    <a:lnT w="9525" cap="flat" cmpd="sng" algn="ctr">
+                      <a:solidFill>
+                        <a:srgbClr val="D9D4D0"/>
+                      </a:solidFill>
+                      <a:prstDash val="solid"/>
+                      <a:round/>
+                      <a:headEnd type="none" w="med" len="med"/>
+                      <a:tailEnd type="none" w="med" len="med"/>
+                    </a:lnT>
+                    <a:lnB w="9525" cap="flat" cmpd="sng" algn="ctr">
+                      <a:solidFill>
+                        <a:srgbClr val="D9D4D0"/>
+                      </a:solidFill>
+                      <a:prstDash val="solid"/>
+                      <a:round/>
+                      <a:headEnd type="none" w="med" len="med"/>
+                      <a:tailEnd type="none" w="med" len="med"/>
+                    </a:lnB>
+                    <a:solidFill>
+                      <a:srgbClr val="F7F2F3"/>
+                    </a:solidFill>
+                  </a:tcPr>
+                </a:tc>
+                <a:tc>
+                  <a:txBody>
+                    <a:bodyPr/>
+                    <a:lstStyle/>
+                    <a:p>
+                      <a:pPr algn="ctr" indent="0" marL="0">
+                        <a:buNone/>
+                      </a:pPr>
+                      <a:r>
+                        <a:rPr lang="en-US" sz="1800" dirty="0">
+                          <a:solidFill>
+                            <a:srgbClr val="0B0B0B"/>
+                          </a:solidFill>
+                          <a:latin typeface="Calibri" pitchFamily="34" charset="0"/>
+                          <a:ea typeface="Calibri" pitchFamily="34" charset="-122"/>
+                          <a:cs typeface="Calibri" pitchFamily="34" charset="-120"/>
+                        </a:rPr>
+                        <a:t>0.9988</a:t>
+                      </a:r>
+                      <a:endParaRPr lang="en-US" sz="1800" dirty="0">
+                        <a:latin typeface="Calibri" charset="0"/>
+                        <a:ea typeface="Calibri" charset="0"/>
+                        <a:cs typeface="Calibri" charset="0"/>
+                      </a:endParaRPr>
+                    </a:p>
+                  </a:txBody>
+                  <a:tcPr marL="45720" marR="45720" marT="45720" marB="45720" anchor="ctr">
+                    <a:lnL w="9525" cap="flat" cmpd="sng" algn="ctr">
+                      <a:solidFill>
+                        <a:srgbClr val="D9D4D0"/>
+                      </a:solidFill>
+                      <a:prstDash val="solid"/>
+                      <a:round/>
+                      <a:headEnd type="none" w="med" len="med"/>
+                      <a:tailEnd type="none" w="med" len="med"/>
+                    </a:lnL>
+                    <a:lnR w="9525" cap="flat" cmpd="sng" algn="ctr">
+                      <a:solidFill>
+                        <a:srgbClr val="D9D4D0"/>
+                      </a:solidFill>
+                      <a:prstDash val="solid"/>
+                      <a:round/>
+                      <a:headEnd type="none" w="med" len="med"/>
+                      <a:tailEnd type="none" w="med" len="med"/>
+                    </a:lnR>
+                    <a:lnT w="9525" cap="flat" cmpd="sng" algn="ctr">
+                      <a:solidFill>
+                        <a:srgbClr val="D9D4D0"/>
+                      </a:solidFill>
+                      <a:prstDash val="solid"/>
+                      <a:round/>
+                      <a:headEnd type="none" w="med" len="med"/>
+                      <a:tailEnd type="none" w="med" len="med"/>
+                    </a:lnT>
+                    <a:lnB w="9525" cap="flat" cmpd="sng" algn="ctr">
+                      <a:solidFill>
+                        <a:srgbClr val="D9D4D0"/>
+                      </a:solidFill>
+                      <a:prstDash val="solid"/>
+                      <a:round/>
+                      <a:headEnd type="none" w="med" len="med"/>
+                      <a:tailEnd type="none" w="med" len="med"/>
+                    </a:lnB>
+                    <a:solidFill>
+                      <a:srgbClr val="F7F2F3"/>
+                    </a:solidFill>
+                  </a:tcPr>
+                </a:tc>
+              </a:tr>
+              <a:tr h="384048">
+                <a:tc>
+                  <a:txBody>
+                    <a:bodyPr/>
+                    <a:lstStyle/>
+                    <a:p>
+                      <a:pPr algn="ctr" indent="0" marL="0">
+                        <a:buNone/>
+                      </a:pPr>
+                      <a:r>
+                        <a:rPr lang="en-US" sz="1800" dirty="0">
+                          <a:solidFill>
+                            <a:srgbClr val="0B0B0B"/>
+                          </a:solidFill>
+                          <a:latin typeface="Calibri" pitchFamily="34" charset="0"/>
+                          <a:ea typeface="Calibri" pitchFamily="34" charset="-122"/>
+                          <a:cs typeface="Calibri" pitchFamily="34" charset="-120"/>
+                        </a:rPr>
+                        <a:t>0</a:t>
+                      </a:r>
+                      <a:endParaRPr lang="en-US" sz="1800" dirty="0">
+                        <a:latin typeface="Calibri" charset="0"/>
+                        <a:ea typeface="Calibri" charset="0"/>
+                        <a:cs typeface="Calibri" charset="0"/>
+                      </a:endParaRPr>
+                    </a:p>
+                  </a:txBody>
+                  <a:tcPr marL="45720" marR="45720" marT="45720" marB="45720" anchor="ctr">
+                    <a:lnL w="9525" cap="flat" cmpd="sng" algn="ctr">
+                      <a:solidFill>
+                        <a:srgbClr val="D9D4D0"/>
+                      </a:solidFill>
+                      <a:prstDash val="solid"/>
+                      <a:round/>
+                      <a:headEnd type="none" w="med" len="med"/>
+                      <a:tailEnd type="none" w="med" len="med"/>
+                    </a:lnL>
+                    <a:lnR w="9525" cap="flat" cmpd="sng" algn="ctr">
+                      <a:solidFill>
+                        <a:srgbClr val="D9D4D0"/>
+                      </a:solidFill>
+                      <a:prstDash val="solid"/>
+                      <a:round/>
+                      <a:headEnd type="none" w="med" len="med"/>
+                      <a:tailEnd type="none" w="med" len="med"/>
+                    </a:lnR>
+                    <a:lnT w="9525" cap="flat" cmpd="sng" algn="ctr">
+                      <a:solidFill>
+                        <a:srgbClr val="D9D4D0"/>
+                      </a:solidFill>
+                      <a:prstDash val="solid"/>
+                      <a:round/>
+                      <a:headEnd type="none" w="med" len="med"/>
+                      <a:tailEnd type="none" w="med" len="med"/>
+                    </a:lnT>
+                    <a:lnB w="9525" cap="flat" cmpd="sng" algn="ctr">
+                      <a:solidFill>
+                        <a:srgbClr val="D9D4D0"/>
+                      </a:solidFill>
+                      <a:prstDash val="solid"/>
+                      <a:round/>
+                      <a:headEnd type="none" w="med" len="med"/>
+                      <a:tailEnd type="none" w="med" len="med"/>
+                    </a:lnB>
+                    <a:solidFill>
+                      <a:srgbClr val="FFFFFF"/>
+                    </a:solidFill>
+                  </a:tcPr>
+                </a:tc>
+                <a:tc>
+                  <a:txBody>
+                    <a:bodyPr/>
+                    <a:lstStyle/>
+                    <a:p>
+                      <a:pPr algn="l" indent="0" marL="0">
+                        <a:buNone/>
+                      </a:pPr>
+                      <a:r>
+                        <a:rPr lang="en-US" sz="1800" dirty="0">
+                          <a:solidFill>
+                            <a:srgbClr val="0B0B0B"/>
+                          </a:solidFill>
+                          <a:latin typeface="Calibri" pitchFamily="34" charset="0"/>
+                          <a:ea typeface="Calibri" pitchFamily="34" charset="-122"/>
+                          <a:cs typeface="Calibri" pitchFamily="34" charset="-120"/>
+                        </a:rPr>
+                        <a:t>white FM</a:t>
+                      </a:r>
+                      <a:endParaRPr lang="en-US" sz="1800" dirty="0">
+                        <a:latin typeface="Calibri" charset="0"/>
+                        <a:ea typeface="Calibri" charset="0"/>
+                        <a:cs typeface="Calibri" charset="0"/>
+                      </a:endParaRPr>
+                    </a:p>
+                  </a:txBody>
+                  <a:tcPr marL="45720" marR="45720" marT="45720" marB="45720" anchor="ctr">
+                    <a:lnL w="9525" cap="flat" cmpd="sng" algn="ctr">
+                      <a:solidFill>
+                        <a:srgbClr val="D9D4D0"/>
+                      </a:solidFill>
+                      <a:prstDash val="solid"/>
+                      <a:round/>
+                      <a:headEnd type="none" w="med" len="med"/>
+                      <a:tailEnd type="none" w="med" len="med"/>
+                    </a:lnL>
+                    <a:lnR w="9525" cap="flat" cmpd="sng" algn="ctr">
+                      <a:solidFill>
+                        <a:srgbClr val="D9D4D0"/>
+                      </a:solidFill>
+                      <a:prstDash val="solid"/>
+                      <a:round/>
+                      <a:headEnd type="none" w="med" len="med"/>
+                      <a:tailEnd type="none" w="med" len="med"/>
+                    </a:lnR>
+                    <a:lnT w="9525" cap="flat" cmpd="sng" algn="ctr">
+                      <a:solidFill>
+                        <a:srgbClr val="D9D4D0"/>
+                      </a:solidFill>
+                      <a:prstDash val="solid"/>
+                      <a:round/>
+                      <a:headEnd type="none" w="med" len="med"/>
+                      <a:tailEnd type="none" w="med" len="med"/>
+                    </a:lnT>
+                    <a:lnB w="9525" cap="flat" cmpd="sng" algn="ctr">
+                      <a:solidFill>
+                        <a:srgbClr val="D9D4D0"/>
+                      </a:solidFill>
+                      <a:prstDash val="solid"/>
+                      <a:round/>
+                      <a:headEnd type="none" w="med" len="med"/>
+                      <a:tailEnd type="none" w="med" len="med"/>
+                    </a:lnB>
+                    <a:solidFill>
+                      <a:srgbClr val="FFFFFF"/>
+                    </a:solidFill>
+                  </a:tcPr>
+                </a:tc>
+                <a:tc>
+                  <a:txBody>
+                    <a:bodyPr/>
+                    <a:lstStyle/>
+                    <a:p>
+                      <a:pPr algn="ctr" indent="0" marL="0">
+                        <a:buNone/>
+                      </a:pPr>
+                      <a:r>
+                        <a:rPr lang="en-US" sz="1800" dirty="0">
+                          <a:solidFill>
+                            <a:srgbClr val="0B0B0B"/>
+                          </a:solidFill>
+                          <a:latin typeface="Calibri" pitchFamily="34" charset="0"/>
+                          <a:ea typeface="Calibri" pitchFamily="34" charset="-122"/>
+                          <a:cs typeface="Calibri" pitchFamily="34" charset="-120"/>
+                        </a:rPr>
+                        <a:t>1.0545</a:t>
+                      </a:r>
+                      <a:endParaRPr lang="en-US" sz="1800" dirty="0">
+                        <a:latin typeface="Calibri" charset="0"/>
+                        <a:ea typeface="Calibri" charset="0"/>
+                        <a:cs typeface="Calibri" charset="0"/>
+                      </a:endParaRPr>
+                    </a:p>
+                  </a:txBody>
+                  <a:tcPr marL="45720" marR="45720" marT="45720" marB="45720" anchor="ctr">
+                    <a:lnL w="9525" cap="flat" cmpd="sng" algn="ctr">
+                      <a:solidFill>
+                        <a:srgbClr val="D9D4D0"/>
+                      </a:solidFill>
+                      <a:prstDash val="solid"/>
+                      <a:round/>
+                      <a:headEnd type="none" w="med" len="med"/>
+                      <a:tailEnd type="none" w="med" len="med"/>
+                    </a:lnL>
+                    <a:lnR w="9525" cap="flat" cmpd="sng" algn="ctr">
+                      <a:solidFill>
+                        <a:srgbClr val="D9D4D0"/>
+                      </a:solidFill>
+                      <a:prstDash val="solid"/>
+                      <a:round/>
+                      <a:headEnd type="none" w="med" len="med"/>
+                      <a:tailEnd type="none" w="med" len="med"/>
+                    </a:lnR>
+                    <a:lnT w="9525" cap="flat" cmpd="sng" algn="ctr">
+                      <a:solidFill>
+                        <a:srgbClr val="D9D4D0"/>
+                      </a:solidFill>
+                      <a:prstDash val="solid"/>
+                      <a:round/>
+                      <a:headEnd type="none" w="med" len="med"/>
+                      <a:tailEnd type="none" w="med" len="med"/>
+                    </a:lnT>
+                    <a:lnB w="9525" cap="flat" cmpd="sng" algn="ctr">
+                      <a:solidFill>
+                        <a:srgbClr val="D9D4D0"/>
+                      </a:solidFill>
+                      <a:prstDash val="solid"/>
+                      <a:round/>
+                      <a:headEnd type="none" w="med" len="med"/>
+                      <a:tailEnd type="none" w="med" len="med"/>
+                    </a:lnB>
+                    <a:solidFill>
+                      <a:srgbClr val="FFFFFF"/>
+                    </a:solidFill>
+                  </a:tcPr>
+                </a:tc>
+                <a:tc>
+                  <a:txBody>
+                    <a:bodyPr/>
+                    <a:lstStyle/>
+                    <a:p>
+                      <a:pPr algn="ctr" indent="0" marL="0">
+                        <a:buNone/>
+                      </a:pPr>
+                      <a:r>
+                        <a:rPr lang="en-US" sz="1800" dirty="0">
+                          <a:solidFill>
+                            <a:srgbClr val="0B0B0B"/>
+                          </a:solidFill>
+                          <a:latin typeface="Calibri" pitchFamily="34" charset="0"/>
+                          <a:ea typeface="Calibri" pitchFamily="34" charset="-122"/>
+                          <a:cs typeface="Calibri" pitchFamily="34" charset="-120"/>
+                        </a:rPr>
+                        <a:t>−0.1706</a:t>
+                      </a:r>
+                      <a:endParaRPr lang="en-US" sz="1800" dirty="0">
+                        <a:latin typeface="Calibri" charset="0"/>
+                        <a:ea typeface="Calibri" charset="0"/>
+                        <a:cs typeface="Calibri" charset="0"/>
+                      </a:endParaRPr>
+                    </a:p>
+                  </a:txBody>
+                  <a:tcPr marL="45720" marR="45720" marT="45720" marB="45720" anchor="ctr">
+                    <a:lnL w="9525" cap="flat" cmpd="sng" algn="ctr">
+                      <a:solidFill>
+                        <a:srgbClr val="D9D4D0"/>
+                      </a:solidFill>
+                      <a:prstDash val="solid"/>
+                      <a:round/>
+                      <a:headEnd type="none" w="med" len="med"/>
+                      <a:tailEnd type="none" w="med" len="med"/>
+                    </a:lnL>
+                    <a:lnR w="9525" cap="flat" cmpd="sng" algn="ctr">
+                      <a:solidFill>
+                        <a:srgbClr val="D9D4D0"/>
+                      </a:solidFill>
+                      <a:prstDash val="solid"/>
+                      <a:round/>
+                      <a:headEnd type="none" w="med" len="med"/>
+                      <a:tailEnd type="none" w="med" len="med"/>
+                    </a:lnR>
+                    <a:lnT w="9525" cap="flat" cmpd="sng" algn="ctr">
+                      <a:solidFill>
+                        <a:srgbClr val="D9D4D0"/>
+                      </a:solidFill>
+                      <a:prstDash val="solid"/>
+                      <a:round/>
+                      <a:headEnd type="none" w="med" len="med"/>
+                      <a:tailEnd type="none" w="med" len="med"/>
+                    </a:lnT>
+                    <a:lnB w="9525" cap="flat" cmpd="sng" algn="ctr">
+                      <a:solidFill>
+                        <a:srgbClr val="D9D4D0"/>
+                      </a:solidFill>
+                      <a:prstDash val="solid"/>
+                      <a:round/>
+                      <a:headEnd type="none" w="med" len="med"/>
+                      <a:tailEnd type="none" w="med" len="med"/>
+                    </a:lnB>
+                    <a:solidFill>
+                      <a:srgbClr val="FFFFFF"/>
+                    </a:solidFill>
+                  </a:tcPr>
+                </a:tc>
+                <a:tc>
+                  <a:txBody>
+                    <a:bodyPr/>
+                    <a:lstStyle/>
+                    <a:p>
+                      <a:pPr algn="ctr" indent="0" marL="0">
+                        <a:buNone/>
+                      </a:pPr>
+                      <a:r>
+                        <a:rPr lang="en-US" sz="1800" dirty="0">
+                          <a:solidFill>
+                            <a:srgbClr val="0B0B0B"/>
+                          </a:solidFill>
+                          <a:latin typeface="Calibri" pitchFamily="34" charset="0"/>
+                          <a:ea typeface="Calibri" pitchFamily="34" charset="-122"/>
+                          <a:cs typeface="Calibri" pitchFamily="34" charset="-120"/>
+                        </a:rPr>
+                        <a:t>1.0861</a:t>
+                      </a:r>
+                      <a:endParaRPr lang="en-US" sz="1800" dirty="0">
+                        <a:latin typeface="Calibri" charset="0"/>
+                        <a:ea typeface="Calibri" charset="0"/>
+                        <a:cs typeface="Calibri" charset="0"/>
+                      </a:endParaRPr>
+                    </a:p>
+                  </a:txBody>
+                  <a:tcPr marL="45720" marR="45720" marT="45720" marB="45720" anchor="ctr">
+                    <a:lnL w="9525" cap="flat" cmpd="sng" algn="ctr">
+                      <a:solidFill>
+                        <a:srgbClr val="D9D4D0"/>
+                      </a:solidFill>
+                      <a:prstDash val="solid"/>
+                      <a:round/>
+                      <a:headEnd type="none" w="med" len="med"/>
+                      <a:tailEnd type="none" w="med" len="med"/>
+                    </a:lnL>
+                    <a:lnR w="9525" cap="flat" cmpd="sng" algn="ctr">
+                      <a:solidFill>
+                        <a:srgbClr val="D9D4D0"/>
+                      </a:solidFill>
+                      <a:prstDash val="solid"/>
+                      <a:round/>
+                      <a:headEnd type="none" w="med" len="med"/>
+                      <a:tailEnd type="none" w="med" len="med"/>
+                    </a:lnR>
+                    <a:lnT w="9525" cap="flat" cmpd="sng" algn="ctr">
+                      <a:solidFill>
+                        <a:srgbClr val="D9D4D0"/>
+                      </a:solidFill>
+                      <a:prstDash val="solid"/>
+                      <a:round/>
+                      <a:headEnd type="none" w="med" len="med"/>
+                      <a:tailEnd type="none" w="med" len="med"/>
+                    </a:lnT>
+                    <a:lnB w="9525" cap="flat" cmpd="sng" algn="ctr">
+                      <a:solidFill>
+                        <a:srgbClr val="D9D4D0"/>
+                      </a:solidFill>
+                      <a:prstDash val="solid"/>
+                      <a:round/>
+                      <a:headEnd type="none" w="med" len="med"/>
+                      <a:tailEnd type="none" w="med" len="med"/>
+                    </a:lnB>
+                    <a:solidFill>
+                      <a:srgbClr val="FFFFFF"/>
+                    </a:solidFill>
+                  </a:tcPr>
+                </a:tc>
+                <a:tc>
+                  <a:txBody>
+                    <a:bodyPr/>
+                    <a:lstStyle/>
+                    <a:p>
+                      <a:pPr algn="ctr" indent="0" marL="0">
+                        <a:buNone/>
+                      </a:pPr>
+                      <a:r>
+                        <a:rPr lang="en-US" sz="1800" dirty="0">
+                          <a:solidFill>
+                            <a:srgbClr val="0B0B0B"/>
+                          </a:solidFill>
+                          <a:latin typeface="Calibri" pitchFamily="34" charset="0"/>
+                          <a:ea typeface="Calibri" pitchFamily="34" charset="-122"/>
+                          <a:cs typeface="Calibri" pitchFamily="34" charset="-120"/>
+                        </a:rPr>
+                        <a:t>3.3451</a:t>
+                      </a:r>
+                      <a:endParaRPr lang="en-US" sz="1800" dirty="0">
+                        <a:latin typeface="Calibri" charset="0"/>
+                        <a:ea typeface="Calibri" charset="0"/>
+                        <a:cs typeface="Calibri" charset="0"/>
+                      </a:endParaRPr>
+                    </a:p>
+                  </a:txBody>
+                  <a:tcPr marL="45720" marR="45720" marT="45720" marB="45720" anchor="ctr">
+                    <a:lnL w="9525" cap="flat" cmpd="sng" algn="ctr">
+                      <a:solidFill>
+                        <a:srgbClr val="D9D4D0"/>
+                      </a:solidFill>
+                      <a:prstDash val="solid"/>
+                      <a:round/>
+                      <a:headEnd type="none" w="med" len="med"/>
+                      <a:tailEnd type="none" w="med" len="med"/>
+                    </a:lnL>
+                    <a:lnR w="9525" cap="flat" cmpd="sng" algn="ctr">
+                      <a:solidFill>
+                        <a:srgbClr val="D9D4D0"/>
+                      </a:solidFill>
+                      <a:prstDash val="solid"/>
+                      <a:round/>
+                      <a:headEnd type="none" w="med" len="med"/>
+                      <a:tailEnd type="none" w="med" len="med"/>
+                    </a:lnR>
+                    <a:lnT w="9525" cap="flat" cmpd="sng" algn="ctr">
+                      <a:solidFill>
+                        <a:srgbClr val="D9D4D0"/>
+                      </a:solidFill>
+                      <a:prstDash val="solid"/>
+                      <a:round/>
+                      <a:headEnd type="none" w="med" len="med"/>
+                      <a:tailEnd type="none" w="med" len="med"/>
+                    </a:lnT>
+                    <a:lnB w="9525" cap="flat" cmpd="sng" algn="ctr">
+                      <a:solidFill>
+                        <a:srgbClr val="D9D4D0"/>
+                      </a:solidFill>
+                      <a:prstDash val="solid"/>
+                      <a:round/>
+                      <a:headEnd type="none" w="med" len="med"/>
+                      <a:tailEnd type="none" w="med" len="med"/>
+                    </a:lnB>
+                    <a:solidFill>
+                      <a:srgbClr val="FFFFFF"/>
+                    </a:solidFill>
+                  </a:tcPr>
+                </a:tc>
+                <a:tc>
+                  <a:txBody>
+                    <a:bodyPr/>
+                    <a:lstStyle/>
+                    <a:p>
+                      <a:pPr algn="ctr" indent="0" marL="0">
+                        <a:buNone/>
+                      </a:pPr>
+                      <a:r>
+                        <a:rPr lang="en-US" sz="1800" dirty="0">
+                          <a:solidFill>
+                            <a:srgbClr val="0B0B0B"/>
+                          </a:solidFill>
+                          <a:latin typeface="Calibri" pitchFamily="34" charset="0"/>
+                          <a:ea typeface="Calibri" pitchFamily="34" charset="-122"/>
+                          <a:cs typeface="Calibri" pitchFamily="34" charset="-120"/>
+                        </a:rPr>
+                        <a:t>0.9991</a:t>
+                      </a:r>
+                      <a:endParaRPr lang="en-US" sz="1800" dirty="0">
+                        <a:latin typeface="Calibri" charset="0"/>
+                        <a:ea typeface="Calibri" charset="0"/>
+                        <a:cs typeface="Calibri" charset="0"/>
+                      </a:endParaRPr>
+                    </a:p>
+                  </a:txBody>
+                  <a:tcPr marL="45720" marR="45720" marT="45720" marB="45720" anchor="ctr">
+                    <a:lnL w="9525" cap="flat" cmpd="sng" algn="ctr">
+                      <a:solidFill>
+                        <a:srgbClr val="D9D4D0"/>
+                      </a:solidFill>
+                      <a:prstDash val="solid"/>
+                      <a:round/>
+                      <a:headEnd type="none" w="med" len="med"/>
+                      <a:tailEnd type="none" w="med" len="med"/>
+                    </a:lnL>
+                    <a:lnR w="9525" cap="flat" cmpd="sng" algn="ctr">
+                      <a:solidFill>
+                        <a:srgbClr val="D9D4D0"/>
+                      </a:solidFill>
+                      <a:prstDash val="solid"/>
+                      <a:round/>
+                      <a:headEnd type="none" w="med" len="med"/>
+                      <a:tailEnd type="none" w="med" len="med"/>
+                    </a:lnR>
+                    <a:lnT w="9525" cap="flat" cmpd="sng" algn="ctr">
+                      <a:solidFill>
+                        <a:srgbClr val="D9D4D0"/>
+                      </a:solidFill>
+                      <a:prstDash val="solid"/>
+                      <a:round/>
+                      <a:headEnd type="none" w="med" len="med"/>
+                      <a:tailEnd type="none" w="med" len="med"/>
+                    </a:lnT>
+                    <a:lnB w="9525" cap="flat" cmpd="sng" algn="ctr">
+                      <a:solidFill>
+                        <a:srgbClr val="D9D4D0"/>
+                      </a:solidFill>
+                      <a:prstDash val="solid"/>
+                      <a:round/>
+                      <a:headEnd type="none" w="med" len="med"/>
+                      <a:tailEnd type="none" w="med" len="med"/>
+                    </a:lnB>
+                    <a:solidFill>
+                      <a:srgbClr val="FFFFFF"/>
+                    </a:solidFill>
+                  </a:tcPr>
+                </a:tc>
+              </a:tr>
+              <a:tr h="384048">
+                <a:tc>
+                  <a:txBody>
+                    <a:bodyPr/>
+                    <a:lstStyle/>
+                    <a:p>
+                      <a:pPr algn="ctr" indent="0" marL="0">
+                        <a:buNone/>
+                      </a:pPr>
+                      <a:r>
+                        <a:rPr lang="en-US" sz="1800" dirty="0">
+                          <a:solidFill>
+                            <a:srgbClr val="0B0B0B"/>
+                          </a:solidFill>
+                          <a:latin typeface="Calibri" pitchFamily="34" charset="0"/>
+                          <a:ea typeface="Calibri" pitchFamily="34" charset="-122"/>
+                          <a:cs typeface="Calibri" pitchFamily="34" charset="-120"/>
+                        </a:rPr>
+                        <a:t>−1</a:t>
+                      </a:r>
+                      <a:endParaRPr lang="en-US" sz="1800" dirty="0">
+                        <a:latin typeface="Calibri" charset="0"/>
+                        <a:ea typeface="Calibri" charset="0"/>
+                        <a:cs typeface="Calibri" charset="0"/>
+                      </a:endParaRPr>
+                    </a:p>
+                  </a:txBody>
+                  <a:tcPr marL="45720" marR="45720" marT="45720" marB="45720" anchor="ctr">
+                    <a:lnL w="9525" cap="flat" cmpd="sng" algn="ctr">
+                      <a:solidFill>
+                        <a:srgbClr val="D9D4D0"/>
+                      </a:solidFill>
+                      <a:prstDash val="solid"/>
+                      <a:round/>
+                      <a:headEnd type="none" w="med" len="med"/>
+                      <a:tailEnd type="none" w="med" len="med"/>
+                    </a:lnL>
+                    <a:lnR w="9525" cap="flat" cmpd="sng" algn="ctr">
+                      <a:solidFill>
+                        <a:srgbClr val="D9D4D0"/>
+                      </a:solidFill>
+                      <a:prstDash val="solid"/>
+                      <a:round/>
+                      <a:headEnd type="none" w="med" len="med"/>
+                      <a:tailEnd type="none" w="med" len="med"/>
+                    </a:lnR>
+                    <a:lnT w="9525" cap="flat" cmpd="sng" algn="ctr">
+                      <a:solidFill>
+                        <a:srgbClr val="D9D4D0"/>
+                      </a:solidFill>
+                      <a:prstDash val="solid"/>
+                      <a:round/>
+                      <a:headEnd type="none" w="med" len="med"/>
+                      <a:tailEnd type="none" w="med" len="med"/>
+                    </a:lnT>
+                    <a:lnB w="9525" cap="flat" cmpd="sng" algn="ctr">
+                      <a:solidFill>
+                        <a:srgbClr val="D9D4D0"/>
+                      </a:solidFill>
+                      <a:prstDash val="solid"/>
+                      <a:round/>
+                      <a:headEnd type="none" w="med" len="med"/>
+                      <a:tailEnd type="none" w="med" len="med"/>
+                    </a:lnB>
+                    <a:solidFill>
+                      <a:srgbClr val="F7F2F3"/>
+                    </a:solidFill>
+                  </a:tcPr>
+                </a:tc>
+                <a:tc>
+                  <a:txBody>
+                    <a:bodyPr/>
+                    <a:lstStyle/>
+                    <a:p>
+                      <a:pPr algn="l" indent="0" marL="0">
+                        <a:buNone/>
+                      </a:pPr>
+                      <a:r>
+                        <a:rPr lang="en-US" sz="1800" dirty="0">
+                          <a:solidFill>
+                            <a:srgbClr val="0B0B0B"/>
+                          </a:solidFill>
+                          <a:latin typeface="Calibri" pitchFamily="34" charset="0"/>
+                          <a:ea typeface="Calibri" pitchFamily="34" charset="-122"/>
+                          <a:cs typeface="Calibri" pitchFamily="34" charset="-120"/>
+                        </a:rPr>
+                        <a:t>flicker FM</a:t>
+                      </a:r>
+                      <a:endParaRPr lang="en-US" sz="1800" dirty="0">
+                        <a:latin typeface="Calibri" charset="0"/>
+                        <a:ea typeface="Calibri" charset="0"/>
+                        <a:cs typeface="Calibri" charset="0"/>
+                      </a:endParaRPr>
+                    </a:p>
+                  </a:txBody>
+                  <a:tcPr marL="45720" marR="45720" marT="45720" marB="45720" anchor="ctr">
+                    <a:lnL w="9525" cap="flat" cmpd="sng" algn="ctr">
+                      <a:solidFill>
+                        <a:srgbClr val="D9D4D0"/>
+                      </a:solidFill>
+                      <a:prstDash val="solid"/>
+                      <a:round/>
+                      <a:headEnd type="none" w="med" len="med"/>
+                      <a:tailEnd type="none" w="med" len="med"/>
+                    </a:lnL>
+                    <a:lnR w="9525" cap="flat" cmpd="sng" algn="ctr">
+                      <a:solidFill>
+                        <a:srgbClr val="D9D4D0"/>
+                      </a:solidFill>
+                      <a:prstDash val="solid"/>
+                      <a:round/>
+                      <a:headEnd type="none" w="med" len="med"/>
+                      <a:tailEnd type="none" w="med" len="med"/>
+                    </a:lnR>
+                    <a:lnT w="9525" cap="flat" cmpd="sng" algn="ctr">
+                      <a:solidFill>
+                        <a:srgbClr val="D9D4D0"/>
+                      </a:solidFill>
+                      <a:prstDash val="solid"/>
+                      <a:round/>
+                      <a:headEnd type="none" w="med" len="med"/>
+                      <a:tailEnd type="none" w="med" len="med"/>
+                    </a:lnT>
+                    <a:lnB w="9525" cap="flat" cmpd="sng" algn="ctr">
+                      <a:solidFill>
+                        <a:srgbClr val="D9D4D0"/>
+                      </a:solidFill>
+                      <a:prstDash val="solid"/>
+                      <a:round/>
+                      <a:headEnd type="none" w="med" len="med"/>
+                      <a:tailEnd type="none" w="med" len="med"/>
+                    </a:lnB>
+                    <a:solidFill>
+                      <a:srgbClr val="F7F2F3"/>
+                    </a:solidFill>
+                  </a:tcPr>
+                </a:tc>
+                <a:tc>
+                  <a:txBody>
+                    <a:bodyPr/>
+                    <a:lstStyle/>
+                    <a:p>
+                      <a:pPr algn="ctr" indent="0" marL="0">
+                        <a:buNone/>
+                      </a:pPr>
+                      <a:r>
+                        <a:rPr lang="en-US" sz="1800" dirty="0">
+                          <a:solidFill>
+                            <a:srgbClr val="0B0B0B"/>
+                          </a:solidFill>
+                          <a:latin typeface="Calibri" pitchFamily="34" charset="0"/>
+                          <a:ea typeface="Calibri" pitchFamily="34" charset="-122"/>
+                          <a:cs typeface="Calibri" pitchFamily="34" charset="-120"/>
+                        </a:rPr>
+                        <a:t>1.2947</a:t>
+                      </a:r>
+                      <a:endParaRPr lang="en-US" sz="1800" dirty="0">
+                        <a:latin typeface="Calibri" charset="0"/>
+                        <a:ea typeface="Calibri" charset="0"/>
+                        <a:cs typeface="Calibri" charset="0"/>
+                      </a:endParaRPr>
+                    </a:p>
+                  </a:txBody>
+                  <a:tcPr marL="45720" marR="45720" marT="45720" marB="45720" anchor="ctr">
+                    <a:lnL w="9525" cap="flat" cmpd="sng" algn="ctr">
+                      <a:solidFill>
+                        <a:srgbClr val="D9D4D0"/>
+                      </a:solidFill>
+                      <a:prstDash val="solid"/>
+                      <a:round/>
+                      <a:headEnd type="none" w="med" len="med"/>
+                      <a:tailEnd type="none" w="med" len="med"/>
+                    </a:lnL>
+                    <a:lnR w="9525" cap="flat" cmpd="sng" algn="ctr">
+                      <a:solidFill>
+                        <a:srgbClr val="D9D4D0"/>
+                      </a:solidFill>
+                      <a:prstDash val="solid"/>
+                      <a:round/>
+                      <a:headEnd type="none" w="med" len="med"/>
+                      <a:tailEnd type="none" w="med" len="med"/>
+                    </a:lnR>
+                    <a:lnT w="9525" cap="flat" cmpd="sng" algn="ctr">
+                      <a:solidFill>
+                        <a:srgbClr val="D9D4D0"/>
+                      </a:solidFill>
+                      <a:prstDash val="solid"/>
+                      <a:round/>
+                      <a:headEnd type="none" w="med" len="med"/>
+                      <a:tailEnd type="none" w="med" len="med"/>
+                    </a:lnT>
+                    <a:lnB w="9525" cap="flat" cmpd="sng" algn="ctr">
+                      <a:solidFill>
+                        <a:srgbClr val="D9D4D0"/>
+                      </a:solidFill>
+                      <a:prstDash val="solid"/>
+                      <a:round/>
+                      <a:headEnd type="none" w="med" len="med"/>
+                      <a:tailEnd type="none" w="med" len="med"/>
+                    </a:lnB>
+                    <a:solidFill>
+                      <a:srgbClr val="F7F2F3"/>
+                    </a:solidFill>
+                  </a:tcPr>
+                </a:tc>
+                <a:tc>
+                  <a:txBody>
+                    <a:bodyPr/>
+                    <a:lstStyle/>
+                    <a:p>
+                      <a:pPr algn="ctr" indent="0" marL="0">
+                        <a:buNone/>
+                      </a:pPr>
+                      <a:r>
+                        <a:rPr lang="en-US" sz="1800" dirty="0">
+                          <a:solidFill>
+                            <a:srgbClr val="0B0B0B"/>
+                          </a:solidFill>
+                          <a:latin typeface="Calibri" pitchFamily="34" charset="0"/>
+                          <a:ea typeface="Calibri" pitchFamily="34" charset="-122"/>
+                          <a:cs typeface="Calibri" pitchFamily="34" charset="-120"/>
+                        </a:rPr>
+                        <a:t>−0.7193</a:t>
+                      </a:r>
+                      <a:endParaRPr lang="en-US" sz="1800" dirty="0">
+                        <a:latin typeface="Calibri" charset="0"/>
+                        <a:ea typeface="Calibri" charset="0"/>
+                        <a:cs typeface="Calibri" charset="0"/>
+                      </a:endParaRPr>
+                    </a:p>
+                  </a:txBody>
+                  <a:tcPr marL="45720" marR="45720" marT="45720" marB="45720" anchor="ctr">
+                    <a:lnL w="9525" cap="flat" cmpd="sng" algn="ctr">
+                      <a:solidFill>
+                        <a:srgbClr val="D9D4D0"/>
+                      </a:solidFill>
+                      <a:prstDash val="solid"/>
+                      <a:round/>
+                      <a:headEnd type="none" w="med" len="med"/>
+                      <a:tailEnd type="none" w="med" len="med"/>
+                    </a:lnL>
+                    <a:lnR w="9525" cap="flat" cmpd="sng" algn="ctr">
+                      <a:solidFill>
+                        <a:srgbClr val="D9D4D0"/>
+                      </a:solidFill>
+                      <a:prstDash val="solid"/>
+                      <a:round/>
+                      <a:headEnd type="none" w="med" len="med"/>
+                      <a:tailEnd type="none" w="med" len="med"/>
+                    </a:lnR>
+                    <a:lnT w="9525" cap="flat" cmpd="sng" algn="ctr">
+                      <a:solidFill>
+                        <a:srgbClr val="D9D4D0"/>
+                      </a:solidFill>
+                      <a:prstDash val="solid"/>
+                      <a:round/>
+                      <a:headEnd type="none" w="med" len="med"/>
+                      <a:tailEnd type="none" w="med" len="med"/>
+                    </a:lnT>
+                    <a:lnB w="9525" cap="flat" cmpd="sng" algn="ctr">
+                      <a:solidFill>
+                        <a:srgbClr val="D9D4D0"/>
+                      </a:solidFill>
+                      <a:prstDash val="solid"/>
+                      <a:round/>
+                      <a:headEnd type="none" w="med" len="med"/>
+                      <a:tailEnd type="none" w="med" len="med"/>
+                    </a:lnB>
+                    <a:solidFill>
+                      <a:srgbClr val="F7F2F3"/>
+                    </a:solidFill>
+                  </a:tcPr>
+                </a:tc>
+                <a:tc>
+                  <a:txBody>
+                    <a:bodyPr/>
+                    <a:lstStyle/>
+                    <a:p>
+                      <a:pPr algn="ctr" indent="0" marL="0">
+                        <a:buNone/>
+                      </a:pPr>
+                      <a:r>
+                        <a:rPr lang="en-US" sz="1800" dirty="0">
+                          <a:solidFill>
+                            <a:srgbClr val="0B0B0B"/>
+                          </a:solidFill>
+                          <a:latin typeface="Calibri" pitchFamily="34" charset="0"/>
+                          <a:ea typeface="Calibri" pitchFamily="34" charset="-122"/>
+                          <a:cs typeface="Calibri" pitchFamily="34" charset="-120"/>
+                        </a:rPr>
+                        <a:t>1.0095</a:t>
+                      </a:r>
+                      <a:endParaRPr lang="en-US" sz="1800" dirty="0">
+                        <a:latin typeface="Calibri" charset="0"/>
+                        <a:ea typeface="Calibri" charset="0"/>
+                        <a:cs typeface="Calibri" charset="0"/>
+                      </a:endParaRPr>
+                    </a:p>
+                  </a:txBody>
+                  <a:tcPr marL="45720" marR="45720" marT="45720" marB="45720" anchor="ctr">
+                    <a:lnL w="9525" cap="flat" cmpd="sng" algn="ctr">
+                      <a:solidFill>
+                        <a:srgbClr val="D9D4D0"/>
+                      </a:solidFill>
+                      <a:prstDash val="solid"/>
+                      <a:round/>
+                      <a:headEnd type="none" w="med" len="med"/>
+                      <a:tailEnd type="none" w="med" len="med"/>
+                    </a:lnL>
+                    <a:lnR w="9525" cap="flat" cmpd="sng" algn="ctr">
+                      <a:solidFill>
+                        <a:srgbClr val="D9D4D0"/>
+                      </a:solidFill>
+                      <a:prstDash val="solid"/>
+                      <a:round/>
+                      <a:headEnd type="none" w="med" len="med"/>
+                      <a:tailEnd type="none" w="med" len="med"/>
+                    </a:lnR>
+                    <a:lnT w="9525" cap="flat" cmpd="sng" algn="ctr">
+                      <a:solidFill>
+                        <a:srgbClr val="D9D4D0"/>
+                      </a:solidFill>
+                      <a:prstDash val="solid"/>
+                      <a:round/>
+                      <a:headEnd type="none" w="med" len="med"/>
+                      <a:tailEnd type="none" w="med" len="med"/>
+                    </a:lnT>
+                    <a:lnB w="9525" cap="flat" cmpd="sng" algn="ctr">
+                      <a:solidFill>
+                        <a:srgbClr val="D9D4D0"/>
+                      </a:solidFill>
+                      <a:prstDash val="solid"/>
+                      <a:round/>
+                      <a:headEnd type="none" w="med" len="med"/>
+                      <a:tailEnd type="none" w="med" len="med"/>
+                    </a:lnB>
+                    <a:solidFill>
+                      <a:srgbClr val="F7F2F3"/>
+                    </a:solidFill>
+                  </a:tcPr>
+                </a:tc>
+                <a:tc>
+                  <a:txBody>
+                    <a:bodyPr/>
+                    <a:lstStyle/>
+                    <a:p>
+                      <a:pPr algn="ctr" indent="0" marL="0">
+                        <a:buNone/>
+                      </a:pPr>
+                      <a:r>
+                        <a:rPr lang="en-US" sz="1800" dirty="0">
+                          <a:solidFill>
+                            <a:srgbClr val="0B0B0B"/>
+                          </a:solidFill>
+                          <a:latin typeface="Calibri" pitchFamily="34" charset="0"/>
+                          <a:ea typeface="Calibri" pitchFamily="34" charset="-122"/>
+                          <a:cs typeface="Calibri" pitchFamily="34" charset="-120"/>
+                        </a:rPr>
+                        <a:t>3.3254</a:t>
+                      </a:r>
+                      <a:endParaRPr lang="en-US" sz="1800" dirty="0">
+                        <a:latin typeface="Calibri" charset="0"/>
+                        <a:ea typeface="Calibri" charset="0"/>
+                        <a:cs typeface="Calibri" charset="0"/>
+                      </a:endParaRPr>
+                    </a:p>
+                  </a:txBody>
+                  <a:tcPr marL="45720" marR="45720" marT="45720" marB="45720" anchor="ctr">
+                    <a:lnL w="9525" cap="flat" cmpd="sng" algn="ctr">
+                      <a:solidFill>
+                        <a:srgbClr val="D9D4D0"/>
+                      </a:solidFill>
+                      <a:prstDash val="solid"/>
+                      <a:round/>
+                      <a:headEnd type="none" w="med" len="med"/>
+                      <a:tailEnd type="none" w="med" len="med"/>
+                    </a:lnL>
+                    <a:lnR w="9525" cap="flat" cmpd="sng" algn="ctr">
+                      <a:solidFill>
+                        <a:srgbClr val="D9D4D0"/>
+                      </a:solidFill>
+                      <a:prstDash val="solid"/>
+                      <a:round/>
+                      <a:headEnd type="none" w="med" len="med"/>
+                      <a:tailEnd type="none" w="med" len="med"/>
+                    </a:lnR>
+                    <a:lnT w="9525" cap="flat" cmpd="sng" algn="ctr">
+                      <a:solidFill>
+                        <a:srgbClr val="D9D4D0"/>
+                      </a:solidFill>
+                      <a:prstDash val="solid"/>
+                      <a:round/>
+                      <a:headEnd type="none" w="med" len="med"/>
+                      <a:tailEnd type="none" w="med" len="med"/>
+                    </a:lnT>
+                    <a:lnB w="9525" cap="flat" cmpd="sng" algn="ctr">
+                      <a:solidFill>
+                        <a:srgbClr val="D9D4D0"/>
+                      </a:solidFill>
+                      <a:prstDash val="solid"/>
+                      <a:round/>
+                      <a:headEnd type="none" w="med" len="med"/>
+                      <a:tailEnd type="none" w="med" len="med"/>
+                    </a:lnB>
+                    <a:solidFill>
+                      <a:srgbClr val="F7F2F3"/>
+                    </a:solidFill>
+                  </a:tcPr>
+                </a:tc>
+                <a:tc>
+                  <a:txBody>
+                    <a:bodyPr/>
+                    <a:lstStyle/>
+                    <a:p>
+                      <a:pPr algn="ctr" indent="0" marL="0">
+                        <a:buNone/>
+                      </a:pPr>
+                      <a:r>
+                        <a:rPr lang="en-US" sz="1800" dirty="0">
+                          <a:solidFill>
+                            <a:srgbClr val="0B0B0B"/>
+                          </a:solidFill>
+                          <a:latin typeface="Calibri" pitchFamily="34" charset="0"/>
+                          <a:ea typeface="Calibri" pitchFamily="34" charset="-122"/>
+                          <a:cs typeface="Calibri" pitchFamily="34" charset="-120"/>
+                        </a:rPr>
+                        <a:t>0.9991</a:t>
+                      </a:r>
+                      <a:endParaRPr lang="en-US" sz="1800" dirty="0">
+                        <a:latin typeface="Calibri" charset="0"/>
+                        <a:ea typeface="Calibri" charset="0"/>
+                        <a:cs typeface="Calibri" charset="0"/>
+                      </a:endParaRPr>
+                    </a:p>
+                  </a:txBody>
+                  <a:tcPr marL="45720" marR="45720" marT="45720" marB="45720" anchor="ctr">
+                    <a:lnL w="9525" cap="flat" cmpd="sng" algn="ctr">
+                      <a:solidFill>
+                        <a:srgbClr val="D9D4D0"/>
+                      </a:solidFill>
+                      <a:prstDash val="solid"/>
+                      <a:round/>
+                      <a:headEnd type="none" w="med" len="med"/>
+                      <a:tailEnd type="none" w="med" len="med"/>
+                    </a:lnL>
+                    <a:lnR w="9525" cap="flat" cmpd="sng" algn="ctr">
+                      <a:solidFill>
+                        <a:srgbClr val="D9D4D0"/>
+                      </a:solidFill>
+                      <a:prstDash val="solid"/>
+                      <a:round/>
+                      <a:headEnd type="none" w="med" len="med"/>
+                      <a:tailEnd type="none" w="med" len="med"/>
+                    </a:lnR>
+                    <a:lnT w="9525" cap="flat" cmpd="sng" algn="ctr">
+                      <a:solidFill>
+                        <a:srgbClr val="D9D4D0"/>
+                      </a:solidFill>
+                      <a:prstDash val="solid"/>
+                      <a:round/>
+                      <a:headEnd type="none" w="med" len="med"/>
+                      <a:tailEnd type="none" w="med" len="med"/>
+                    </a:lnT>
+                    <a:lnB w="9525" cap="flat" cmpd="sng" algn="ctr">
+                      <a:solidFill>
+                        <a:srgbClr val="D9D4D0"/>
+                      </a:solidFill>
+                      <a:prstDash val="solid"/>
+                      <a:round/>
+                      <a:headEnd type="none" w="med" len="med"/>
+                      <a:tailEnd type="none" w="med" len="med"/>
+                    </a:lnB>
+                    <a:solidFill>
+                      <a:srgbClr val="F7F2F3"/>
+                    </a:solidFill>
+                  </a:tcPr>
+                </a:tc>
+              </a:tr>
+              <a:tr h="384048">
+                <a:tc>
+                  <a:txBody>
+                    <a:bodyPr/>
+                    <a:lstStyle/>
+                    <a:p>
+                      <a:pPr algn="ctr" indent="0" marL="0">
+                        <a:buNone/>
+                      </a:pPr>
+                      <a:r>
+                        <a:rPr lang="en-US" sz="1800" dirty="0">
+                          <a:solidFill>
+                            <a:srgbClr val="0B0B0B"/>
+                          </a:solidFill>
+                          <a:latin typeface="Calibri" pitchFamily="34" charset="0"/>
+                          <a:ea typeface="Calibri" pitchFamily="34" charset="-122"/>
+                          <a:cs typeface="Calibri" pitchFamily="34" charset="-120"/>
+                        </a:rPr>
+                        <a:t>−2</a:t>
+                      </a:r>
+                      <a:endParaRPr lang="en-US" sz="1800" dirty="0">
+                        <a:latin typeface="Calibri" charset="0"/>
+                        <a:ea typeface="Calibri" charset="0"/>
+                        <a:cs typeface="Calibri" charset="0"/>
+                      </a:endParaRPr>
+                    </a:p>
+                  </a:txBody>
+                  <a:tcPr marL="45720" marR="45720" marT="45720" marB="45720" anchor="ctr">
+                    <a:lnL w="9525" cap="flat" cmpd="sng" algn="ctr">
+                      <a:solidFill>
+                        <a:srgbClr val="D9D4D0"/>
+                      </a:solidFill>
+                      <a:prstDash val="solid"/>
+                      <a:round/>
+                      <a:headEnd type="none" w="med" len="med"/>
+                      <a:tailEnd type="none" w="med" len="med"/>
+                    </a:lnL>
+                    <a:lnR w="9525" cap="flat" cmpd="sng" algn="ctr">
+                      <a:solidFill>
+                        <a:srgbClr val="D9D4D0"/>
+                      </a:solidFill>
+                      <a:prstDash val="solid"/>
+                      <a:round/>
+                      <a:headEnd type="none" w="med" len="med"/>
+                      <a:tailEnd type="none" w="med" len="med"/>
+                    </a:lnR>
+                    <a:lnT w="9525" cap="flat" cmpd="sng" algn="ctr">
+                      <a:solidFill>
+                        <a:srgbClr val="D9D4D0"/>
+                      </a:solidFill>
+                      <a:prstDash val="solid"/>
+                      <a:round/>
+                      <a:headEnd type="none" w="med" len="med"/>
+                      <a:tailEnd type="none" w="med" len="med"/>
+                    </a:lnT>
+                    <a:lnB w="9525" cap="flat" cmpd="sng" algn="ctr">
+                      <a:solidFill>
+                        <a:srgbClr val="D9D4D0"/>
+                      </a:solidFill>
+                      <a:prstDash val="solid"/>
+                      <a:round/>
+                      <a:headEnd type="none" w="med" len="med"/>
+                      <a:tailEnd type="none" w="med" len="med"/>
+                    </a:lnB>
+                    <a:solidFill>
+                      <a:srgbClr val="FFFFFF"/>
+                    </a:solidFill>
+                  </a:tcPr>
+                </a:tc>
+                <a:tc>
+                  <a:txBody>
+                    <a:bodyPr/>
+                    <a:lstStyle/>
+                    <a:p>
+                      <a:pPr algn="l" indent="0" marL="0">
+                        <a:buNone/>
+                      </a:pPr>
+                      <a:r>
+                        <a:rPr lang="en-US" sz="1800" dirty="0">
+                          <a:solidFill>
+                            <a:srgbClr val="0B0B0B"/>
+                          </a:solidFill>
+                          <a:latin typeface="Calibri" pitchFamily="34" charset="0"/>
+                          <a:ea typeface="Calibri" pitchFamily="34" charset="-122"/>
+                          <a:cs typeface="Calibri" pitchFamily="34" charset="-120"/>
+                        </a:rPr>
+                        <a:t>random-walk FM</a:t>
+                      </a:r>
+                      <a:endParaRPr lang="en-US" sz="1800" dirty="0">
+                        <a:latin typeface="Calibri" charset="0"/>
+                        <a:ea typeface="Calibri" charset="0"/>
+                        <a:cs typeface="Calibri" charset="0"/>
+                      </a:endParaRPr>
+                    </a:p>
+                  </a:txBody>
+                  <a:tcPr marL="45720" marR="45720" marT="45720" marB="45720" anchor="ctr">
+                    <a:lnL w="9525" cap="flat" cmpd="sng" algn="ctr">
+                      <a:solidFill>
+                        <a:srgbClr val="D9D4D0"/>
+                      </a:solidFill>
+                      <a:prstDash val="solid"/>
+                      <a:round/>
+                      <a:headEnd type="none" w="med" len="med"/>
+                      <a:tailEnd type="none" w="med" len="med"/>
+                    </a:lnL>
+                    <a:lnR w="9525" cap="flat" cmpd="sng" algn="ctr">
+                      <a:solidFill>
+                        <a:srgbClr val="D9D4D0"/>
+                      </a:solidFill>
+                      <a:prstDash val="solid"/>
+                      <a:round/>
+                      <a:headEnd type="none" w="med" len="med"/>
+                      <a:tailEnd type="none" w="med" len="med"/>
+                    </a:lnR>
+                    <a:lnT w="9525" cap="flat" cmpd="sng" algn="ctr">
+                      <a:solidFill>
+                        <a:srgbClr val="D9D4D0"/>
+                      </a:solidFill>
+                      <a:prstDash val="solid"/>
+                      <a:round/>
+                      <a:headEnd type="none" w="med" len="med"/>
+                      <a:tailEnd type="none" w="med" len="med"/>
+                    </a:lnT>
+                    <a:lnB w="9525" cap="flat" cmpd="sng" algn="ctr">
+                      <a:solidFill>
+                        <a:srgbClr val="D9D4D0"/>
+                      </a:solidFill>
+                      <a:prstDash val="solid"/>
+                      <a:round/>
+                      <a:headEnd type="none" w="med" len="med"/>
+                      <a:tailEnd type="none" w="med" len="med"/>
+                    </a:lnB>
+                    <a:solidFill>
+                      <a:srgbClr val="FFFFFF"/>
+                    </a:solidFill>
+                  </a:tcPr>
+                </a:tc>
+                <a:tc>
+                  <a:txBody>
+                    <a:bodyPr/>
+                    <a:lstStyle/>
+                    <a:p>
+                      <a:pPr algn="ctr" indent="0" marL="0">
+                        <a:buNone/>
+                      </a:pPr>
+                      <a:r>
+                        <a:rPr lang="en-US" sz="1800" dirty="0">
+                          <a:solidFill>
+                            <a:srgbClr val="0B0B0B"/>
+                          </a:solidFill>
+                          <a:latin typeface="Calibri" pitchFamily="34" charset="0"/>
+                          <a:ea typeface="Calibri" pitchFamily="34" charset="-122"/>
+                          <a:cs typeface="Calibri" pitchFamily="34" charset="-120"/>
+                        </a:rPr>
+                        <a:t>2.1686</a:t>
+                      </a:r>
+                      <a:endParaRPr lang="en-US" sz="1800" dirty="0">
+                        <a:latin typeface="Calibri" charset="0"/>
+                        <a:ea typeface="Calibri" charset="0"/>
+                        <a:cs typeface="Calibri" charset="0"/>
+                      </a:endParaRPr>
+                    </a:p>
+                  </a:txBody>
+                  <a:tcPr marL="45720" marR="45720" marT="45720" marB="45720" anchor="ctr">
+                    <a:lnL w="9525" cap="flat" cmpd="sng" algn="ctr">
+                      <a:solidFill>
+                        <a:srgbClr val="D9D4D0"/>
+                      </a:solidFill>
+                      <a:prstDash val="solid"/>
+                      <a:round/>
+                      <a:headEnd type="none" w="med" len="med"/>
+                      <a:tailEnd type="none" w="med" len="med"/>
+                    </a:lnL>
+                    <a:lnR w="9525" cap="flat" cmpd="sng" algn="ctr">
+                      <a:solidFill>
+                        <a:srgbClr val="D9D4D0"/>
+                      </a:solidFill>
+                      <a:prstDash val="solid"/>
+                      <a:round/>
+                      <a:headEnd type="none" w="med" len="med"/>
+                      <a:tailEnd type="none" w="med" len="med"/>
+                    </a:lnR>
+                    <a:lnT w="9525" cap="flat" cmpd="sng" algn="ctr">
+                      <a:solidFill>
+                        <a:srgbClr val="D9D4D0"/>
+                      </a:solidFill>
+                      <a:prstDash val="solid"/>
+                      <a:round/>
+                      <a:headEnd type="none" w="med" len="med"/>
+                      <a:tailEnd type="none" w="med" len="med"/>
+                    </a:lnT>
+                    <a:lnB w="9525" cap="flat" cmpd="sng" algn="ctr">
+                      <a:solidFill>
+                        <a:srgbClr val="D9D4D0"/>
+                      </a:solidFill>
+                      <a:prstDash val="solid"/>
+                      <a:round/>
+                      <a:headEnd type="none" w="med" len="med"/>
+                      <a:tailEnd type="none" w="med" len="med"/>
+                    </a:lnB>
+                    <a:solidFill>
+                      <a:srgbClr val="FFFFFF"/>
+                    </a:solidFill>
+                  </a:tcPr>
+                </a:tc>
+                <a:tc>
+                  <a:txBody>
+                    <a:bodyPr/>
+                    <a:lstStyle/>
+                    <a:p>
+                      <a:pPr algn="ctr" indent="0" marL="0">
+                        <a:buNone/>
+                      </a:pPr>
+                      <a:r>
+                        <a:rPr lang="en-US" sz="1800" dirty="0">
+                          <a:solidFill>
+                            <a:srgbClr val="0B0B0B"/>
+                          </a:solidFill>
+                          <a:latin typeface="Calibri" pitchFamily="34" charset="0"/>
+                          <a:ea typeface="Calibri" pitchFamily="34" charset="-122"/>
+                          <a:cs typeface="Calibri" pitchFamily="34" charset="-120"/>
+                        </a:rPr>
+                        <a:t>−5.5884</a:t>
+                      </a:r>
+                      <a:endParaRPr lang="en-US" sz="1800" dirty="0">
+                        <a:latin typeface="Calibri" charset="0"/>
+                        <a:ea typeface="Calibri" charset="0"/>
+                        <a:cs typeface="Calibri" charset="0"/>
+                      </a:endParaRPr>
+                    </a:p>
+                  </a:txBody>
+                  <a:tcPr marL="45720" marR="45720" marT="45720" marB="45720" anchor="ctr">
+                    <a:lnL w="9525" cap="flat" cmpd="sng" algn="ctr">
+                      <a:solidFill>
+                        <a:srgbClr val="D9D4D0"/>
+                      </a:solidFill>
+                      <a:prstDash val="solid"/>
+                      <a:round/>
+                      <a:headEnd type="none" w="med" len="med"/>
+                      <a:tailEnd type="none" w="med" len="med"/>
+                    </a:lnL>
+                    <a:lnR w="9525" cap="flat" cmpd="sng" algn="ctr">
+                      <a:solidFill>
+                        <a:srgbClr val="D9D4D0"/>
+                      </a:solidFill>
+                      <a:prstDash val="solid"/>
+                      <a:round/>
+                      <a:headEnd type="none" w="med" len="med"/>
+                      <a:tailEnd type="none" w="med" len="med"/>
+                    </a:lnR>
+                    <a:lnT w="9525" cap="flat" cmpd="sng" algn="ctr">
+                      <a:solidFill>
+                        <a:srgbClr val="D9D4D0"/>
+                      </a:solidFill>
+                      <a:prstDash val="solid"/>
+                      <a:round/>
+                      <a:headEnd type="none" w="med" len="med"/>
+                      <a:tailEnd type="none" w="med" len="med"/>
+                    </a:lnT>
+                    <a:lnB w="9525" cap="flat" cmpd="sng" algn="ctr">
+                      <a:solidFill>
+                        <a:srgbClr val="D9D4D0"/>
+                      </a:solidFill>
+                      <a:prstDash val="solid"/>
+                      <a:round/>
+                      <a:headEnd type="none" w="med" len="med"/>
+                      <a:tailEnd type="none" w="med" len="med"/>
+                    </a:lnB>
+                    <a:solidFill>
+                      <a:srgbClr val="FFFFFF"/>
+                    </a:solidFill>
+                  </a:tcPr>
+                </a:tc>
+                <a:tc>
+                  <a:txBody>
+                    <a:bodyPr/>
+                    <a:lstStyle/>
+                    <a:p>
+                      <a:pPr algn="ctr" indent="0" marL="0">
+                        <a:buNone/>
+                      </a:pPr>
+                      <a:r>
+                        <a:rPr lang="en-US" sz="1800" dirty="0">
+                          <a:solidFill>
+                            <a:srgbClr val="0B0B0B"/>
+                          </a:solidFill>
+                          <a:latin typeface="Calibri" pitchFamily="34" charset="0"/>
+                          <a:ea typeface="Calibri" pitchFamily="34" charset="-122"/>
+                          <a:cs typeface="Calibri" pitchFamily="34" charset="-120"/>
+                        </a:rPr>
+                        <a:t>0.7631</a:t>
+                      </a:r>
+                      <a:endParaRPr lang="en-US" sz="1800" dirty="0">
+                        <a:latin typeface="Calibri" charset="0"/>
+                        <a:ea typeface="Calibri" charset="0"/>
+                        <a:cs typeface="Calibri" charset="0"/>
+                      </a:endParaRPr>
+                    </a:p>
+                  </a:txBody>
+                  <a:tcPr marL="45720" marR="45720" marT="45720" marB="45720" anchor="ctr">
+                    <a:lnL w="9525" cap="flat" cmpd="sng" algn="ctr">
+                      <a:solidFill>
+                        <a:srgbClr val="D9D4D0"/>
+                      </a:solidFill>
+                      <a:prstDash val="solid"/>
+                      <a:round/>
+                      <a:headEnd type="none" w="med" len="med"/>
+                      <a:tailEnd type="none" w="med" len="med"/>
+                    </a:lnL>
+                    <a:lnR w="9525" cap="flat" cmpd="sng" algn="ctr">
+                      <a:solidFill>
+                        <a:srgbClr val="D9D4D0"/>
+                      </a:solidFill>
+                      <a:prstDash val="solid"/>
+                      <a:round/>
+                      <a:headEnd type="none" w="med" len="med"/>
+                      <a:tailEnd type="none" w="med" len="med"/>
+                    </a:lnR>
+                    <a:lnT w="9525" cap="flat" cmpd="sng" algn="ctr">
+                      <a:solidFill>
+                        <a:srgbClr val="D9D4D0"/>
+                      </a:solidFill>
+                      <a:prstDash val="solid"/>
+                      <a:round/>
+                      <a:headEnd type="none" w="med" len="med"/>
+                      <a:tailEnd type="none" w="med" len="med"/>
+                    </a:lnT>
+                    <a:lnB w="9525" cap="flat" cmpd="sng" algn="ctr">
+                      <a:solidFill>
+                        <a:srgbClr val="D9D4D0"/>
+                      </a:solidFill>
+                      <a:prstDash val="solid"/>
+                      <a:round/>
+                      <a:headEnd type="none" w="med" len="med"/>
+                      <a:tailEnd type="none" w="med" len="med"/>
+                    </a:lnB>
+                    <a:solidFill>
+                      <a:srgbClr val="FFFFFF"/>
+                    </a:solidFill>
+                  </a:tcPr>
+                </a:tc>
+                <a:tc>
+                  <a:txBody>
+                    <a:bodyPr/>
+                    <a:lstStyle/>
+                    <a:p>
+                      <a:pPr algn="ctr" indent="0" marL="0">
+                        <a:buNone/>
+                      </a:pPr>
+                      <a:r>
+                        <a:rPr lang="en-US" sz="1800" dirty="0">
+                          <a:solidFill>
+                            <a:srgbClr val="0B0B0B"/>
+                          </a:solidFill>
+                          <a:latin typeface="Calibri" pitchFamily="34" charset="0"/>
+                          <a:ea typeface="Calibri" pitchFamily="34" charset="-122"/>
+                          <a:cs typeface="Calibri" pitchFamily="34" charset="-120"/>
+                        </a:rPr>
+                        <a:t>2.4490</a:t>
+                      </a:r>
+                      <a:endParaRPr lang="en-US" sz="1800" dirty="0">
+                        <a:latin typeface="Calibri" charset="0"/>
+                        <a:ea typeface="Calibri" charset="0"/>
+                        <a:cs typeface="Calibri" charset="0"/>
+                      </a:endParaRPr>
+                    </a:p>
+                  </a:txBody>
+                  <a:tcPr marL="45720" marR="45720" marT="45720" marB="45720" anchor="ctr">
+                    <a:lnL w="9525" cap="flat" cmpd="sng" algn="ctr">
+                      <a:solidFill>
+                        <a:srgbClr val="D9D4D0"/>
+                      </a:solidFill>
+                      <a:prstDash val="solid"/>
+                      <a:round/>
+                      <a:headEnd type="none" w="med" len="med"/>
+                      <a:tailEnd type="none" w="med" len="med"/>
+                    </a:lnL>
+                    <a:lnR w="9525" cap="flat" cmpd="sng" algn="ctr">
+                      <a:solidFill>
+                        <a:srgbClr val="D9D4D0"/>
+                      </a:solidFill>
+                      <a:prstDash val="solid"/>
+                      <a:round/>
+                      <a:headEnd type="none" w="med" len="med"/>
+                      <a:tailEnd type="none" w="med" len="med"/>
+                    </a:lnR>
+                    <a:lnT w="9525" cap="flat" cmpd="sng" algn="ctr">
+                      <a:solidFill>
+                        <a:srgbClr val="D9D4D0"/>
+                      </a:solidFill>
+                      <a:prstDash val="solid"/>
+                      <a:round/>
+                      <a:headEnd type="none" w="med" len="med"/>
+                      <a:tailEnd type="none" w="med" len="med"/>
+                    </a:lnT>
+                    <a:lnB w="9525" cap="flat" cmpd="sng" algn="ctr">
+                      <a:solidFill>
+                        <a:srgbClr val="D9D4D0"/>
+                      </a:solidFill>
+                      <a:prstDash val="solid"/>
+                      <a:round/>
+                      <a:headEnd type="none" w="med" len="med"/>
+                      <a:tailEnd type="none" w="med" len="med"/>
+                    </a:lnB>
+                    <a:solidFill>
+                      <a:srgbClr val="FFFFFF"/>
+                    </a:solidFill>
+                  </a:tcPr>
+                </a:tc>
+                <a:tc>
+                  <a:txBody>
+                    <a:bodyPr/>
+                    <a:lstStyle/>
+                    <a:p>
+                      <a:pPr algn="ctr" indent="0" marL="0">
+                        <a:buNone/>
+                      </a:pPr>
+                      <a:r>
+                        <a:rPr lang="en-US" sz="1800" dirty="0">
+                          <a:solidFill>
+                            <a:srgbClr val="0B0B0B"/>
+                          </a:solidFill>
+                          <a:latin typeface="Calibri" pitchFamily="34" charset="0"/>
+                          <a:ea typeface="Calibri" pitchFamily="34" charset="-122"/>
+                          <a:cs typeface="Calibri" pitchFamily="34" charset="-120"/>
+                        </a:rPr>
+                        <a:t>0.9985</a:t>
+                      </a:r>
+                      <a:endParaRPr lang="en-US" sz="1800" dirty="0">
+                        <a:latin typeface="Calibri" charset="0"/>
+                        <a:ea typeface="Calibri" charset="0"/>
+                        <a:cs typeface="Calibri" charset="0"/>
+                      </a:endParaRPr>
+                    </a:p>
+                  </a:txBody>
+                  <a:tcPr marL="45720" marR="45720" marT="45720" marB="45720" anchor="ctr">
+                    <a:lnL w="9525" cap="flat" cmpd="sng" algn="ctr">
+                      <a:solidFill>
+                        <a:srgbClr val="D9D4D0"/>
+                      </a:solidFill>
+                      <a:prstDash val="solid"/>
+                      <a:round/>
+                      <a:headEnd type="none" w="med" len="med"/>
+                      <a:tailEnd type="none" w="med" len="med"/>
+                    </a:lnL>
+                    <a:lnR w="9525" cap="flat" cmpd="sng" algn="ctr">
+                      <a:solidFill>
+                        <a:srgbClr val="D9D4D0"/>
+                      </a:solidFill>
+                      <a:prstDash val="solid"/>
+                      <a:round/>
+                      <a:headEnd type="none" w="med" len="med"/>
+                      <a:tailEnd type="none" w="med" len="med"/>
+                    </a:lnR>
+                    <a:lnT w="9525" cap="flat" cmpd="sng" algn="ctr">
+                      <a:solidFill>
+                        <a:srgbClr val="D9D4D0"/>
+                      </a:solidFill>
+                      <a:prstDash val="solid"/>
+                      <a:round/>
+                      <a:headEnd type="none" w="med" len="med"/>
+                      <a:tailEnd type="none" w="med" len="med"/>
+                    </a:lnT>
+                    <a:lnB w="9525" cap="flat" cmpd="sng" algn="ctr">
+                      <a:solidFill>
+                        <a:srgbClr val="D9D4D0"/>
+                      </a:solidFill>
+                      <a:prstDash val="solid"/>
+                      <a:round/>
+                      <a:headEnd type="none" w="med" len="med"/>
+                      <a:tailEnd type="none" w="med" len="med"/>
+                    </a:lnB>
+                    <a:solidFill>
+                      <a:srgbClr val="FFFFFF"/>
+                    </a:solidFill>
+                  </a:tcPr>
+                </a:tc>
+              </a:tr>
+            </a:tbl>
+          </a:graphicData>
+        </a:graphic>
+      </p:graphicFrame>
+      <p:sp>
+        <p:nvSpPr>
+          <p:cNvPr id="38" name="Shape 29"/>
+          <p:cNvSpPr/>
+          <p:nvPr/>
+        </p:nvSpPr>
+        <p:spPr>
+          <a:xfrm>
+            <a:off x="24566880" y="19198463"/>
+            <a:ext cx="11094720" cy="7680960"/>
+          </a:xfrm>
+          <a:prstGeom prst="rect">
+            <a:avLst/>
+          </a:prstGeom>
+          <a:solidFill>
+            <a:srgbClr val="FFFFFF"/>
+          </a:solidFill>
+          <a:ln w="12700">
+            <a:solidFill>
+              <a:srgbClr val="D9D4D0"/>
+            </a:solidFill>
+            <a:prstDash val="solid"/>
+          </a:ln>
+        </p:spPr>
+      </p:sp>
+      <p:sp>
+        <p:nvSpPr>
+          <p:cNvPr id="39" name="Heading"/>
+          <p:cNvSpPr txBox="1"/>
+          <p:nvPr/>
+        </p:nvSpPr>
+        <p:spPr>
+          <a:xfrm>
+            <a:off x="24886920" y="19518503"/>
+            <a:ext cx="10454640" cy="1009650"/>
+          </a:xfrm>
+          <a:prstGeom prst="rect">
+            <a:avLst/>
+          </a:prstGeom>
+          <a:noFill/>
+          <a:ln/>
+        </p:spPr>
+        <p:txBody>
+          <a:bodyPr wrap="square" lIns="0" tIns="0" rIns="0" bIns="0" rtlCol="0" anchor="t"/>
+          <a:lstStyle/>
+          <a:p>
+            <a:pPr indent="0" marL="0">
+              <a:buNone/>
+            </a:pPr>
+            <a:r>
+              <a:rPr lang="en-US" sz="3300" b="1" dirty="0">
+                <a:solidFill>
+                  <a:srgbClr val="9E1B32"/>
+                </a:solidFill>
+                <a:latin typeface="Calibri" pitchFamily="34" charset="0"/>
+                <a:ea typeface="Calibri" pitchFamily="34" charset="-122"/>
+                <a:cs typeface="Calibri" pitchFamily="34" charset="-120"/>
+              </a:rPr>
+              <a:t>Time-resolved stability: σ(t, τ) maps for non-stationary records</a:t>
+            </a:r>
+            <a:endParaRPr lang="en-US" sz="3300" dirty="0"/>
+          </a:p>
+        </p:txBody>
+      </p:sp>
+      <p:pic>
+        <p:nvPicPr>
+          <p:cNvPr id="40" name="F7_dynamic" descr="/home/user/SigmaTau.jl/poster/figures/F7_dynamic.png">    </p:cNvPr>
+          <p:cNvPicPr>
+            <a:picLocks noChangeAspect="1"/>
+          </p:cNvPicPr>
+          <p:nvPr/>
+        </p:nvPicPr>
+        <p:blipFill>
+          <a:blip r:embed="rId6"/>
+          <a:stretch>
+            <a:fillRect/>
+          </a:stretch>
+        </p:blipFill>
+        <p:spPr>
+          <a:xfrm>
+            <a:off x="26911773" y="20692745"/>
+            <a:ext cx="6404934" cy="4572000"/>
+          </a:xfrm>
+          <a:prstGeom prst="rect">
+            <a:avLst/>
+          </a:prstGeom>
+        </p:spPr>
+      </p:pic>
+      <p:sp>
+        <p:nvSpPr>
+          <p:cNvPr id="41" name="Caption"/>
+          <p:cNvSpPr txBox="1"/>
+          <p:nvPr/>
+        </p:nvSpPr>
+        <p:spPr>
+          <a:xfrm>
+            <a:off x="24886920" y="25374473"/>
+            <a:ext cx="10454640" cy="1184910"/>
+          </a:xfrm>
+          <a:prstGeom prst="rect">
+            <a:avLst/>
+          </a:prstGeom>
+          <a:noFill/>
+          <a:ln/>
+        </p:spPr>
+        <p:txBody>
+          <a:bodyPr wrap="square" lIns="0" tIns="0" rIns="0" bIns="0" rtlCol="0" anchor="t"/>
+          <a:lstStyle/>
+          <a:p>
+            <a:pPr indent="0" marL="0">
+              <a:buNone/>
+            </a:pPr>
+            <a:r>
+              <a:rPr lang="en-US" sz="1950" dirty="0">
+                <a:solidFill>
+                  <a:srgbClr val="52514E"/>
+                </a:solidFill>
+                <a:latin typeface="Calibri" pitchFamily="34" charset="0"/>
+                <a:ea typeface="Calibri" pitchFamily="34" charset="-122"/>
+                <a:cs typeface="Calibri" pitchFamily="34" charset="-120"/>
+              </a:rPr>
+              <a:t>Fig. 5. DADEV on a synthesized 8191-sample record (τ₀ = 1 s): white FM at σ</a:t>
+            </a:r>
+            <a:pPr indent="0" marL="0">
+              <a:buNone/>
+            </a:pPr>
+            <a:r>
+              <a:rPr lang="en-US" sz="1950" baseline="-40000" dirty="0">
+                <a:solidFill>
+                  <a:srgbClr val="52514E"/>
+                </a:solidFill>
+                <a:latin typeface="Calibri" pitchFamily="34" charset="0"/>
+                <a:ea typeface="Calibri" pitchFamily="34" charset="-122"/>
+                <a:cs typeface="Calibri" pitchFamily="34" charset="-120"/>
+              </a:rPr>
+              <a:t>y</a:t>
+            </a:r>
+            <a:pPr indent="0" marL="0">
+              <a:buNone/>
+            </a:pPr>
+            <a:r>
+              <a:rPr lang="en-US" sz="1950" dirty="0">
+                <a:solidFill>
+                  <a:srgbClr val="52514E"/>
+                </a:solidFill>
+                <a:latin typeface="Calibri" pitchFamily="34" charset="0"/>
+                <a:ea typeface="Calibri" pitchFamily="34" charset="-122"/>
+                <a:cs typeface="Calibri" pitchFamily="34" charset="-120"/>
+              </a:rPr>
+              <a:t>(1 s) = 1 × 10⁻¹² for the first half, then 3 × 10⁻¹² plus flicker FM at 1 × 10⁻¹²; window 1024 samples, step 128. Each cell is an ordinary overlapping ADEV of its window, so the change is located to within one window length; a 3-D view is in the desktop explorer.</a:t>
+            </a:r>
+            <a:endParaRPr lang="en-US" sz="1950" dirty="0"/>
+          </a:p>
+        </p:txBody>
+      </p:sp>
+      <p:sp>
+        <p:nvSpPr>
+          <p:cNvPr id="42" name="Shape 32"/>
           <p:cNvSpPr/>
           <p:nvPr/>
         </p:nvSpPr>
@@ -8073,7 +8185,7 @@
       </p:sp>
       <p:sp>
         <p:nvSpPr>
-          <p:cNvPr id="41" name="References A"/>
+          <p:cNvPr id="43" name="References A"/>
           <p:cNvSpPr txBox="1"/>
           <p:nvPr/>
         </p:nvSpPr>
@@ -8192,7 +8304,7 @@
       </p:sp>
       <p:sp>
         <p:nvSpPr>
-          <p:cNvPr id="42" name="References B"/>
+          <p:cNvPr id="44" name="References B"/>
           <p:cNvSpPr txBox="1"/>
           <p:nvPr/>
         </p:nvSpPr>
@@ -8291,7 +8403,7 @@
       </p:sp>
       <p:sp>
         <p:nvSpPr>
-          <p:cNvPr id="43" name="Acknowledgments"/>
+          <p:cNvPr id="45" name="Acknowledgments"/>
           <p:cNvSpPr txBox="1"/>
           <p:nvPr/>
         </p:nvSpPr>

--- a/poster/SigmaTau_poster_draft.pptx
+++ b/poster/SigmaTau_poster_draft.pptx
@@ -8014,7 +8014,7 @@
         <p:spPr>
           <a:xfrm>
             <a:off x="24566880" y="19198463"/>
-            <a:ext cx="11094720" cy="7680960"/>
+            <a:ext cx="11094720" cy="7772400"/>
           </a:xfrm>
           <a:prstGeom prst="rect">
             <a:avLst/>
@@ -8085,8 +8085,8 @@
         </p:blipFill>
         <p:spPr>
           <a:xfrm>
-            <a:off x="26911773" y="20692745"/>
-            <a:ext cx="6404934" cy="4572000"/>
+            <a:off x="27133415" y="20692745"/>
+            <a:ext cx="5961650" cy="4663440"/>
           </a:xfrm>
           <a:prstGeom prst="rect">
             <a:avLst/>
@@ -8101,7 +8101,7 @@
         </p:nvSpPr>
         <p:spPr>
           <a:xfrm>
-            <a:off x="24886920" y="25374473"/>
+            <a:off x="24886920" y="25465913"/>
             <a:ext cx="10454640" cy="1184910"/>
           </a:xfrm>
           <a:prstGeom prst="rect">
@@ -8126,7 +8126,7 @@
                 <a:ea typeface="Calibri" pitchFamily="34" charset="-122"/>
                 <a:cs typeface="Calibri" pitchFamily="34" charset="-120"/>
               </a:rPr>
-              <a:t>Fig. 5. DADEV on a synthesized 8191-sample record (τ₀ = 1 s): white FM at σ</a:t>
+              <a:t>Fig. 5. DADEV waterfall on a synthesized 8191-sample record (τ₀ = 1 s): white FM at σ</a:t>
             </a:r>
             <a:pPr indent="0" marL="0">
               <a:buNone/>
@@ -8154,7 +8154,7 @@
                 <a:ea typeface="Calibri" pitchFamily="34" charset="-122"/>
                 <a:cs typeface="Calibri" pitchFamily="34" charset="-120"/>
               </a:rPr>
-              <a:t>(1 s) = 1 × 10⁻¹² for the first half, then 3 × 10⁻¹² plus flicker FM at 1 × 10⁻¹²; window 1024 samples, step 128. Each cell is an ordinary overlapping ADEV of its window, so the change is located to within one window length; a 3-D view is in the desktop explorer.</a:t>
+              <a:t>(1 s) = 1 × 10⁻¹² for the first half, then 3 × 10⁻¹² plus flicker FM at 1 × 10⁻¹²; window 1024 samples, step 128. Each curve is the overlapping ADEV of one window, so the change is located to within one window length.</a:t>
             </a:r>
             <a:endParaRPr lang="en-US" sz="1950" dirty="0"/>
           </a:p>

--- a/poster/SigmaTau_poster_draft.pptx
+++ b/poster/SigmaTau_poster_draft.pptx
@@ -935,7 +935,7 @@
                 <a:ea typeface="Calibri" pitchFamily="34" charset="-122"/>
                 <a:cs typeface="Calibri" pitchFamily="34" charset="-120"/>
               </a:rPr>
-              <a:t>SigmaTau.jl: unified, validated and fast time-and-frequency stability analysis in Julia</a:t>
+              <a:t>SigmaTau.jl: time-and-frequency stability analysis in Julia</a:t>
             </a:r>
             <a:endParaRPr lang="en-US" sz="6000" dirty="0"/>
           </a:p>
@@ -974,7 +974,7 @@
                 <a:ea typeface="Calibri" pitchFamily="34" charset="-122"/>
                 <a:cs typeface="Calibri" pitchFamily="34" charset="-120"/>
               </a:rPr>
-              <a:t>Every estimator family with per-τ noise identification, EDF and χ² intervals in one call · matches Stable32 and allantools · modified-total kernels 1,600 to 4,200× faster · a new Monte-Carlo-calibrated MHTOTDEV</a:t>
+              <a:t>Every estimator family, per-τ noise ID, EDF and χ² intervals in one call · matches Stable32 and allantools · modified-total kernels 1,600 to 4,200× faster · new Monte-Carlo-calibrated MHTOTDEV</a:t>
             </a:r>
             <a:endParaRPr lang="en-US" sz="2800" dirty="0"/>
           </a:p>
@@ -1042,7 +1042,7 @@
         <p:spPr>
           <a:xfrm>
             <a:off x="914400" y="4206240"/>
-            <a:ext cx="11094720" cy="13876020"/>
+            <a:ext cx="11094720" cy="12342495"/>
           </a:xfrm>
           <a:prstGeom prst="rect">
             <a:avLst/>
@@ -1067,7 +1067,7 @@
         <p:spPr>
           <a:xfrm>
             <a:off x="1234440" y="4526280"/>
-            <a:ext cx="10454640" cy="1009650"/>
+            <a:ext cx="10454640" cy="527685"/>
           </a:xfrm>
           <a:prstGeom prst="rect">
             <a:avLst/>
@@ -1091,7 +1091,7 @@
                 <a:ea typeface="Calibri" pitchFamily="34" charset="-122"/>
                 <a:cs typeface="Calibri" pitchFamily="34" charset="-120"/>
               </a:rPr>
-              <a:t>One API, every estimator, a χ² interval with every point</a:t>
+              <a:t>One API: every estimator, noise ID, EDF, χ² bounds</a:t>
             </a:r>
             <a:endParaRPr lang="en-US" sz="3300" dirty="0"/>
           </a:p>
@@ -1105,8 +1105,8 @@
         </p:nvSpPr>
         <p:spPr>
           <a:xfrm>
-            <a:off x="1234440" y="5700522"/>
-            <a:ext cx="10454640" cy="5615940"/>
+            <a:off x="1234440" y="5218557"/>
+            <a:ext cx="10454640" cy="4564380"/>
           </a:xfrm>
           <a:prstGeom prst="rect">
             <a:avLst/>
@@ -1134,7 +1134,7 @@
                 <a:ea typeface="Calibri" pitchFamily="34" charset="-122"/>
                 <a:cs typeface="Calibri" pitchFamily="34" charset="-120"/>
               </a:rPr>
-              <a:t>Allan: </a:t>
+              <a:t>Estimators: </a:t>
             </a:r>
             <a:pPr indent="0" marL="0">
               <a:buNone/>
@@ -1148,7 +1148,7 @@
                 <a:ea typeface="Calibri" pitchFamily="34" charset="-122"/>
                 <a:cs typeface="Calibri" pitchFamily="34" charset="-120"/>
               </a:rPr>
-              <a:t>ADEV, MDEV, TDEV.  Hadamard: HDEV, MHDEV, HTDEV.  Total: TOTDEV, MTOTDEV, TTOTDEV, HTOTDEV, MHTOTDEV.  Thêo1 / ThêoBR / ThêoH.  MTIE, TIE rms, PDEV.  Time-resolved DADEV / DHDEV.  Real-time ADEV / MDEV / HDEV / MHDEV.  N-cornered hat.  S</a:t>
+              <a:t>ADEV/MDEV/TDEV; HDEV/MHDEV/HTDEV; TOTDEV, MTOTDEV, TTOTDEV, HTOTDEV, MHTOTDEV; Thêo1/ThêoBR/ThêoH; MTIE, TIE rms, PDEV; DADEV/DHDEV; S</a:t>
             </a:r>
             <a:pPr indent="0" marL="0">
               <a:buNone/>
@@ -1204,7 +1204,7 @@
                 <a:ea typeface="Calibri" pitchFamily="34" charset="-122"/>
                 <a:cs typeface="Calibri" pitchFamily="34" charset="-120"/>
               </a:rPr>
-              <a:t>, ℒ(f), calibrated power-law synthesis.</a:t>
+              <a:t>, ℒ(f); calibrated power-law synthesis.</a:t>
             </a:r>
             <a:endParaRPr lang="en-US" sz="2400" dirty="0"/>
           </a:p>
@@ -1225,7 +1225,7 @@
                 <a:ea typeface="Calibri" pitchFamily="34" charset="-122"/>
                 <a:cs typeface="Calibri" pitchFamily="34" charset="-120"/>
               </a:rPr>
-              <a:t>Per τ, in the same call: </a:t>
+              <a:t>Per τ: </a:t>
             </a:r>
             <a:pPr indent="0" marL="0">
               <a:buNone/>
@@ -1239,7 +1239,7 @@
                 <a:ea typeface="Calibri" pitchFamily="34" charset="-122"/>
                 <a:cs typeface="Calibri" pitchFamily="34" charset="-120"/>
               </a:rPr>
-              <a:t>the deviation, the noise type (lag-1 autocorrelation with B1 / R(n) fallback), the Greenhall–Riley EDF, and the χ² bounds at 68.3 % (switchable). Total-family bias corrections are on by default and switchable.</a:t>
+              <a:t>σ, noise type (lag-1; B1/R(n) fallback), Greenhall–Riley EDF, 68.3 % χ² bounds (switchable). Total-family bias correction default on, switchable.</a:t>
             </a:r>
             <a:endParaRPr lang="en-US" sz="2400" dirty="0"/>
           </a:p>
@@ -1274,7 +1274,7 @@
                 <a:ea typeface="Calibri" pitchFamily="34" charset="-122"/>
                 <a:cs typeface="Calibri" pitchFamily="34" charset="-120"/>
               </a:rPr>
-              <a:t>phase or frequency, any τ grid; read, detrend, gap-fill and outlier tools; plain-text round-trip of results.</a:t>
+              <a:t>phase or frequency, any τ grid; read/detrend/gap-fill/outlier tools; plain-text round-trip.</a:t>
             </a:r>
             <a:endParaRPr lang="en-US" sz="2400" dirty="0"/>
           </a:p>
@@ -1295,7 +1295,7 @@
                 <a:ea typeface="Calibri" pitchFamily="34" charset="-122"/>
                 <a:cs typeface="Calibri" pitchFamily="34" charset="-120"/>
               </a:rPr>
-              <a:t>Real-time and multi-clock: </a:t>
+              <a:t>Real-time, multi-clock: </a:t>
             </a:r>
             <a:pPr indent="0" marL="0">
               <a:buNone/>
@@ -1309,7 +1309,7 @@
                 <a:ea typeface="Calibri" pitchFamily="34" charset="-122"/>
                 <a:cs typeface="Calibri" pitchFamily="34" charset="-120"/>
               </a:rPr>
-              <a:t>ADEV, MDEV, HDEV and MHDEV accumulate in O(1) per sample per τ from a ring buffer of at most 4·m</a:t>
+              <a:t>ADEV/MDEV/HDEV/MHDEV in O(1) per sample per τ; ring buffer ≤ 4·m</a:t>
             </a:r>
             <a:pPr indent="0" marL="0">
               <a:buNone/>
@@ -1337,7 +1337,7 @@
                 <a:ea typeface="Calibri" pitchFamily="34" charset="-122"/>
                 <a:cs typeface="Calibri" pitchFamily="34" charset="-120"/>
               </a:rPr>
-              <a:t> + 1 samples and reproduce the batch kernels on the samples seen so far to ≤ 2 × 10⁻¹¹ relative (Dobrogowski–Kasznia 2007, extended to third differences); dynamic σ(t, τ) maps; N-cornered hat for N ≥ 3 clocks.</a:t>
+              <a:t> + 1 samples; ≤ 2 × 10⁻¹¹ relative to batch kernels on samples seen so far (Dobrogowski–Kasznia 2007, extended to third differences). N-cornered hat, N ≥ 3.</a:t>
             </a:r>
             <a:endParaRPr lang="en-US" sz="2400" dirty="0"/>
           </a:p>
@@ -1351,7 +1351,7 @@
         </p:nvSpPr>
         <p:spPr>
           <a:xfrm>
-            <a:off x="1234440" y="11426190"/>
+            <a:off x="1234440" y="9892665"/>
             <a:ext cx="10454640" cy="1215390"/>
           </a:xfrm>
           <a:prstGeom prst="roundRect">
@@ -1378,7 +1378,7 @@
         </p:nvSpPr>
         <p:spPr>
           <a:xfrm>
-            <a:off x="1417320" y="11535918"/>
+            <a:off x="1417320" y="10002393"/>
             <a:ext cx="10088880" cy="995934"/>
           </a:xfrm>
           <a:prstGeom prst="rect">
@@ -1458,7 +1458,7 @@
           </p:nvPr>
         </p:nvGraphicFramePr>
         <p:xfrm>
-          <a:off x="1234440" y="12778740"/>
+          <a:off x="1234440" y="11245215"/>
           <a:ext cx="10454640" cy="914400"/>
         </p:xfrm>
         <a:graphic>
@@ -4212,8 +4212,8 @@
         </p:nvSpPr>
         <p:spPr>
           <a:xfrm>
-            <a:off x="914400" y="18493740"/>
-            <a:ext cx="11094720" cy="8113395"/>
+            <a:off x="914400" y="16960215"/>
+            <a:ext cx="11094720" cy="8823960"/>
           </a:xfrm>
           <a:prstGeom prst="rect">
             <a:avLst/>
@@ -4237,7 +4237,7 @@
         </p:nvSpPr>
         <p:spPr>
           <a:xfrm>
-            <a:off x="1234440" y="18813780"/>
+            <a:off x="1234440" y="17280255"/>
             <a:ext cx="10454640" cy="527685"/>
           </a:xfrm>
           <a:prstGeom prst="rect">
@@ -4262,7 +4262,7 @@
                 <a:ea typeface="Calibri" pitchFamily="34" charset="-122"/>
                 <a:cs typeface="Calibri" pitchFamily="34" charset="-120"/>
               </a:rPr>
-              <a:t>Deviation, noise type and interval at every τ</a:t>
+              <a:t>Deviation, noise type and χ² interval at every τ</a:t>
             </a:r>
             <a:endParaRPr lang="en-US" sz="3300" dirty="0"/>
           </a:p>
@@ -4284,8 +4284,8 @@
         </p:blipFill>
         <p:spPr>
           <a:xfrm>
-            <a:off x="2670243" y="19506057"/>
-            <a:ext cx="7583033" cy="5486400"/>
+            <a:off x="1785556" y="17972532"/>
+            <a:ext cx="9352408" cy="6766560"/>
           </a:xfrm>
           <a:prstGeom prst="rect">
             <a:avLst/>
@@ -4300,8 +4300,8 @@
         </p:nvSpPr>
         <p:spPr>
           <a:xfrm>
-            <a:off x="1234440" y="25102185"/>
-            <a:ext cx="10454640" cy="1184910"/>
+            <a:off x="1234440" y="24848820"/>
+            <a:ext cx="10454640" cy="615315"/>
           </a:xfrm>
           <a:prstGeom prst="rect">
             <a:avLst/>
@@ -4325,7 +4325,7 @@
                 <a:ea typeface="Calibri" pitchFamily="34" charset="-122"/>
                 <a:cs typeface="Calibri" pitchFamily="34" charset="-120"/>
               </a:rPr>
-              <a:t>Fig. 1. One call on the shipped 8192-point validation record (τ₀ = 1 s): five estimators with 68.3 % χ² intervals from the noise type identified at each τ (top strip). The totals reach further (TOTDEV to τ = T/2, MHTOTDEV to T/4) with tighter long-τ bounds; MDEV separates white from flicker PM.</a:t>
+              <a:t>Fig. 1. Shipped 8192-point record, τ₀ = 1 s, one call: five estimators, per-τ noise type (top strip), 68.3 % χ² intervals. TOTDEV reaches T/2, MHTOTDEV T/4, tighter long-τ bounds.</a:t>
             </a:r>
             <a:endParaRPr lang="en-US" sz="1950" dirty="0"/>
           </a:p>
@@ -4340,7 +4340,7 @@
         <p:spPr>
           <a:xfrm>
             <a:off x="12740640" y="4206240"/>
-            <a:ext cx="11094720" cy="9695688"/>
+            <a:ext cx="11094720" cy="8074533"/>
           </a:xfrm>
           <a:prstGeom prst="rect">
             <a:avLst/>
@@ -4389,7 +4389,7 @@
                 <a:ea typeface="Calibri" pitchFamily="34" charset="-122"/>
                 <a:cs typeface="Calibri" pitchFamily="34" charset="-120"/>
               </a:rPr>
-              <a:t>Matches Stable32 to its printed precision and allantools to machine precision</a:t>
+              <a:t>Matches Stable32 to printed precision, allantools to machine precision</a:t>
             </a:r>
             <a:endParaRPr lang="en-US" sz="3300" dirty="0"/>
           </a:p>
@@ -4404,7 +4404,7 @@
         <p:spPr>
           <a:xfrm>
             <a:off x="13060680" y="5700522"/>
-            <a:ext cx="10454640" cy="2545080"/>
+            <a:ext cx="10454640" cy="1493520"/>
           </a:xfrm>
           <a:prstGeom prst="rect">
             <a:avLst/>
@@ -4431,7 +4431,7 @@
                 <a:ea typeface="Calibri" pitchFamily="34" charset="-122"/>
                 <a:cs typeface="Calibri" pitchFamily="34" charset="-120"/>
               </a:rPr>
-              <a:t>Shipped fixture: an 8192-point phase record with the Stable32 and allantools outputs beside it. ADEV, MDEV, TDEV and HDEV agree with Stable32 to ≤ 0.005 % (its five significant figures) and with allantools to ≤ 1 × 10⁻¹³; raw total kernels agree with allantools to ≤ 4.4 × 10⁻¹⁵; confidence bounds agree with Stable32 to ≤ 0.05 % at 11 of 12 τ. Where a default differs from a reference (MTOTDEV bias policy, noise-ID detrending), the per-τ tables name the keyword that reproduces it.</a:t>
+              <a:t>Shipped fixture: 8192-point phase record, Stable32 and allantools outputs. ADEV/MDEV/TDEV/HDEV: ≤ 0.005 % vs Stable32 (five significant figures); ≤ 1 × 10⁻¹³ vs allantools. Raw total kernels: ≤ 4.4 × 10⁻¹⁵ vs allantools. Confidence bounds: ≤ 0.05 % vs Stable32 at 11 of 12 τ.</a:t>
             </a:r>
             <a:endParaRPr lang="en-US" sz="2400" dirty="0"/>
           </a:p>
@@ -4453,7 +4453,7 @@
         </p:blipFill>
         <p:spPr>
           <a:xfrm>
-            <a:off x="14795996" y="8355330"/>
+            <a:off x="14795996" y="7303770"/>
             <a:ext cx="6984008" cy="3931920"/>
           </a:xfrm>
           <a:prstGeom prst="rect">
@@ -4469,8 +4469,8 @@
         </p:nvSpPr>
         <p:spPr>
           <a:xfrm>
-            <a:off x="13060680" y="12396978"/>
-            <a:ext cx="10454640" cy="1184910"/>
+            <a:off x="13060680" y="11345418"/>
+            <a:ext cx="10454640" cy="615315"/>
           </a:xfrm>
           <a:prstGeom prst="rect">
             <a:avLst/>
@@ -4494,7 +4494,7 @@
                 <a:ea typeface="Calibri" pitchFamily="34" charset="-122"/>
                 <a:cs typeface="Calibri" pitchFamily="34" charset="-120"/>
               </a:rPr>
-              <a:t>Fig. 2. Relative difference to Stable32 at every τ for seven estimators. Filled points lie at or below the 5 × 10⁻⁵ floor set by Stable32's printed precision; open points are the τ = 256 s noise-ID convention (Stable32 α = +2, detrended identifier α = 0). MTOTDEV compared raw, as Stable32 reports the uncorrected statistic.</a:t>
+              <a:t>Fig. 2. Seven estimators vs Stable32, every τ. Filled: ≤ 5 × 10⁻⁵ printed-precision floor. Open: τ = 256 s, Stable32 α = +2, detrended α = 0. MTOTDEV raw.</a:t>
             </a:r>
             <a:endParaRPr lang="en-US" sz="1950" dirty="0"/>
           </a:p>
@@ -4508,8 +4508,8 @@
         </p:nvSpPr>
         <p:spPr>
           <a:xfrm>
-            <a:off x="12740640" y="14313408"/>
-            <a:ext cx="11094720" cy="8968931"/>
+            <a:off x="12740640" y="12692253"/>
+            <a:ext cx="11094720" cy="7409688"/>
           </a:xfrm>
           <a:prstGeom prst="rect">
             <a:avLst/>
@@ -4533,8 +4533,8 @@
         </p:nvSpPr>
         <p:spPr>
           <a:xfrm>
-            <a:off x="13060680" y="14633448"/>
-            <a:ext cx="10454640" cy="1009650"/>
+            <a:off x="13060680" y="13012293"/>
+            <a:ext cx="10454640" cy="527685"/>
           </a:xfrm>
           <a:prstGeom prst="rect">
             <a:avLst/>
@@ -4558,7 +4558,7 @@
                 <a:ea typeface="Calibri" pitchFamily="34" charset="-122"/>
                 <a:cs typeface="Calibri" pitchFamily="34" charset="-120"/>
               </a:rPr>
-              <a:t>Modified totals on a 4 × 10⁵-sample record: 0.47 s instead of 30 min</a:t>
+              <a:t>4 × 10⁵-sample modified totals: 0.47 s vs 30 min</a:t>
             </a:r>
             <a:endParaRPr lang="en-US" sz="3300" dirty="0"/>
           </a:p>
@@ -4572,8 +4572,8 @@
         </p:nvSpPr>
         <p:spPr>
           <a:xfrm>
-            <a:off x="13060680" y="15807690"/>
-            <a:ext cx="10454640" cy="2194560"/>
+            <a:off x="13060680" y="13704570"/>
+            <a:ext cx="10454640" cy="1493520"/>
           </a:xfrm>
           <a:prstGeom prst="rect">
             <a:avLst/>
@@ -4600,7 +4600,7 @@
                 <a:ea typeface="Calibri" pitchFamily="34" charset="-122"/>
                 <a:cs typeface="Calibri" pitchFamily="34" charset="-120"/>
               </a:rPr>
-              <a:t>Same samples, same τ grid, same statistic, kernel-only timing; allantools is single-threaded as it has no parallel path. On a measured 406 763-sample phase record MTOTDEV takes 0.469 s against 1 803.6 s and HTOTDEV 0.455 s against 1 928.0 s (3,842× and 4,233×). The gap is algorithmic as well as compiled-versus-interpreted: the reflected extension is streamed through a per-thread buffer and the window sum is split across threads.</a:t>
+              <a:t>Measured 406 763-sample phase record, kernel-only timing, same samples, τ grid and statistic; allantools single-threaded (no parallel path). MTOTDEV 0.469 s vs 1 803.6 s (3,842×); HTOTDEV 0.455 s vs 1 928.0 s (4,233×). Reflected extension streamed per thread; window sum split across threads.</a:t>
             </a:r>
             <a:endParaRPr lang="en-US" sz="2400" dirty="0"/>
           </a:p>
@@ -4622,8 +4622,8 @@
         </p:blipFill>
         <p:spPr>
           <a:xfrm>
-            <a:off x="14861441" y="18111978"/>
-            <a:ext cx="6853118" cy="3840480"/>
+            <a:off x="14943026" y="15307818"/>
+            <a:ext cx="6689948" cy="3749040"/>
           </a:xfrm>
           <a:prstGeom prst="rect">
             <a:avLst/>
@@ -4638,7 +4638,134 @@
         </p:nvSpPr>
         <p:spPr>
           <a:xfrm>
-            <a:off x="13060680" y="22062186"/>
+            <a:off x="13060680" y="19166586"/>
+            <a:ext cx="10454640" cy="615315"/>
+          </a:xfrm>
+          <a:prstGeom prst="rect">
+            <a:avLst/>
+          </a:prstGeom>
+          <a:noFill/>
+          <a:ln/>
+        </p:spPr>
+        <p:txBody>
+          <a:bodyPr wrap="square" lIns="0" tIns="0" rIns="0" bIns="0" rtlCol="0" anchor="t"/>
+          <a:lstStyle/>
+          <a:p>
+            <a:pPr indent="0" marL="0">
+              <a:buNone/>
+            </a:pPr>
+            <a:r>
+              <a:rPr lang="en-US" sz="1950" dirty="0">
+                <a:solidFill>
+                  <a:srgbClr val="52514E"/>
+                </a:solidFill>
+                <a:latin typeface="Calibri" pitchFamily="34" charset="0"/>
+                <a:ea typeface="Calibri" pitchFamily="34" charset="-122"/>
+                <a:cs typeface="Calibri" pitchFamily="34" charset="-120"/>
+              </a:rPr>
+              <a:t>Fig. 3. Speed-up per kernel, N = 25 000 white-PM record (bench/), 12-core workstation; diamonds: independent 4-core re-run. Ratios portable; absolute times machine-dependent.</a:t>
+            </a:r>
+            <a:endParaRPr lang="en-US" sz="1950" dirty="0"/>
+          </a:p>
+        </p:txBody>
+      </p:sp>
+      <p:sp>
+        <p:nvSpPr>
+          <p:cNvPr id="26" name="Shape 20"/>
+          <p:cNvSpPr/>
+          <p:nvPr/>
+        </p:nvSpPr>
+        <p:spPr>
+          <a:xfrm>
+            <a:off x="12740640" y="20513421"/>
+            <a:ext cx="11094720" cy="6365558"/>
+          </a:xfrm>
+          <a:prstGeom prst="rect">
+            <a:avLst/>
+          </a:prstGeom>
+          <a:solidFill>
+            <a:srgbClr val="FFFFFF"/>
+          </a:solidFill>
+          <a:ln w="12700">
+            <a:solidFill>
+              <a:srgbClr val="D9D4D0"/>
+            </a:solidFill>
+            <a:prstDash val="solid"/>
+          </a:ln>
+        </p:spPr>
+      </p:sp>
+      <p:sp>
+        <p:nvSpPr>
+          <p:cNvPr id="27" name="Heading"/>
+          <p:cNvSpPr txBox="1"/>
+          <p:nvPr/>
+        </p:nvSpPr>
+        <p:spPr>
+          <a:xfrm>
+            <a:off x="13060680" y="20833461"/>
+            <a:ext cx="10454640" cy="527685"/>
+          </a:xfrm>
+          <a:prstGeom prst="rect">
+            <a:avLst/>
+          </a:prstGeom>
+          <a:noFill/>
+          <a:ln/>
+        </p:spPr>
+        <p:txBody>
+          <a:bodyPr wrap="square" lIns="0" tIns="0" rIns="0" bIns="0" rtlCol="0" anchor="t"/>
+          <a:lstStyle/>
+          <a:p>
+            <a:pPr indent="0" marL="0">
+              <a:buNone/>
+            </a:pPr>
+            <a:r>
+              <a:rPr lang="en-US" sz="3300" b="1" dirty="0">
+                <a:solidFill>
+                  <a:srgbClr val="9E1B32"/>
+                </a:solidFill>
+                <a:latin typeface="Calibri" pitchFamily="34" charset="0"/>
+                <a:ea typeface="Calibri" pitchFamily="34" charset="-122"/>
+                <a:cs typeface="Calibri" pitchFamily="34" charset="-120"/>
+              </a:rPr>
+              <a:t>Desktop explorer: the whole workflow without code</a:t>
+            </a:r>
+            <a:endParaRPr lang="en-US" sz="3300" dirty="0"/>
+          </a:p>
+        </p:txBody>
+      </p:sp>
+      <p:pic>
+        <p:nvPicPr>
+          <p:cNvPr id="28" name="F8_explorer" descr="/home/user/SigmaTau.jl/poster/figures/F8_explorer.png">    </p:cNvPr>
+          <p:cNvPicPr>
+            <a:picLocks noChangeAspect="1"/>
+          </p:cNvPicPr>
+          <p:nvPr/>
+        </p:nvPicPr>
+        <p:blipFill>
+          <a:blip r:embed="rId4"/>
+          <a:stretch>
+            <a:fillRect/>
+          </a:stretch>
+        </p:blipFill>
+        <p:spPr>
+          <a:xfrm>
+            <a:off x="15077872" y="21525738"/>
+            <a:ext cx="6420255" cy="4023360"/>
+          </a:xfrm>
+          <a:prstGeom prst="rect">
+            <a:avLst/>
+          </a:prstGeom>
+        </p:spPr>
+      </p:pic>
+      <p:sp>
+        <p:nvSpPr>
+          <p:cNvPr id="29" name="Caption"/>
+          <p:cNvSpPr txBox="1"/>
+          <p:nvPr/>
+        </p:nvSpPr>
+        <p:spPr>
+          <a:xfrm>
+            <a:off x="13060680" y="25658826"/>
             <a:ext cx="10454640" cy="900112"/>
           </a:xfrm>
           <a:prstGeom prst="rect">
@@ -4663,7 +4790,63 @@
                 <a:ea typeface="Calibri" pitchFamily="34" charset="-122"/>
                 <a:cs typeface="Calibri" pitchFamily="34" charset="-120"/>
               </a:rPr>
-              <a:t>Fig. 3. Speed-up per kernel on an N = 25 000 white-PM record (bench/, 12-core workstation; diamonds: independent 4-core re-run). Ratios are the portable result; absolute times depend on the machine.</a:t>
+              <a:t>Fig. 4. GLMakie desktop app: load or synthesize a record; preprocessing, estimators, τ grid, confidence level; σ</a:t>
+            </a:r>
+            <a:pPr indent="0" marL="0">
+              <a:buNone/>
+            </a:pPr>
+            <a:r>
+              <a:rPr lang="en-US" sz="1950" baseline="-40000" dirty="0">
+                <a:solidFill>
+                  <a:srgbClr val="52514E"/>
+                </a:solidFill>
+                <a:latin typeface="Calibri" pitchFamily="34" charset="0"/>
+                <a:ea typeface="Calibri" pitchFamily="34" charset="-122"/>
+                <a:cs typeface="Calibri" pitchFamily="34" charset="-120"/>
+              </a:rPr>
+              <a:t>y</a:t>
+            </a:r>
+            <a:pPr indent="0" marL="0">
+              <a:buNone/>
+            </a:pPr>
+            <a:r>
+              <a:rPr lang="en-US" sz="1950" dirty="0">
+                <a:solidFill>
+                  <a:srgbClr val="52514E"/>
+                </a:solidFill>
+                <a:latin typeface="Calibri" pitchFamily="34" charset="0"/>
+                <a:ea typeface="Calibri" pitchFamily="34" charset="-122"/>
+                <a:cs typeface="Calibri" pitchFamily="34" charset="-120"/>
+              </a:rPr>
+              <a:t> and σ</a:t>
+            </a:r>
+            <a:pPr indent="0" marL="0">
+              <a:buNone/>
+            </a:pPr>
+            <a:r>
+              <a:rPr lang="en-US" sz="1950" baseline="-40000" dirty="0">
+                <a:solidFill>
+                  <a:srgbClr val="52514E"/>
+                </a:solidFill>
+                <a:latin typeface="Calibri" pitchFamily="34" charset="0"/>
+                <a:ea typeface="Calibri" pitchFamily="34" charset="-122"/>
+                <a:cs typeface="Calibri" pitchFamily="34" charset="-120"/>
+              </a:rPr>
+              <a:t>x</a:t>
+            </a:r>
+            <a:pPr indent="0" marL="0">
+              <a:buNone/>
+            </a:pPr>
+            <a:r>
+              <a:rPr lang="en-US" sz="1950" dirty="0">
+                <a:solidFill>
+                  <a:srgbClr val="52514E"/>
+                </a:solidFill>
+                <a:latin typeface="Calibri" pitchFamily="34" charset="0"/>
+                <a:ea typeface="Calibri" pitchFamily="34" charset="-122"/>
+                <a:cs typeface="Calibri" pitchFamily="34" charset="-120"/>
+              </a:rPr>
+              <a:t> curves with χ² intervals, per-τ table, spectra, dynamic map; PNG/PDF/SVG and TSV export.</a:t>
             </a:r>
             <a:endParaRPr lang="en-US" sz="1950" dirty="0"/>
           </a:p>
@@ -4671,14 +4854,14 @@
       </p:sp>
       <p:sp>
         <p:nvSpPr>
-          <p:cNvPr id="26" name="Shape 20"/>
+          <p:cNvPr id="30" name="Shape 23"/>
           <p:cNvSpPr/>
           <p:nvPr/>
         </p:nvSpPr>
         <p:spPr>
           <a:xfrm>
-            <a:off x="12740640" y="23693819"/>
-            <a:ext cx="11094720" cy="3283585"/>
+            <a:off x="24566880" y="4206240"/>
+            <a:ext cx="11094720" cy="3997325"/>
           </a:xfrm>
           <a:prstGeom prst="rect">
             <a:avLst/>
@@ -4696,13 +4879,13 @@
       </p:sp>
       <p:sp>
         <p:nvSpPr>
-          <p:cNvPr id="27" name="Heading"/>
+          <p:cNvPr id="31" name="Heading"/>
           <p:cNvSpPr txBox="1"/>
           <p:nvPr/>
         </p:nvSpPr>
         <p:spPr>
           <a:xfrm>
-            <a:off x="13060680" y="24013859"/>
+            <a:off x="24886920" y="4526280"/>
             <a:ext cx="10454640" cy="527685"/>
           </a:xfrm>
           <a:prstGeom prst="rect">
@@ -4727,7 +4910,7 @@
                 <a:ea typeface="Calibri" pitchFamily="34" charset="-122"/>
                 <a:cs typeface="Calibri" pitchFamily="34" charset="-120"/>
               </a:rPr>
-              <a:t>Reproducible by construction</a:t>
+              <a:t>MHTOTDEV: new total estimator, calibrated by Monte Carlo</a:t>
             </a:r>
             <a:endParaRPr lang="en-US" sz="3300" dirty="0"/>
           </a:p>
@@ -4735,170 +4918,14 @@
       </p:sp>
       <p:sp>
         <p:nvSpPr>
-          <p:cNvPr id="28" name="Bullets"/>
+          <p:cNvPr id="32" name="Body"/>
           <p:cNvSpPr txBox="1"/>
           <p:nvPr/>
         </p:nvSpPr>
         <p:spPr>
           <a:xfrm>
-            <a:off x="13060680" y="24706136"/>
-            <a:ext cx="10454640" cy="1932940"/>
-          </a:xfrm>
-          <a:prstGeom prst="rect">
-            <a:avLst/>
-          </a:prstGeom>
-          <a:noFill/>
-          <a:ln/>
-        </p:spPr>
-        <p:txBody>
-          <a:bodyPr wrap="square" lIns="0" tIns="0" rIns="0" bIns="0" rtlCol="0" anchor="t"/>
-          <a:lstStyle/>
-          <a:p>
-            <a:pPr marL="279400" indent="-279400">
-              <a:spcAft>
-                <a:spcPts val="700"/>
-              </a:spcAft>
-              <a:buSzPct val="100000"/>
-              <a:buChar char="•"/>
-            </a:pPr>
-            <a:r>
-              <a:rPr lang="en-US" sz="2400" b="1" dirty="0">
-                <a:solidFill>
-                  <a:srgbClr val="0B0B0B"/>
-                </a:solidFill>
-                <a:latin typeface="Calibri" pitchFamily="34" charset="0"/>
-                <a:ea typeface="Calibri" pitchFamily="34" charset="-122"/>
-                <a:cs typeface="Calibri" pitchFamily="34" charset="-120"/>
-              </a:rPr>
-              <a:t>Shipped with the code: </a:t>
-            </a:r>
-            <a:pPr indent="0" marL="0">
-              <a:buNone/>
-            </a:pPr>
-            <a:r>
-              <a:rPr lang="en-US" sz="2400" dirty="0">
-                <a:solidFill>
-                  <a:srgbClr val="0B0B0B"/>
-                </a:solidFill>
-                <a:latin typeface="Calibri" pitchFamily="34" charset="0"/>
-                <a:ea typeface="Calibri" pitchFamily="34" charset="-122"/>
-                <a:cs typeface="Calibri" pitchFamily="34" charset="-120"/>
-              </a:rPr>
-              <a:t>the validation fixture with Stable32 and allantools outputs, the per-τ comparison tables, the benchmark scripts for both libraries, and the Monte Carlo harness with its seed and tracked fit artifact.</a:t>
-            </a:r>
-            <a:endParaRPr lang="en-US" sz="2400" dirty="0"/>
-          </a:p>
-          <a:p>
-            <a:pPr marL="279400" indent="-279400">
-              <a:spcAft>
-                <a:spcPts val="700"/>
-              </a:spcAft>
-              <a:buSzPct val="100000"/>
-              <a:buChar char="•"/>
-            </a:pPr>
-            <a:r>
-              <a:rPr lang="en-US" sz="2400" b="1" dirty="0">
-                <a:solidFill>
-                  <a:srgbClr val="0B0B0B"/>
-                </a:solidFill>
-                <a:latin typeface="Calibri" pitchFamily="34" charset="0"/>
-                <a:ea typeface="Calibri" pitchFamily="34" charset="-122"/>
-                <a:cs typeface="Calibri" pitchFamily="34" charset="-120"/>
-              </a:rPr>
-              <a:t>Next: </a:t>
-            </a:r>
-            <a:pPr indent="0" marL="0">
-              <a:buNone/>
-            </a:pPr>
-            <a:r>
-              <a:rPr lang="en-US" sz="2400" dirty="0">
-                <a:solidFill>
-                  <a:srgbClr val="0B0B0B"/>
-                </a:solidFill>
-                <a:latin typeface="Calibri" pitchFamily="34" charset="0"/>
-                <a:ea typeface="Calibri" pitchFamily="34" charset="-122"/>
-                <a:cs typeface="Calibri" pitchFamily="34" charset="-120"/>
-              </a:rPr>
-              <a:t>real-time monitoring of the laboratory Rb-87 clock comparisons; Monte Carlo calibration of the Thêo family and of gapped records.</a:t>
-            </a:r>
-            <a:endParaRPr lang="en-US" sz="2400" dirty="0"/>
-          </a:p>
-        </p:txBody>
-      </p:sp>
-      <p:sp>
-        <p:nvSpPr>
-          <p:cNvPr id="29" name="Shape 23"/>
-          <p:cNvSpPr/>
-          <p:nvPr/>
-        </p:nvSpPr>
-        <p:spPr>
-          <a:xfrm>
-            <a:off x="24566880" y="4206240"/>
-            <a:ext cx="11094720" cy="5530850"/>
-          </a:xfrm>
-          <a:prstGeom prst="rect">
-            <a:avLst/>
-          </a:prstGeom>
-          <a:solidFill>
-            <a:srgbClr val="FFFFFF"/>
-          </a:solidFill>
-          <a:ln w="12700">
-            <a:solidFill>
-              <a:srgbClr val="D9D4D0"/>
-            </a:solidFill>
-            <a:prstDash val="solid"/>
-          </a:ln>
-        </p:spPr>
-      </p:sp>
-      <p:sp>
-        <p:nvSpPr>
-          <p:cNvPr id="30" name="Heading"/>
-          <p:cNvSpPr txBox="1"/>
-          <p:nvPr/>
-        </p:nvSpPr>
-        <p:spPr>
-          <a:xfrm>
-            <a:off x="24886920" y="4526280"/>
-            <a:ext cx="10454640" cy="1009650"/>
-          </a:xfrm>
-          <a:prstGeom prst="rect">
-            <a:avLst/>
-          </a:prstGeom>
-          <a:noFill/>
-          <a:ln/>
-        </p:spPr>
-        <p:txBody>
-          <a:bodyPr wrap="square" lIns="0" tIns="0" rIns="0" bIns="0" rtlCol="0" anchor="t"/>
-          <a:lstStyle/>
-          <a:p>
-            <a:pPr indent="0" marL="0">
-              <a:buNone/>
-            </a:pPr>
-            <a:r>
-              <a:rPr lang="en-US" sz="3300" b="1" dirty="0">
-                <a:solidFill>
-                  <a:srgbClr val="9E1B32"/>
-                </a:solidFill>
-                <a:latin typeface="Calibri" pitchFamily="34" charset="0"/>
-                <a:ea typeface="Calibri" pitchFamily="34" charset="-122"/>
-                <a:cs typeface="Calibri" pitchFamily="34" charset="-120"/>
-              </a:rPr>
-              <a:t>MHTOTDEV: a new total estimator, calibrated by Monte Carlo</a:t>
-            </a:r>
-            <a:endParaRPr lang="en-US" sz="3300" dirty="0"/>
-          </a:p>
-        </p:txBody>
-      </p:sp>
-      <p:sp>
-        <p:nvSpPr>
-          <p:cNvPr id="31" name="Body"/>
-          <p:cNvSpPr txBox="1"/>
-          <p:nvPr/>
-        </p:nvSpPr>
-        <p:spPr>
-          <a:xfrm>
-            <a:off x="24886920" y="5700522"/>
-            <a:ext cx="10454640" cy="3698240"/>
+            <a:off x="24886920" y="5218557"/>
+            <a:ext cx="10454640" cy="2646680"/>
           </a:xfrm>
           <a:prstGeom prst="rect">
             <a:avLst/>
@@ -4925,7 +4952,7 @@
                 <a:ea typeface="Calibri" pitchFamily="34" charset="-122"/>
                 <a:cs typeface="Calibri" pitchFamily="34" charset="-120"/>
               </a:rPr>
-              <a:t>Modified Hadamard total deviation combines drift rejection (third differences), white-from-flicker PM separation (modified form) and long-τ confidence (reflected extension). No published bias or EDF existed, so both were measured against synthesized noise: α ∈ {+2 … −2}, N ∈ {1024 … 32768}, R = 3000 realizations per cell, one seeded stream per (α, N, r), fits over τ/τ₀ ≥ 16. Bias B = E[MHTOTVAR]/E[MHVAR] against MHDEV on the same realization; EDF from the χ² variance relation, bootstrap standard error 2.6 %.</a:t>
+              <a:t>Monte Carlo: α ∈ {+2 … −2}, N ∈ {1024 … 32768}, R = 3000 per cell, one seeded stream per (α, N, r), fit window τ/τ₀ ≥ 16. Bias B = E[MHTOTVAR]/E[MHVAR] vs MHDEV, same realization; EDF from χ² variance relation; bootstrap SE 2.6 %.</a:t>
             </a:r>
             <a:endParaRPr lang="en-US" sz="2400" dirty="0"/>
           </a:p>
@@ -4945,7 +4972,7 @@
                 <a:ea typeface="Calibri" pitchFamily="34" charset="-122"/>
                 <a:cs typeface="Calibri" pitchFamily="34" charset="-120"/>
               </a:rPr>
-              <a:t>Kernel: the Greenhall scheme of MTOTDEV and HTOTDEV on windows of length 4m (half-mean slope removal, 3× time-reverse extension, modified third difference), after global least-squares drift removal.</a:t>
+              <a:t>Kernel: Greenhall MTOTDEV/HTOTDEV scheme on 4m windows (half-mean slope removal, 3× time-reverse extension, modified third difference) after global least-squares drift removal.</a:t>
             </a:r>
             <a:endParaRPr lang="en-US" sz="2400" dirty="0"/>
           </a:p>
@@ -4953,14 +4980,14 @@
       </p:sp>
       <p:sp>
         <p:nvSpPr>
-          <p:cNvPr id="32" name="Shape 26"/>
+          <p:cNvPr id="33" name="Shape 26"/>
           <p:cNvSpPr/>
           <p:nvPr/>
         </p:nvSpPr>
         <p:spPr>
           <a:xfrm>
-            <a:off x="24566880" y="10148570"/>
-            <a:ext cx="11094720" cy="8638413"/>
+            <a:off x="24566880" y="8615045"/>
+            <a:ext cx="11094720" cy="8065008"/>
           </a:xfrm>
           <a:prstGeom prst="rect">
             <a:avLst/>
@@ -4978,14 +5005,14 @@
       </p:sp>
       <p:sp>
         <p:nvSpPr>
-          <p:cNvPr id="33" name="Heading"/>
+          <p:cNvPr id="34" name="Heading"/>
           <p:cNvSpPr txBox="1"/>
           <p:nvPr/>
         </p:nvSpPr>
         <p:spPr>
           <a:xfrm>
-            <a:off x="24886920" y="10468610"/>
-            <a:ext cx="10454640" cy="1009650"/>
+            <a:off x="24886920" y="8935085"/>
+            <a:ext cx="10454640" cy="527685"/>
           </a:xfrm>
           <a:prstGeom prst="rect">
             <a:avLst/>
@@ -5009,7 +5036,7 @@
                 <a:ea typeface="Calibri" pitchFamily="34" charset="-122"/>
                 <a:cs typeface="Calibri" pitchFamily="34" charset="-120"/>
               </a:rPr>
-              <a:t>Unbiased for PM noise, reads high for red FM; EDF fits with R² ≥ 0.9982</a:t>
+              <a:t>PM unbiased, red FM reads high; EDF R² ≥ 0.9982</a:t>
             </a:r>
             <a:endParaRPr lang="en-US" sz="3300" dirty="0"/>
           </a:p>
@@ -5017,31 +5044,7 @@
       </p:sp>
       <p:pic>
         <p:nvPicPr>
-          <p:cNvPr id="34" name="F4_mhtot_bias" descr="/home/user/SigmaTau.jl/poster/figures/F4_mhtot_bias.png">    </p:cNvPr>
-          <p:cNvPicPr>
-            <a:picLocks noChangeAspect="1"/>
-          </p:cNvPicPr>
-          <p:nvPr/>
-        </p:nvPicPr>
-        <p:blipFill>
-          <a:blip r:embed="rId4"/>
-          <a:stretch>
-            <a:fillRect/>
-          </a:stretch>
-        </p:blipFill>
-        <p:spPr>
-          <a:xfrm>
-            <a:off x="25324428" y="11642852"/>
-            <a:ext cx="4215143" cy="3657600"/>
-          </a:xfrm>
-          <a:prstGeom prst="rect">
-            <a:avLst/>
-          </a:prstGeom>
-        </p:spPr>
-      </p:pic>
-      <p:pic>
-        <p:nvPicPr>
-          <p:cNvPr id="35" name="F5_mhtot_edf" descr="/home/user/SigmaTau.jl/poster/figures/F5_mhtot_edf.png">    </p:cNvPr>
+          <p:cNvPr id="35" name="F4_mhtot_bias" descr="/home/user/SigmaTau.jl/poster/figures/F4_mhtot_bias.png">    </p:cNvPr>
           <p:cNvPicPr>
             <a:picLocks noChangeAspect="1"/>
           </p:cNvPicPr>
@@ -5055,8 +5058,32 @@
         </p:blipFill>
         <p:spPr>
           <a:xfrm>
-            <a:off x="30691116" y="11642852"/>
-            <a:ext cx="4210729" cy="3657600"/>
+            <a:off x="25377118" y="9627362"/>
+            <a:ext cx="4109765" cy="3566160"/>
+          </a:xfrm>
+          <a:prstGeom prst="rect">
+            <a:avLst/>
+          </a:prstGeom>
+        </p:spPr>
+      </p:pic>
+      <p:pic>
+        <p:nvPicPr>
+          <p:cNvPr id="36" name="F5_mhtot_edf" descr="/home/user/SigmaTau.jl/poster/figures/F5_mhtot_edf.png">    </p:cNvPr>
+          <p:cNvPicPr>
+            <a:picLocks noChangeAspect="1"/>
+          </p:cNvPicPr>
+          <p:nvPr/>
+        </p:nvPicPr>
+        <p:blipFill>
+          <a:blip r:embed="rId6"/>
+          <a:stretch>
+            <a:fillRect/>
+          </a:stretch>
+        </p:blipFill>
+        <p:spPr>
+          <a:xfrm>
+            <a:off x="30743750" y="9627362"/>
+            <a:ext cx="4105461" cy="3566160"/>
           </a:xfrm>
           <a:prstGeom prst="rect">
             <a:avLst/>
@@ -5065,13 +5092,13 @@
       </p:pic>
       <p:sp>
         <p:nvSpPr>
-          <p:cNvPr id="36" name="Caption"/>
+          <p:cNvPr id="37" name="Caption"/>
           <p:cNvSpPr txBox="1"/>
           <p:nvPr/>
         </p:nvSpPr>
         <p:spPr>
           <a:xfrm>
-            <a:off x="24886920" y="15410180"/>
+            <a:off x="24886920" y="13303250"/>
             <a:ext cx="10454640" cy="615315"/>
           </a:xfrm>
           <a:prstGeom prst="rect">
@@ -5096,7 +5123,7 @@
                 <a:ea typeface="Calibri" pitchFamily="34" charset="-122"/>
                 <a:cs typeface="Calibri" pitchFamily="34" charset="-120"/>
               </a:rPr>
-              <a:t>Fig. 4. Shipped models B = b₀ + b₁ τ/T and ν = b T/τ − c (seed 20260531). Below T/τ ≈ 5–6 the interval is indicative only; σ itself is valid to the reach limit τ = T/4.</a:t>
+              <a:t>Fig. 5. Models B = b₀ + b₁ τ/T, ν = b T/τ − c (seed 20260531). Interval indicative only below T/τ ≈ 5–6; σ valid to τ = T/4.</a:t>
             </a:r>
             <a:endParaRPr lang="en-US" sz="1950" dirty="0"/>
           </a:p>
@@ -5117,7 +5144,7 @@
           </p:nvPr>
         </p:nvGraphicFramePr>
         <p:xfrm>
-          <a:off x="24886920" y="16116935"/>
+          <a:off x="24886920" y="14010005"/>
           <a:ext cx="10454640" cy="914400"/>
         </p:xfrm>
         <a:graphic>
@@ -8007,14 +8034,14 @@
       </p:graphicFrame>
       <p:sp>
         <p:nvSpPr>
-          <p:cNvPr id="38" name="Shape 29"/>
+          <p:cNvPr id="39" name="Shape 29"/>
           <p:cNvSpPr/>
           <p:nvPr/>
         </p:nvSpPr>
         <p:spPr>
           <a:xfrm>
-            <a:off x="24566880" y="19198463"/>
-            <a:ext cx="11094720" cy="7772400"/>
+            <a:off x="24566880" y="17091533"/>
+            <a:ext cx="11094720" cy="5715000"/>
           </a:xfrm>
           <a:prstGeom prst="rect">
             <a:avLst/>
@@ -8032,14 +8059,14 @@
       </p:sp>
       <p:sp>
         <p:nvSpPr>
-          <p:cNvPr id="39" name="Heading"/>
+          <p:cNvPr id="40" name="Heading"/>
           <p:cNvSpPr txBox="1"/>
           <p:nvPr/>
         </p:nvSpPr>
         <p:spPr>
           <a:xfrm>
-            <a:off x="24886920" y="19518503"/>
-            <a:ext cx="10454640" cy="1009650"/>
+            <a:off x="24886920" y="17411573"/>
+            <a:ext cx="10454640" cy="527685"/>
           </a:xfrm>
           <a:prstGeom prst="rect">
             <a:avLst/>
@@ -8063,7 +8090,7 @@
                 <a:ea typeface="Calibri" pitchFamily="34" charset="-122"/>
                 <a:cs typeface="Calibri" pitchFamily="34" charset="-120"/>
               </a:rPr>
-              <a:t>Time-resolved stability: σ(t, τ) maps for non-stationary records</a:t>
+              <a:t>DADEV σ(t, τ) map: change located to within one window</a:t>
             </a:r>
             <a:endParaRPr lang="en-US" sz="3300" dirty="0"/>
           </a:p>
@@ -8071,22 +8098,22 @@
       </p:sp>
       <p:pic>
         <p:nvPicPr>
-          <p:cNvPr id="40" name="F7_dynamic" descr="/home/user/SigmaTau.jl/poster/figures/F7_dynamic.png">    </p:cNvPr>
+          <p:cNvPr id="41" name="F7_dynamic" descr="/home/user/SigmaTau.jl/poster/figures/F7_dynamic.png">    </p:cNvPr>
           <p:cNvPicPr>
             <a:picLocks noChangeAspect="1"/>
           </p:cNvPicPr>
           <p:nvPr/>
         </p:nvPicPr>
         <p:blipFill>
-          <a:blip r:embed="rId6"/>
+          <a:blip r:embed="rId7"/>
           <a:stretch>
             <a:fillRect/>
           </a:stretch>
         </p:blipFill>
         <p:spPr>
           <a:xfrm>
-            <a:off x="27133415" y="20692745"/>
-            <a:ext cx="5961650" cy="4663440"/>
+            <a:off x="27776338" y="18103850"/>
+            <a:ext cx="4675804" cy="3657600"/>
           </a:xfrm>
           <a:prstGeom prst="rect">
             <a:avLst/>
@@ -8095,14 +8122,14 @@
       </p:pic>
       <p:sp>
         <p:nvSpPr>
-          <p:cNvPr id="41" name="Caption"/>
+          <p:cNvPr id="42" name="Caption"/>
           <p:cNvSpPr txBox="1"/>
           <p:nvPr/>
         </p:nvSpPr>
         <p:spPr>
           <a:xfrm>
-            <a:off x="24886920" y="25465913"/>
-            <a:ext cx="10454640" cy="1184910"/>
+            <a:off x="24886920" y="21871178"/>
+            <a:ext cx="10454640" cy="615315"/>
           </a:xfrm>
           <a:prstGeom prst="rect">
             <a:avLst/>
@@ -8126,7 +8153,7 @@
                 <a:ea typeface="Calibri" pitchFamily="34" charset="-122"/>
                 <a:cs typeface="Calibri" pitchFamily="34" charset="-120"/>
               </a:rPr>
-              <a:t>Fig. 5. DADEV waterfall on a synthesized 8191-sample record (τ₀ = 1 s): white FM at σ</a:t>
+              <a:t>Fig. 6. Synthetic 8191-sample record, τ₀ = 1 s: white FM σ</a:t>
             </a:r>
             <a:pPr indent="0" marL="0">
               <a:buNone/>
@@ -8154,7 +8181,7 @@
                 <a:ea typeface="Calibri" pitchFamily="34" charset="-122"/>
                 <a:cs typeface="Calibri" pitchFamily="34" charset="-120"/>
               </a:rPr>
-              <a:t>(1 s) = 1 × 10⁻¹² for the first half, then 3 × 10⁻¹² plus flicker FM at 1 × 10⁻¹²; window 1024 samples, step 128. Each curve is the overlapping ADEV of one window, so the change is located to within one window length.</a:t>
+              <a:t>(1 s) = 1 × 10⁻¹² first half, then 3 × 10⁻¹² plus flicker FM 1 × 10⁻¹²; window 1024, step 128.</a:t>
             </a:r>
             <a:endParaRPr lang="en-US" sz="1950" dirty="0"/>
           </a:p>
@@ -8162,7 +8189,163 @@
       </p:sp>
       <p:sp>
         <p:nvSpPr>
-          <p:cNvPr id="42" name="Shape 32"/>
+          <p:cNvPr id="43" name="Shape 32"/>
+          <p:cNvSpPr/>
+          <p:nvPr/>
+        </p:nvSpPr>
+        <p:spPr>
+          <a:xfrm>
+            <a:off x="24566880" y="23218013"/>
+            <a:ext cx="11094720" cy="3283585"/>
+          </a:xfrm>
+          <a:prstGeom prst="rect">
+            <a:avLst/>
+          </a:prstGeom>
+          <a:solidFill>
+            <a:srgbClr val="FFFFFF"/>
+          </a:solidFill>
+          <a:ln w="12700">
+            <a:solidFill>
+              <a:srgbClr val="D9D4D0"/>
+            </a:solidFill>
+            <a:prstDash val="solid"/>
+          </a:ln>
+        </p:spPr>
+      </p:sp>
+      <p:sp>
+        <p:nvSpPr>
+          <p:cNvPr id="44" name="Heading"/>
+          <p:cNvSpPr txBox="1"/>
+          <p:nvPr/>
+        </p:nvSpPr>
+        <p:spPr>
+          <a:xfrm>
+            <a:off x="24886920" y="23538053"/>
+            <a:ext cx="10454640" cy="527685"/>
+          </a:xfrm>
+          <a:prstGeom prst="rect">
+            <a:avLst/>
+          </a:prstGeom>
+          <a:noFill/>
+          <a:ln/>
+        </p:spPr>
+        <p:txBody>
+          <a:bodyPr wrap="square" lIns="0" tIns="0" rIns="0" bIns="0" rtlCol="0" anchor="t"/>
+          <a:lstStyle/>
+          <a:p>
+            <a:pPr indent="0" marL="0">
+              <a:buNone/>
+            </a:pPr>
+            <a:r>
+              <a:rPr lang="en-US" sz="3300" b="1" dirty="0">
+                <a:solidFill>
+                  <a:srgbClr val="9E1B32"/>
+                </a:solidFill>
+                <a:latin typeface="Calibri" pitchFamily="34" charset="0"/>
+                <a:ea typeface="Calibri" pitchFamily="34" charset="-122"/>
+                <a:cs typeface="Calibri" pitchFamily="34" charset="-120"/>
+              </a:rPr>
+              <a:t>Every result reproducible from the repository</a:t>
+            </a:r>
+            <a:endParaRPr lang="en-US" sz="3300" dirty="0"/>
+          </a:p>
+        </p:txBody>
+      </p:sp>
+      <p:sp>
+        <p:nvSpPr>
+          <p:cNvPr id="45" name="Bullets"/>
+          <p:cNvSpPr txBox="1"/>
+          <p:nvPr/>
+        </p:nvSpPr>
+        <p:spPr>
+          <a:xfrm>
+            <a:off x="24886920" y="24230330"/>
+            <a:ext cx="10454640" cy="1932940"/>
+          </a:xfrm>
+          <a:prstGeom prst="rect">
+            <a:avLst/>
+          </a:prstGeom>
+          <a:noFill/>
+          <a:ln/>
+        </p:spPr>
+        <p:txBody>
+          <a:bodyPr wrap="square" lIns="0" tIns="0" rIns="0" bIns="0" rtlCol="0" anchor="t"/>
+          <a:lstStyle/>
+          <a:p>
+            <a:pPr marL="279400" indent="-279400">
+              <a:spcAft>
+                <a:spcPts val="700"/>
+              </a:spcAft>
+              <a:buSzPct val="100000"/>
+              <a:buChar char="•"/>
+            </a:pPr>
+            <a:r>
+              <a:rPr lang="en-US" sz="2400" b="1" dirty="0">
+                <a:solidFill>
+                  <a:srgbClr val="0B0B0B"/>
+                </a:solidFill>
+                <a:latin typeface="Calibri" pitchFamily="34" charset="0"/>
+                <a:ea typeface="Calibri" pitchFamily="34" charset="-122"/>
+                <a:cs typeface="Calibri" pitchFamily="34" charset="-120"/>
+              </a:rPr>
+              <a:t>Shipped: </a:t>
+            </a:r>
+            <a:pPr indent="0" marL="0">
+              <a:buNone/>
+            </a:pPr>
+            <a:r>
+              <a:rPr lang="en-US" sz="2400" dirty="0">
+                <a:solidFill>
+                  <a:srgbClr val="0B0B0B"/>
+                </a:solidFill>
+                <a:latin typeface="Calibri" pitchFamily="34" charset="0"/>
+                <a:ea typeface="Calibri" pitchFamily="34" charset="-122"/>
+                <a:cs typeface="Calibri" pitchFamily="34" charset="-120"/>
+              </a:rPr>
+              <a:t>validation fixture with Stable32/allantools outputs; per-τ comparison tables; benchmark scripts for both libraries; Monte Carlo harness, seed, tracked fit artifact.</a:t>
+            </a:r>
+            <a:endParaRPr lang="en-US" sz="2400" dirty="0"/>
+          </a:p>
+          <a:p>
+            <a:pPr marL="279400" indent="-279400">
+              <a:spcAft>
+                <a:spcPts val="700"/>
+              </a:spcAft>
+              <a:buSzPct val="100000"/>
+              <a:buChar char="•"/>
+            </a:pPr>
+            <a:r>
+              <a:rPr lang="en-US" sz="2400" b="1" dirty="0">
+                <a:solidFill>
+                  <a:srgbClr val="0B0B0B"/>
+                </a:solidFill>
+                <a:latin typeface="Calibri" pitchFamily="34" charset="0"/>
+                <a:ea typeface="Calibri" pitchFamily="34" charset="-122"/>
+                <a:cs typeface="Calibri" pitchFamily="34" charset="-120"/>
+              </a:rPr>
+              <a:t>Next: </a:t>
+            </a:r>
+            <a:pPr indent="0" marL="0">
+              <a:buNone/>
+            </a:pPr>
+            <a:r>
+              <a:rPr lang="en-US" sz="2400" dirty="0">
+                <a:solidFill>
+                  <a:srgbClr val="0B0B0B"/>
+                </a:solidFill>
+                <a:latin typeface="Calibri" pitchFamily="34" charset="0"/>
+                <a:ea typeface="Calibri" pitchFamily="34" charset="-122"/>
+                <a:cs typeface="Calibri" pitchFamily="34" charset="-120"/>
+              </a:rPr>
+              <a:t>real-time monitoring of laboratory Rb-87 clock comparisons; Monte Carlo calibration of the Thêo family and gapped records.</a:t>
+            </a:r>
+            <a:endParaRPr lang="en-US" sz="2400" dirty="0"/>
+          </a:p>
+        </p:txBody>
+      </p:sp>
+      <p:sp>
+        <p:nvSpPr>
+          <p:cNvPr id="46" name="Shape 35"/>
           <p:cNvSpPr/>
           <p:nvPr/>
         </p:nvSpPr>
@@ -8185,7 +8368,7 @@
       </p:sp>
       <p:sp>
         <p:nvSpPr>
-          <p:cNvPr id="43" name="References A"/>
+          <p:cNvPr id="47" name="References A"/>
           <p:cNvSpPr txBox="1"/>
           <p:nvPr/>
         </p:nvSpPr>
@@ -8304,7 +8487,7 @@
       </p:sp>
       <p:sp>
         <p:nvSpPr>
-          <p:cNvPr id="44" name="References B"/>
+          <p:cNvPr id="48" name="References B"/>
           <p:cNvSpPr txBox="1"/>
           <p:nvPr/>
         </p:nvSpPr>
@@ -8403,7 +8586,7 @@
       </p:sp>
       <p:sp>
         <p:nvSpPr>
-          <p:cNvPr id="45" name="Acknowledgments"/>
+          <p:cNvPr id="49" name="Acknowledgments"/>
           <p:cNvSpPr txBox="1"/>
           <p:nvPr/>
         </p:nvSpPr>

--- a/poster/SigmaTau_poster_draft.pptx
+++ b/poster/SigmaTau_poster_draft.pptx
@@ -2574,7 +2574,7 @@
                           <a:ea typeface="Calibri" pitchFamily="34" charset="-122"/>
                           <a:cs typeface="Calibri" pitchFamily="34" charset="-120"/>
                         </a:rPr>
-                        <a:t>MDEV-class Hadamard (MHDEV, HTDEV, MHTOTDEV)</a:t>
+                        <a:t>Modified Hadamard Class (MHDEV, HTDEV, MHTOTDEV)</a:t>
                       </a:r>
                       <a:endParaRPr lang="en-US" sz="1800" dirty="0">
                         <a:latin typeface="Calibri" charset="0"/>
@@ -4270,7 +4270,7 @@
       </p:sp>
       <p:pic>
         <p:nvPicPr>
-          <p:cNvPr id="14" name="F1_suite" descr="/home/user/SigmaTau.jl/poster/figures/F1_suite.png">    </p:cNvPr>
+          <p:cNvPr id="14" name="F1_suite" descr="/home/ian/SigmaTau.jl/poster/figures/F1_suite.png">    </p:cNvPr>
           <p:cNvPicPr>
             <a:picLocks noChangeAspect="1"/>
           </p:cNvPicPr>
@@ -4439,7 +4439,7 @@
       </p:sp>
       <p:pic>
         <p:nvPicPr>
-          <p:cNvPr id="19" name="F2_validation" descr="/home/user/SigmaTau.jl/poster/figures/F2_validation.png">    </p:cNvPr>
+          <p:cNvPr id="19" name="F2_validation" descr="/home/ian/SigmaTau.jl/poster/figures/F2_validation.png">    </p:cNvPr>
           <p:cNvPicPr>
             <a:picLocks noChangeAspect="1"/>
           </p:cNvPicPr>
@@ -4558,7 +4558,7 @@
                 <a:ea typeface="Calibri" pitchFamily="34" charset="-122"/>
                 <a:cs typeface="Calibri" pitchFamily="34" charset="-120"/>
               </a:rPr>
-              <a:t>4 × 10⁵-sample modified totals: 0.47 s vs 30 min</a:t>
+              <a:t>4 × 10⁵-sample modified totals: 0.46 s vs 30 min</a:t>
             </a:r>
             <a:endParaRPr lang="en-US" sz="3300" dirty="0"/>
           </a:p>
@@ -4600,7 +4600,7 @@
                 <a:ea typeface="Calibri" pitchFamily="34" charset="-122"/>
                 <a:cs typeface="Calibri" pitchFamily="34" charset="-120"/>
               </a:rPr>
-              <a:t>Measured 406 763-sample phase record, kernel-only timing, same samples, τ grid and statistic; allantools single-threaded (no parallel path). MTOTDEV 0.469 s vs 1 803.6 s (3,842×); HTOTDEV 0.455 s vs 1 928.0 s (4,233×). Reflected extension streamed per thread; window sum split across threads.</a:t>
+              <a:t>Measured 406 763-sample phase record, kernel-only timing, same samples, τ grid and statistic; allantools single-threaded (no parallel path). MTOTDEV 0.461 s vs 1 810 s (3,926×); HTOTDEV 0.461 s vs 1 926 s (4,178×). Reflected extension streamed per thread; window sum split across threads.</a:t>
             </a:r>
             <a:endParaRPr lang="en-US" sz="2400" dirty="0"/>
           </a:p>
@@ -4608,7 +4608,7 @@
       </p:sp>
       <p:pic>
         <p:nvPicPr>
-          <p:cNvPr id="24" name="F3_speed" descr="/home/user/SigmaTau.jl/poster/figures/F3_speed.png">    </p:cNvPr>
+          <p:cNvPr id="24" name="F3_speed" descr="/home/ian/SigmaTau.jl/poster/figures/F3_speed.png">    </p:cNvPr>
           <p:cNvPicPr>
             <a:picLocks noChangeAspect="1"/>
           </p:cNvPicPr>
@@ -4622,8 +4622,8 @@
         </p:blipFill>
         <p:spPr>
           <a:xfrm>
-            <a:off x="14943026" y="15307818"/>
-            <a:ext cx="6689948" cy="3749040"/>
+            <a:off x="15170919" y="15307818"/>
+            <a:ext cx="6234161" cy="3749040"/>
           </a:xfrm>
           <a:prstGeom prst="rect">
             <a:avLst/>
@@ -4663,7 +4663,7 @@
                 <a:ea typeface="Calibri" pitchFamily="34" charset="-122"/>
                 <a:cs typeface="Calibri" pitchFamily="34" charset="-120"/>
               </a:rPr>
-              <a:t>Fig. 3. Speed-up per kernel, N = 25 000 white-PM record (bench/), 12-core workstation; diamonds: independent 4-core re-run. Ratios portable; absolute times machine-dependent.</a:t>
+              <a:t>Fig. 3. Speed-up per kernel, N = 25 000 white-PM record (bench/), 12-thread workstation; diamonds: 4-core container run. Ratios portable; absolute times machine-dependent.</a:t>
             </a:r>
             <a:endParaRPr lang="en-US" sz="1950" dirty="0"/>
           </a:p>
@@ -4735,7 +4735,7 @@
       </p:sp>
       <p:pic>
         <p:nvPicPr>
-          <p:cNvPr id="28" name="F8_explorer" descr="/home/user/SigmaTau.jl/poster/figures/F8_explorer.png">    </p:cNvPr>
+          <p:cNvPr id="28" name="F8_explorer" descr="/home/ian/SigmaTau.jl/poster/figures/F8_explorer.png">    </p:cNvPr>
           <p:cNvPicPr>
             <a:picLocks noChangeAspect="1"/>
           </p:cNvPicPr>
@@ -5036,7 +5036,7 @@
                 <a:ea typeface="Calibri" pitchFamily="34" charset="-122"/>
                 <a:cs typeface="Calibri" pitchFamily="34" charset="-120"/>
               </a:rPr>
-              <a:t>PM unbiased, red FM reads high; EDF R² ≥ 0.9982</a:t>
+              <a:t>PM unbiased, red FM reads high; EDF R² ≥ 0.9988</a:t>
             </a:r>
             <a:endParaRPr lang="en-US" sz="3300" dirty="0"/>
           </a:p>
@@ -5044,7 +5044,7 @@
       </p:sp>
       <p:pic>
         <p:nvPicPr>
-          <p:cNvPr id="35" name="F4_mhtot_bias" descr="/home/user/SigmaTau.jl/poster/figures/F4_mhtot_bias.png">    </p:cNvPr>
+          <p:cNvPr id="35" name="F4_mhtot_bias" descr="/home/ian/SigmaTau.jl/poster/figures/F4_mhtot_bias.png">    </p:cNvPr>
           <p:cNvPicPr>
             <a:picLocks noChangeAspect="1"/>
           </p:cNvPicPr>
@@ -5058,8 +5058,8 @@
         </p:blipFill>
         <p:spPr>
           <a:xfrm>
-            <a:off x="25377118" y="9627362"/>
-            <a:ext cx="4109765" cy="3566160"/>
+            <a:off x="25350533" y="9627362"/>
+            <a:ext cx="4162934" cy="3566160"/>
           </a:xfrm>
           <a:prstGeom prst="rect">
             <a:avLst/>
@@ -5068,7 +5068,7 @@
       </p:pic>
       <p:pic>
         <p:nvPicPr>
-          <p:cNvPr id="36" name="F5_mhtot_edf" descr="/home/user/SigmaTau.jl/poster/figures/F5_mhtot_edf.png">    </p:cNvPr>
+          <p:cNvPr id="36" name="F5_mhtot_edf" descr="/home/ian/SigmaTau.jl/poster/figures/F5_mhtot_edf.png">    </p:cNvPr>
           <p:cNvPicPr>
             <a:picLocks noChangeAspect="1"/>
           </p:cNvPicPr>
@@ -5082,8 +5082,8 @@
         </p:blipFill>
         <p:spPr>
           <a:xfrm>
-            <a:off x="30743750" y="9627362"/>
-            <a:ext cx="4105461" cy="3566160"/>
+            <a:off x="30712116" y="9627362"/>
+            <a:ext cx="4168728" cy="3566160"/>
           </a:xfrm>
           <a:prstGeom prst="rect">
             <a:avLst/>
@@ -5792,7 +5792,7 @@
                           <a:ea typeface="Calibri" pitchFamily="34" charset="-122"/>
                           <a:cs typeface="Calibri" pitchFamily="34" charset="-120"/>
                         </a:rPr>
-                        <a:t>1.0308</a:t>
+                        <a:t>1.0249</a:t>
                       </a:r>
                       <a:endParaRPr lang="en-US" sz="1800" dirty="0">
                         <a:latin typeface="Calibri" charset="0"/>
@@ -5860,7 +5860,7 @@
                           <a:ea typeface="Calibri" pitchFamily="34" charset="-122"/>
                           <a:cs typeface="Calibri" pitchFamily="34" charset="-120"/>
                         </a:rPr>
-                        <a:t>−0.1197</a:t>
+                        <a:t>−0.0078</a:t>
                       </a:r>
                       <a:endParaRPr lang="en-US" sz="1800" dirty="0">
                         <a:latin typeface="Calibri" charset="0"/>
@@ -5928,7 +5928,7 @@
                           <a:ea typeface="Calibri" pitchFamily="34" charset="-122"/>
                           <a:cs typeface="Calibri" pitchFamily="34" charset="-120"/>
                         </a:rPr>
-                        <a:t>1.6869</a:t>
+                        <a:t>1.6342</a:t>
                       </a:r>
                       <a:endParaRPr lang="en-US" sz="1800" dirty="0">
                         <a:latin typeface="Calibri" charset="0"/>
@@ -5996,7 +5996,7 @@
                           <a:ea typeface="Calibri" pitchFamily="34" charset="-122"/>
                           <a:cs typeface="Calibri" pitchFamily="34" charset="-120"/>
                         </a:rPr>
-                        <a:t>4.3166</a:t>
+                        <a:t>3.8334</a:t>
                       </a:r>
                       <a:endParaRPr lang="en-US" sz="1800" dirty="0">
                         <a:latin typeface="Calibri" charset="0"/>
@@ -6064,7 +6064,7 @@
                           <a:ea typeface="Calibri" pitchFamily="34" charset="-122"/>
                           <a:cs typeface="Calibri" pitchFamily="34" charset="-120"/>
                         </a:rPr>
-                        <a:t>0.9982</a:t>
+                        <a:t>0.9989</a:t>
                       </a:r>
                       <a:endParaRPr lang="en-US" sz="1800" dirty="0">
                         <a:latin typeface="Calibri" charset="0"/>
@@ -6270,7 +6270,7 @@
                           <a:ea typeface="Calibri" pitchFamily="34" charset="-122"/>
                           <a:cs typeface="Calibri" pitchFamily="34" charset="-120"/>
                         </a:rPr>
-                        <a:t>0.9883</a:t>
+                        <a:t>0.9879</a:t>
                       </a:r>
                       <a:endParaRPr lang="en-US" sz="1800" dirty="0">
                         <a:latin typeface="Calibri" charset="0"/>
@@ -6338,7 +6338,7 @@
                           <a:ea typeface="Calibri" pitchFamily="34" charset="-122"/>
                           <a:cs typeface="Calibri" pitchFamily="34" charset="-120"/>
                         </a:rPr>
-                        <a:t>−0.0686</a:t>
+                        <a:t>−0.0630</a:t>
                       </a:r>
                       <a:endParaRPr lang="en-US" sz="1800" dirty="0">
                         <a:latin typeface="Calibri" charset="0"/>
@@ -6406,7 +6406,7 @@
                           <a:ea typeface="Calibri" pitchFamily="34" charset="-122"/>
                           <a:cs typeface="Calibri" pitchFamily="34" charset="-120"/>
                         </a:rPr>
-                        <a:t>1.1671</a:t>
+                        <a:t>1.1651</a:t>
                       </a:r>
                       <a:endParaRPr lang="en-US" sz="1800" dirty="0">
                         <a:latin typeface="Calibri" charset="0"/>
@@ -6474,7 +6474,7 @@
                           <a:ea typeface="Calibri" pitchFamily="34" charset="-122"/>
                           <a:cs typeface="Calibri" pitchFamily="34" charset="-120"/>
                         </a:rPr>
-                        <a:t>3.2107</a:t>
+                        <a:t>3.1934</a:t>
                       </a:r>
                       <a:endParaRPr lang="en-US" sz="1800" dirty="0">
                         <a:latin typeface="Calibri" charset="0"/>
@@ -7226,7 +7226,7 @@
                           <a:ea typeface="Calibri" pitchFamily="34" charset="-122"/>
                           <a:cs typeface="Calibri" pitchFamily="34" charset="-120"/>
                         </a:rPr>
-                        <a:t>1.2947</a:t>
+                        <a:t>1.2946</a:t>
                       </a:r>
                       <a:endParaRPr lang="en-US" sz="1800" dirty="0">
                         <a:latin typeface="Calibri" charset="0"/>
@@ -7294,7 +7294,7 @@
                           <a:ea typeface="Calibri" pitchFamily="34" charset="-122"/>
                           <a:cs typeface="Calibri" pitchFamily="34" charset="-120"/>
                         </a:rPr>
-                        <a:t>−0.7193</a:t>
+                        <a:t>−0.7752</a:t>
                       </a:r>
                       <a:endParaRPr lang="en-US" sz="1800" dirty="0">
                         <a:latin typeface="Calibri" charset="0"/>
@@ -7362,7 +7362,7 @@
                           <a:ea typeface="Calibri" pitchFamily="34" charset="-122"/>
                           <a:cs typeface="Calibri" pitchFamily="34" charset="-120"/>
                         </a:rPr>
-                        <a:t>1.0095</a:t>
+                        <a:t>1.0096</a:t>
                       </a:r>
                       <a:endParaRPr lang="en-US" sz="1800" dirty="0">
                         <a:latin typeface="Calibri" charset="0"/>
@@ -7430,7 +7430,7 @@
                           <a:ea typeface="Calibri" pitchFamily="34" charset="-122"/>
                           <a:cs typeface="Calibri" pitchFamily="34" charset="-120"/>
                         </a:rPr>
-                        <a:t>3.3254</a:t>
+                        <a:t>3.3662</a:t>
                       </a:r>
                       <a:endParaRPr lang="en-US" sz="1800" dirty="0">
                         <a:latin typeface="Calibri" charset="0"/>
@@ -7498,7 +7498,7 @@
                           <a:ea typeface="Calibri" pitchFamily="34" charset="-122"/>
                           <a:cs typeface="Calibri" pitchFamily="34" charset="-120"/>
                         </a:rPr>
-                        <a:t>0.9991</a:t>
+                        <a:t>0.9992</a:t>
                       </a:r>
                       <a:endParaRPr lang="en-US" sz="1800" dirty="0">
                         <a:latin typeface="Calibri" charset="0"/>
@@ -7704,7 +7704,7 @@
                           <a:ea typeface="Calibri" pitchFamily="34" charset="-122"/>
                           <a:cs typeface="Calibri" pitchFamily="34" charset="-120"/>
                         </a:rPr>
-                        <a:t>2.1686</a:t>
+                        <a:t>2.1678</a:t>
                       </a:r>
                       <a:endParaRPr lang="en-US" sz="1800" dirty="0">
                         <a:latin typeface="Calibri" charset="0"/>
@@ -7772,7 +7772,7 @@
                           <a:ea typeface="Calibri" pitchFamily="34" charset="-122"/>
                           <a:cs typeface="Calibri" pitchFamily="34" charset="-120"/>
                         </a:rPr>
-                        <a:t>−5.5884</a:t>
+                        <a:t>−5.6243</a:t>
                       </a:r>
                       <a:endParaRPr lang="en-US" sz="1800" dirty="0">
                         <a:latin typeface="Calibri" charset="0"/>
@@ -7840,7 +7840,7 @@
                           <a:ea typeface="Calibri" pitchFamily="34" charset="-122"/>
                           <a:cs typeface="Calibri" pitchFamily="34" charset="-120"/>
                         </a:rPr>
-                        <a:t>0.7631</a:t>
+                        <a:t>0.7641</a:t>
                       </a:r>
                       <a:endParaRPr lang="en-US" sz="1800" dirty="0">
                         <a:latin typeface="Calibri" charset="0"/>
@@ -7908,7 +7908,7 @@
                           <a:ea typeface="Calibri" pitchFamily="34" charset="-122"/>
                           <a:cs typeface="Calibri" pitchFamily="34" charset="-120"/>
                         </a:rPr>
-                        <a:t>2.4490</a:t>
+                        <a:t>2.4152</a:t>
                       </a:r>
                       <a:endParaRPr lang="en-US" sz="1800" dirty="0">
                         <a:latin typeface="Calibri" charset="0"/>
@@ -7976,7 +7976,7 @@
                           <a:ea typeface="Calibri" pitchFamily="34" charset="-122"/>
                           <a:cs typeface="Calibri" pitchFamily="34" charset="-120"/>
                         </a:rPr>
-                        <a:t>0.9985</a:t>
+                        <a:t>0.9988</a:t>
                       </a:r>
                       <a:endParaRPr lang="en-US" sz="1800" dirty="0">
                         <a:latin typeface="Calibri" charset="0"/>
@@ -8098,7 +8098,7 @@
       </p:sp>
       <p:pic>
         <p:nvPicPr>
-          <p:cNvPr id="41" name="F7_dynamic" descr="/home/user/SigmaTau.jl/poster/figures/F7_dynamic.png">    </p:cNvPr>
+          <p:cNvPr id="41" name="F7_dynamic" descr="/home/ian/SigmaTau.jl/poster/figures/F7_dynamic.png">    </p:cNvPr>
           <p:cNvPicPr>
             <a:picLocks noChangeAspect="1"/>
           </p:cNvPicPr>
